--- a/DataIntelligencePlatform.pptx
+++ b/DataIntelligencePlatform.pptx
@@ -981,7 +981,7 @@
         <p:spPr>
           <a:xfrm>
             <a:off x="73152" y="667512"/>
-            <a:ext cx="1920240" cy="886968"/>
+            <a:ext cx="1920240" cy="1353312"/>
           </a:xfrm>
           <a:prstGeom prst="rect">
             <a:avLst/>
@@ -1013,8 +1013,8 @@
         </p:blipFill>
         <p:spPr>
           <a:xfrm>
-            <a:off x="231648" y="795528"/>
-            <a:ext cx="384048" cy="384048"/>
+            <a:off x="249936" y="758952"/>
+            <a:ext cx="347472" cy="347472"/>
           </a:xfrm>
           <a:prstGeom prst="rect">
             <a:avLst/>
@@ -1037,8 +1037,8 @@
         </p:blipFill>
         <p:spPr>
           <a:xfrm>
-            <a:off x="841248" y="795528"/>
-            <a:ext cx="384048" cy="384048"/>
+            <a:off x="859536" y="758952"/>
+            <a:ext cx="347472" cy="347472"/>
           </a:xfrm>
           <a:prstGeom prst="rect">
             <a:avLst/>
@@ -1054,7 +1054,7 @@
         <p:spPr>
           <a:xfrm>
             <a:off x="1338072" y="722376"/>
-            <a:ext cx="609600" cy="530352"/>
+            <a:ext cx="609600" cy="420624"/>
           </a:xfrm>
           <a:prstGeom prst="rect">
             <a:avLst/>
@@ -1089,8 +1089,8 @@
         </p:nvSpPr>
         <p:spPr>
           <a:xfrm>
-            <a:off x="118872" y="1252728"/>
-            <a:ext cx="609600" cy="530352"/>
+            <a:off x="118872" y="1143000"/>
+            <a:ext cx="609600" cy="420624"/>
           </a:xfrm>
           <a:prstGeom prst="rect">
             <a:avLst/>
@@ -1125,8 +1125,8 @@
         </p:nvSpPr>
         <p:spPr>
           <a:xfrm>
-            <a:off x="728472" y="1252728"/>
-            <a:ext cx="609600" cy="530352"/>
+            <a:off x="728472" y="1143000"/>
+            <a:ext cx="609600" cy="420624"/>
           </a:xfrm>
           <a:prstGeom prst="rect">
             <a:avLst/>
@@ -1161,8 +1161,8 @@
         </p:nvSpPr>
         <p:spPr>
           <a:xfrm>
-            <a:off x="1338072" y="1252728"/>
-            <a:ext cx="609600" cy="530352"/>
+            <a:off x="1338072" y="1143000"/>
+            <a:ext cx="609600" cy="420624"/>
           </a:xfrm>
           <a:prstGeom prst="rect">
             <a:avLst/>
@@ -1211,8 +1211,8 @@
         </p:nvSpPr>
         <p:spPr>
           <a:xfrm>
-            <a:off x="118872" y="1783080"/>
-            <a:ext cx="609600" cy="530352"/>
+            <a:off x="118872" y="1563624"/>
+            <a:ext cx="609600" cy="420624"/>
           </a:xfrm>
           <a:prstGeom prst="rect">
             <a:avLst/>
@@ -1261,7 +1261,7 @@
         </p:nvSpPr>
         <p:spPr>
           <a:xfrm>
-            <a:off x="73152" y="1609344"/>
+            <a:off x="73152" y="2075688"/>
             <a:ext cx="1920240" cy="228600"/>
           </a:xfrm>
           <a:prstGeom prst="rect">
@@ -1286,7 +1286,7 @@
         </p:nvSpPr>
         <p:spPr>
           <a:xfrm>
-            <a:off x="73152" y="1609344"/>
+            <a:off x="73152" y="2075688"/>
             <a:ext cx="1920240" cy="228600"/>
           </a:xfrm>
           <a:prstGeom prst="rect">
@@ -1322,8 +1322,8 @@
         </p:nvSpPr>
         <p:spPr>
           <a:xfrm>
-            <a:off x="73152" y="1837944"/>
-            <a:ext cx="1920240" cy="758952"/>
+            <a:off x="73152" y="2304288"/>
+            <a:ext cx="1920240" cy="932688"/>
           </a:xfrm>
           <a:prstGeom prst="rect">
             <a:avLst/>
@@ -1347,8 +1347,8 @@
         </p:nvSpPr>
         <p:spPr>
           <a:xfrm>
-            <a:off x="118872" y="1892808"/>
-            <a:ext cx="609600" cy="530352"/>
+            <a:off x="118872" y="2359152"/>
+            <a:ext cx="609600" cy="420624"/>
           </a:xfrm>
           <a:prstGeom prst="rect">
             <a:avLst/>
@@ -1397,8 +1397,8 @@
         </p:blipFill>
         <p:spPr>
           <a:xfrm>
-            <a:off x="841248" y="1965960"/>
-            <a:ext cx="384048" cy="384048"/>
+            <a:off x="859536" y="2395728"/>
+            <a:ext cx="347472" cy="347472"/>
           </a:xfrm>
           <a:prstGeom prst="rect">
             <a:avLst/>
@@ -1413,8 +1413,8 @@
         </p:nvSpPr>
         <p:spPr>
           <a:xfrm>
-            <a:off x="1338072" y="1892808"/>
-            <a:ext cx="609600" cy="530352"/>
+            <a:off x="1338072" y="2359152"/>
+            <a:ext cx="609600" cy="420624"/>
           </a:xfrm>
           <a:prstGeom prst="rect">
             <a:avLst/>
@@ -1463,8 +1463,8 @@
         </p:blipFill>
         <p:spPr>
           <a:xfrm>
-            <a:off x="231648" y="2496312"/>
-            <a:ext cx="384048" cy="384048"/>
+            <a:off x="249936" y="2816352"/>
+            <a:ext cx="347472" cy="347472"/>
           </a:xfrm>
           <a:prstGeom prst="rect">
             <a:avLst/>
@@ -1487,8 +1487,8 @@
         </p:blipFill>
         <p:spPr>
           <a:xfrm>
-            <a:off x="841248" y="2496312"/>
-            <a:ext cx="384048" cy="384048"/>
+            <a:off x="859536" y="2816352"/>
+            <a:ext cx="347472" cy="347472"/>
           </a:xfrm>
           <a:prstGeom prst="rect">
             <a:avLst/>
@@ -1503,8 +1503,8 @@
         </p:nvSpPr>
         <p:spPr>
           <a:xfrm>
-            <a:off x="1338072" y="2423160"/>
-            <a:ext cx="609600" cy="530352"/>
+            <a:off x="1338072" y="2779776"/>
+            <a:ext cx="609600" cy="420624"/>
           </a:xfrm>
           <a:prstGeom prst="rect">
             <a:avLst/>
@@ -1539,7 +1539,7 @@
         </p:nvSpPr>
         <p:spPr>
           <a:xfrm>
-            <a:off x="73152" y="2651760"/>
+            <a:off x="73152" y="3291840"/>
             <a:ext cx="1920240" cy="228600"/>
           </a:xfrm>
           <a:prstGeom prst="rect">
@@ -1564,7 +1564,7 @@
         </p:nvSpPr>
         <p:spPr>
           <a:xfrm>
-            <a:off x="73152" y="2651760"/>
+            <a:off x="73152" y="3291840"/>
             <a:ext cx="1920240" cy="228600"/>
           </a:xfrm>
           <a:prstGeom prst="rect">
@@ -1600,8 +1600,8 @@
         </p:nvSpPr>
         <p:spPr>
           <a:xfrm>
-            <a:off x="73152" y="2880360"/>
-            <a:ext cx="1920240" cy="594360"/>
+            <a:off x="73152" y="3520440"/>
+            <a:ext cx="1920240" cy="932688"/>
           </a:xfrm>
           <a:prstGeom prst="rect">
             <a:avLst/>
@@ -1625,8 +1625,8 @@
         </p:nvSpPr>
         <p:spPr>
           <a:xfrm>
-            <a:off x="118872" y="2935224"/>
-            <a:ext cx="609600" cy="530352"/>
+            <a:off x="118872" y="3575304"/>
+            <a:ext cx="609600" cy="420624"/>
           </a:xfrm>
           <a:prstGeom prst="rect">
             <a:avLst/>
@@ -1661,8 +1661,8 @@
         </p:nvSpPr>
         <p:spPr>
           <a:xfrm>
-            <a:off x="728472" y="2935224"/>
-            <a:ext cx="609600" cy="530352"/>
+            <a:off x="728472" y="3575304"/>
+            <a:ext cx="609600" cy="420624"/>
           </a:xfrm>
           <a:prstGeom prst="rect">
             <a:avLst/>
@@ -1711,8 +1711,8 @@
         </p:blipFill>
         <p:spPr>
           <a:xfrm>
-            <a:off x="1450848" y="3008376"/>
-            <a:ext cx="384048" cy="384048"/>
+            <a:off x="1469136" y="3611880"/>
+            <a:ext cx="347472" cy="347472"/>
           </a:xfrm>
           <a:prstGeom prst="rect">
             <a:avLst/>
@@ -1727,8 +1727,8 @@
         </p:nvSpPr>
         <p:spPr>
           <a:xfrm>
-            <a:off x="118872" y="3465576"/>
-            <a:ext cx="609600" cy="530352"/>
+            <a:off x="118872" y="3995928"/>
+            <a:ext cx="609600" cy="420624"/>
           </a:xfrm>
           <a:prstGeom prst="rect">
             <a:avLst/>
@@ -1763,8 +1763,8 @@
         </p:nvSpPr>
         <p:spPr>
           <a:xfrm>
-            <a:off x="728472" y="3465576"/>
-            <a:ext cx="609600" cy="530352"/>
+            <a:off x="728472" y="3995928"/>
+            <a:ext cx="609600" cy="420624"/>
           </a:xfrm>
           <a:prstGeom prst="rect">
             <a:avLst/>
@@ -1799,8 +1799,8 @@
         </p:nvSpPr>
         <p:spPr>
           <a:xfrm>
-            <a:off x="1338072" y="3465576"/>
-            <a:ext cx="609600" cy="530352"/>
+            <a:off x="1338072" y="3995928"/>
+            <a:ext cx="609600" cy="420624"/>
           </a:xfrm>
           <a:prstGeom prst="rect">
             <a:avLst/>
@@ -1835,7 +1835,7 @@
         </p:nvSpPr>
         <p:spPr>
           <a:xfrm>
-            <a:off x="73152" y="3529584"/>
+            <a:off x="73152" y="4507992"/>
             <a:ext cx="1920240" cy="228600"/>
           </a:xfrm>
           <a:prstGeom prst="rect">
@@ -1860,7 +1860,7 @@
         </p:nvSpPr>
         <p:spPr>
           <a:xfrm>
-            <a:off x="73152" y="3529584"/>
+            <a:off x="73152" y="4507992"/>
             <a:ext cx="1920240" cy="228600"/>
           </a:xfrm>
           <a:prstGeom prst="rect">
@@ -1896,8 +1896,8 @@
         </p:nvSpPr>
         <p:spPr>
           <a:xfrm>
-            <a:off x="73152" y="3758184"/>
-            <a:ext cx="1920240" cy="978408"/>
+            <a:off x="73152" y="4736592"/>
+            <a:ext cx="1920240" cy="1353312"/>
           </a:xfrm>
           <a:prstGeom prst="rect">
             <a:avLst/>
@@ -1921,8 +1921,8 @@
         </p:nvSpPr>
         <p:spPr>
           <a:xfrm>
-            <a:off x="118872" y="3813048"/>
-            <a:ext cx="609600" cy="530352"/>
+            <a:off x="118872" y="4791456"/>
+            <a:ext cx="609600" cy="420624"/>
           </a:xfrm>
           <a:prstGeom prst="rect">
             <a:avLst/>
@@ -1957,8 +1957,8 @@
         </p:nvSpPr>
         <p:spPr>
           <a:xfrm>
-            <a:off x="728472" y="3813048"/>
-            <a:ext cx="609600" cy="530352"/>
+            <a:off x="728472" y="4791456"/>
+            <a:ext cx="609600" cy="420624"/>
           </a:xfrm>
           <a:prstGeom prst="rect">
             <a:avLst/>
@@ -1993,8 +1993,8 @@
         </p:nvSpPr>
         <p:spPr>
           <a:xfrm>
-            <a:off x="1338072" y="3813048"/>
-            <a:ext cx="609600" cy="530352"/>
+            <a:off x="1338072" y="4791456"/>
+            <a:ext cx="609600" cy="420624"/>
           </a:xfrm>
           <a:prstGeom prst="rect">
             <a:avLst/>
@@ -2043,8 +2043,8 @@
         </p:nvSpPr>
         <p:spPr>
           <a:xfrm>
-            <a:off x="118872" y="4343400"/>
-            <a:ext cx="609600" cy="530352"/>
+            <a:off x="118872" y="5212080"/>
+            <a:ext cx="609600" cy="420624"/>
           </a:xfrm>
           <a:prstGeom prst="rect">
             <a:avLst/>
@@ -2093,8 +2093,8 @@
         </p:nvSpPr>
         <p:spPr>
           <a:xfrm>
-            <a:off x="728472" y="4343400"/>
-            <a:ext cx="609600" cy="530352"/>
+            <a:off x="728472" y="5212080"/>
+            <a:ext cx="609600" cy="420624"/>
           </a:xfrm>
           <a:prstGeom prst="rect">
             <a:avLst/>
@@ -2129,8 +2129,8 @@
         </p:nvSpPr>
         <p:spPr>
           <a:xfrm>
-            <a:off x="1338072" y="4343400"/>
-            <a:ext cx="609600" cy="530352"/>
+            <a:off x="1338072" y="5212080"/>
+            <a:ext cx="609600" cy="420624"/>
           </a:xfrm>
           <a:prstGeom prst="rect">
             <a:avLst/>
@@ -2165,8 +2165,8 @@
         </p:nvSpPr>
         <p:spPr>
           <a:xfrm>
-            <a:off x="118872" y="4873752"/>
-            <a:ext cx="609600" cy="530352"/>
+            <a:off x="118872" y="5632704"/>
+            <a:ext cx="609600" cy="420624"/>
           </a:xfrm>
           <a:prstGeom prst="rect">
             <a:avLst/>
@@ -2201,8 +2201,8 @@
         </p:nvSpPr>
         <p:spPr>
           <a:xfrm>
-            <a:off x="728472" y="4873752"/>
-            <a:ext cx="609600" cy="530352"/>
+            <a:off x="728472" y="5632704"/>
+            <a:ext cx="609600" cy="420624"/>
           </a:xfrm>
           <a:prstGeom prst="rect">
             <a:avLst/>
@@ -2237,7 +2237,7 @@
         </p:nvSpPr>
         <p:spPr>
           <a:xfrm>
-            <a:off x="1993392" y="996696"/>
+            <a:off x="1993392" y="1225296"/>
             <a:ext cx="201168" cy="0"/>
           </a:xfrm>
           <a:prstGeom prst="line">
@@ -2261,7 +2261,7 @@
         </p:nvSpPr>
         <p:spPr>
           <a:xfrm>
-            <a:off x="1993392" y="2103120"/>
+            <a:off x="1993392" y="2660904"/>
             <a:ext cx="201168" cy="0"/>
           </a:xfrm>
           <a:prstGeom prst="line">
@@ -2285,7 +2285,7 @@
         </p:nvSpPr>
         <p:spPr>
           <a:xfrm>
-            <a:off x="1993392" y="3063240"/>
+            <a:off x="1993392" y="3877056"/>
             <a:ext cx="201168" cy="0"/>
           </a:xfrm>
           <a:prstGeom prst="line">
@@ -2309,7 +2309,7 @@
         </p:nvSpPr>
         <p:spPr>
           <a:xfrm>
-            <a:off x="1993392" y="4133088"/>
+            <a:off x="1993392" y="5303520"/>
             <a:ext cx="201168" cy="0"/>
           </a:xfrm>
           <a:prstGeom prst="line">
@@ -2334,7 +2334,7 @@
         <p:spPr>
           <a:xfrm>
             <a:off x="2212848" y="438912"/>
-            <a:ext cx="7699248" cy="4224528"/>
+            <a:ext cx="6025896" cy="4224528"/>
           </a:xfrm>
           <a:prstGeom prst="rect">
             <a:avLst/>
@@ -2359,7 +2359,7 @@
         <p:spPr>
           <a:xfrm>
             <a:off x="2212848" y="438912"/>
-            <a:ext cx="7699248" cy="274320"/>
+            <a:ext cx="6025896" cy="274320"/>
           </a:xfrm>
           <a:prstGeom prst="rect">
             <a:avLst/>
@@ -2391,8 +2391,8 @@
         </p:blipFill>
         <p:spPr>
           <a:xfrm>
-            <a:off x="2350008" y="475488"/>
-            <a:ext cx="201168" cy="201168"/>
+            <a:off x="2304288" y="466344"/>
+            <a:ext cx="548640" cy="219456"/>
           </a:xfrm>
           <a:prstGeom prst="rect">
             <a:avLst/>
@@ -2407,8 +2407,8 @@
         </p:nvSpPr>
         <p:spPr>
           <a:xfrm>
-            <a:off x="2578608" y="438912"/>
-            <a:ext cx="6967728" cy="274320"/>
+            <a:off x="2898648" y="438912"/>
+            <a:ext cx="5248656" cy="274320"/>
           </a:xfrm>
           <a:prstGeom prst="rect">
             <a:avLst/>
@@ -2434,10 +2434,887 @@
             <a:endParaRPr lang="en-US" sz="1100" dirty="0"/>
           </a:p>
         </p:txBody>
+      </p:sp>
+      <p:sp>
+        <p:nvSpPr>
+          <p:cNvPr id="50" name="Shape 41"/>
+          <p:cNvSpPr/>
+          <p:nvPr/>
+        </p:nvSpPr>
+        <p:spPr>
+          <a:xfrm>
+            <a:off x="2286000" y="749808"/>
+            <a:ext cx="5879592" cy="237744"/>
+          </a:xfrm>
+          <a:prstGeom prst="rect">
+            <a:avLst/>
+          </a:prstGeom>
+          <a:solidFill>
+            <a:srgbClr val="2D1B69"/>
+          </a:solidFill>
+          <a:ln w="12700">
+            <a:solidFill>
+              <a:srgbClr val="2D1B69"/>
+            </a:solidFill>
+            <a:prstDash val="solid"/>
+          </a:ln>
+        </p:spPr>
+      </p:sp>
+      <p:sp>
+        <p:nvSpPr>
+          <p:cNvPr id="51" name="Text 42"/>
+          <p:cNvSpPr/>
+          <p:nvPr/>
+        </p:nvSpPr>
+        <p:spPr>
+          <a:xfrm>
+            <a:off x="2286000" y="749808"/>
+            <a:ext cx="5879592" cy="237744"/>
+          </a:xfrm>
+          <a:prstGeom prst="rect">
+            <a:avLst/>
+          </a:prstGeom>
+          <a:noFill/>
+          <a:ln/>
+        </p:spPr>
+        <p:txBody>
+          <a:bodyPr wrap="square" rtlCol="0" anchor="ctr"/>
+          <a:lstStyle/>
+          <a:p>
+            <a:pPr algn="ctr" indent="0" marL="0">
+              <a:buNone/>
+            </a:pPr>
+            <a:r>
+              <a:rPr lang="en-US" sz="800" b="1" dirty="0">
+                <a:solidFill>
+                  <a:srgbClr val="FFFFFF"/>
+                </a:solidFill>
+              </a:rPr>
+              <a:t>Orchestration</a:t>
+            </a:r>
+            <a:endParaRPr lang="en-US" sz="800" dirty="0"/>
+          </a:p>
+        </p:txBody>
+      </p:sp>
+      <p:sp>
+        <p:nvSpPr>
+          <p:cNvPr id="52" name="Shape 43"/>
+          <p:cNvSpPr/>
+          <p:nvPr/>
+        </p:nvSpPr>
+        <p:spPr>
+          <a:xfrm>
+            <a:off x="2286000" y="1042416"/>
+            <a:ext cx="1417320" cy="2633472"/>
+          </a:xfrm>
+          <a:prstGeom prst="rect">
+            <a:avLst/>
+          </a:prstGeom>
+          <a:solidFill>
+            <a:srgbClr val="EDE8F9"/>
+          </a:solidFill>
+          <a:ln w="19050">
+            <a:solidFill>
+              <a:srgbClr val="5D35B1"/>
+            </a:solidFill>
+            <a:prstDash val="dash"/>
+          </a:ln>
+        </p:spPr>
+      </p:sp>
+      <p:sp>
+        <p:nvSpPr>
+          <p:cNvPr id="53" name="Text 44"/>
+          <p:cNvSpPr/>
+          <p:nvPr/>
+        </p:nvSpPr>
+        <p:spPr>
+          <a:xfrm>
+            <a:off x="2286000" y="1078992"/>
+            <a:ext cx="1417320" cy="201168"/>
+          </a:xfrm>
+          <a:prstGeom prst="rect">
+            <a:avLst/>
+          </a:prstGeom>
+          <a:noFill/>
+          <a:ln/>
+        </p:spPr>
+        <p:txBody>
+          <a:bodyPr wrap="square" rtlCol="0" anchor="ctr"/>
+          <a:lstStyle/>
+          <a:p>
+            <a:pPr algn="ctr" indent="0" marL="0">
+              <a:buNone/>
+            </a:pPr>
+            <a:r>
+              <a:rPr lang="en-US" sz="800" b="1" dirty="0">
+                <a:solidFill>
+                  <a:srgbClr val="5D35B1"/>
+                </a:solidFill>
+              </a:rPr>
+              <a:t>Data Ingestion</a:t>
+            </a:r>
+            <a:endParaRPr lang="en-US" sz="800" dirty="0"/>
+          </a:p>
+        </p:txBody>
+      </p:sp>
+      <p:sp>
+        <p:nvSpPr>
+          <p:cNvPr id="54" name="Shape 45"/>
+          <p:cNvSpPr/>
+          <p:nvPr/>
+        </p:nvSpPr>
+        <p:spPr>
+          <a:xfrm>
+            <a:off x="2450592" y="1353312"/>
+            <a:ext cx="256032" cy="256032"/>
+          </a:xfrm>
+          <a:prstGeom prst="ellipse">
+            <a:avLst/>
+          </a:prstGeom>
+          <a:solidFill>
+            <a:srgbClr val="5D35B1"/>
+          </a:solidFill>
+          <a:ln w="12700">
+            <a:solidFill>
+              <a:srgbClr val="5D35B1"/>
+            </a:solidFill>
+            <a:prstDash val="solid"/>
+          </a:ln>
+        </p:spPr>
+      </p:sp>
+      <p:sp>
+        <p:nvSpPr>
+          <p:cNvPr id="55" name="Text 46"/>
+          <p:cNvSpPr/>
+          <p:nvPr/>
+        </p:nvSpPr>
+        <p:spPr>
+          <a:xfrm>
+            <a:off x="2450592" y="1353312"/>
+            <a:ext cx="256032" cy="256032"/>
+          </a:xfrm>
+          <a:prstGeom prst="rect">
+            <a:avLst/>
+          </a:prstGeom>
+          <a:noFill/>
+          <a:ln/>
+        </p:spPr>
+        <p:txBody>
+          <a:bodyPr wrap="square" rtlCol="0" anchor="ctr"/>
+          <a:lstStyle/>
+          <a:p>
+            <a:pPr algn="ctr" indent="0" marL="0">
+              <a:buNone/>
+            </a:pPr>
+            <a:r>
+              <a:rPr lang="en-US" sz="700" b="1" dirty="0">
+                <a:solidFill>
+                  <a:srgbClr val="FFFFFF"/>
+                </a:solidFill>
+              </a:rPr>
+              <a:t>1</a:t>
+            </a:r>
+            <a:endParaRPr lang="en-US" sz="700" dirty="0"/>
+          </a:p>
+        </p:txBody>
+      </p:sp>
+      <p:sp>
+        <p:nvSpPr>
+          <p:cNvPr id="56" name="Shape 47"/>
+          <p:cNvSpPr/>
+          <p:nvPr/>
+        </p:nvSpPr>
+        <p:spPr>
+          <a:xfrm>
+            <a:off x="2633472" y="1389888"/>
+            <a:ext cx="475488" cy="475488"/>
+          </a:xfrm>
+          <a:prstGeom prst="ellipse">
+            <a:avLst/>
+          </a:prstGeom>
+          <a:solidFill>
+            <a:srgbClr val="FFFFFF"/>
+          </a:solidFill>
+          <a:ln w="15240">
+            <a:solidFill>
+              <a:srgbClr val="5D35B1"/>
+            </a:solidFill>
+            <a:prstDash val="solid"/>
+          </a:ln>
+        </p:spPr>
+      </p:sp>
+      <p:sp>
+        <p:nvSpPr>
+          <p:cNvPr id="57" name="Text 48"/>
+          <p:cNvSpPr/>
+          <p:nvPr/>
+        </p:nvSpPr>
+        <p:spPr>
+          <a:xfrm>
+            <a:off x="2377440" y="1883664"/>
+            <a:ext cx="1234440" cy="310896"/>
+          </a:xfrm>
+          <a:prstGeom prst="rect">
+            <a:avLst/>
+          </a:prstGeom>
+          <a:noFill/>
+          <a:ln/>
+        </p:spPr>
+        <p:txBody>
+          <a:bodyPr wrap="square" rtlCol="0" anchor="ctr"/>
+          <a:lstStyle/>
+          <a:p>
+            <a:pPr algn="ctr" indent="0" marL="0">
+              <a:buNone/>
+            </a:pPr>
+            <a:r>
+              <a:rPr lang="en-US" sz="700" b="1" dirty="0">
+                <a:solidFill>
+                  <a:srgbClr val="1A1A1A"/>
+                </a:solidFill>
+              </a:rPr>
+              <a:t>Batch</a:t>
+            </a:r>
+            <a:endParaRPr lang="en-US" sz="700" dirty="0"/>
+          </a:p>
+          <a:p>
+            <a:pPr algn="ctr" indent="0" marL="0">
+              <a:buNone/>
+            </a:pPr>
+            <a:r>
+              <a:rPr lang="en-US" sz="700" b="1" dirty="0">
+                <a:solidFill>
+                  <a:srgbClr val="1A1A1A"/>
+                </a:solidFill>
+              </a:rPr>
+              <a:t>Ingestion</a:t>
+            </a:r>
+            <a:endParaRPr lang="en-US" sz="700" dirty="0"/>
+          </a:p>
+        </p:txBody>
+      </p:sp>
+      <p:sp>
+        <p:nvSpPr>
+          <p:cNvPr id="58" name="Shape 49"/>
+          <p:cNvSpPr/>
+          <p:nvPr/>
+        </p:nvSpPr>
+        <p:spPr>
+          <a:xfrm>
+            <a:off x="2450592" y="2121408"/>
+            <a:ext cx="256032" cy="256032"/>
+          </a:xfrm>
+          <a:prstGeom prst="ellipse">
+            <a:avLst/>
+          </a:prstGeom>
+          <a:solidFill>
+            <a:srgbClr val="5D35B1"/>
+          </a:solidFill>
+          <a:ln w="12700">
+            <a:solidFill>
+              <a:srgbClr val="5D35B1"/>
+            </a:solidFill>
+            <a:prstDash val="solid"/>
+          </a:ln>
+        </p:spPr>
+      </p:sp>
+      <p:sp>
+        <p:nvSpPr>
+          <p:cNvPr id="59" name="Text 50"/>
+          <p:cNvSpPr/>
+          <p:nvPr/>
+        </p:nvSpPr>
+        <p:spPr>
+          <a:xfrm>
+            <a:off x="2450592" y="2121408"/>
+            <a:ext cx="256032" cy="256032"/>
+          </a:xfrm>
+          <a:prstGeom prst="rect">
+            <a:avLst/>
+          </a:prstGeom>
+          <a:noFill/>
+          <a:ln/>
+        </p:spPr>
+        <p:txBody>
+          <a:bodyPr wrap="square" rtlCol="0" anchor="ctr"/>
+          <a:lstStyle/>
+          <a:p>
+            <a:pPr algn="ctr" indent="0" marL="0">
+              <a:buNone/>
+            </a:pPr>
+            <a:r>
+              <a:rPr lang="en-US" sz="700" b="1" dirty="0">
+                <a:solidFill>
+                  <a:srgbClr val="FFFFFF"/>
+                </a:solidFill>
+              </a:rPr>
+              <a:t>2</a:t>
+            </a:r>
+            <a:endParaRPr lang="en-US" sz="700" dirty="0"/>
+          </a:p>
+        </p:txBody>
+      </p:sp>
+      <p:sp>
+        <p:nvSpPr>
+          <p:cNvPr id="60" name="Shape 51"/>
+          <p:cNvSpPr/>
+          <p:nvPr/>
+        </p:nvSpPr>
+        <p:spPr>
+          <a:xfrm>
+            <a:off x="2633472" y="2157984"/>
+            <a:ext cx="475488" cy="475488"/>
+          </a:xfrm>
+          <a:prstGeom prst="ellipse">
+            <a:avLst/>
+          </a:prstGeom>
+          <a:solidFill>
+            <a:srgbClr val="FFFFFF"/>
+          </a:solidFill>
+          <a:ln w="15240">
+            <a:solidFill>
+              <a:srgbClr val="5D35B1"/>
+            </a:solidFill>
+            <a:prstDash val="solid"/>
+          </a:ln>
+        </p:spPr>
+      </p:sp>
+      <p:sp>
+        <p:nvSpPr>
+          <p:cNvPr id="61" name="Text 52"/>
+          <p:cNvSpPr/>
+          <p:nvPr/>
+        </p:nvSpPr>
+        <p:spPr>
+          <a:xfrm>
+            <a:off x="2377440" y="2651760"/>
+            <a:ext cx="1234440" cy="310896"/>
+          </a:xfrm>
+          <a:prstGeom prst="rect">
+            <a:avLst/>
+          </a:prstGeom>
+          <a:noFill/>
+          <a:ln/>
+        </p:spPr>
+        <p:txBody>
+          <a:bodyPr wrap="square" rtlCol="0" anchor="ctr"/>
+          <a:lstStyle/>
+          <a:p>
+            <a:pPr algn="ctr" indent="0" marL="0">
+              <a:buNone/>
+            </a:pPr>
+            <a:r>
+              <a:rPr lang="en-US" sz="700" b="1" dirty="0">
+                <a:solidFill>
+                  <a:srgbClr val="1A1A1A"/>
+                </a:solidFill>
+              </a:rPr>
+              <a:t>CDC</a:t>
+            </a:r>
+            <a:endParaRPr lang="en-US" sz="700" dirty="0"/>
+          </a:p>
+          <a:p>
+            <a:pPr algn="ctr" indent="0" marL="0">
+              <a:buNone/>
+            </a:pPr>
+            <a:r>
+              <a:rPr lang="en-US" sz="700" b="1" dirty="0">
+                <a:solidFill>
+                  <a:srgbClr val="1A1A1A"/>
+                </a:solidFill>
+              </a:rPr>
+              <a:t>Ingestion</a:t>
+            </a:r>
+            <a:endParaRPr lang="en-US" sz="700" dirty="0"/>
+          </a:p>
+        </p:txBody>
+      </p:sp>
+      <p:sp>
+        <p:nvSpPr>
+          <p:cNvPr id="62" name="Shape 53"/>
+          <p:cNvSpPr/>
+          <p:nvPr/>
+        </p:nvSpPr>
+        <p:spPr>
+          <a:xfrm>
+            <a:off x="2450592" y="2889504"/>
+            <a:ext cx="256032" cy="256032"/>
+          </a:xfrm>
+          <a:prstGeom prst="ellipse">
+            <a:avLst/>
+          </a:prstGeom>
+          <a:solidFill>
+            <a:srgbClr val="5D35B1"/>
+          </a:solidFill>
+          <a:ln w="12700">
+            <a:solidFill>
+              <a:srgbClr val="5D35B1"/>
+            </a:solidFill>
+            <a:prstDash val="solid"/>
+          </a:ln>
+        </p:spPr>
+      </p:sp>
+      <p:sp>
+        <p:nvSpPr>
+          <p:cNvPr id="63" name="Text 54"/>
+          <p:cNvSpPr/>
+          <p:nvPr/>
+        </p:nvSpPr>
+        <p:spPr>
+          <a:xfrm>
+            <a:off x="2450592" y="2889504"/>
+            <a:ext cx="256032" cy="256032"/>
+          </a:xfrm>
+          <a:prstGeom prst="rect">
+            <a:avLst/>
+          </a:prstGeom>
+          <a:noFill/>
+          <a:ln/>
+        </p:spPr>
+        <p:txBody>
+          <a:bodyPr wrap="square" rtlCol="0" anchor="ctr"/>
+          <a:lstStyle/>
+          <a:p>
+            <a:pPr algn="ctr" indent="0" marL="0">
+              <a:buNone/>
+            </a:pPr>
+            <a:r>
+              <a:rPr lang="en-US" sz="700" b="1" dirty="0">
+                <a:solidFill>
+                  <a:srgbClr val="FFFFFF"/>
+                </a:solidFill>
+              </a:rPr>
+              <a:t>3</a:t>
+            </a:r>
+            <a:endParaRPr lang="en-US" sz="700" dirty="0"/>
+          </a:p>
+        </p:txBody>
+      </p:sp>
+      <p:sp>
+        <p:nvSpPr>
+          <p:cNvPr id="64" name="Shape 55"/>
+          <p:cNvSpPr/>
+          <p:nvPr/>
+        </p:nvSpPr>
+        <p:spPr>
+          <a:xfrm>
+            <a:off x="2633472" y="2926080"/>
+            <a:ext cx="475488" cy="475488"/>
+          </a:xfrm>
+          <a:prstGeom prst="ellipse">
+            <a:avLst/>
+          </a:prstGeom>
+          <a:solidFill>
+            <a:srgbClr val="FFFFFF"/>
+          </a:solidFill>
+          <a:ln w="15240">
+            <a:solidFill>
+              <a:srgbClr val="5D35B1"/>
+            </a:solidFill>
+            <a:prstDash val="solid"/>
+          </a:ln>
+        </p:spPr>
+      </p:sp>
+      <p:sp>
+        <p:nvSpPr>
+          <p:cNvPr id="65" name="Text 56"/>
+          <p:cNvSpPr/>
+          <p:nvPr/>
+        </p:nvSpPr>
+        <p:spPr>
+          <a:xfrm>
+            <a:off x="2377440" y="3419856"/>
+            <a:ext cx="1234440" cy="310896"/>
+          </a:xfrm>
+          <a:prstGeom prst="rect">
+            <a:avLst/>
+          </a:prstGeom>
+          <a:noFill/>
+          <a:ln/>
+        </p:spPr>
+        <p:txBody>
+          <a:bodyPr wrap="square" rtlCol="0" anchor="ctr"/>
+          <a:lstStyle/>
+          <a:p>
+            <a:pPr algn="ctr" indent="0" marL="0">
+              <a:buNone/>
+            </a:pPr>
+            <a:r>
+              <a:rPr lang="en-US" sz="700" b="1" dirty="0">
+                <a:solidFill>
+                  <a:srgbClr val="1A1A1A"/>
+                </a:solidFill>
+              </a:rPr>
+              <a:t>Streaming</a:t>
+            </a:r>
+            <a:endParaRPr lang="en-US" sz="700" dirty="0"/>
+          </a:p>
+          <a:p>
+            <a:pPr algn="ctr" indent="0" marL="0">
+              <a:buNone/>
+            </a:pPr>
+            <a:r>
+              <a:rPr lang="en-US" sz="700" b="1" dirty="0">
+                <a:solidFill>
+                  <a:srgbClr val="1A1A1A"/>
+                </a:solidFill>
+              </a:rPr>
+              <a:t>Ingestion</a:t>
+            </a:r>
+            <a:endParaRPr lang="en-US" sz="700" dirty="0"/>
+          </a:p>
+        </p:txBody>
+      </p:sp>
+      <p:sp>
+        <p:nvSpPr>
+          <p:cNvPr id="66" name="Shape 57"/>
+          <p:cNvSpPr/>
+          <p:nvPr/>
+        </p:nvSpPr>
+        <p:spPr>
+          <a:xfrm>
+            <a:off x="3831336" y="1042416"/>
+            <a:ext cx="2194560" cy="228600"/>
+          </a:xfrm>
+          <a:prstGeom prst="rect">
+            <a:avLst/>
+          </a:prstGeom>
+          <a:solidFill>
+            <a:srgbClr val="2D1B69"/>
+          </a:solidFill>
+          <a:ln w="12700">
+            <a:solidFill>
+              <a:srgbClr val="2D1B69"/>
+            </a:solidFill>
+            <a:prstDash val="solid"/>
+          </a:ln>
+        </p:spPr>
+      </p:sp>
+      <p:sp>
+        <p:nvSpPr>
+          <p:cNvPr id="67" name="Text 58"/>
+          <p:cNvSpPr/>
+          <p:nvPr/>
+        </p:nvSpPr>
+        <p:spPr>
+          <a:xfrm>
+            <a:off x="3831336" y="1042416"/>
+            <a:ext cx="2194560" cy="228600"/>
+          </a:xfrm>
+          <a:prstGeom prst="rect">
+            <a:avLst/>
+          </a:prstGeom>
+          <a:noFill/>
+          <a:ln/>
+        </p:spPr>
+        <p:txBody>
+          <a:bodyPr wrap="square" rtlCol="0" anchor="ctr"/>
+          <a:lstStyle/>
+          <a:p>
+            <a:pPr algn="ctr" indent="0" marL="0">
+              <a:buNone/>
+            </a:pPr>
+            <a:r>
+              <a:rPr lang="en-US" sz="800" b="1" dirty="0">
+                <a:solidFill>
+                  <a:srgbClr val="FFFFFF"/>
+                </a:solidFill>
+              </a:rPr>
+              <a:t>ETL</a:t>
+            </a:r>
+            <a:endParaRPr lang="en-US" sz="800" dirty="0"/>
+          </a:p>
+        </p:txBody>
+      </p:sp>
+      <p:sp>
+        <p:nvSpPr>
+          <p:cNvPr id="68" name="Shape 59"/>
+          <p:cNvSpPr/>
+          <p:nvPr/>
+        </p:nvSpPr>
+        <p:spPr>
+          <a:xfrm>
+            <a:off x="3831336" y="1271016"/>
+            <a:ext cx="2194560" cy="1014984"/>
+          </a:xfrm>
+          <a:prstGeom prst="rect">
+            <a:avLst/>
+          </a:prstGeom>
+          <a:solidFill>
+            <a:srgbClr val="F2F2F2"/>
+          </a:solidFill>
+          <a:ln w="9525">
+            <a:solidFill>
+              <a:srgbClr val="CCCCCC"/>
+            </a:solidFill>
+            <a:prstDash val="solid"/>
+          </a:ln>
+        </p:spPr>
+      </p:sp>
+      <p:sp>
+        <p:nvSpPr>
+          <p:cNvPr id="69" name="Shape 60"/>
+          <p:cNvSpPr/>
+          <p:nvPr/>
+        </p:nvSpPr>
+        <p:spPr>
+          <a:xfrm>
+            <a:off x="3941064" y="1463040"/>
+            <a:ext cx="475488" cy="402336"/>
+          </a:xfrm>
+          <a:prstGeom prst="rect">
+            <a:avLst>
+              <a:gd name="adj" fmla="val 11364"/>
+            </a:avLst>
+          </a:prstGeom>
+          <a:solidFill>
+            <a:srgbClr val="EDE8F9"/>
+          </a:solidFill>
+          <a:ln w="10160">
+            <a:solidFill>
+              <a:srgbClr val="5D35B1"/>
+            </a:solidFill>
+            <a:prstDash val="solid"/>
+          </a:ln>
+        </p:spPr>
+      </p:sp>
+      <p:sp>
+        <p:nvSpPr>
+          <p:cNvPr id="70" name="Text 61"/>
+          <p:cNvSpPr/>
+          <p:nvPr/>
+        </p:nvSpPr>
+        <p:spPr>
+          <a:xfrm>
+            <a:off x="3941064" y="1700784"/>
+            <a:ext cx="475488" cy="182880"/>
+          </a:xfrm>
+          <a:prstGeom prst="rect">
+            <a:avLst/>
+          </a:prstGeom>
+          <a:noFill/>
+          <a:ln/>
+        </p:spPr>
+        <p:txBody>
+          <a:bodyPr wrap="square" rtlCol="0" anchor="ctr"/>
+          <a:lstStyle/>
+          <a:p>
+            <a:pPr algn="ctr" indent="0" marL="0">
+              <a:buNone/>
+            </a:pPr>
+            <a:r>
+              <a:rPr lang="en-US" sz="650" b="1" dirty="0">
+                <a:solidFill>
+                  <a:srgbClr val="5D35B1"/>
+                </a:solidFill>
+              </a:rPr>
+              <a:t>RAW</a:t>
+            </a:r>
+            <a:endParaRPr lang="en-US" sz="650" dirty="0"/>
+          </a:p>
+        </p:txBody>
+      </p:sp>
+      <p:sp>
+        <p:nvSpPr>
+          <p:cNvPr id="71" name="Shape 62"/>
+          <p:cNvSpPr/>
+          <p:nvPr/>
+        </p:nvSpPr>
+        <p:spPr>
+          <a:xfrm>
+            <a:off x="4672584" y="1463040"/>
+            <a:ext cx="475488" cy="402336"/>
+          </a:xfrm>
+          <a:prstGeom prst="rect">
+            <a:avLst>
+              <a:gd name="adj" fmla="val 11364"/>
+            </a:avLst>
+          </a:prstGeom>
+          <a:solidFill>
+            <a:srgbClr val="EDE8F9"/>
+          </a:solidFill>
+          <a:ln w="10160">
+            <a:solidFill>
+              <a:srgbClr val="5D35B1"/>
+            </a:solidFill>
+            <a:prstDash val="solid"/>
+          </a:ln>
+        </p:spPr>
+      </p:sp>
+      <p:sp>
+        <p:nvSpPr>
+          <p:cNvPr id="72" name="Text 63"/>
+          <p:cNvSpPr/>
+          <p:nvPr/>
+        </p:nvSpPr>
+        <p:spPr>
+          <a:xfrm>
+            <a:off x="4672584" y="1700784"/>
+            <a:ext cx="475488" cy="182880"/>
+          </a:xfrm>
+          <a:prstGeom prst="rect">
+            <a:avLst/>
+          </a:prstGeom>
+          <a:noFill/>
+          <a:ln/>
+        </p:spPr>
+        <p:txBody>
+          <a:bodyPr wrap="square" rtlCol="0" anchor="ctr"/>
+          <a:lstStyle/>
+          <a:p>
+            <a:pPr algn="ctr" indent="0" marL="0">
+              <a:buNone/>
+            </a:pPr>
+            <a:r>
+              <a:rPr lang="en-US" sz="650" b="1" dirty="0">
+                <a:solidFill>
+                  <a:srgbClr val="5D35B1"/>
+                </a:solidFill>
+              </a:rPr>
+              <a:t>ODS</a:t>
+            </a:r>
+            <a:endParaRPr lang="en-US" sz="650" dirty="0"/>
+          </a:p>
+        </p:txBody>
+      </p:sp>
+      <p:sp>
+        <p:nvSpPr>
+          <p:cNvPr id="73" name="Shape 64"/>
+          <p:cNvSpPr/>
+          <p:nvPr/>
+        </p:nvSpPr>
+        <p:spPr>
+          <a:xfrm>
+            <a:off x="5440680" y="1463040"/>
+            <a:ext cx="475488" cy="402336"/>
+          </a:xfrm>
+          <a:prstGeom prst="rect">
+            <a:avLst>
+              <a:gd name="adj" fmla="val 11364"/>
+            </a:avLst>
+          </a:prstGeom>
+          <a:solidFill>
+            <a:srgbClr val="EDE8F9"/>
+          </a:solidFill>
+          <a:ln w="10160">
+            <a:solidFill>
+              <a:srgbClr val="5D35B1"/>
+            </a:solidFill>
+            <a:prstDash val="solid"/>
+          </a:ln>
+        </p:spPr>
+      </p:sp>
+      <p:sp>
+        <p:nvSpPr>
+          <p:cNvPr id="74" name="Text 65"/>
+          <p:cNvSpPr/>
+          <p:nvPr/>
+        </p:nvSpPr>
+        <p:spPr>
+          <a:xfrm>
+            <a:off x="5440680" y="1700784"/>
+            <a:ext cx="475488" cy="182880"/>
+          </a:xfrm>
+          <a:prstGeom prst="rect">
+            <a:avLst/>
+          </a:prstGeom>
+          <a:noFill/>
+          <a:ln/>
+        </p:spPr>
+        <p:txBody>
+          <a:bodyPr wrap="square" rtlCol="0" anchor="ctr"/>
+          <a:lstStyle/>
+          <a:p>
+            <a:pPr algn="ctr" indent="0" marL="0">
+              <a:buNone/>
+            </a:pPr>
+            <a:r>
+              <a:rPr lang="en-US" sz="650" b="1" dirty="0">
+                <a:solidFill>
+                  <a:srgbClr val="5D35B1"/>
+                </a:solidFill>
+              </a:rPr>
+              <a:t>Facts</a:t>
+            </a:r>
+            <a:endParaRPr lang="en-US" sz="650" dirty="0"/>
+          </a:p>
+        </p:txBody>
+      </p:sp>
+      <p:sp>
+        <p:nvSpPr>
+          <p:cNvPr id="75" name="Shape 66"/>
+          <p:cNvSpPr/>
+          <p:nvPr/>
+        </p:nvSpPr>
+        <p:spPr>
+          <a:xfrm>
+            <a:off x="4434840" y="1664208"/>
+            <a:ext cx="237744" cy="0"/>
+          </a:xfrm>
+          <a:prstGeom prst="line">
+            <a:avLst/>
+          </a:prstGeom>
+          <a:noFill/>
+          <a:ln w="12700">
+            <a:solidFill>
+              <a:srgbClr val="888888"/>
+            </a:solidFill>
+            <a:prstDash val="dash"/>
+            <a:tailEnd type="arrow"/>
+          </a:ln>
+        </p:spPr>
+      </p:sp>
+      <p:sp>
+        <p:nvSpPr>
+          <p:cNvPr id="76" name="Shape 67"/>
+          <p:cNvSpPr/>
+          <p:nvPr/>
+        </p:nvSpPr>
+        <p:spPr>
+          <a:xfrm>
+            <a:off x="5184648" y="1627632"/>
+            <a:ext cx="256032" cy="91440"/>
+          </a:xfrm>
+          <a:prstGeom prst="line">
+            <a:avLst/>
+          </a:prstGeom>
+          <a:noFill/>
+          <a:ln w="12700">
+            <a:solidFill>
+              <a:srgbClr val="888888"/>
+            </a:solidFill>
+            <a:prstDash val="dash"/>
+            <a:tailEnd type="arrow"/>
+          </a:ln>
+        </p:spPr>
+      </p:sp>
+      <p:sp>
+        <p:nvSpPr>
+          <p:cNvPr id="77" name="Shape 68"/>
+          <p:cNvSpPr/>
+          <p:nvPr/>
+        </p:nvSpPr>
+        <p:spPr>
+          <a:xfrm>
+            <a:off x="4928616" y="2286000"/>
+            <a:ext cx="0" cy="201168"/>
+          </a:xfrm>
+          <a:prstGeom prst="line">
+            <a:avLst/>
+          </a:prstGeom>
+          <a:noFill/>
+          <a:ln w="15240">
+            <a:solidFill>
+              <a:srgbClr val="1A1A1A"/>
+            </a:solidFill>
+            <a:prstDash val="solid"/>
+            <a:tailEnd type="arrow"/>
+          </a:ln>
+        </p:spPr>
       </p:sp>
       <p:pic>
         <p:nvPicPr>
-          <p:cNvPr id="50" name="Image 7" descr="preencoded.png">    </p:cNvPr>
+          <p:cNvPr id="78" name="Image 7" descr="preencoded.png">    </p:cNvPr>
           <p:cNvPicPr>
             <a:picLocks noChangeAspect="1"/>
           </p:cNvPicPr>
@@ -2451,8 +3328,8 @@
         </p:blipFill>
         <p:spPr>
           <a:xfrm>
-            <a:off x="9573768" y="475488"/>
-            <a:ext cx="201168" cy="201168"/>
+            <a:off x="5477256" y="1298448"/>
+            <a:ext cx="457200" cy="164592"/>
           </a:xfrm>
           <a:prstGeom prst="rect">
             <a:avLst/>
@@ -2461,14 +3338,14 @@
       </p:pic>
       <p:sp>
         <p:nvSpPr>
-          <p:cNvPr id="51" name="Shape 41"/>
-          <p:cNvSpPr/>
-          <p:nvPr/>
-        </p:nvSpPr>
-        <p:spPr>
-          <a:xfrm>
-            <a:off x="2286000" y="749808"/>
-            <a:ext cx="7552944" cy="237744"/>
+          <p:cNvPr id="79" name="Shape 69"/>
+          <p:cNvSpPr/>
+          <p:nvPr/>
+        </p:nvSpPr>
+        <p:spPr>
+          <a:xfrm>
+            <a:off x="3831336" y="2487168"/>
+            <a:ext cx="2194560" cy="237744"/>
           </a:xfrm>
           <a:prstGeom prst="rect">
             <a:avLst/>
@@ -2486,14 +3363,14 @@
       </p:sp>
       <p:sp>
         <p:nvSpPr>
-          <p:cNvPr id="52" name="Text 42"/>
-          <p:cNvSpPr/>
-          <p:nvPr/>
-        </p:nvSpPr>
-        <p:spPr>
-          <a:xfrm>
-            <a:off x="2286000" y="749808"/>
-            <a:ext cx="7552944" cy="237744"/>
+          <p:cNvPr id="80" name="Text 70"/>
+          <p:cNvSpPr/>
+          <p:nvPr/>
+        </p:nvSpPr>
+        <p:spPr>
+          <a:xfrm>
+            <a:off x="3831336" y="2487168"/>
+            <a:ext cx="2194560" cy="237744"/>
           </a:xfrm>
           <a:prstGeom prst="rect">
             <a:avLst/>
@@ -2514,7 +3391,7 @@
                   <a:srgbClr val="FFFFFF"/>
                 </a:solidFill>
               </a:rPr>
-              <a:t>Orchestration</a:t>
+              <a:t>Data Warehouse</a:t>
             </a:r>
             <a:endParaRPr lang="en-US" sz="800" dirty="0"/>
           </a:p>
@@ -2522,823 +3399,59 @@
       </p:sp>
       <p:sp>
         <p:nvSpPr>
-          <p:cNvPr id="53" name="Shape 43"/>
-          <p:cNvSpPr/>
-          <p:nvPr/>
-        </p:nvSpPr>
-        <p:spPr>
-          <a:xfrm>
-            <a:off x="2286000" y="1042416"/>
-            <a:ext cx="1417320" cy="2633472"/>
-          </a:xfrm>
-          <a:prstGeom prst="rect">
-            <a:avLst/>
-          </a:prstGeom>
-          <a:solidFill>
-            <a:srgbClr val="EDE8F9"/>
-          </a:solidFill>
-          <a:ln w="19050">
+          <p:cNvPr id="81" name="Shape 71"/>
+          <p:cNvSpPr/>
+          <p:nvPr/>
+        </p:nvSpPr>
+        <p:spPr>
+          <a:xfrm>
+            <a:off x="3831336" y="2724912"/>
+            <a:ext cx="2194560" cy="512064"/>
+          </a:xfrm>
+          <a:prstGeom prst="rect">
+            <a:avLst/>
+          </a:prstGeom>
+          <a:solidFill>
+            <a:srgbClr val="F2F2F2"/>
+          </a:solidFill>
+          <a:ln w="9525">
+            <a:solidFill>
+              <a:srgbClr val="CCCCCC"/>
+            </a:solidFill>
+            <a:prstDash val="solid"/>
+          </a:ln>
+        </p:spPr>
+      </p:sp>
+      <p:sp>
+        <p:nvSpPr>
+          <p:cNvPr id="82" name="Shape 72"/>
+          <p:cNvSpPr/>
+          <p:nvPr/>
+        </p:nvSpPr>
+        <p:spPr>
+          <a:xfrm>
+            <a:off x="3959352" y="2779776"/>
+            <a:ext cx="1938528" cy="274320"/>
+          </a:xfrm>
+          <a:prstGeom prst="rect">
+            <a:avLst>
+              <a:gd name="adj" fmla="val 20000"/>
+            </a:avLst>
+          </a:prstGeom>
+          <a:solidFill>
+            <a:srgbClr val="5D35B1"/>
+          </a:solidFill>
+          <a:ln w="12700">
             <a:solidFill>
               <a:srgbClr val="5D35B1"/>
             </a:solidFill>
-            <a:prstDash val="dash"/>
-          </a:ln>
-        </p:spPr>
-      </p:sp>
-      <p:sp>
-        <p:nvSpPr>
-          <p:cNvPr id="54" name="Text 44"/>
-          <p:cNvSpPr/>
-          <p:nvPr/>
-        </p:nvSpPr>
-        <p:spPr>
-          <a:xfrm>
-            <a:off x="2286000" y="1078992"/>
-            <a:ext cx="1417320" cy="201168"/>
-          </a:xfrm>
-          <a:prstGeom prst="rect">
-            <a:avLst/>
-          </a:prstGeom>
-          <a:noFill/>
-          <a:ln/>
-        </p:spPr>
-        <p:txBody>
-          <a:bodyPr wrap="square" rtlCol="0" anchor="ctr"/>
-          <a:lstStyle/>
-          <a:p>
-            <a:pPr algn="ctr" indent="0" marL="0">
-              <a:buNone/>
-            </a:pPr>
-            <a:r>
-              <a:rPr lang="en-US" sz="800" b="1" dirty="0">
-                <a:solidFill>
-                  <a:srgbClr val="5D35B1"/>
-                </a:solidFill>
-              </a:rPr>
-              <a:t>Data Ingestion</a:t>
-            </a:r>
-            <a:endParaRPr lang="en-US" sz="800" dirty="0"/>
-          </a:p>
-        </p:txBody>
-      </p:sp>
-      <p:sp>
-        <p:nvSpPr>
-          <p:cNvPr id="55" name="Shape 45"/>
-          <p:cNvSpPr/>
-          <p:nvPr/>
-        </p:nvSpPr>
-        <p:spPr>
-          <a:xfrm>
-            <a:off x="2450592" y="1353312"/>
-            <a:ext cx="256032" cy="256032"/>
-          </a:xfrm>
-          <a:prstGeom prst="ellipse">
-            <a:avLst/>
-          </a:prstGeom>
-          <a:solidFill>
-            <a:srgbClr val="5D35B1"/>
-          </a:solidFill>
-          <a:ln w="12700">
-            <a:solidFill>
-              <a:srgbClr val="5D35B1"/>
-            </a:solidFill>
-            <a:prstDash val="solid"/>
-          </a:ln>
-        </p:spPr>
-      </p:sp>
-      <p:sp>
-        <p:nvSpPr>
-          <p:cNvPr id="56" name="Text 46"/>
-          <p:cNvSpPr/>
-          <p:nvPr/>
-        </p:nvSpPr>
-        <p:spPr>
-          <a:xfrm>
-            <a:off x="2450592" y="1353312"/>
-            <a:ext cx="256032" cy="256032"/>
-          </a:xfrm>
-          <a:prstGeom prst="rect">
-            <a:avLst/>
-          </a:prstGeom>
-          <a:noFill/>
-          <a:ln/>
-        </p:spPr>
-        <p:txBody>
-          <a:bodyPr wrap="square" rtlCol="0" anchor="ctr"/>
-          <a:lstStyle/>
-          <a:p>
-            <a:pPr algn="ctr" indent="0" marL="0">
-              <a:buNone/>
-            </a:pPr>
-            <a:r>
-              <a:rPr lang="en-US" sz="700" b="1" dirty="0">
-                <a:solidFill>
-                  <a:srgbClr val="FFFFFF"/>
-                </a:solidFill>
-              </a:rPr>
-              <a:t>1</a:t>
-            </a:r>
-            <a:endParaRPr lang="en-US" sz="700" dirty="0"/>
-          </a:p>
-        </p:txBody>
-      </p:sp>
-      <p:sp>
-        <p:nvSpPr>
-          <p:cNvPr id="57" name="Shape 47"/>
-          <p:cNvSpPr/>
-          <p:nvPr/>
-        </p:nvSpPr>
-        <p:spPr>
-          <a:xfrm>
-            <a:off x="2633472" y="1389888"/>
-            <a:ext cx="475488" cy="475488"/>
-          </a:xfrm>
-          <a:prstGeom prst="ellipse">
-            <a:avLst/>
-          </a:prstGeom>
-          <a:solidFill>
-            <a:srgbClr val="FFFFFF"/>
-          </a:solidFill>
-          <a:ln w="15240">
-            <a:solidFill>
-              <a:srgbClr val="5D35B1"/>
-            </a:solidFill>
-            <a:prstDash val="solid"/>
-          </a:ln>
-        </p:spPr>
-      </p:sp>
-      <p:sp>
-        <p:nvSpPr>
-          <p:cNvPr id="58" name="Text 48"/>
-          <p:cNvSpPr/>
-          <p:nvPr/>
-        </p:nvSpPr>
-        <p:spPr>
-          <a:xfrm>
-            <a:off x="2377440" y="1883664"/>
-            <a:ext cx="1234440" cy="310896"/>
-          </a:xfrm>
-          <a:prstGeom prst="rect">
-            <a:avLst/>
-          </a:prstGeom>
-          <a:noFill/>
-          <a:ln/>
-        </p:spPr>
-        <p:txBody>
-          <a:bodyPr wrap="square" rtlCol="0" anchor="ctr"/>
-          <a:lstStyle/>
-          <a:p>
-            <a:pPr algn="ctr" indent="0" marL="0">
-              <a:buNone/>
-            </a:pPr>
-            <a:r>
-              <a:rPr lang="en-US" sz="700" b="1" dirty="0">
-                <a:solidFill>
-                  <a:srgbClr val="1A1A1A"/>
-                </a:solidFill>
-              </a:rPr>
-              <a:t>Batch</a:t>
-            </a:r>
-            <a:endParaRPr lang="en-US" sz="700" dirty="0"/>
-          </a:p>
-          <a:p>
-            <a:pPr algn="ctr" indent="0" marL="0">
-              <a:buNone/>
-            </a:pPr>
-            <a:r>
-              <a:rPr lang="en-US" sz="700" b="1" dirty="0">
-                <a:solidFill>
-                  <a:srgbClr val="1A1A1A"/>
-                </a:solidFill>
-              </a:rPr>
-              <a:t>Ingestion</a:t>
-            </a:r>
-            <a:endParaRPr lang="en-US" sz="700" dirty="0"/>
-          </a:p>
-        </p:txBody>
-      </p:sp>
-      <p:sp>
-        <p:nvSpPr>
-          <p:cNvPr id="59" name="Shape 49"/>
-          <p:cNvSpPr/>
-          <p:nvPr/>
-        </p:nvSpPr>
-        <p:spPr>
-          <a:xfrm>
-            <a:off x="2450592" y="2121408"/>
-            <a:ext cx="256032" cy="256032"/>
-          </a:xfrm>
-          <a:prstGeom prst="ellipse">
-            <a:avLst/>
-          </a:prstGeom>
-          <a:solidFill>
-            <a:srgbClr val="5D35B1"/>
-          </a:solidFill>
-          <a:ln w="12700">
-            <a:solidFill>
-              <a:srgbClr val="5D35B1"/>
-            </a:solidFill>
-            <a:prstDash val="solid"/>
-          </a:ln>
-        </p:spPr>
-      </p:sp>
-      <p:sp>
-        <p:nvSpPr>
-          <p:cNvPr id="60" name="Text 50"/>
-          <p:cNvSpPr/>
-          <p:nvPr/>
-        </p:nvSpPr>
-        <p:spPr>
-          <a:xfrm>
-            <a:off x="2450592" y="2121408"/>
-            <a:ext cx="256032" cy="256032"/>
-          </a:xfrm>
-          <a:prstGeom prst="rect">
-            <a:avLst/>
-          </a:prstGeom>
-          <a:noFill/>
-          <a:ln/>
-        </p:spPr>
-        <p:txBody>
-          <a:bodyPr wrap="square" rtlCol="0" anchor="ctr"/>
-          <a:lstStyle/>
-          <a:p>
-            <a:pPr algn="ctr" indent="0" marL="0">
-              <a:buNone/>
-            </a:pPr>
-            <a:r>
-              <a:rPr lang="en-US" sz="700" b="1" dirty="0">
-                <a:solidFill>
-                  <a:srgbClr val="FFFFFF"/>
-                </a:solidFill>
-              </a:rPr>
-              <a:t>2</a:t>
-            </a:r>
-            <a:endParaRPr lang="en-US" sz="700" dirty="0"/>
-          </a:p>
-        </p:txBody>
-      </p:sp>
-      <p:sp>
-        <p:nvSpPr>
-          <p:cNvPr id="61" name="Shape 51"/>
-          <p:cNvSpPr/>
-          <p:nvPr/>
-        </p:nvSpPr>
-        <p:spPr>
-          <a:xfrm>
-            <a:off x="2633472" y="2157984"/>
-            <a:ext cx="475488" cy="475488"/>
-          </a:xfrm>
-          <a:prstGeom prst="ellipse">
-            <a:avLst/>
-          </a:prstGeom>
-          <a:solidFill>
-            <a:srgbClr val="FFFFFF"/>
-          </a:solidFill>
-          <a:ln w="15240">
-            <a:solidFill>
-              <a:srgbClr val="5D35B1"/>
-            </a:solidFill>
-            <a:prstDash val="solid"/>
-          </a:ln>
-        </p:spPr>
-      </p:sp>
-      <p:sp>
-        <p:nvSpPr>
-          <p:cNvPr id="62" name="Text 52"/>
-          <p:cNvSpPr/>
-          <p:nvPr/>
-        </p:nvSpPr>
-        <p:spPr>
-          <a:xfrm>
-            <a:off x="2377440" y="2651760"/>
-            <a:ext cx="1234440" cy="310896"/>
-          </a:xfrm>
-          <a:prstGeom prst="rect">
-            <a:avLst/>
-          </a:prstGeom>
-          <a:noFill/>
-          <a:ln/>
-        </p:spPr>
-        <p:txBody>
-          <a:bodyPr wrap="square" rtlCol="0" anchor="ctr"/>
-          <a:lstStyle/>
-          <a:p>
-            <a:pPr algn="ctr" indent="0" marL="0">
-              <a:buNone/>
-            </a:pPr>
-            <a:r>
-              <a:rPr lang="en-US" sz="700" b="1" dirty="0">
-                <a:solidFill>
-                  <a:srgbClr val="1A1A1A"/>
-                </a:solidFill>
-              </a:rPr>
-              <a:t>CDC</a:t>
-            </a:r>
-            <a:endParaRPr lang="en-US" sz="700" dirty="0"/>
-          </a:p>
-          <a:p>
-            <a:pPr algn="ctr" indent="0" marL="0">
-              <a:buNone/>
-            </a:pPr>
-            <a:r>
-              <a:rPr lang="en-US" sz="700" b="1" dirty="0">
-                <a:solidFill>
-                  <a:srgbClr val="1A1A1A"/>
-                </a:solidFill>
-              </a:rPr>
-              <a:t>Ingestion</a:t>
-            </a:r>
-            <a:endParaRPr lang="en-US" sz="700" dirty="0"/>
-          </a:p>
-        </p:txBody>
-      </p:sp>
-      <p:sp>
-        <p:nvSpPr>
-          <p:cNvPr id="63" name="Shape 53"/>
-          <p:cNvSpPr/>
-          <p:nvPr/>
-        </p:nvSpPr>
-        <p:spPr>
-          <a:xfrm>
-            <a:off x="2450592" y="2889504"/>
-            <a:ext cx="256032" cy="256032"/>
-          </a:xfrm>
-          <a:prstGeom prst="ellipse">
-            <a:avLst/>
-          </a:prstGeom>
-          <a:solidFill>
-            <a:srgbClr val="5D35B1"/>
-          </a:solidFill>
-          <a:ln w="12700">
-            <a:solidFill>
-              <a:srgbClr val="5D35B1"/>
-            </a:solidFill>
-            <a:prstDash val="solid"/>
-          </a:ln>
-        </p:spPr>
-      </p:sp>
-      <p:sp>
-        <p:nvSpPr>
-          <p:cNvPr id="64" name="Text 54"/>
-          <p:cNvSpPr/>
-          <p:nvPr/>
-        </p:nvSpPr>
-        <p:spPr>
-          <a:xfrm>
-            <a:off x="2450592" y="2889504"/>
-            <a:ext cx="256032" cy="256032"/>
-          </a:xfrm>
-          <a:prstGeom prst="rect">
-            <a:avLst/>
-          </a:prstGeom>
-          <a:noFill/>
-          <a:ln/>
-        </p:spPr>
-        <p:txBody>
-          <a:bodyPr wrap="square" rtlCol="0" anchor="ctr"/>
-          <a:lstStyle/>
-          <a:p>
-            <a:pPr algn="ctr" indent="0" marL="0">
-              <a:buNone/>
-            </a:pPr>
-            <a:r>
-              <a:rPr lang="en-US" sz="700" b="1" dirty="0">
-                <a:solidFill>
-                  <a:srgbClr val="FFFFFF"/>
-                </a:solidFill>
-              </a:rPr>
-              <a:t>3</a:t>
-            </a:r>
-            <a:endParaRPr lang="en-US" sz="700" dirty="0"/>
-          </a:p>
-        </p:txBody>
-      </p:sp>
-      <p:sp>
-        <p:nvSpPr>
-          <p:cNvPr id="65" name="Shape 55"/>
-          <p:cNvSpPr/>
-          <p:nvPr/>
-        </p:nvSpPr>
-        <p:spPr>
-          <a:xfrm>
-            <a:off x="2633472" y="2926080"/>
-            <a:ext cx="475488" cy="475488"/>
-          </a:xfrm>
-          <a:prstGeom prst="ellipse">
-            <a:avLst/>
-          </a:prstGeom>
-          <a:solidFill>
-            <a:srgbClr val="FFFFFF"/>
-          </a:solidFill>
-          <a:ln w="15240">
-            <a:solidFill>
-              <a:srgbClr val="5D35B1"/>
-            </a:solidFill>
-            <a:prstDash val="solid"/>
-          </a:ln>
-        </p:spPr>
-      </p:sp>
-      <p:sp>
-        <p:nvSpPr>
-          <p:cNvPr id="66" name="Text 56"/>
-          <p:cNvSpPr/>
-          <p:nvPr/>
-        </p:nvSpPr>
-        <p:spPr>
-          <a:xfrm>
-            <a:off x="2377440" y="3419856"/>
-            <a:ext cx="1234440" cy="310896"/>
-          </a:xfrm>
-          <a:prstGeom prst="rect">
-            <a:avLst/>
-          </a:prstGeom>
-          <a:noFill/>
-          <a:ln/>
-        </p:spPr>
-        <p:txBody>
-          <a:bodyPr wrap="square" rtlCol="0" anchor="ctr"/>
-          <a:lstStyle/>
-          <a:p>
-            <a:pPr algn="ctr" indent="0" marL="0">
-              <a:buNone/>
-            </a:pPr>
-            <a:r>
-              <a:rPr lang="en-US" sz="700" b="1" dirty="0">
-                <a:solidFill>
-                  <a:srgbClr val="1A1A1A"/>
-                </a:solidFill>
-              </a:rPr>
-              <a:t>Streaming</a:t>
-            </a:r>
-            <a:endParaRPr lang="en-US" sz="700" dirty="0"/>
-          </a:p>
-          <a:p>
-            <a:pPr algn="ctr" indent="0" marL="0">
-              <a:buNone/>
-            </a:pPr>
-            <a:r>
-              <a:rPr lang="en-US" sz="700" b="1" dirty="0">
-                <a:solidFill>
-                  <a:srgbClr val="1A1A1A"/>
-                </a:solidFill>
-              </a:rPr>
-              <a:t>Ingestion</a:t>
-            </a:r>
-            <a:endParaRPr lang="en-US" sz="700" dirty="0"/>
-          </a:p>
-        </p:txBody>
-      </p:sp>
-      <p:sp>
-        <p:nvSpPr>
-          <p:cNvPr id="67" name="Shape 57"/>
-          <p:cNvSpPr/>
-          <p:nvPr/>
-        </p:nvSpPr>
-        <p:spPr>
-          <a:xfrm>
-            <a:off x="3831336" y="1042416"/>
-            <a:ext cx="2194560" cy="228600"/>
-          </a:xfrm>
-          <a:prstGeom prst="rect">
-            <a:avLst/>
-          </a:prstGeom>
-          <a:solidFill>
-            <a:srgbClr val="2D1B69"/>
-          </a:solidFill>
-          <a:ln w="12700">
-            <a:solidFill>
-              <a:srgbClr val="2D1B69"/>
-            </a:solidFill>
-            <a:prstDash val="solid"/>
-          </a:ln>
-        </p:spPr>
-      </p:sp>
-      <p:sp>
-        <p:nvSpPr>
-          <p:cNvPr id="68" name="Text 58"/>
-          <p:cNvSpPr/>
-          <p:nvPr/>
-        </p:nvSpPr>
-        <p:spPr>
-          <a:xfrm>
-            <a:off x="3831336" y="1042416"/>
-            <a:ext cx="2194560" cy="228600"/>
-          </a:xfrm>
-          <a:prstGeom prst="rect">
-            <a:avLst/>
-          </a:prstGeom>
-          <a:noFill/>
-          <a:ln/>
-        </p:spPr>
-        <p:txBody>
-          <a:bodyPr wrap="square" rtlCol="0" anchor="ctr"/>
-          <a:lstStyle/>
-          <a:p>
-            <a:pPr algn="ctr" indent="0" marL="0">
-              <a:buNone/>
-            </a:pPr>
-            <a:r>
-              <a:rPr lang="en-US" sz="800" b="1" dirty="0">
-                <a:solidFill>
-                  <a:srgbClr val="FFFFFF"/>
-                </a:solidFill>
-              </a:rPr>
-              <a:t>ETL</a:t>
-            </a:r>
-            <a:endParaRPr lang="en-US" sz="800" dirty="0"/>
-          </a:p>
-        </p:txBody>
-      </p:sp>
-      <p:sp>
-        <p:nvSpPr>
-          <p:cNvPr id="69" name="Shape 59"/>
-          <p:cNvSpPr/>
-          <p:nvPr/>
-        </p:nvSpPr>
-        <p:spPr>
-          <a:xfrm>
-            <a:off x="3831336" y="1271016"/>
-            <a:ext cx="2194560" cy="1014984"/>
-          </a:xfrm>
-          <a:prstGeom prst="rect">
-            <a:avLst/>
-          </a:prstGeom>
-          <a:solidFill>
-            <a:srgbClr val="F2F2F2"/>
-          </a:solidFill>
-          <a:ln w="9525">
-            <a:solidFill>
-              <a:srgbClr val="CCCCCC"/>
-            </a:solidFill>
-            <a:prstDash val="solid"/>
-          </a:ln>
-        </p:spPr>
-      </p:sp>
-      <p:sp>
-        <p:nvSpPr>
-          <p:cNvPr id="70" name="Shape 60"/>
-          <p:cNvSpPr/>
-          <p:nvPr/>
-        </p:nvSpPr>
-        <p:spPr>
-          <a:xfrm>
-            <a:off x="3941064" y="1463040"/>
-            <a:ext cx="475488" cy="402336"/>
-          </a:xfrm>
-          <a:prstGeom prst="rect">
-            <a:avLst>
-              <a:gd name="adj" fmla="val 11364"/>
-            </a:avLst>
-          </a:prstGeom>
-          <a:solidFill>
-            <a:srgbClr val="EDE8F9"/>
-          </a:solidFill>
-          <a:ln w="10160">
-            <a:solidFill>
-              <a:srgbClr val="5D35B1"/>
-            </a:solidFill>
-            <a:prstDash val="solid"/>
-          </a:ln>
-        </p:spPr>
-      </p:sp>
-      <p:sp>
-        <p:nvSpPr>
-          <p:cNvPr id="71" name="Text 61"/>
-          <p:cNvSpPr/>
-          <p:nvPr/>
-        </p:nvSpPr>
-        <p:spPr>
-          <a:xfrm>
-            <a:off x="3941064" y="1700784"/>
-            <a:ext cx="475488" cy="182880"/>
-          </a:xfrm>
-          <a:prstGeom prst="rect">
-            <a:avLst/>
-          </a:prstGeom>
-          <a:noFill/>
-          <a:ln/>
-        </p:spPr>
-        <p:txBody>
-          <a:bodyPr wrap="square" rtlCol="0" anchor="ctr"/>
-          <a:lstStyle/>
-          <a:p>
-            <a:pPr algn="ctr" indent="0" marL="0">
-              <a:buNone/>
-            </a:pPr>
-            <a:r>
-              <a:rPr lang="en-US" sz="650" b="1" dirty="0">
-                <a:solidFill>
-                  <a:srgbClr val="5D35B1"/>
-                </a:solidFill>
-              </a:rPr>
-              <a:t>RAW</a:t>
-            </a:r>
-            <a:endParaRPr lang="en-US" sz="650" dirty="0"/>
-          </a:p>
-        </p:txBody>
-      </p:sp>
-      <p:sp>
-        <p:nvSpPr>
-          <p:cNvPr id="72" name="Shape 62"/>
-          <p:cNvSpPr/>
-          <p:nvPr/>
-        </p:nvSpPr>
-        <p:spPr>
-          <a:xfrm>
-            <a:off x="4672584" y="1463040"/>
-            <a:ext cx="475488" cy="402336"/>
-          </a:xfrm>
-          <a:prstGeom prst="rect">
-            <a:avLst>
-              <a:gd name="adj" fmla="val 11364"/>
-            </a:avLst>
-          </a:prstGeom>
-          <a:solidFill>
-            <a:srgbClr val="EDE8F9"/>
-          </a:solidFill>
-          <a:ln w="10160">
-            <a:solidFill>
-              <a:srgbClr val="5D35B1"/>
-            </a:solidFill>
-            <a:prstDash val="solid"/>
-          </a:ln>
-        </p:spPr>
-      </p:sp>
-      <p:sp>
-        <p:nvSpPr>
-          <p:cNvPr id="73" name="Text 63"/>
-          <p:cNvSpPr/>
-          <p:nvPr/>
-        </p:nvSpPr>
-        <p:spPr>
-          <a:xfrm>
-            <a:off x="4672584" y="1700784"/>
-            <a:ext cx="475488" cy="182880"/>
-          </a:xfrm>
-          <a:prstGeom prst="rect">
-            <a:avLst/>
-          </a:prstGeom>
-          <a:noFill/>
-          <a:ln/>
-        </p:spPr>
-        <p:txBody>
-          <a:bodyPr wrap="square" rtlCol="0" anchor="ctr"/>
-          <a:lstStyle/>
-          <a:p>
-            <a:pPr algn="ctr" indent="0" marL="0">
-              <a:buNone/>
-            </a:pPr>
-            <a:r>
-              <a:rPr lang="en-US" sz="650" b="1" dirty="0">
-                <a:solidFill>
-                  <a:srgbClr val="5D35B1"/>
-                </a:solidFill>
-              </a:rPr>
-              <a:t>ODS</a:t>
-            </a:r>
-            <a:endParaRPr lang="en-US" sz="650" dirty="0"/>
-          </a:p>
-        </p:txBody>
-      </p:sp>
-      <p:sp>
-        <p:nvSpPr>
-          <p:cNvPr id="74" name="Shape 64"/>
-          <p:cNvSpPr/>
-          <p:nvPr/>
-        </p:nvSpPr>
-        <p:spPr>
-          <a:xfrm>
-            <a:off x="5440680" y="1463040"/>
-            <a:ext cx="475488" cy="402336"/>
-          </a:xfrm>
-          <a:prstGeom prst="rect">
-            <a:avLst>
-              <a:gd name="adj" fmla="val 11364"/>
-            </a:avLst>
-          </a:prstGeom>
-          <a:solidFill>
-            <a:srgbClr val="EDE8F9"/>
-          </a:solidFill>
-          <a:ln w="10160">
-            <a:solidFill>
-              <a:srgbClr val="5D35B1"/>
-            </a:solidFill>
-            <a:prstDash val="solid"/>
-          </a:ln>
-        </p:spPr>
-      </p:sp>
-      <p:sp>
-        <p:nvSpPr>
-          <p:cNvPr id="75" name="Text 65"/>
-          <p:cNvSpPr/>
-          <p:nvPr/>
-        </p:nvSpPr>
-        <p:spPr>
-          <a:xfrm>
-            <a:off x="5440680" y="1700784"/>
-            <a:ext cx="475488" cy="182880"/>
-          </a:xfrm>
-          <a:prstGeom prst="rect">
-            <a:avLst/>
-          </a:prstGeom>
-          <a:noFill/>
-          <a:ln/>
-        </p:spPr>
-        <p:txBody>
-          <a:bodyPr wrap="square" rtlCol="0" anchor="ctr"/>
-          <a:lstStyle/>
-          <a:p>
-            <a:pPr algn="ctr" indent="0" marL="0">
-              <a:buNone/>
-            </a:pPr>
-            <a:r>
-              <a:rPr lang="en-US" sz="650" b="1" dirty="0">
-                <a:solidFill>
-                  <a:srgbClr val="5D35B1"/>
-                </a:solidFill>
-              </a:rPr>
-              <a:t>Facts</a:t>
-            </a:r>
-            <a:endParaRPr lang="en-US" sz="650" dirty="0"/>
-          </a:p>
-        </p:txBody>
-      </p:sp>
-      <p:sp>
-        <p:nvSpPr>
-          <p:cNvPr id="76" name="Shape 66"/>
-          <p:cNvSpPr/>
-          <p:nvPr/>
-        </p:nvSpPr>
-        <p:spPr>
-          <a:xfrm>
-            <a:off x="4434840" y="1664208"/>
-            <a:ext cx="237744" cy="0"/>
-          </a:xfrm>
-          <a:prstGeom prst="line">
-            <a:avLst/>
-          </a:prstGeom>
-          <a:noFill/>
-          <a:ln w="12700">
-            <a:solidFill>
-              <a:srgbClr val="888888"/>
-            </a:solidFill>
-            <a:prstDash val="dash"/>
-            <a:tailEnd type="arrow"/>
-          </a:ln>
-        </p:spPr>
-      </p:sp>
-      <p:sp>
-        <p:nvSpPr>
-          <p:cNvPr id="77" name="Shape 67"/>
-          <p:cNvSpPr/>
-          <p:nvPr/>
-        </p:nvSpPr>
-        <p:spPr>
-          <a:xfrm>
-            <a:off x="5184648" y="1627632"/>
-            <a:ext cx="256032" cy="91440"/>
-          </a:xfrm>
-          <a:prstGeom prst="line">
-            <a:avLst/>
-          </a:prstGeom>
-          <a:noFill/>
-          <a:ln w="12700">
-            <a:solidFill>
-              <a:srgbClr val="888888"/>
-            </a:solidFill>
-            <a:prstDash val="dash"/>
-            <a:tailEnd type="arrow"/>
-          </a:ln>
-        </p:spPr>
-      </p:sp>
-      <p:sp>
-        <p:nvSpPr>
-          <p:cNvPr id="78" name="Shape 68"/>
-          <p:cNvSpPr/>
-          <p:nvPr/>
-        </p:nvSpPr>
-        <p:spPr>
-          <a:xfrm>
-            <a:off x="4928616" y="2286000"/>
-            <a:ext cx="0" cy="201168"/>
-          </a:xfrm>
-          <a:prstGeom prst="line">
-            <a:avLst/>
-          </a:prstGeom>
-          <a:noFill/>
-          <a:ln w="15240">
-            <a:solidFill>
-              <a:srgbClr val="1A1A1A"/>
-            </a:solidFill>
-            <a:prstDash val="solid"/>
-            <a:tailEnd type="arrow"/>
+            <a:prstDash val="solid"/>
           </a:ln>
         </p:spPr>
       </p:sp>
       <p:pic>
         <p:nvPicPr>
-          <p:cNvPr id="79" name="Image 8" descr="preencoded.png">    </p:cNvPr>
+          <p:cNvPr id="83" name="Image 8" descr="preencoded.png">    </p:cNvPr>
           <p:cNvPicPr>
             <a:picLocks noChangeAspect="1"/>
           </p:cNvPicPr>
@@ -3352,8 +3465,8 @@
         </p:blipFill>
         <p:spPr>
           <a:xfrm>
-            <a:off x="5477256" y="1298448"/>
-            <a:ext cx="457200" cy="164592"/>
+            <a:off x="4032504" y="2807208"/>
+            <a:ext cx="182880" cy="182880"/>
           </a:xfrm>
           <a:prstGeom prst="rect">
             <a:avLst/>
@@ -3362,13 +3475,85 @@
       </p:pic>
       <p:sp>
         <p:nvSpPr>
-          <p:cNvPr id="80" name="Shape 69"/>
-          <p:cNvSpPr/>
-          <p:nvPr/>
-        </p:nvSpPr>
-        <p:spPr>
-          <a:xfrm>
-            <a:off x="3831336" y="2487168"/>
+          <p:cNvPr id="84" name="Text 73"/>
+          <p:cNvSpPr/>
+          <p:nvPr/>
+        </p:nvSpPr>
+        <p:spPr>
+          <a:xfrm>
+            <a:off x="4251960" y="2779776"/>
+            <a:ext cx="1554480" cy="274320"/>
+          </a:xfrm>
+          <a:prstGeom prst="rect">
+            <a:avLst/>
+          </a:prstGeom>
+          <a:noFill/>
+          <a:ln/>
+        </p:spPr>
+        <p:txBody>
+          <a:bodyPr wrap="square" rtlCol="0" anchor="ctr"/>
+          <a:lstStyle/>
+          <a:p>
+            <a:pPr indent="0" marL="0">
+              <a:buNone/>
+            </a:pPr>
+            <a:r>
+              <a:rPr lang="en-US" sz="750" b="1" dirty="0">
+                <a:solidFill>
+                  <a:srgbClr val="FFFFFF"/>
+                </a:solidFill>
+              </a:rPr>
+              <a:t>Databricks SQL</a:t>
+            </a:r>
+            <a:endParaRPr lang="en-US" sz="750" dirty="0"/>
+          </a:p>
+        </p:txBody>
+      </p:sp>
+      <p:sp>
+        <p:nvSpPr>
+          <p:cNvPr id="85" name="Text 74"/>
+          <p:cNvSpPr/>
+          <p:nvPr/>
+        </p:nvSpPr>
+        <p:spPr>
+          <a:xfrm>
+            <a:off x="3922776" y="3081528"/>
+            <a:ext cx="2011680" cy="128016"/>
+          </a:xfrm>
+          <a:prstGeom prst="rect">
+            <a:avLst/>
+          </a:prstGeom>
+          <a:noFill/>
+          <a:ln/>
+        </p:spPr>
+        <p:txBody>
+          <a:bodyPr wrap="square" rtlCol="0" anchor="ctr"/>
+          <a:lstStyle/>
+          <a:p>
+            <a:pPr algn="ctr" indent="0" marL="0">
+              <a:buNone/>
+            </a:pPr>
+            <a:r>
+              <a:rPr lang="en-US" sz="550" i="1" dirty="0">
+                <a:solidFill>
+                  <a:srgbClr val="888888"/>
+                </a:solidFill>
+              </a:rPr>
+              <a:t>Best-in-class DW performance</a:t>
+            </a:r>
+            <a:endParaRPr lang="en-US" sz="550" dirty="0"/>
+          </a:p>
+        </p:txBody>
+      </p:sp>
+      <p:sp>
+        <p:nvSpPr>
+          <p:cNvPr id="86" name="Shape 75"/>
+          <p:cNvSpPr/>
+          <p:nvPr/>
+        </p:nvSpPr>
+        <p:spPr>
+          <a:xfrm>
+            <a:off x="3831336" y="3364992"/>
             <a:ext cx="2194560" cy="237744"/>
           </a:xfrm>
           <a:prstGeom prst="rect">
@@ -3387,13 +3572,13 @@
       </p:sp>
       <p:sp>
         <p:nvSpPr>
-          <p:cNvPr id="81" name="Text 70"/>
-          <p:cNvSpPr/>
-          <p:nvPr/>
-        </p:nvSpPr>
-        <p:spPr>
-          <a:xfrm>
-            <a:off x="3831336" y="2487168"/>
+          <p:cNvPr id="87" name="Text 76"/>
+          <p:cNvSpPr/>
+          <p:nvPr/>
+        </p:nvSpPr>
+        <p:spPr>
+          <a:xfrm>
+            <a:off x="3831336" y="3364992"/>
             <a:ext cx="2194560" cy="237744"/>
           </a:xfrm>
           <a:prstGeom prst="rect">
@@ -3415,7 +3600,7 @@
                   <a:srgbClr val="FFFFFF"/>
                 </a:solidFill>
               </a:rPr>
-              <a:t>Data Warehouse</a:t>
+              <a:t>AI Agent Systems</a:t>
             </a:r>
             <a:endParaRPr lang="en-US" sz="800" dirty="0"/>
           </a:p>
@@ -3423,14 +3608,14 @@
       </p:sp>
       <p:sp>
         <p:nvSpPr>
-          <p:cNvPr id="82" name="Shape 71"/>
-          <p:cNvSpPr/>
-          <p:nvPr/>
-        </p:nvSpPr>
-        <p:spPr>
-          <a:xfrm>
-            <a:off x="3831336" y="2724912"/>
-            <a:ext cx="2194560" cy="512064"/>
+          <p:cNvPr id="88" name="Shape 77"/>
+          <p:cNvSpPr/>
+          <p:nvPr/>
+        </p:nvSpPr>
+        <p:spPr>
+          <a:xfrm>
+            <a:off x="3831336" y="3602736"/>
+            <a:ext cx="2194560" cy="969264"/>
           </a:xfrm>
           <a:prstGeom prst="rect">
             <a:avLst/>
@@ -3442,40 +3627,13 @@
             <a:solidFill>
               <a:srgbClr val="CCCCCC"/>
             </a:solidFill>
-            <a:prstDash val="solid"/>
-          </a:ln>
-        </p:spPr>
-      </p:sp>
-      <p:sp>
-        <p:nvSpPr>
-          <p:cNvPr id="83" name="Shape 72"/>
-          <p:cNvSpPr/>
-          <p:nvPr/>
-        </p:nvSpPr>
-        <p:spPr>
-          <a:xfrm>
-            <a:off x="3959352" y="2779776"/>
-            <a:ext cx="1938528" cy="274320"/>
-          </a:xfrm>
-          <a:prstGeom prst="rect">
-            <a:avLst>
-              <a:gd name="adj" fmla="val 20000"/>
-            </a:avLst>
-          </a:prstGeom>
-          <a:solidFill>
-            <a:srgbClr val="5D35B1"/>
-          </a:solidFill>
-          <a:ln w="12700">
-            <a:solidFill>
-              <a:srgbClr val="5D35B1"/>
-            </a:solidFill>
-            <a:prstDash val="solid"/>
+            <a:prstDash val="dash"/>
           </a:ln>
         </p:spPr>
       </p:sp>
       <p:pic>
         <p:nvPicPr>
-          <p:cNvPr id="84" name="Image 9" descr="preencoded.png">    </p:cNvPr>
+          <p:cNvPr id="89" name="Image 9" descr="preencoded.png">    </p:cNvPr>
           <p:cNvPicPr>
             <a:picLocks noChangeAspect="1"/>
           </p:cNvPicPr>
@@ -3489,8 +3647,8 @@
         </p:blipFill>
         <p:spPr>
           <a:xfrm>
-            <a:off x="4032504" y="2807208"/>
-            <a:ext cx="182880" cy="182880"/>
+            <a:off x="5550408" y="3639312"/>
+            <a:ext cx="402336" cy="329184"/>
           </a:xfrm>
           <a:prstGeom prst="rect">
             <a:avLst/>
@@ -3499,71 +3657,62 @@
       </p:pic>
       <p:sp>
         <p:nvSpPr>
-          <p:cNvPr id="85" name="Text 73"/>
-          <p:cNvSpPr/>
-          <p:nvPr/>
-        </p:nvSpPr>
-        <p:spPr>
-          <a:xfrm>
-            <a:off x="4251960" y="2779776"/>
-            <a:ext cx="1554480" cy="274320"/>
-          </a:xfrm>
-          <a:prstGeom prst="rect">
-            <a:avLst/>
-          </a:prstGeom>
-          <a:noFill/>
-          <a:ln/>
-        </p:spPr>
-        <p:txBody>
-          <a:bodyPr wrap="square" rtlCol="0" anchor="ctr"/>
-          <a:lstStyle/>
-          <a:p>
-            <a:pPr indent="0" marL="0">
-              <a:buNone/>
-            </a:pPr>
-            <a:r>
-              <a:rPr lang="en-US" sz="750" b="1" dirty="0">
+          <p:cNvPr id="90" name="Shape 78"/>
+          <p:cNvSpPr/>
+          <p:nvPr/>
+        </p:nvSpPr>
+        <p:spPr>
+          <a:xfrm>
+            <a:off x="3904488" y="3675888"/>
+            <a:ext cx="786384" cy="219456"/>
+          </a:xfrm>
+          <a:prstGeom prst="rect">
+            <a:avLst>
+              <a:gd name="adj" fmla="val 33333"/>
+            </a:avLst>
+          </a:prstGeom>
+          <a:solidFill>
+            <a:srgbClr val="5D35B1"/>
+          </a:solidFill>
+          <a:ln w="12700">
+            <a:solidFill>
+              <a:srgbClr val="5D35B1"/>
+            </a:solidFill>
+            <a:prstDash val="solid"/>
+          </a:ln>
+        </p:spPr>
+      </p:sp>
+      <p:sp>
+        <p:nvSpPr>
+          <p:cNvPr id="91" name="Text 79"/>
+          <p:cNvSpPr/>
+          <p:nvPr/>
+        </p:nvSpPr>
+        <p:spPr>
+          <a:xfrm>
+            <a:off x="3904488" y="3675888"/>
+            <a:ext cx="786384" cy="219456"/>
+          </a:xfrm>
+          <a:prstGeom prst="rect">
+            <a:avLst/>
+          </a:prstGeom>
+          <a:noFill/>
+          <a:ln/>
+        </p:spPr>
+        <p:txBody>
+          <a:bodyPr wrap="square" lIns="12700" tIns="12700" rIns="12700" bIns="12700" rtlCol="0" anchor="ctr"/>
+          <a:lstStyle/>
+          <a:p>
+            <a:pPr algn="ctr" indent="0" marL="0">
+              <a:buNone/>
+            </a:pPr>
+            <a:r>
+              <a:rPr lang="en-US" sz="550" b="1" dirty="0">
                 <a:solidFill>
                   <a:srgbClr val="FFFFFF"/>
                 </a:solidFill>
               </a:rPr>
-              <a:t>Databricks SQL</a:t>
-            </a:r>
-            <a:endParaRPr lang="en-US" sz="750" dirty="0"/>
-          </a:p>
-        </p:txBody>
-      </p:sp>
-      <p:sp>
-        <p:nvSpPr>
-          <p:cNvPr id="86" name="Text 74"/>
-          <p:cNvSpPr/>
-          <p:nvPr/>
-        </p:nvSpPr>
-        <p:spPr>
-          <a:xfrm>
-            <a:off x="3922776" y="3081528"/>
-            <a:ext cx="2011680" cy="128016"/>
-          </a:xfrm>
-          <a:prstGeom prst="rect">
-            <a:avLst/>
-          </a:prstGeom>
-          <a:noFill/>
-          <a:ln/>
-        </p:spPr>
-        <p:txBody>
-          <a:bodyPr wrap="square" rtlCol="0" anchor="ctr"/>
-          <a:lstStyle/>
-          <a:p>
-            <a:pPr algn="ctr" indent="0" marL="0">
-              <a:buNone/>
-            </a:pPr>
-            <a:r>
-              <a:rPr lang="en-US" sz="550" i="1" dirty="0">
-                <a:solidFill>
-                  <a:srgbClr val="888888"/>
-                </a:solidFill>
-              </a:rPr>
-              <a:t>Best-in-class DW performance</a:t>
+              <a:t>Prepare data</a:t>
             </a:r>
             <a:endParaRPr lang="en-US" sz="550" dirty="0"/>
           </a:p>
@@ -3571,14 +3720,266 @@
       </p:sp>
       <p:sp>
         <p:nvSpPr>
-          <p:cNvPr id="87" name="Shape 75"/>
-          <p:cNvSpPr/>
-          <p:nvPr/>
-        </p:nvSpPr>
-        <p:spPr>
-          <a:xfrm>
-            <a:off x="3831336" y="3364992"/>
-            <a:ext cx="2194560" cy="237744"/>
+          <p:cNvPr id="92" name="Shape 80"/>
+          <p:cNvSpPr/>
+          <p:nvPr/>
+        </p:nvSpPr>
+        <p:spPr>
+          <a:xfrm>
+            <a:off x="5148072" y="3675888"/>
+            <a:ext cx="786384" cy="219456"/>
+          </a:xfrm>
+          <a:prstGeom prst="rect">
+            <a:avLst>
+              <a:gd name="adj" fmla="val 33333"/>
+            </a:avLst>
+          </a:prstGeom>
+          <a:solidFill>
+            <a:srgbClr val="5D35B1"/>
+          </a:solidFill>
+          <a:ln w="12700">
+            <a:solidFill>
+              <a:srgbClr val="5D35B1"/>
+            </a:solidFill>
+            <a:prstDash val="solid"/>
+          </a:ln>
+        </p:spPr>
+      </p:sp>
+      <p:sp>
+        <p:nvSpPr>
+          <p:cNvPr id="93" name="Text 81"/>
+          <p:cNvSpPr/>
+          <p:nvPr/>
+        </p:nvSpPr>
+        <p:spPr>
+          <a:xfrm>
+            <a:off x="5148072" y="3675888"/>
+            <a:ext cx="786384" cy="219456"/>
+          </a:xfrm>
+          <a:prstGeom prst="rect">
+            <a:avLst/>
+          </a:prstGeom>
+          <a:noFill/>
+          <a:ln/>
+        </p:spPr>
+        <p:txBody>
+          <a:bodyPr wrap="square" lIns="12700" tIns="12700" rIns="12700" bIns="12700" rtlCol="0" anchor="ctr"/>
+          <a:lstStyle/>
+          <a:p>
+            <a:pPr algn="ctr" indent="0" marL="0">
+              <a:buNone/>
+            </a:pPr>
+            <a:r>
+              <a:rPr lang="en-US" sz="550" b="1" dirty="0">
+                <a:solidFill>
+                  <a:srgbClr val="FFFFFF"/>
+                </a:solidFill>
+              </a:rPr>
+              <a:t>Build agents</a:t>
+            </a:r>
+            <a:endParaRPr lang="en-US" sz="550" dirty="0"/>
+          </a:p>
+        </p:txBody>
+      </p:sp>
+      <p:sp>
+        <p:nvSpPr>
+          <p:cNvPr id="94" name="Shape 82"/>
+          <p:cNvSpPr/>
+          <p:nvPr/>
+        </p:nvSpPr>
+        <p:spPr>
+          <a:xfrm>
+            <a:off x="3904488" y="3950208"/>
+            <a:ext cx="786384" cy="219456"/>
+          </a:xfrm>
+          <a:prstGeom prst="rect">
+            <a:avLst>
+              <a:gd name="adj" fmla="val 33333"/>
+            </a:avLst>
+          </a:prstGeom>
+          <a:solidFill>
+            <a:srgbClr val="5D35B1"/>
+          </a:solidFill>
+          <a:ln w="12700">
+            <a:solidFill>
+              <a:srgbClr val="5D35B1"/>
+            </a:solidFill>
+            <a:prstDash val="solid"/>
+          </a:ln>
+        </p:spPr>
+      </p:sp>
+      <p:sp>
+        <p:nvSpPr>
+          <p:cNvPr id="95" name="Text 83"/>
+          <p:cNvSpPr/>
+          <p:nvPr/>
+        </p:nvSpPr>
+        <p:spPr>
+          <a:xfrm>
+            <a:off x="3904488" y="3950208"/>
+            <a:ext cx="786384" cy="219456"/>
+          </a:xfrm>
+          <a:prstGeom prst="rect">
+            <a:avLst/>
+          </a:prstGeom>
+          <a:noFill/>
+          <a:ln/>
+        </p:spPr>
+        <p:txBody>
+          <a:bodyPr wrap="square" lIns="12700" tIns="12700" rIns="12700" bIns="12700" rtlCol="0" anchor="ctr"/>
+          <a:lstStyle/>
+          <a:p>
+            <a:pPr algn="ctr" indent="0" marL="0">
+              <a:buNone/>
+            </a:pPr>
+            <a:r>
+              <a:rPr lang="en-US" sz="550" b="1" dirty="0">
+                <a:solidFill>
+                  <a:srgbClr val="FFFFFF"/>
+                </a:solidFill>
+              </a:rPr>
+              <a:t>Evaluate agents</a:t>
+            </a:r>
+            <a:endParaRPr lang="en-US" sz="550" dirty="0"/>
+          </a:p>
+        </p:txBody>
+      </p:sp>
+      <p:sp>
+        <p:nvSpPr>
+          <p:cNvPr id="96" name="Shape 84"/>
+          <p:cNvSpPr/>
+          <p:nvPr/>
+        </p:nvSpPr>
+        <p:spPr>
+          <a:xfrm>
+            <a:off x="5148072" y="3950208"/>
+            <a:ext cx="786384" cy="219456"/>
+          </a:xfrm>
+          <a:prstGeom prst="rect">
+            <a:avLst>
+              <a:gd name="adj" fmla="val 33333"/>
+            </a:avLst>
+          </a:prstGeom>
+          <a:solidFill>
+            <a:srgbClr val="5D35B1"/>
+          </a:solidFill>
+          <a:ln w="12700">
+            <a:solidFill>
+              <a:srgbClr val="5D35B1"/>
+            </a:solidFill>
+            <a:prstDash val="solid"/>
+          </a:ln>
+        </p:spPr>
+      </p:sp>
+      <p:sp>
+        <p:nvSpPr>
+          <p:cNvPr id="97" name="Text 85"/>
+          <p:cNvSpPr/>
+          <p:nvPr/>
+        </p:nvSpPr>
+        <p:spPr>
+          <a:xfrm>
+            <a:off x="5148072" y="3950208"/>
+            <a:ext cx="786384" cy="219456"/>
+          </a:xfrm>
+          <a:prstGeom prst="rect">
+            <a:avLst/>
+          </a:prstGeom>
+          <a:noFill/>
+          <a:ln/>
+        </p:spPr>
+        <p:txBody>
+          <a:bodyPr wrap="square" lIns="12700" tIns="12700" rIns="12700" bIns="12700" rtlCol="0" anchor="ctr"/>
+          <a:lstStyle/>
+          <a:p>
+            <a:pPr algn="ctr" indent="0" marL="0">
+              <a:buNone/>
+            </a:pPr>
+            <a:r>
+              <a:rPr lang="en-US" sz="550" b="1" dirty="0">
+                <a:solidFill>
+                  <a:srgbClr val="FFFFFF"/>
+                </a:solidFill>
+              </a:rPr>
+              <a:t>Deploy agents</a:t>
+            </a:r>
+            <a:endParaRPr lang="en-US" sz="550" dirty="0"/>
+          </a:p>
+        </p:txBody>
+      </p:sp>
+      <p:sp>
+        <p:nvSpPr>
+          <p:cNvPr id="98" name="Shape 86"/>
+          <p:cNvSpPr/>
+          <p:nvPr/>
+        </p:nvSpPr>
+        <p:spPr>
+          <a:xfrm>
+            <a:off x="4526280" y="4224528"/>
+            <a:ext cx="786384" cy="219456"/>
+          </a:xfrm>
+          <a:prstGeom prst="rect">
+            <a:avLst>
+              <a:gd name="adj" fmla="val 33333"/>
+            </a:avLst>
+          </a:prstGeom>
+          <a:solidFill>
+            <a:srgbClr val="5D35B1"/>
+          </a:solidFill>
+          <a:ln w="12700">
+            <a:solidFill>
+              <a:srgbClr val="5D35B1"/>
+            </a:solidFill>
+            <a:prstDash val="solid"/>
+          </a:ln>
+        </p:spPr>
+      </p:sp>
+      <p:sp>
+        <p:nvSpPr>
+          <p:cNvPr id="99" name="Text 87"/>
+          <p:cNvSpPr/>
+          <p:nvPr/>
+        </p:nvSpPr>
+        <p:spPr>
+          <a:xfrm>
+            <a:off x="4526280" y="4224528"/>
+            <a:ext cx="786384" cy="219456"/>
+          </a:xfrm>
+          <a:prstGeom prst="rect">
+            <a:avLst/>
+          </a:prstGeom>
+          <a:noFill/>
+          <a:ln/>
+        </p:spPr>
+        <p:txBody>
+          <a:bodyPr wrap="square" lIns="12700" tIns="12700" rIns="12700" bIns="12700" rtlCol="0" anchor="ctr"/>
+          <a:lstStyle/>
+          <a:p>
+            <a:pPr algn="ctr" indent="0" marL="0">
+              <a:buNone/>
+            </a:pPr>
+            <a:r>
+              <a:rPr lang="en-US" sz="550" b="1" dirty="0">
+                <a:solidFill>
+                  <a:srgbClr val="FFFFFF"/>
+                </a:solidFill>
+              </a:rPr>
+              <a:t>Govern agents</a:t>
+            </a:r>
+            <a:endParaRPr lang="en-US" sz="550" dirty="0"/>
+          </a:p>
+        </p:txBody>
+      </p:sp>
+      <p:sp>
+        <p:nvSpPr>
+          <p:cNvPr id="100" name="Shape 88"/>
+          <p:cNvSpPr/>
+          <p:nvPr/>
+        </p:nvSpPr>
+        <p:spPr>
+          <a:xfrm>
+            <a:off x="6153912" y="1042416"/>
+            <a:ext cx="1828800" cy="237744"/>
           </a:xfrm>
           <a:prstGeom prst="rect">
             <a:avLst/>
@@ -3596,50 +3997,50 @@
       </p:sp>
       <p:sp>
         <p:nvSpPr>
-          <p:cNvPr id="88" name="Text 76"/>
-          <p:cNvSpPr/>
-          <p:nvPr/>
-        </p:nvSpPr>
-        <p:spPr>
-          <a:xfrm>
-            <a:off x="3831336" y="3364992"/>
-            <a:ext cx="2194560" cy="237744"/>
-          </a:xfrm>
-          <a:prstGeom prst="rect">
-            <a:avLst/>
-          </a:prstGeom>
-          <a:noFill/>
-          <a:ln/>
-        </p:spPr>
-        <p:txBody>
-          <a:bodyPr wrap="square" rtlCol="0" anchor="ctr"/>
-          <a:lstStyle/>
-          <a:p>
-            <a:pPr algn="ctr" indent="0" marL="0">
-              <a:buNone/>
-            </a:pPr>
-            <a:r>
-              <a:rPr lang="en-US" sz="800" b="1" dirty="0">
+          <p:cNvPr id="101" name="Text 89"/>
+          <p:cNvSpPr/>
+          <p:nvPr/>
+        </p:nvSpPr>
+        <p:spPr>
+          <a:xfrm>
+            <a:off x="6153912" y="1042416"/>
+            <a:ext cx="1828800" cy="237744"/>
+          </a:xfrm>
+          <a:prstGeom prst="rect">
+            <a:avLst/>
+          </a:prstGeom>
+          <a:noFill/>
+          <a:ln/>
+        </p:spPr>
+        <p:txBody>
+          <a:bodyPr wrap="square" rtlCol="0" anchor="ctr"/>
+          <a:lstStyle/>
+          <a:p>
+            <a:pPr algn="ctr" indent="0" marL="0">
+              <a:buNone/>
+            </a:pPr>
+            <a:r>
+              <a:rPr lang="en-US" sz="700" b="1" dirty="0">
                 <a:solidFill>
                   <a:srgbClr val="FFFFFF"/>
                 </a:solidFill>
               </a:rPr>
-              <a:t>AI Agent Systems</a:t>
-            </a:r>
-            <a:endParaRPr lang="en-US" sz="800" dirty="0"/>
-          </a:p>
-        </p:txBody>
-      </p:sp>
-      <p:sp>
-        <p:nvSpPr>
-          <p:cNvPr id="89" name="Shape 77"/>
-          <p:cNvSpPr/>
-          <p:nvPr/>
-        </p:nvSpPr>
-        <p:spPr>
-          <a:xfrm>
-            <a:off x="3831336" y="3602736"/>
-            <a:ext cx="2194560" cy="969264"/>
+              <a:t>Streaming Analytics</a:t>
+            </a:r>
+            <a:endParaRPr lang="en-US" sz="700" dirty="0"/>
+          </a:p>
+        </p:txBody>
+      </p:sp>
+      <p:sp>
+        <p:nvSpPr>
+          <p:cNvPr id="102" name="Shape 90"/>
+          <p:cNvSpPr/>
+          <p:nvPr/>
+        </p:nvSpPr>
+        <p:spPr>
+          <a:xfrm>
+            <a:off x="6153912" y="1280160"/>
+            <a:ext cx="1828800" cy="420624"/>
           </a:xfrm>
           <a:prstGeom prst="rect">
             <a:avLst/>
@@ -3651,13 +4052,988 @@
             <a:solidFill>
               <a:srgbClr val="CCCCCC"/>
             </a:solidFill>
-            <a:prstDash val="dash"/>
-          </a:ln>
-        </p:spPr>
+            <a:prstDash val="solid"/>
+          </a:ln>
+        </p:spPr>
+      </p:sp>
+      <p:sp>
+        <p:nvSpPr>
+          <p:cNvPr id="103" name="Shape 91"/>
+          <p:cNvSpPr/>
+          <p:nvPr/>
+        </p:nvSpPr>
+        <p:spPr>
+          <a:xfrm>
+            <a:off x="6245352" y="1335024"/>
+            <a:ext cx="384048" cy="329184"/>
+          </a:xfrm>
+          <a:prstGeom prst="rect">
+            <a:avLst>
+              <a:gd name="adj" fmla="val 11111"/>
+            </a:avLst>
+          </a:prstGeom>
+          <a:solidFill>
+            <a:srgbClr val="EDE8F9"/>
+          </a:solidFill>
+          <a:ln w="6350">
+            <a:solidFill>
+              <a:srgbClr val="5D35B1"/>
+            </a:solidFill>
+            <a:prstDash val="solid"/>
+          </a:ln>
+        </p:spPr>
+      </p:sp>
+      <p:sp>
+        <p:nvSpPr>
+          <p:cNvPr id="104" name="Text 92"/>
+          <p:cNvSpPr/>
+          <p:nvPr/>
+        </p:nvSpPr>
+        <p:spPr>
+          <a:xfrm>
+            <a:off x="6245352" y="1335024"/>
+            <a:ext cx="384048" cy="329184"/>
+          </a:xfrm>
+          <a:prstGeom prst="rect">
+            <a:avLst/>
+          </a:prstGeom>
+          <a:noFill/>
+          <a:ln/>
+        </p:spPr>
+        <p:txBody>
+          <a:bodyPr wrap="square" rtlCol="0" anchor="ctr"/>
+          <a:lstStyle/>
+          <a:p>
+            <a:pPr algn="ctr" indent="0" marL="0">
+              <a:buNone/>
+            </a:pPr>
+            <a:r>
+              <a:rPr lang="en-US" sz="1300" dirty="0">
+                <a:solidFill>
+                  <a:srgbClr val="000000"/>
+                </a:solidFill>
+              </a:rPr>
+              <a:t>📊</a:t>
+            </a:r>
+            <a:endParaRPr lang="en-US" sz="1300" dirty="0"/>
+          </a:p>
+        </p:txBody>
+      </p:sp>
+      <p:sp>
+        <p:nvSpPr>
+          <p:cNvPr id="105" name="Shape 93"/>
+          <p:cNvSpPr/>
+          <p:nvPr/>
+        </p:nvSpPr>
+        <p:spPr>
+          <a:xfrm>
+            <a:off x="6153912" y="1755648"/>
+            <a:ext cx="1828800" cy="237744"/>
+          </a:xfrm>
+          <a:prstGeom prst="rect">
+            <a:avLst/>
+          </a:prstGeom>
+          <a:solidFill>
+            <a:srgbClr val="2D1B69"/>
+          </a:solidFill>
+          <a:ln w="12700">
+            <a:solidFill>
+              <a:srgbClr val="2D1B69"/>
+            </a:solidFill>
+            <a:prstDash val="solid"/>
+          </a:ln>
+        </p:spPr>
+      </p:sp>
+      <p:sp>
+        <p:nvSpPr>
+          <p:cNvPr id="106" name="Text 94"/>
+          <p:cNvSpPr/>
+          <p:nvPr/>
+        </p:nvSpPr>
+        <p:spPr>
+          <a:xfrm>
+            <a:off x="6153912" y="1755648"/>
+            <a:ext cx="1828800" cy="237744"/>
+          </a:xfrm>
+          <a:prstGeom prst="rect">
+            <a:avLst/>
+          </a:prstGeom>
+          <a:noFill/>
+          <a:ln/>
+        </p:spPr>
+        <p:txBody>
+          <a:bodyPr wrap="square" rtlCol="0" anchor="ctr"/>
+          <a:lstStyle/>
+          <a:p>
+            <a:pPr algn="ctr" indent="0" marL="0">
+              <a:buNone/>
+            </a:pPr>
+            <a:r>
+              <a:rPr lang="en-US" sz="700" b="1" dirty="0">
+                <a:solidFill>
+                  <a:srgbClr val="FFFFFF"/>
+                </a:solidFill>
+              </a:rPr>
+              <a:t>BI &amp; Reporting</a:t>
+            </a:r>
+            <a:endParaRPr lang="en-US" sz="700" dirty="0"/>
+          </a:p>
+        </p:txBody>
+      </p:sp>
+      <p:sp>
+        <p:nvSpPr>
+          <p:cNvPr id="107" name="Shape 95"/>
+          <p:cNvSpPr/>
+          <p:nvPr/>
+        </p:nvSpPr>
+        <p:spPr>
+          <a:xfrm>
+            <a:off x="6153912" y="1993392"/>
+            <a:ext cx="1828800" cy="420624"/>
+          </a:xfrm>
+          <a:prstGeom prst="rect">
+            <a:avLst/>
+          </a:prstGeom>
+          <a:solidFill>
+            <a:srgbClr val="F2F2F2"/>
+          </a:solidFill>
+          <a:ln w="9525">
+            <a:solidFill>
+              <a:srgbClr val="CCCCCC"/>
+            </a:solidFill>
+            <a:prstDash val="solid"/>
+          </a:ln>
+        </p:spPr>
+      </p:sp>
+      <p:sp>
+        <p:nvSpPr>
+          <p:cNvPr id="108" name="Shape 96"/>
+          <p:cNvSpPr/>
+          <p:nvPr/>
+        </p:nvSpPr>
+        <p:spPr>
+          <a:xfrm>
+            <a:off x="6245352" y="2048256"/>
+            <a:ext cx="384048" cy="329184"/>
+          </a:xfrm>
+          <a:prstGeom prst="rect">
+            <a:avLst>
+              <a:gd name="adj" fmla="val 11111"/>
+            </a:avLst>
+          </a:prstGeom>
+          <a:solidFill>
+            <a:srgbClr val="EDE8F9"/>
+          </a:solidFill>
+          <a:ln w="6350">
+            <a:solidFill>
+              <a:srgbClr val="5D35B1"/>
+            </a:solidFill>
+            <a:prstDash val="solid"/>
+          </a:ln>
+        </p:spPr>
+      </p:sp>
+      <p:sp>
+        <p:nvSpPr>
+          <p:cNvPr id="109" name="Text 97"/>
+          <p:cNvSpPr/>
+          <p:nvPr/>
+        </p:nvSpPr>
+        <p:spPr>
+          <a:xfrm>
+            <a:off x="6245352" y="2048256"/>
+            <a:ext cx="384048" cy="329184"/>
+          </a:xfrm>
+          <a:prstGeom prst="rect">
+            <a:avLst/>
+          </a:prstGeom>
+          <a:noFill/>
+          <a:ln/>
+        </p:spPr>
+        <p:txBody>
+          <a:bodyPr wrap="square" rtlCol="0" anchor="ctr"/>
+          <a:lstStyle/>
+          <a:p>
+            <a:pPr algn="ctr" indent="0" marL="0">
+              <a:buNone/>
+            </a:pPr>
+            <a:r>
+              <a:rPr lang="en-US" sz="1300" dirty="0">
+                <a:solidFill>
+                  <a:srgbClr val="000000"/>
+                </a:solidFill>
+              </a:rPr>
+              <a:t>📈</a:t>
+            </a:r>
+            <a:endParaRPr lang="en-US" sz="1300" dirty="0"/>
+          </a:p>
+        </p:txBody>
+      </p:sp>
+      <p:sp>
+        <p:nvSpPr>
+          <p:cNvPr id="110" name="Shape 98"/>
+          <p:cNvSpPr/>
+          <p:nvPr/>
+        </p:nvSpPr>
+        <p:spPr>
+          <a:xfrm>
+            <a:off x="6153912" y="2468880"/>
+            <a:ext cx="1828800" cy="237744"/>
+          </a:xfrm>
+          <a:prstGeom prst="rect">
+            <a:avLst/>
+          </a:prstGeom>
+          <a:solidFill>
+            <a:srgbClr val="2D1B69"/>
+          </a:solidFill>
+          <a:ln w="12700">
+            <a:solidFill>
+              <a:srgbClr val="2D1B69"/>
+            </a:solidFill>
+            <a:prstDash val="solid"/>
+          </a:ln>
+        </p:spPr>
+      </p:sp>
+      <p:sp>
+        <p:nvSpPr>
+          <p:cNvPr id="111" name="Text 99"/>
+          <p:cNvSpPr/>
+          <p:nvPr/>
+        </p:nvSpPr>
+        <p:spPr>
+          <a:xfrm>
+            <a:off x="6153912" y="2468880"/>
+            <a:ext cx="1828800" cy="237744"/>
+          </a:xfrm>
+          <a:prstGeom prst="rect">
+            <a:avLst/>
+          </a:prstGeom>
+          <a:noFill/>
+          <a:ln/>
+        </p:spPr>
+        <p:txBody>
+          <a:bodyPr wrap="square" rtlCol="0" anchor="ctr"/>
+          <a:lstStyle/>
+          <a:p>
+            <a:pPr algn="ctr" indent="0" marL="0">
+              <a:buNone/>
+            </a:pPr>
+            <a:r>
+              <a:rPr lang="en-US" sz="700" b="1" dirty="0">
+                <a:solidFill>
+                  <a:srgbClr val="FFFFFF"/>
+                </a:solidFill>
+              </a:rPr>
+              <a:t>Data Sharing &amp; Marketplace</a:t>
+            </a:r>
+            <a:endParaRPr lang="en-US" sz="700" dirty="0"/>
+          </a:p>
+        </p:txBody>
+      </p:sp>
+      <p:sp>
+        <p:nvSpPr>
+          <p:cNvPr id="112" name="Shape 100"/>
+          <p:cNvSpPr/>
+          <p:nvPr/>
+        </p:nvSpPr>
+        <p:spPr>
+          <a:xfrm>
+            <a:off x="6153912" y="2706624"/>
+            <a:ext cx="1828800" cy="420624"/>
+          </a:xfrm>
+          <a:prstGeom prst="rect">
+            <a:avLst/>
+          </a:prstGeom>
+          <a:solidFill>
+            <a:srgbClr val="F2F2F2"/>
+          </a:solidFill>
+          <a:ln w="9525">
+            <a:solidFill>
+              <a:srgbClr val="CCCCCC"/>
+            </a:solidFill>
+            <a:prstDash val="solid"/>
+          </a:ln>
+        </p:spPr>
+      </p:sp>
+      <p:sp>
+        <p:nvSpPr>
+          <p:cNvPr id="113" name="Shape 101"/>
+          <p:cNvSpPr/>
+          <p:nvPr/>
+        </p:nvSpPr>
+        <p:spPr>
+          <a:xfrm>
+            <a:off x="6245352" y="2761488"/>
+            <a:ext cx="384048" cy="329184"/>
+          </a:xfrm>
+          <a:prstGeom prst="rect">
+            <a:avLst>
+              <a:gd name="adj" fmla="val 11111"/>
+            </a:avLst>
+          </a:prstGeom>
+          <a:solidFill>
+            <a:srgbClr val="EDE8F9"/>
+          </a:solidFill>
+          <a:ln w="6350">
+            <a:solidFill>
+              <a:srgbClr val="5D35B1"/>
+            </a:solidFill>
+            <a:prstDash val="solid"/>
+          </a:ln>
+        </p:spPr>
+      </p:sp>
+      <p:sp>
+        <p:nvSpPr>
+          <p:cNvPr id="114" name="Text 102"/>
+          <p:cNvSpPr/>
+          <p:nvPr/>
+        </p:nvSpPr>
+        <p:spPr>
+          <a:xfrm>
+            <a:off x="6245352" y="2761488"/>
+            <a:ext cx="384048" cy="329184"/>
+          </a:xfrm>
+          <a:prstGeom prst="rect">
+            <a:avLst/>
+          </a:prstGeom>
+          <a:noFill/>
+          <a:ln/>
+        </p:spPr>
+        <p:txBody>
+          <a:bodyPr wrap="square" rtlCol="0" anchor="ctr"/>
+          <a:lstStyle/>
+          <a:p>
+            <a:pPr algn="ctr" indent="0" marL="0">
+              <a:buNone/>
+            </a:pPr>
+            <a:r>
+              <a:rPr lang="en-US" sz="1300" dirty="0">
+                <a:solidFill>
+                  <a:srgbClr val="000000"/>
+                </a:solidFill>
+              </a:rPr>
+              <a:t>🔗</a:t>
+            </a:r>
+            <a:endParaRPr lang="en-US" sz="1300" dirty="0"/>
+          </a:p>
+        </p:txBody>
+      </p:sp>
+      <p:sp>
+        <p:nvSpPr>
+          <p:cNvPr id="115" name="Shape 103"/>
+          <p:cNvSpPr/>
+          <p:nvPr/>
+        </p:nvSpPr>
+        <p:spPr>
+          <a:xfrm>
+            <a:off x="6153912" y="3182112"/>
+            <a:ext cx="1828800" cy="237744"/>
+          </a:xfrm>
+          <a:prstGeom prst="rect">
+            <a:avLst/>
+          </a:prstGeom>
+          <a:solidFill>
+            <a:srgbClr val="2D1B69"/>
+          </a:solidFill>
+          <a:ln w="12700">
+            <a:solidFill>
+              <a:srgbClr val="2D1B69"/>
+            </a:solidFill>
+            <a:prstDash val="solid"/>
+          </a:ln>
+        </p:spPr>
+      </p:sp>
+      <p:sp>
+        <p:nvSpPr>
+          <p:cNvPr id="116" name="Text 104"/>
+          <p:cNvSpPr/>
+          <p:nvPr/>
+        </p:nvSpPr>
+        <p:spPr>
+          <a:xfrm>
+            <a:off x="6153912" y="3182112"/>
+            <a:ext cx="1828800" cy="237744"/>
+          </a:xfrm>
+          <a:prstGeom prst="rect">
+            <a:avLst/>
+          </a:prstGeom>
+          <a:noFill/>
+          <a:ln/>
+        </p:spPr>
+        <p:txBody>
+          <a:bodyPr wrap="square" rtlCol="0" anchor="ctr"/>
+          <a:lstStyle/>
+          <a:p>
+            <a:pPr algn="ctr" indent="0" marL="0">
+              <a:buNone/>
+            </a:pPr>
+            <a:r>
+              <a:rPr lang="en-US" sz="700" b="1" dirty="0">
+                <a:solidFill>
+                  <a:srgbClr val="FFFFFF"/>
+                </a:solidFill>
+              </a:rPr>
+              <a:t>AI Applications</a:t>
+            </a:r>
+            <a:endParaRPr lang="en-US" sz="700" dirty="0"/>
+          </a:p>
+        </p:txBody>
+      </p:sp>
+      <p:sp>
+        <p:nvSpPr>
+          <p:cNvPr id="117" name="Shape 105"/>
+          <p:cNvSpPr/>
+          <p:nvPr/>
+        </p:nvSpPr>
+        <p:spPr>
+          <a:xfrm>
+            <a:off x="6153912" y="3419856"/>
+            <a:ext cx="1828800" cy="420624"/>
+          </a:xfrm>
+          <a:prstGeom prst="rect">
+            <a:avLst/>
+          </a:prstGeom>
+          <a:solidFill>
+            <a:srgbClr val="F2F2F2"/>
+          </a:solidFill>
+          <a:ln w="9525">
+            <a:solidFill>
+              <a:srgbClr val="CCCCCC"/>
+            </a:solidFill>
+            <a:prstDash val="solid"/>
+          </a:ln>
+        </p:spPr>
+      </p:sp>
+      <p:sp>
+        <p:nvSpPr>
+          <p:cNvPr id="118" name="Shape 106"/>
+          <p:cNvSpPr/>
+          <p:nvPr/>
+        </p:nvSpPr>
+        <p:spPr>
+          <a:xfrm>
+            <a:off x="6245352" y="3474720"/>
+            <a:ext cx="384048" cy="329184"/>
+          </a:xfrm>
+          <a:prstGeom prst="rect">
+            <a:avLst>
+              <a:gd name="adj" fmla="val 11111"/>
+            </a:avLst>
+          </a:prstGeom>
+          <a:solidFill>
+            <a:srgbClr val="EDE8F9"/>
+          </a:solidFill>
+          <a:ln w="6350">
+            <a:solidFill>
+              <a:srgbClr val="5D35B1"/>
+            </a:solidFill>
+            <a:prstDash val="solid"/>
+          </a:ln>
+        </p:spPr>
+      </p:sp>
+      <p:sp>
+        <p:nvSpPr>
+          <p:cNvPr id="119" name="Text 107"/>
+          <p:cNvSpPr/>
+          <p:nvPr/>
+        </p:nvSpPr>
+        <p:spPr>
+          <a:xfrm>
+            <a:off x="6245352" y="3474720"/>
+            <a:ext cx="384048" cy="329184"/>
+          </a:xfrm>
+          <a:prstGeom prst="rect">
+            <a:avLst/>
+          </a:prstGeom>
+          <a:noFill/>
+          <a:ln/>
+        </p:spPr>
+        <p:txBody>
+          <a:bodyPr wrap="square" rtlCol="0" anchor="ctr"/>
+          <a:lstStyle/>
+          <a:p>
+            <a:pPr algn="ctr" indent="0" marL="0">
+              <a:buNone/>
+            </a:pPr>
+            <a:r>
+              <a:rPr lang="en-US" sz="1300" dirty="0">
+                <a:solidFill>
+                  <a:srgbClr val="000000"/>
+                </a:solidFill>
+              </a:rPr>
+              <a:t>🤖</a:t>
+            </a:r>
+            <a:endParaRPr lang="en-US" sz="1300" dirty="0"/>
+          </a:p>
+        </p:txBody>
+      </p:sp>
+      <p:sp>
+        <p:nvSpPr>
+          <p:cNvPr id="120" name="Shape 108"/>
+          <p:cNvSpPr/>
+          <p:nvPr/>
+        </p:nvSpPr>
+        <p:spPr>
+          <a:xfrm>
+            <a:off x="6153912" y="3895344"/>
+            <a:ext cx="1828800" cy="237744"/>
+          </a:xfrm>
+          <a:prstGeom prst="rect">
+            <a:avLst/>
+          </a:prstGeom>
+          <a:solidFill>
+            <a:srgbClr val="2D1B69"/>
+          </a:solidFill>
+          <a:ln w="12700">
+            <a:solidFill>
+              <a:srgbClr val="2D1B69"/>
+            </a:solidFill>
+            <a:prstDash val="solid"/>
+          </a:ln>
+        </p:spPr>
+      </p:sp>
+      <p:sp>
+        <p:nvSpPr>
+          <p:cNvPr id="121" name="Text 109"/>
+          <p:cNvSpPr/>
+          <p:nvPr/>
+        </p:nvSpPr>
+        <p:spPr>
+          <a:xfrm>
+            <a:off x="6153912" y="3895344"/>
+            <a:ext cx="1828800" cy="237744"/>
+          </a:xfrm>
+          <a:prstGeom prst="rect">
+            <a:avLst/>
+          </a:prstGeom>
+          <a:noFill/>
+          <a:ln/>
+        </p:spPr>
+        <p:txBody>
+          <a:bodyPr wrap="square" rtlCol="0" anchor="ctr"/>
+          <a:lstStyle/>
+          <a:p>
+            <a:pPr algn="ctr" indent="0" marL="0">
+              <a:buNone/>
+            </a:pPr>
+            <a:r>
+              <a:rPr lang="en-US" sz="700" b="1" dirty="0">
+                <a:solidFill>
+                  <a:srgbClr val="FFFFFF"/>
+                </a:solidFill>
+              </a:rPr>
+              <a:t>Apps</a:t>
+            </a:r>
+            <a:endParaRPr lang="en-US" sz="700" dirty="0"/>
+          </a:p>
+        </p:txBody>
+      </p:sp>
+      <p:sp>
+        <p:nvSpPr>
+          <p:cNvPr id="122" name="Shape 110"/>
+          <p:cNvSpPr/>
+          <p:nvPr/>
+        </p:nvSpPr>
+        <p:spPr>
+          <a:xfrm>
+            <a:off x="6153912" y="4133088"/>
+            <a:ext cx="1828800" cy="420624"/>
+          </a:xfrm>
+          <a:prstGeom prst="rect">
+            <a:avLst/>
+          </a:prstGeom>
+          <a:solidFill>
+            <a:srgbClr val="F2F2F2"/>
+          </a:solidFill>
+          <a:ln w="9525">
+            <a:solidFill>
+              <a:srgbClr val="CCCCCC"/>
+            </a:solidFill>
+            <a:prstDash val="solid"/>
+          </a:ln>
+        </p:spPr>
+      </p:sp>
+      <p:sp>
+        <p:nvSpPr>
+          <p:cNvPr id="123" name="Shape 111"/>
+          <p:cNvSpPr/>
+          <p:nvPr/>
+        </p:nvSpPr>
+        <p:spPr>
+          <a:xfrm>
+            <a:off x="6245352" y="4187952"/>
+            <a:ext cx="384048" cy="329184"/>
+          </a:xfrm>
+          <a:prstGeom prst="rect">
+            <a:avLst>
+              <a:gd name="adj" fmla="val 11111"/>
+            </a:avLst>
+          </a:prstGeom>
+          <a:solidFill>
+            <a:srgbClr val="EDE8F9"/>
+          </a:solidFill>
+          <a:ln w="6350">
+            <a:solidFill>
+              <a:srgbClr val="5D35B1"/>
+            </a:solidFill>
+            <a:prstDash val="solid"/>
+          </a:ln>
+        </p:spPr>
+      </p:sp>
+      <p:sp>
+        <p:nvSpPr>
+          <p:cNvPr id="124" name="Text 112"/>
+          <p:cNvSpPr/>
+          <p:nvPr/>
+        </p:nvSpPr>
+        <p:spPr>
+          <a:xfrm>
+            <a:off x="6245352" y="4187952"/>
+            <a:ext cx="384048" cy="329184"/>
+          </a:xfrm>
+          <a:prstGeom prst="rect">
+            <a:avLst/>
+          </a:prstGeom>
+          <a:noFill/>
+          <a:ln/>
+        </p:spPr>
+        <p:txBody>
+          <a:bodyPr wrap="square" rtlCol="0" anchor="ctr"/>
+          <a:lstStyle/>
+          <a:p>
+            <a:pPr algn="ctr" indent="0" marL="0">
+              <a:buNone/>
+            </a:pPr>
+            <a:r>
+              <a:rPr lang="en-US" sz="1300" dirty="0">
+                <a:solidFill>
+                  <a:srgbClr val="000000"/>
+                </a:solidFill>
+              </a:rPr>
+              <a:t>⚙️</a:t>
+            </a:r>
+            <a:endParaRPr lang="en-US" sz="1300" dirty="0"/>
+          </a:p>
+        </p:txBody>
+      </p:sp>
+      <p:sp>
+        <p:nvSpPr>
+          <p:cNvPr id="125" name="Shape 113"/>
+          <p:cNvSpPr/>
+          <p:nvPr/>
+        </p:nvSpPr>
+        <p:spPr>
+          <a:xfrm>
+            <a:off x="3703320" y="1463040"/>
+            <a:ext cx="128016" cy="0"/>
+          </a:xfrm>
+          <a:prstGeom prst="line">
+            <a:avLst/>
+          </a:prstGeom>
+          <a:noFill/>
+          <a:ln w="15240">
+            <a:solidFill>
+              <a:srgbClr val="1A1A1A"/>
+            </a:solidFill>
+            <a:prstDash val="solid"/>
+            <a:tailEnd type="arrow"/>
+          </a:ln>
+        </p:spPr>
+      </p:sp>
+      <p:sp>
+        <p:nvSpPr>
+          <p:cNvPr id="126" name="Shape 114"/>
+          <p:cNvSpPr/>
+          <p:nvPr/>
+        </p:nvSpPr>
+        <p:spPr>
+          <a:xfrm>
+            <a:off x="3703320" y="2871216"/>
+            <a:ext cx="128016" cy="0"/>
+          </a:xfrm>
+          <a:prstGeom prst="line">
+            <a:avLst/>
+          </a:prstGeom>
+          <a:noFill/>
+          <a:ln w="15240">
+            <a:solidFill>
+              <a:srgbClr val="1A1A1A"/>
+            </a:solidFill>
+            <a:prstDash val="solid"/>
+            <a:tailEnd type="arrow"/>
+          </a:ln>
+        </p:spPr>
+      </p:sp>
+      <p:sp>
+        <p:nvSpPr>
+          <p:cNvPr id="127" name="Shape 115"/>
+          <p:cNvSpPr/>
+          <p:nvPr/>
+        </p:nvSpPr>
+        <p:spPr>
+          <a:xfrm>
+            <a:off x="3703320" y="3913632"/>
+            <a:ext cx="128016" cy="0"/>
+          </a:xfrm>
+          <a:prstGeom prst="line">
+            <a:avLst/>
+          </a:prstGeom>
+          <a:noFill/>
+          <a:ln w="15240">
+            <a:solidFill>
+              <a:srgbClr val="1A1A1A"/>
+            </a:solidFill>
+            <a:prstDash val="solid"/>
+            <a:tailEnd type="arrow"/>
+          </a:ln>
+        </p:spPr>
+      </p:sp>
+      <p:sp>
+        <p:nvSpPr>
+          <p:cNvPr id="128" name="Shape 116"/>
+          <p:cNvSpPr/>
+          <p:nvPr/>
+        </p:nvSpPr>
+        <p:spPr>
+          <a:xfrm>
+            <a:off x="6025896" y="1371600"/>
+            <a:ext cx="128016" cy="0"/>
+          </a:xfrm>
+          <a:prstGeom prst="line">
+            <a:avLst/>
+          </a:prstGeom>
+          <a:noFill/>
+          <a:ln w="15240">
+            <a:solidFill>
+              <a:srgbClr val="1A1A1A"/>
+            </a:solidFill>
+            <a:prstDash val="solid"/>
+            <a:tailEnd type="arrow"/>
+          </a:ln>
+        </p:spPr>
+      </p:sp>
+      <p:sp>
+        <p:nvSpPr>
+          <p:cNvPr id="129" name="Shape 117"/>
+          <p:cNvSpPr/>
+          <p:nvPr/>
+        </p:nvSpPr>
+        <p:spPr>
+          <a:xfrm>
+            <a:off x="6025896" y="2084832"/>
+            <a:ext cx="128016" cy="0"/>
+          </a:xfrm>
+          <a:prstGeom prst="line">
+            <a:avLst/>
+          </a:prstGeom>
+          <a:noFill/>
+          <a:ln w="15240">
+            <a:solidFill>
+              <a:srgbClr val="1A1A1A"/>
+            </a:solidFill>
+            <a:prstDash val="solid"/>
+            <a:tailEnd type="arrow"/>
+          </a:ln>
+        </p:spPr>
+      </p:sp>
+      <p:sp>
+        <p:nvSpPr>
+          <p:cNvPr id="130" name="Shape 118"/>
+          <p:cNvSpPr/>
+          <p:nvPr/>
+        </p:nvSpPr>
+        <p:spPr>
+          <a:xfrm>
+            <a:off x="6025896" y="2798064"/>
+            <a:ext cx="128016" cy="0"/>
+          </a:xfrm>
+          <a:prstGeom prst="line">
+            <a:avLst/>
+          </a:prstGeom>
+          <a:noFill/>
+          <a:ln w="15240">
+            <a:solidFill>
+              <a:srgbClr val="1A1A1A"/>
+            </a:solidFill>
+            <a:prstDash val="solid"/>
+            <a:tailEnd type="arrow"/>
+          </a:ln>
+        </p:spPr>
+      </p:sp>
+      <p:sp>
+        <p:nvSpPr>
+          <p:cNvPr id="131" name="Shape 119"/>
+          <p:cNvSpPr/>
+          <p:nvPr/>
+        </p:nvSpPr>
+        <p:spPr>
+          <a:xfrm>
+            <a:off x="6025896" y="3511296"/>
+            <a:ext cx="128016" cy="0"/>
+          </a:xfrm>
+          <a:prstGeom prst="line">
+            <a:avLst/>
+          </a:prstGeom>
+          <a:noFill/>
+          <a:ln w="15240">
+            <a:solidFill>
+              <a:srgbClr val="1A1A1A"/>
+            </a:solidFill>
+            <a:prstDash val="solid"/>
+            <a:tailEnd type="arrow"/>
+          </a:ln>
+        </p:spPr>
+      </p:sp>
+      <p:sp>
+        <p:nvSpPr>
+          <p:cNvPr id="132" name="Shape 120"/>
+          <p:cNvSpPr/>
+          <p:nvPr/>
+        </p:nvSpPr>
+        <p:spPr>
+          <a:xfrm>
+            <a:off x="6025896" y="4224528"/>
+            <a:ext cx="128016" cy="0"/>
+          </a:xfrm>
+          <a:prstGeom prst="line">
+            <a:avLst/>
+          </a:prstGeom>
+          <a:noFill/>
+          <a:ln w="15240">
+            <a:solidFill>
+              <a:srgbClr val="1A1A1A"/>
+            </a:solidFill>
+            <a:prstDash val="solid"/>
+            <a:tailEnd type="arrow"/>
+          </a:ln>
+        </p:spPr>
+      </p:sp>
+      <p:sp>
+        <p:nvSpPr>
+          <p:cNvPr id="133" name="Shape 121"/>
+          <p:cNvSpPr/>
+          <p:nvPr/>
+        </p:nvSpPr>
+        <p:spPr>
+          <a:xfrm>
+            <a:off x="2212848" y="4754880"/>
+            <a:ext cx="6025896" cy="914400"/>
+          </a:xfrm>
+          <a:prstGeom prst="rect">
+            <a:avLst/>
+          </a:prstGeom>
+          <a:solidFill>
+            <a:srgbClr val="7030A0"/>
+          </a:solidFill>
+          <a:ln w="12700">
+            <a:solidFill>
+              <a:srgbClr val="7030A0"/>
+            </a:solidFill>
+            <a:prstDash val="solid"/>
+          </a:ln>
+        </p:spPr>
+      </p:sp>
+      <p:sp>
+        <p:nvSpPr>
+          <p:cNvPr id="134" name="Text 122"/>
+          <p:cNvSpPr/>
+          <p:nvPr/>
+        </p:nvSpPr>
+        <p:spPr>
+          <a:xfrm>
+            <a:off x="2212848" y="4791456"/>
+            <a:ext cx="6025896" cy="219456"/>
+          </a:xfrm>
+          <a:prstGeom prst="rect">
+            <a:avLst/>
+          </a:prstGeom>
+          <a:noFill/>
+          <a:ln/>
+        </p:spPr>
+        <p:txBody>
+          <a:bodyPr wrap="square" rtlCol="0" anchor="ctr"/>
+          <a:lstStyle/>
+          <a:p>
+            <a:pPr algn="ctr" indent="0" marL="0">
+              <a:buNone/>
+            </a:pPr>
+            <a:r>
+              <a:rPr lang="en-US" sz="900" b="1" dirty="0">
+                <a:solidFill>
+                  <a:srgbClr val="FFFFFF"/>
+                </a:solidFill>
+              </a:rPr>
+              <a:t>Unified, Open and Scalable Lakehouse</a:t>
+            </a:r>
+            <a:endParaRPr lang="en-US" sz="900" dirty="0"/>
+          </a:p>
+        </p:txBody>
+      </p:sp>
+      <p:sp>
+        <p:nvSpPr>
+          <p:cNvPr id="135" name="Shape 123"/>
+          <p:cNvSpPr/>
+          <p:nvPr/>
+        </p:nvSpPr>
+        <p:spPr>
+          <a:xfrm>
+            <a:off x="2304288" y="5029200"/>
+            <a:ext cx="2848356" cy="566928"/>
+          </a:xfrm>
+          <a:prstGeom prst="rect">
+            <a:avLst>
+              <a:gd name="adj" fmla="val 8065"/>
+            </a:avLst>
+          </a:prstGeom>
+          <a:solidFill>
+            <a:srgbClr val="FFFFFF"/>
+          </a:solidFill>
+          <a:ln w="12700">
+            <a:solidFill>
+              <a:srgbClr val="FFFFFF"/>
+            </a:solidFill>
+            <a:prstDash val="solid"/>
+          </a:ln>
+        </p:spPr>
+      </p:sp>
+      <p:sp>
+        <p:nvSpPr>
+          <p:cNvPr id="136" name="Text 124"/>
+          <p:cNvSpPr/>
+          <p:nvPr/>
+        </p:nvSpPr>
+        <p:spPr>
+          <a:xfrm>
+            <a:off x="2322576" y="5029200"/>
+            <a:ext cx="2811780" cy="164592"/>
+          </a:xfrm>
+          <a:prstGeom prst="rect">
+            <a:avLst/>
+          </a:prstGeom>
+          <a:noFill/>
+          <a:ln/>
+        </p:spPr>
+        <p:txBody>
+          <a:bodyPr wrap="square" rtlCol="0" anchor="ctr"/>
+          <a:lstStyle/>
+          <a:p>
+            <a:pPr algn="ctr" indent="0" marL="0">
+              <a:buNone/>
+            </a:pPr>
+            <a:r>
+              <a:rPr lang="en-US" sz="550" dirty="0">
+                <a:solidFill>
+                  <a:srgbClr val="1A1A1A"/>
+                </a:solidFill>
+              </a:rPr>
+              <a:t>Governance, Security, Observability, Interoperability, Sharing</a:t>
+            </a:r>
+            <a:endParaRPr lang="en-US" sz="550" dirty="0"/>
+          </a:p>
+        </p:txBody>
       </p:sp>
       <p:pic>
         <p:nvPicPr>
-          <p:cNvPr id="90" name="Image 10" descr="preencoded.png">    </p:cNvPr>
+          <p:cNvPr id="137" name="Image 10" descr="preencoded.png">    </p:cNvPr>
           <p:cNvPicPr>
             <a:picLocks noChangeAspect="1"/>
           </p:cNvPicPr>
@@ -3671,8 +5047,8 @@
         </p:blipFill>
         <p:spPr>
           <a:xfrm>
-            <a:off x="5550408" y="3639312"/>
-            <a:ext cx="402336" cy="329184"/>
+            <a:off x="3316986" y="5212080"/>
+            <a:ext cx="201168" cy="201168"/>
           </a:xfrm>
           <a:prstGeom prst="rect">
             <a:avLst/>
@@ -3681,1327 +5057,50 @@
       </p:pic>
       <p:sp>
         <p:nvSpPr>
-          <p:cNvPr id="91" name="Shape 78"/>
-          <p:cNvSpPr/>
-          <p:nvPr/>
-        </p:nvSpPr>
-        <p:spPr>
-          <a:xfrm>
-            <a:off x="3904488" y="3675888"/>
-            <a:ext cx="786384" cy="219456"/>
-          </a:xfrm>
-          <a:prstGeom prst="rect">
-            <a:avLst>
-              <a:gd name="adj" fmla="val 33333"/>
-            </a:avLst>
-          </a:prstGeom>
-          <a:solidFill>
-            <a:srgbClr val="5D35B1"/>
-          </a:solidFill>
-          <a:ln w="12700">
-            <a:solidFill>
-              <a:srgbClr val="5D35B1"/>
-            </a:solidFill>
-            <a:prstDash val="solid"/>
-          </a:ln>
-        </p:spPr>
-      </p:sp>
-      <p:sp>
-        <p:nvSpPr>
-          <p:cNvPr id="92" name="Text 79"/>
-          <p:cNvSpPr/>
-          <p:nvPr/>
-        </p:nvSpPr>
-        <p:spPr>
-          <a:xfrm>
-            <a:off x="3904488" y="3675888"/>
-            <a:ext cx="786384" cy="219456"/>
-          </a:xfrm>
-          <a:prstGeom prst="rect">
-            <a:avLst/>
-          </a:prstGeom>
-          <a:noFill/>
-          <a:ln/>
-        </p:spPr>
-        <p:txBody>
-          <a:bodyPr wrap="square" lIns="12700" tIns="12700" rIns="12700" bIns="12700" rtlCol="0" anchor="ctr"/>
-          <a:lstStyle/>
-          <a:p>
-            <a:pPr algn="ctr" indent="0" marL="0">
-              <a:buNone/>
-            </a:pPr>
-            <a:r>
-              <a:rPr lang="en-US" sz="550" b="1" dirty="0">
-                <a:solidFill>
-                  <a:srgbClr val="FFFFFF"/>
-                </a:solidFill>
-              </a:rPr>
-              <a:t>Prepare data</a:t>
-            </a:r>
-            <a:endParaRPr lang="en-US" sz="550" dirty="0"/>
-          </a:p>
-        </p:txBody>
-      </p:sp>
-      <p:sp>
-        <p:nvSpPr>
-          <p:cNvPr id="93" name="Shape 80"/>
-          <p:cNvSpPr/>
-          <p:nvPr/>
-        </p:nvSpPr>
-        <p:spPr>
-          <a:xfrm>
-            <a:off x="5148072" y="3675888"/>
-            <a:ext cx="786384" cy="219456"/>
-          </a:xfrm>
-          <a:prstGeom prst="rect">
-            <a:avLst>
-              <a:gd name="adj" fmla="val 33333"/>
-            </a:avLst>
-          </a:prstGeom>
-          <a:solidFill>
-            <a:srgbClr val="5D35B1"/>
-          </a:solidFill>
-          <a:ln w="12700">
-            <a:solidFill>
-              <a:srgbClr val="5D35B1"/>
-            </a:solidFill>
-            <a:prstDash val="solid"/>
-          </a:ln>
-        </p:spPr>
-      </p:sp>
-      <p:sp>
-        <p:nvSpPr>
-          <p:cNvPr id="94" name="Text 81"/>
-          <p:cNvSpPr/>
-          <p:nvPr/>
-        </p:nvSpPr>
-        <p:spPr>
-          <a:xfrm>
-            <a:off x="5148072" y="3675888"/>
-            <a:ext cx="786384" cy="219456"/>
-          </a:xfrm>
-          <a:prstGeom prst="rect">
-            <a:avLst/>
-          </a:prstGeom>
-          <a:noFill/>
-          <a:ln/>
-        </p:spPr>
-        <p:txBody>
-          <a:bodyPr wrap="square" lIns="12700" tIns="12700" rIns="12700" bIns="12700" rtlCol="0" anchor="ctr"/>
-          <a:lstStyle/>
-          <a:p>
-            <a:pPr algn="ctr" indent="0" marL="0">
-              <a:buNone/>
-            </a:pPr>
-            <a:r>
-              <a:rPr lang="en-US" sz="550" b="1" dirty="0">
-                <a:solidFill>
-                  <a:srgbClr val="FFFFFF"/>
-                </a:solidFill>
-              </a:rPr>
-              <a:t>Build agents</a:t>
-            </a:r>
-            <a:endParaRPr lang="en-US" sz="550" dirty="0"/>
-          </a:p>
-        </p:txBody>
-      </p:sp>
-      <p:sp>
-        <p:nvSpPr>
-          <p:cNvPr id="95" name="Shape 82"/>
-          <p:cNvSpPr/>
-          <p:nvPr/>
-        </p:nvSpPr>
-        <p:spPr>
-          <a:xfrm>
-            <a:off x="3904488" y="3950208"/>
-            <a:ext cx="786384" cy="219456"/>
-          </a:xfrm>
-          <a:prstGeom prst="rect">
-            <a:avLst>
-              <a:gd name="adj" fmla="val 33333"/>
-            </a:avLst>
-          </a:prstGeom>
-          <a:solidFill>
-            <a:srgbClr val="5D35B1"/>
-          </a:solidFill>
-          <a:ln w="12700">
-            <a:solidFill>
-              <a:srgbClr val="5D35B1"/>
-            </a:solidFill>
-            <a:prstDash val="solid"/>
-          </a:ln>
-        </p:spPr>
-      </p:sp>
-      <p:sp>
-        <p:nvSpPr>
-          <p:cNvPr id="96" name="Text 83"/>
-          <p:cNvSpPr/>
-          <p:nvPr/>
-        </p:nvSpPr>
-        <p:spPr>
-          <a:xfrm>
-            <a:off x="3904488" y="3950208"/>
-            <a:ext cx="786384" cy="219456"/>
-          </a:xfrm>
-          <a:prstGeom prst="rect">
-            <a:avLst/>
-          </a:prstGeom>
-          <a:noFill/>
-          <a:ln/>
-        </p:spPr>
-        <p:txBody>
-          <a:bodyPr wrap="square" lIns="12700" tIns="12700" rIns="12700" bIns="12700" rtlCol="0" anchor="ctr"/>
-          <a:lstStyle/>
-          <a:p>
-            <a:pPr algn="ctr" indent="0" marL="0">
-              <a:buNone/>
-            </a:pPr>
-            <a:r>
-              <a:rPr lang="en-US" sz="550" b="1" dirty="0">
-                <a:solidFill>
-                  <a:srgbClr val="FFFFFF"/>
-                </a:solidFill>
-              </a:rPr>
-              <a:t>Evaluate agents</a:t>
-            </a:r>
-            <a:endParaRPr lang="en-US" sz="550" dirty="0"/>
-          </a:p>
-        </p:txBody>
-      </p:sp>
-      <p:sp>
-        <p:nvSpPr>
-          <p:cNvPr id="97" name="Shape 84"/>
-          <p:cNvSpPr/>
-          <p:nvPr/>
-        </p:nvSpPr>
-        <p:spPr>
-          <a:xfrm>
-            <a:off x="5148072" y="3950208"/>
-            <a:ext cx="786384" cy="219456"/>
-          </a:xfrm>
-          <a:prstGeom prst="rect">
-            <a:avLst>
-              <a:gd name="adj" fmla="val 33333"/>
-            </a:avLst>
-          </a:prstGeom>
-          <a:solidFill>
-            <a:srgbClr val="5D35B1"/>
-          </a:solidFill>
-          <a:ln w="12700">
-            <a:solidFill>
-              <a:srgbClr val="5D35B1"/>
-            </a:solidFill>
-            <a:prstDash val="solid"/>
-          </a:ln>
-        </p:spPr>
-      </p:sp>
-      <p:sp>
-        <p:nvSpPr>
-          <p:cNvPr id="98" name="Text 85"/>
-          <p:cNvSpPr/>
-          <p:nvPr/>
-        </p:nvSpPr>
-        <p:spPr>
-          <a:xfrm>
-            <a:off x="5148072" y="3950208"/>
-            <a:ext cx="786384" cy="219456"/>
-          </a:xfrm>
-          <a:prstGeom prst="rect">
-            <a:avLst/>
-          </a:prstGeom>
-          <a:noFill/>
-          <a:ln/>
-        </p:spPr>
-        <p:txBody>
-          <a:bodyPr wrap="square" lIns="12700" tIns="12700" rIns="12700" bIns="12700" rtlCol="0" anchor="ctr"/>
-          <a:lstStyle/>
-          <a:p>
-            <a:pPr algn="ctr" indent="0" marL="0">
-              <a:buNone/>
-            </a:pPr>
-            <a:r>
-              <a:rPr lang="en-US" sz="550" b="1" dirty="0">
-                <a:solidFill>
-                  <a:srgbClr val="FFFFFF"/>
-                </a:solidFill>
-              </a:rPr>
-              <a:t>Deploy agents</a:t>
-            </a:r>
-            <a:endParaRPr lang="en-US" sz="550" dirty="0"/>
-          </a:p>
-        </p:txBody>
-      </p:sp>
-      <p:sp>
-        <p:nvSpPr>
-          <p:cNvPr id="99" name="Shape 86"/>
-          <p:cNvSpPr/>
-          <p:nvPr/>
-        </p:nvSpPr>
-        <p:spPr>
-          <a:xfrm>
-            <a:off x="4526280" y="4224528"/>
-            <a:ext cx="786384" cy="219456"/>
-          </a:xfrm>
-          <a:prstGeom prst="rect">
-            <a:avLst>
-              <a:gd name="adj" fmla="val 33333"/>
-            </a:avLst>
-          </a:prstGeom>
-          <a:solidFill>
-            <a:srgbClr val="5D35B1"/>
-          </a:solidFill>
-          <a:ln w="12700">
-            <a:solidFill>
-              <a:srgbClr val="5D35B1"/>
-            </a:solidFill>
-            <a:prstDash val="solid"/>
-          </a:ln>
-        </p:spPr>
-      </p:sp>
-      <p:sp>
-        <p:nvSpPr>
-          <p:cNvPr id="100" name="Text 87"/>
-          <p:cNvSpPr/>
-          <p:nvPr/>
-        </p:nvSpPr>
-        <p:spPr>
-          <a:xfrm>
-            <a:off x="4526280" y="4224528"/>
-            <a:ext cx="786384" cy="219456"/>
-          </a:xfrm>
-          <a:prstGeom prst="rect">
-            <a:avLst/>
-          </a:prstGeom>
-          <a:noFill/>
-          <a:ln/>
-        </p:spPr>
-        <p:txBody>
-          <a:bodyPr wrap="square" lIns="12700" tIns="12700" rIns="12700" bIns="12700" rtlCol="0" anchor="ctr"/>
-          <a:lstStyle/>
-          <a:p>
-            <a:pPr algn="ctr" indent="0" marL="0">
-              <a:buNone/>
-            </a:pPr>
-            <a:r>
-              <a:rPr lang="en-US" sz="550" b="1" dirty="0">
-                <a:solidFill>
-                  <a:srgbClr val="FFFFFF"/>
-                </a:solidFill>
-              </a:rPr>
-              <a:t>Govern agents</a:t>
-            </a:r>
-            <a:endParaRPr lang="en-US" sz="550" dirty="0"/>
-          </a:p>
-        </p:txBody>
-      </p:sp>
-      <p:sp>
-        <p:nvSpPr>
-          <p:cNvPr id="101" name="Shape 88"/>
-          <p:cNvSpPr/>
-          <p:nvPr/>
-        </p:nvSpPr>
-        <p:spPr>
-          <a:xfrm>
-            <a:off x="6153912" y="1042416"/>
-            <a:ext cx="3685032" cy="237744"/>
-          </a:xfrm>
-          <a:prstGeom prst="rect">
-            <a:avLst/>
-          </a:prstGeom>
-          <a:solidFill>
-            <a:srgbClr val="2D1B69"/>
-          </a:solidFill>
-          <a:ln w="12700">
-            <a:solidFill>
-              <a:srgbClr val="2D1B69"/>
-            </a:solidFill>
-            <a:prstDash val="solid"/>
-          </a:ln>
-        </p:spPr>
-      </p:sp>
-      <p:sp>
-        <p:nvSpPr>
-          <p:cNvPr id="102" name="Text 89"/>
-          <p:cNvSpPr/>
-          <p:nvPr/>
-        </p:nvSpPr>
-        <p:spPr>
-          <a:xfrm>
-            <a:off x="6153912" y="1042416"/>
-            <a:ext cx="3685032" cy="237744"/>
-          </a:xfrm>
-          <a:prstGeom prst="rect">
-            <a:avLst/>
-          </a:prstGeom>
-          <a:noFill/>
-          <a:ln/>
-        </p:spPr>
-        <p:txBody>
-          <a:bodyPr wrap="square" rtlCol="0" anchor="ctr"/>
-          <a:lstStyle/>
-          <a:p>
-            <a:pPr algn="ctr" indent="0" marL="0">
-              <a:buNone/>
-            </a:pPr>
-            <a:r>
-              <a:rPr lang="en-US" sz="700" b="1" dirty="0">
-                <a:solidFill>
-                  <a:srgbClr val="FFFFFF"/>
-                </a:solidFill>
-              </a:rPr>
-              <a:t>Streaming Analytics</a:t>
-            </a:r>
-            <a:endParaRPr lang="en-US" sz="700" dirty="0"/>
-          </a:p>
-        </p:txBody>
-      </p:sp>
-      <p:sp>
-        <p:nvSpPr>
-          <p:cNvPr id="103" name="Shape 90"/>
-          <p:cNvSpPr/>
-          <p:nvPr/>
-        </p:nvSpPr>
-        <p:spPr>
-          <a:xfrm>
-            <a:off x="6153912" y="1280160"/>
-            <a:ext cx="3685032" cy="420624"/>
-          </a:xfrm>
-          <a:prstGeom prst="rect">
-            <a:avLst/>
-          </a:prstGeom>
-          <a:solidFill>
-            <a:srgbClr val="F2F2F2"/>
-          </a:solidFill>
-          <a:ln w="9525">
-            <a:solidFill>
-              <a:srgbClr val="CCCCCC"/>
-            </a:solidFill>
-            <a:prstDash val="solid"/>
-          </a:ln>
-        </p:spPr>
-      </p:sp>
-      <p:sp>
-        <p:nvSpPr>
-          <p:cNvPr id="104" name="Shape 91"/>
-          <p:cNvSpPr/>
-          <p:nvPr/>
-        </p:nvSpPr>
-        <p:spPr>
-          <a:xfrm>
-            <a:off x="6245352" y="1335024"/>
-            <a:ext cx="384048" cy="329184"/>
-          </a:xfrm>
-          <a:prstGeom prst="rect">
-            <a:avLst>
-              <a:gd name="adj" fmla="val 11111"/>
-            </a:avLst>
-          </a:prstGeom>
-          <a:solidFill>
-            <a:srgbClr val="EDE8F9"/>
-          </a:solidFill>
-          <a:ln w="6350">
-            <a:solidFill>
-              <a:srgbClr val="5D35B1"/>
-            </a:solidFill>
-            <a:prstDash val="solid"/>
-          </a:ln>
-        </p:spPr>
-      </p:sp>
-      <p:sp>
-        <p:nvSpPr>
-          <p:cNvPr id="105" name="Text 92"/>
-          <p:cNvSpPr/>
-          <p:nvPr/>
-        </p:nvSpPr>
-        <p:spPr>
-          <a:xfrm>
-            <a:off x="6245352" y="1335024"/>
-            <a:ext cx="384048" cy="329184"/>
-          </a:xfrm>
-          <a:prstGeom prst="rect">
-            <a:avLst/>
-          </a:prstGeom>
-          <a:noFill/>
-          <a:ln/>
-        </p:spPr>
-        <p:txBody>
-          <a:bodyPr wrap="square" rtlCol="0" anchor="ctr"/>
-          <a:lstStyle/>
-          <a:p>
-            <a:pPr algn="ctr" indent="0" marL="0">
-              <a:buNone/>
-            </a:pPr>
-            <a:r>
-              <a:rPr lang="en-US" sz="1300" dirty="0">
-                <a:solidFill>
-                  <a:srgbClr val="000000"/>
-                </a:solidFill>
-              </a:rPr>
-              <a:t>📊</a:t>
-            </a:r>
-            <a:endParaRPr lang="en-US" sz="1300" dirty="0"/>
-          </a:p>
-        </p:txBody>
-      </p:sp>
-      <p:sp>
-        <p:nvSpPr>
-          <p:cNvPr id="106" name="Shape 93"/>
-          <p:cNvSpPr/>
-          <p:nvPr/>
-        </p:nvSpPr>
-        <p:spPr>
-          <a:xfrm>
-            <a:off x="6153912" y="1755648"/>
-            <a:ext cx="3685032" cy="237744"/>
-          </a:xfrm>
-          <a:prstGeom prst="rect">
-            <a:avLst/>
-          </a:prstGeom>
-          <a:solidFill>
-            <a:srgbClr val="2D1B69"/>
-          </a:solidFill>
-          <a:ln w="12700">
-            <a:solidFill>
-              <a:srgbClr val="2D1B69"/>
-            </a:solidFill>
-            <a:prstDash val="solid"/>
-          </a:ln>
-        </p:spPr>
-      </p:sp>
-      <p:sp>
-        <p:nvSpPr>
-          <p:cNvPr id="107" name="Text 94"/>
-          <p:cNvSpPr/>
-          <p:nvPr/>
-        </p:nvSpPr>
-        <p:spPr>
-          <a:xfrm>
-            <a:off x="6153912" y="1755648"/>
-            <a:ext cx="3685032" cy="237744"/>
-          </a:xfrm>
-          <a:prstGeom prst="rect">
-            <a:avLst/>
-          </a:prstGeom>
-          <a:noFill/>
-          <a:ln/>
-        </p:spPr>
-        <p:txBody>
-          <a:bodyPr wrap="square" rtlCol="0" anchor="ctr"/>
-          <a:lstStyle/>
-          <a:p>
-            <a:pPr algn="ctr" indent="0" marL="0">
-              <a:buNone/>
-            </a:pPr>
-            <a:r>
-              <a:rPr lang="en-US" sz="700" b="1" dirty="0">
-                <a:solidFill>
-                  <a:srgbClr val="FFFFFF"/>
-                </a:solidFill>
-              </a:rPr>
-              <a:t>BI &amp; Reporting</a:t>
-            </a:r>
-            <a:endParaRPr lang="en-US" sz="700" dirty="0"/>
-          </a:p>
-        </p:txBody>
-      </p:sp>
-      <p:sp>
-        <p:nvSpPr>
-          <p:cNvPr id="108" name="Shape 95"/>
-          <p:cNvSpPr/>
-          <p:nvPr/>
-        </p:nvSpPr>
-        <p:spPr>
-          <a:xfrm>
-            <a:off x="6153912" y="1993392"/>
-            <a:ext cx="3685032" cy="420624"/>
-          </a:xfrm>
-          <a:prstGeom prst="rect">
-            <a:avLst/>
-          </a:prstGeom>
-          <a:solidFill>
-            <a:srgbClr val="F2F2F2"/>
-          </a:solidFill>
-          <a:ln w="9525">
-            <a:solidFill>
-              <a:srgbClr val="CCCCCC"/>
-            </a:solidFill>
-            <a:prstDash val="solid"/>
-          </a:ln>
-        </p:spPr>
-      </p:sp>
-      <p:sp>
-        <p:nvSpPr>
-          <p:cNvPr id="109" name="Shape 96"/>
-          <p:cNvSpPr/>
-          <p:nvPr/>
-        </p:nvSpPr>
-        <p:spPr>
-          <a:xfrm>
-            <a:off x="6245352" y="2048256"/>
-            <a:ext cx="384048" cy="329184"/>
-          </a:xfrm>
-          <a:prstGeom prst="rect">
-            <a:avLst>
-              <a:gd name="adj" fmla="val 11111"/>
-            </a:avLst>
-          </a:prstGeom>
-          <a:solidFill>
-            <a:srgbClr val="EDE8F9"/>
-          </a:solidFill>
-          <a:ln w="6350">
-            <a:solidFill>
-              <a:srgbClr val="5D35B1"/>
-            </a:solidFill>
-            <a:prstDash val="solid"/>
-          </a:ln>
-        </p:spPr>
-      </p:sp>
-      <p:sp>
-        <p:nvSpPr>
-          <p:cNvPr id="110" name="Text 97"/>
-          <p:cNvSpPr/>
-          <p:nvPr/>
-        </p:nvSpPr>
-        <p:spPr>
-          <a:xfrm>
-            <a:off x="6245352" y="2048256"/>
-            <a:ext cx="384048" cy="329184"/>
-          </a:xfrm>
-          <a:prstGeom prst="rect">
-            <a:avLst/>
-          </a:prstGeom>
-          <a:noFill/>
-          <a:ln/>
-        </p:spPr>
-        <p:txBody>
-          <a:bodyPr wrap="square" rtlCol="0" anchor="ctr"/>
-          <a:lstStyle/>
-          <a:p>
-            <a:pPr algn="ctr" indent="0" marL="0">
-              <a:buNone/>
-            </a:pPr>
-            <a:r>
-              <a:rPr lang="en-US" sz="1300" dirty="0">
-                <a:solidFill>
-                  <a:srgbClr val="000000"/>
-                </a:solidFill>
-              </a:rPr>
-              <a:t>📈</a:t>
-            </a:r>
-            <a:endParaRPr lang="en-US" sz="1300" dirty="0"/>
-          </a:p>
-        </p:txBody>
-      </p:sp>
-      <p:sp>
-        <p:nvSpPr>
-          <p:cNvPr id="111" name="Shape 98"/>
-          <p:cNvSpPr/>
-          <p:nvPr/>
-        </p:nvSpPr>
-        <p:spPr>
-          <a:xfrm>
-            <a:off x="6153912" y="2468880"/>
-            <a:ext cx="3685032" cy="237744"/>
-          </a:xfrm>
-          <a:prstGeom prst="rect">
-            <a:avLst/>
-          </a:prstGeom>
-          <a:solidFill>
-            <a:srgbClr val="2D1B69"/>
-          </a:solidFill>
-          <a:ln w="12700">
-            <a:solidFill>
-              <a:srgbClr val="2D1B69"/>
-            </a:solidFill>
-            <a:prstDash val="solid"/>
-          </a:ln>
-        </p:spPr>
-      </p:sp>
-      <p:sp>
-        <p:nvSpPr>
-          <p:cNvPr id="112" name="Text 99"/>
-          <p:cNvSpPr/>
-          <p:nvPr/>
-        </p:nvSpPr>
-        <p:spPr>
-          <a:xfrm>
-            <a:off x="6153912" y="2468880"/>
-            <a:ext cx="3685032" cy="237744"/>
-          </a:xfrm>
-          <a:prstGeom prst="rect">
-            <a:avLst/>
-          </a:prstGeom>
-          <a:noFill/>
-          <a:ln/>
-        </p:spPr>
-        <p:txBody>
-          <a:bodyPr wrap="square" rtlCol="0" anchor="ctr"/>
-          <a:lstStyle/>
-          <a:p>
-            <a:pPr algn="ctr" indent="0" marL="0">
-              <a:buNone/>
-            </a:pPr>
-            <a:r>
-              <a:rPr lang="en-US" sz="700" b="1" dirty="0">
-                <a:solidFill>
-                  <a:srgbClr val="FFFFFF"/>
-                </a:solidFill>
-              </a:rPr>
-              <a:t>Data Sharing &amp; Marketplace</a:t>
-            </a:r>
-            <a:endParaRPr lang="en-US" sz="700" dirty="0"/>
-          </a:p>
-        </p:txBody>
-      </p:sp>
-      <p:sp>
-        <p:nvSpPr>
-          <p:cNvPr id="113" name="Shape 100"/>
-          <p:cNvSpPr/>
-          <p:nvPr/>
-        </p:nvSpPr>
-        <p:spPr>
-          <a:xfrm>
-            <a:off x="6153912" y="2706624"/>
-            <a:ext cx="3685032" cy="420624"/>
-          </a:xfrm>
-          <a:prstGeom prst="rect">
-            <a:avLst/>
-          </a:prstGeom>
-          <a:solidFill>
-            <a:srgbClr val="F2F2F2"/>
-          </a:solidFill>
-          <a:ln w="9525">
-            <a:solidFill>
-              <a:srgbClr val="CCCCCC"/>
-            </a:solidFill>
-            <a:prstDash val="solid"/>
-          </a:ln>
-        </p:spPr>
-      </p:sp>
-      <p:sp>
-        <p:nvSpPr>
-          <p:cNvPr id="114" name="Shape 101"/>
-          <p:cNvSpPr/>
-          <p:nvPr/>
-        </p:nvSpPr>
-        <p:spPr>
-          <a:xfrm>
-            <a:off x="6245352" y="2761488"/>
-            <a:ext cx="384048" cy="329184"/>
-          </a:xfrm>
-          <a:prstGeom prst="rect">
-            <a:avLst>
-              <a:gd name="adj" fmla="val 11111"/>
-            </a:avLst>
-          </a:prstGeom>
-          <a:solidFill>
-            <a:srgbClr val="EDE8F9"/>
-          </a:solidFill>
-          <a:ln w="6350">
-            <a:solidFill>
-              <a:srgbClr val="5D35B1"/>
-            </a:solidFill>
-            <a:prstDash val="solid"/>
-          </a:ln>
-        </p:spPr>
-      </p:sp>
-      <p:sp>
-        <p:nvSpPr>
-          <p:cNvPr id="115" name="Text 102"/>
-          <p:cNvSpPr/>
-          <p:nvPr/>
-        </p:nvSpPr>
-        <p:spPr>
-          <a:xfrm>
-            <a:off x="6245352" y="2761488"/>
-            <a:ext cx="384048" cy="329184"/>
-          </a:xfrm>
-          <a:prstGeom prst="rect">
-            <a:avLst/>
-          </a:prstGeom>
-          <a:noFill/>
-          <a:ln/>
-        </p:spPr>
-        <p:txBody>
-          <a:bodyPr wrap="square" rtlCol="0" anchor="ctr"/>
-          <a:lstStyle/>
-          <a:p>
-            <a:pPr algn="ctr" indent="0" marL="0">
-              <a:buNone/>
-            </a:pPr>
-            <a:r>
-              <a:rPr lang="en-US" sz="1300" dirty="0">
-                <a:solidFill>
-                  <a:srgbClr val="000000"/>
-                </a:solidFill>
-              </a:rPr>
-              <a:t>🔗</a:t>
-            </a:r>
-            <a:endParaRPr lang="en-US" sz="1300" dirty="0"/>
-          </a:p>
-        </p:txBody>
-      </p:sp>
-      <p:sp>
-        <p:nvSpPr>
-          <p:cNvPr id="116" name="Shape 103"/>
-          <p:cNvSpPr/>
-          <p:nvPr/>
-        </p:nvSpPr>
-        <p:spPr>
-          <a:xfrm>
-            <a:off x="6153912" y="3182112"/>
-            <a:ext cx="3685032" cy="237744"/>
-          </a:xfrm>
-          <a:prstGeom prst="rect">
-            <a:avLst/>
-          </a:prstGeom>
-          <a:solidFill>
-            <a:srgbClr val="2D1B69"/>
-          </a:solidFill>
-          <a:ln w="12700">
-            <a:solidFill>
-              <a:srgbClr val="2D1B69"/>
-            </a:solidFill>
-            <a:prstDash val="solid"/>
-          </a:ln>
-        </p:spPr>
-      </p:sp>
-      <p:sp>
-        <p:nvSpPr>
-          <p:cNvPr id="117" name="Text 104"/>
-          <p:cNvSpPr/>
-          <p:nvPr/>
-        </p:nvSpPr>
-        <p:spPr>
-          <a:xfrm>
-            <a:off x="6153912" y="3182112"/>
-            <a:ext cx="3685032" cy="237744"/>
-          </a:xfrm>
-          <a:prstGeom prst="rect">
-            <a:avLst/>
-          </a:prstGeom>
-          <a:noFill/>
-          <a:ln/>
-        </p:spPr>
-        <p:txBody>
-          <a:bodyPr wrap="square" rtlCol="0" anchor="ctr"/>
-          <a:lstStyle/>
-          <a:p>
-            <a:pPr algn="ctr" indent="0" marL="0">
-              <a:buNone/>
-            </a:pPr>
-            <a:r>
-              <a:rPr lang="en-US" sz="700" b="1" dirty="0">
-                <a:solidFill>
-                  <a:srgbClr val="FFFFFF"/>
-                </a:solidFill>
-              </a:rPr>
-              <a:t>AI Applications</a:t>
-            </a:r>
-            <a:endParaRPr lang="en-US" sz="700" dirty="0"/>
-          </a:p>
-        </p:txBody>
-      </p:sp>
-      <p:sp>
-        <p:nvSpPr>
-          <p:cNvPr id="118" name="Shape 105"/>
-          <p:cNvSpPr/>
-          <p:nvPr/>
-        </p:nvSpPr>
-        <p:spPr>
-          <a:xfrm>
-            <a:off x="6153912" y="3419856"/>
-            <a:ext cx="3685032" cy="420624"/>
-          </a:xfrm>
-          <a:prstGeom prst="rect">
-            <a:avLst/>
-          </a:prstGeom>
-          <a:solidFill>
-            <a:srgbClr val="F2F2F2"/>
-          </a:solidFill>
-          <a:ln w="9525">
-            <a:solidFill>
-              <a:srgbClr val="CCCCCC"/>
-            </a:solidFill>
-            <a:prstDash val="solid"/>
-          </a:ln>
-        </p:spPr>
-      </p:sp>
-      <p:sp>
-        <p:nvSpPr>
-          <p:cNvPr id="119" name="Shape 106"/>
-          <p:cNvSpPr/>
-          <p:nvPr/>
-        </p:nvSpPr>
-        <p:spPr>
-          <a:xfrm>
-            <a:off x="6245352" y="3474720"/>
-            <a:ext cx="384048" cy="329184"/>
-          </a:xfrm>
-          <a:prstGeom prst="rect">
-            <a:avLst>
-              <a:gd name="adj" fmla="val 11111"/>
-            </a:avLst>
-          </a:prstGeom>
-          <a:solidFill>
-            <a:srgbClr val="EDE8F9"/>
-          </a:solidFill>
-          <a:ln w="6350">
-            <a:solidFill>
-              <a:srgbClr val="5D35B1"/>
-            </a:solidFill>
-            <a:prstDash val="solid"/>
-          </a:ln>
-        </p:spPr>
-      </p:sp>
-      <p:sp>
-        <p:nvSpPr>
-          <p:cNvPr id="120" name="Text 107"/>
-          <p:cNvSpPr/>
-          <p:nvPr/>
-        </p:nvSpPr>
-        <p:spPr>
-          <a:xfrm>
-            <a:off x="6245352" y="3474720"/>
-            <a:ext cx="384048" cy="329184"/>
-          </a:xfrm>
-          <a:prstGeom prst="rect">
-            <a:avLst/>
-          </a:prstGeom>
-          <a:noFill/>
-          <a:ln/>
-        </p:spPr>
-        <p:txBody>
-          <a:bodyPr wrap="square" rtlCol="0" anchor="ctr"/>
-          <a:lstStyle/>
-          <a:p>
-            <a:pPr algn="ctr" indent="0" marL="0">
-              <a:buNone/>
-            </a:pPr>
-            <a:r>
-              <a:rPr lang="en-US" sz="1300" dirty="0">
-                <a:solidFill>
-                  <a:srgbClr val="000000"/>
-                </a:solidFill>
-              </a:rPr>
-              <a:t>🤖</a:t>
-            </a:r>
-            <a:endParaRPr lang="en-US" sz="1300" dirty="0"/>
-          </a:p>
-        </p:txBody>
-      </p:sp>
-      <p:sp>
-        <p:nvSpPr>
-          <p:cNvPr id="121" name="Shape 108"/>
-          <p:cNvSpPr/>
-          <p:nvPr/>
-        </p:nvSpPr>
-        <p:spPr>
-          <a:xfrm>
-            <a:off x="6153912" y="3895344"/>
-            <a:ext cx="3685032" cy="237744"/>
-          </a:xfrm>
-          <a:prstGeom prst="rect">
-            <a:avLst/>
-          </a:prstGeom>
-          <a:solidFill>
-            <a:srgbClr val="2D1B69"/>
-          </a:solidFill>
-          <a:ln w="12700">
-            <a:solidFill>
-              <a:srgbClr val="2D1B69"/>
-            </a:solidFill>
-            <a:prstDash val="solid"/>
-          </a:ln>
-        </p:spPr>
-      </p:sp>
-      <p:sp>
-        <p:nvSpPr>
-          <p:cNvPr id="122" name="Text 109"/>
-          <p:cNvSpPr/>
-          <p:nvPr/>
-        </p:nvSpPr>
-        <p:spPr>
-          <a:xfrm>
-            <a:off x="6153912" y="3895344"/>
-            <a:ext cx="3685032" cy="237744"/>
-          </a:xfrm>
-          <a:prstGeom prst="rect">
-            <a:avLst/>
-          </a:prstGeom>
-          <a:noFill/>
-          <a:ln/>
-        </p:spPr>
-        <p:txBody>
-          <a:bodyPr wrap="square" rtlCol="0" anchor="ctr"/>
-          <a:lstStyle/>
-          <a:p>
-            <a:pPr algn="ctr" indent="0" marL="0">
-              <a:buNone/>
-            </a:pPr>
-            <a:r>
-              <a:rPr lang="en-US" sz="700" b="1" dirty="0">
-                <a:solidFill>
-                  <a:srgbClr val="FFFFFF"/>
-                </a:solidFill>
-              </a:rPr>
-              <a:t>Apps</a:t>
-            </a:r>
-            <a:endParaRPr lang="en-US" sz="700" dirty="0"/>
-          </a:p>
-        </p:txBody>
-      </p:sp>
-      <p:sp>
-        <p:nvSpPr>
-          <p:cNvPr id="123" name="Shape 110"/>
-          <p:cNvSpPr/>
-          <p:nvPr/>
-        </p:nvSpPr>
-        <p:spPr>
-          <a:xfrm>
-            <a:off x="6153912" y="4133088"/>
-            <a:ext cx="3685032" cy="420624"/>
-          </a:xfrm>
-          <a:prstGeom prst="rect">
-            <a:avLst/>
-          </a:prstGeom>
-          <a:solidFill>
-            <a:srgbClr val="F2F2F2"/>
-          </a:solidFill>
-          <a:ln w="9525">
-            <a:solidFill>
-              <a:srgbClr val="CCCCCC"/>
-            </a:solidFill>
-            <a:prstDash val="solid"/>
-          </a:ln>
-        </p:spPr>
-      </p:sp>
-      <p:sp>
-        <p:nvSpPr>
-          <p:cNvPr id="124" name="Shape 111"/>
-          <p:cNvSpPr/>
-          <p:nvPr/>
-        </p:nvSpPr>
-        <p:spPr>
-          <a:xfrm>
-            <a:off x="6245352" y="4187952"/>
-            <a:ext cx="384048" cy="329184"/>
-          </a:xfrm>
-          <a:prstGeom prst="rect">
-            <a:avLst>
-              <a:gd name="adj" fmla="val 11111"/>
-            </a:avLst>
-          </a:prstGeom>
-          <a:solidFill>
-            <a:srgbClr val="EDE8F9"/>
-          </a:solidFill>
-          <a:ln w="6350">
-            <a:solidFill>
-              <a:srgbClr val="5D35B1"/>
-            </a:solidFill>
-            <a:prstDash val="solid"/>
-          </a:ln>
-        </p:spPr>
-      </p:sp>
-      <p:sp>
-        <p:nvSpPr>
-          <p:cNvPr id="125" name="Text 112"/>
-          <p:cNvSpPr/>
-          <p:nvPr/>
-        </p:nvSpPr>
-        <p:spPr>
-          <a:xfrm>
-            <a:off x="6245352" y="4187952"/>
-            <a:ext cx="384048" cy="329184"/>
-          </a:xfrm>
-          <a:prstGeom prst="rect">
-            <a:avLst/>
-          </a:prstGeom>
-          <a:noFill/>
-          <a:ln/>
-        </p:spPr>
-        <p:txBody>
-          <a:bodyPr wrap="square" rtlCol="0" anchor="ctr"/>
-          <a:lstStyle/>
-          <a:p>
-            <a:pPr algn="ctr" indent="0" marL="0">
-              <a:buNone/>
-            </a:pPr>
-            <a:r>
-              <a:rPr lang="en-US" sz="1300" dirty="0">
-                <a:solidFill>
-                  <a:srgbClr val="000000"/>
-                </a:solidFill>
-              </a:rPr>
-              <a:t>⚙️</a:t>
-            </a:r>
-            <a:endParaRPr lang="en-US" sz="1300" dirty="0"/>
-          </a:p>
-        </p:txBody>
-      </p:sp>
-      <p:sp>
-        <p:nvSpPr>
-          <p:cNvPr id="126" name="Shape 113"/>
-          <p:cNvSpPr/>
-          <p:nvPr/>
-        </p:nvSpPr>
-        <p:spPr>
-          <a:xfrm>
-            <a:off x="3703320" y="1463040"/>
-            <a:ext cx="128016" cy="0"/>
-          </a:xfrm>
-          <a:prstGeom prst="line">
-            <a:avLst/>
-          </a:prstGeom>
-          <a:noFill/>
-          <a:ln w="15240">
-            <a:solidFill>
-              <a:srgbClr val="1A1A1A"/>
-            </a:solidFill>
-            <a:prstDash val="solid"/>
-            <a:tailEnd type="arrow"/>
-          </a:ln>
-        </p:spPr>
-      </p:sp>
-      <p:sp>
-        <p:nvSpPr>
-          <p:cNvPr id="127" name="Shape 114"/>
-          <p:cNvSpPr/>
-          <p:nvPr/>
-        </p:nvSpPr>
-        <p:spPr>
-          <a:xfrm>
-            <a:off x="3703320" y="2871216"/>
-            <a:ext cx="128016" cy="0"/>
-          </a:xfrm>
-          <a:prstGeom prst="line">
-            <a:avLst/>
-          </a:prstGeom>
-          <a:noFill/>
-          <a:ln w="15240">
-            <a:solidFill>
-              <a:srgbClr val="1A1A1A"/>
-            </a:solidFill>
-            <a:prstDash val="solid"/>
-            <a:tailEnd type="arrow"/>
-          </a:ln>
-        </p:spPr>
-      </p:sp>
-      <p:sp>
-        <p:nvSpPr>
-          <p:cNvPr id="128" name="Shape 115"/>
-          <p:cNvSpPr/>
-          <p:nvPr/>
-        </p:nvSpPr>
-        <p:spPr>
-          <a:xfrm>
-            <a:off x="3703320" y="3913632"/>
-            <a:ext cx="128016" cy="0"/>
-          </a:xfrm>
-          <a:prstGeom prst="line">
-            <a:avLst/>
-          </a:prstGeom>
-          <a:noFill/>
-          <a:ln w="15240">
-            <a:solidFill>
-              <a:srgbClr val="1A1A1A"/>
-            </a:solidFill>
-            <a:prstDash val="solid"/>
-            <a:tailEnd type="arrow"/>
-          </a:ln>
-        </p:spPr>
-      </p:sp>
-      <p:sp>
-        <p:nvSpPr>
-          <p:cNvPr id="129" name="Shape 116"/>
-          <p:cNvSpPr/>
-          <p:nvPr/>
-        </p:nvSpPr>
-        <p:spPr>
-          <a:xfrm>
-            <a:off x="6025896" y="1371600"/>
-            <a:ext cx="128016" cy="0"/>
-          </a:xfrm>
-          <a:prstGeom prst="line">
-            <a:avLst/>
-          </a:prstGeom>
-          <a:noFill/>
-          <a:ln w="15240">
-            <a:solidFill>
-              <a:srgbClr val="1A1A1A"/>
-            </a:solidFill>
-            <a:prstDash val="solid"/>
-            <a:tailEnd type="arrow"/>
-          </a:ln>
-        </p:spPr>
-      </p:sp>
-      <p:sp>
-        <p:nvSpPr>
-          <p:cNvPr id="130" name="Shape 117"/>
-          <p:cNvSpPr/>
-          <p:nvPr/>
-        </p:nvSpPr>
-        <p:spPr>
-          <a:xfrm>
-            <a:off x="6025896" y="2084832"/>
-            <a:ext cx="128016" cy="0"/>
-          </a:xfrm>
-          <a:prstGeom prst="line">
-            <a:avLst/>
-          </a:prstGeom>
-          <a:noFill/>
-          <a:ln w="15240">
-            <a:solidFill>
-              <a:srgbClr val="1A1A1A"/>
-            </a:solidFill>
-            <a:prstDash val="solid"/>
-            <a:tailEnd type="arrow"/>
-          </a:ln>
-        </p:spPr>
-      </p:sp>
-      <p:sp>
-        <p:nvSpPr>
-          <p:cNvPr id="131" name="Shape 118"/>
-          <p:cNvSpPr/>
-          <p:nvPr/>
-        </p:nvSpPr>
-        <p:spPr>
-          <a:xfrm>
-            <a:off x="6025896" y="2798064"/>
-            <a:ext cx="128016" cy="0"/>
-          </a:xfrm>
-          <a:prstGeom prst="line">
-            <a:avLst/>
-          </a:prstGeom>
-          <a:noFill/>
-          <a:ln w="15240">
-            <a:solidFill>
-              <a:srgbClr val="1A1A1A"/>
-            </a:solidFill>
-            <a:prstDash val="solid"/>
-            <a:tailEnd type="arrow"/>
-          </a:ln>
-        </p:spPr>
-      </p:sp>
-      <p:sp>
-        <p:nvSpPr>
-          <p:cNvPr id="132" name="Shape 119"/>
-          <p:cNvSpPr/>
-          <p:nvPr/>
-        </p:nvSpPr>
-        <p:spPr>
-          <a:xfrm>
-            <a:off x="6025896" y="3511296"/>
-            <a:ext cx="128016" cy="0"/>
-          </a:xfrm>
-          <a:prstGeom prst="line">
-            <a:avLst/>
-          </a:prstGeom>
-          <a:noFill/>
-          <a:ln w="15240">
-            <a:solidFill>
-              <a:srgbClr val="1A1A1A"/>
-            </a:solidFill>
-            <a:prstDash val="solid"/>
-            <a:tailEnd type="arrow"/>
-          </a:ln>
-        </p:spPr>
-      </p:sp>
-      <p:sp>
-        <p:nvSpPr>
-          <p:cNvPr id="133" name="Shape 120"/>
-          <p:cNvSpPr/>
-          <p:nvPr/>
-        </p:nvSpPr>
-        <p:spPr>
-          <a:xfrm>
-            <a:off x="6025896" y="4224528"/>
-            <a:ext cx="128016" cy="0"/>
-          </a:xfrm>
-          <a:prstGeom prst="line">
-            <a:avLst/>
-          </a:prstGeom>
-          <a:noFill/>
-          <a:ln w="15240">
-            <a:solidFill>
-              <a:srgbClr val="1A1A1A"/>
-            </a:solidFill>
-            <a:prstDash val="solid"/>
-            <a:tailEnd type="arrow"/>
-          </a:ln>
-        </p:spPr>
-      </p:sp>
-      <p:sp>
-        <p:nvSpPr>
-          <p:cNvPr id="134" name="Shape 121"/>
-          <p:cNvSpPr/>
-          <p:nvPr/>
-        </p:nvSpPr>
-        <p:spPr>
-          <a:xfrm>
-            <a:off x="2212848" y="4754880"/>
-            <a:ext cx="7699248" cy="914400"/>
-          </a:xfrm>
-          <a:prstGeom prst="rect">
-            <a:avLst/>
-          </a:prstGeom>
-          <a:solidFill>
-            <a:srgbClr val="7030A0"/>
-          </a:solidFill>
-          <a:ln w="12700">
-            <a:solidFill>
-              <a:srgbClr val="7030A0"/>
-            </a:solidFill>
-            <a:prstDash val="solid"/>
-          </a:ln>
-        </p:spPr>
-      </p:sp>
-      <p:sp>
-        <p:nvSpPr>
-          <p:cNvPr id="135" name="Text 122"/>
-          <p:cNvSpPr/>
-          <p:nvPr/>
-        </p:nvSpPr>
-        <p:spPr>
-          <a:xfrm>
-            <a:off x="2212848" y="4791456"/>
-            <a:ext cx="7699248" cy="219456"/>
-          </a:xfrm>
-          <a:prstGeom prst="rect">
-            <a:avLst/>
-          </a:prstGeom>
-          <a:noFill/>
-          <a:ln/>
-        </p:spPr>
-        <p:txBody>
-          <a:bodyPr wrap="square" rtlCol="0" anchor="ctr"/>
-          <a:lstStyle/>
-          <a:p>
-            <a:pPr algn="ctr" indent="0" marL="0">
-              <a:buNone/>
-            </a:pPr>
-            <a:r>
-              <a:rPr lang="en-US" sz="900" b="1" dirty="0">
-                <a:solidFill>
-                  <a:srgbClr val="FFFFFF"/>
-                </a:solidFill>
-              </a:rPr>
-              <a:t>Unified, Open and Scalable Lakehouse</a:t>
-            </a:r>
-            <a:endParaRPr lang="en-US" sz="900" dirty="0"/>
-          </a:p>
-        </p:txBody>
-      </p:sp>
-      <p:sp>
-        <p:nvSpPr>
-          <p:cNvPr id="136" name="Shape 123"/>
-          <p:cNvSpPr/>
-          <p:nvPr/>
-        </p:nvSpPr>
-        <p:spPr>
-          <a:xfrm>
-            <a:off x="2304288" y="5029200"/>
-            <a:ext cx="3685032" cy="566928"/>
+          <p:cNvPr id="138" name="Text 125"/>
+          <p:cNvSpPr/>
+          <p:nvPr/>
+        </p:nvSpPr>
+        <p:spPr>
+          <a:xfrm>
+            <a:off x="3554730" y="5193792"/>
+            <a:ext cx="2464308" cy="256032"/>
+          </a:xfrm>
+          <a:prstGeom prst="rect">
+            <a:avLst/>
+          </a:prstGeom>
+          <a:noFill/>
+          <a:ln/>
+        </p:spPr>
+        <p:txBody>
+          <a:bodyPr wrap="square" rtlCol="0" anchor="ctr"/>
+          <a:lstStyle/>
+          <a:p>
+            <a:pPr indent="0" marL="0">
+              <a:buNone/>
+            </a:pPr>
+            <a:r>
+              <a:rPr lang="en-US" sz="1000" b="1" dirty="0">
+                <a:solidFill>
+                  <a:srgbClr val="5D35B1"/>
+                </a:solidFill>
+              </a:rPr>
+              <a:t>Unity Catalog</a:t>
+            </a:r>
+            <a:endParaRPr lang="en-US" sz="1000" dirty="0"/>
+          </a:p>
+        </p:txBody>
+      </p:sp>
+      <p:sp>
+        <p:nvSpPr>
+          <p:cNvPr id="139" name="Shape 126"/>
+          <p:cNvSpPr/>
+          <p:nvPr/>
+        </p:nvSpPr>
+        <p:spPr>
+          <a:xfrm>
+            <a:off x="5298948" y="5029200"/>
+            <a:ext cx="2848356" cy="566928"/>
           </a:xfrm>
           <a:prstGeom prst="rect">
             <a:avLst>
@@ -5021,14 +5120,14 @@
       </p:sp>
       <p:sp>
         <p:nvSpPr>
-          <p:cNvPr id="137" name="Text 124"/>
-          <p:cNvSpPr/>
-          <p:nvPr/>
-        </p:nvSpPr>
-        <p:spPr>
-          <a:xfrm>
-            <a:off x="2322576" y="5029200"/>
-            <a:ext cx="3648456" cy="164592"/>
+          <p:cNvPr id="140" name="Text 127"/>
+          <p:cNvSpPr/>
+          <p:nvPr/>
+        </p:nvSpPr>
+        <p:spPr>
+          <a:xfrm>
+            <a:off x="5317236" y="5029200"/>
+            <a:ext cx="2811780" cy="164592"/>
           </a:xfrm>
           <a:prstGeom prst="rect">
             <a:avLst/>
@@ -5049,144 +5148,21 @@
                   <a:srgbClr val="1A1A1A"/>
                 </a:solidFill>
               </a:rPr>
-              <a:t>Governance, Security, Observability, Interoperability, Sharing</a:t>
+              <a:t>Universal, Open Storage</a:t>
             </a:r>
             <a:endParaRPr lang="en-US" sz="550" dirty="0"/>
           </a:p>
         </p:txBody>
       </p:sp>
-      <p:pic>
-        <p:nvPicPr>
-          <p:cNvPr id="138" name="Image 11" descr="preencoded.png">    </p:cNvPr>
-          <p:cNvPicPr>
-            <a:picLocks noChangeAspect="1"/>
-          </p:cNvPicPr>
-          <p:nvPr/>
-        </p:nvPicPr>
-        <p:blipFill>
-          <a:blip r:embed="rId15"/>
-          <a:stretch>
-            <a:fillRect/>
-          </a:stretch>
-        </p:blipFill>
-        <p:spPr>
-          <a:xfrm>
-            <a:off x="3735324" y="5212080"/>
-            <a:ext cx="201168" cy="201168"/>
-          </a:xfrm>
-          <a:prstGeom prst="rect">
-            <a:avLst/>
-          </a:prstGeom>
-        </p:spPr>
-      </p:pic>
-      <p:sp>
-        <p:nvSpPr>
-          <p:cNvPr id="139" name="Text 125"/>
-          <p:cNvSpPr/>
-          <p:nvPr/>
-        </p:nvSpPr>
-        <p:spPr>
-          <a:xfrm>
-            <a:off x="3973068" y="5193792"/>
-            <a:ext cx="3300984" cy="256032"/>
-          </a:xfrm>
-          <a:prstGeom prst="rect">
-            <a:avLst/>
-          </a:prstGeom>
-          <a:noFill/>
-          <a:ln/>
-        </p:spPr>
-        <p:txBody>
-          <a:bodyPr wrap="square" rtlCol="0" anchor="ctr"/>
-          <a:lstStyle/>
-          <a:p>
-            <a:pPr indent="0" marL="0">
-              <a:buNone/>
-            </a:pPr>
-            <a:r>
-              <a:rPr lang="en-US" sz="1000" b="1" dirty="0">
-                <a:solidFill>
-                  <a:srgbClr val="5D35B1"/>
-                </a:solidFill>
-              </a:rPr>
-              <a:t>Unity Catalog</a:t>
-            </a:r>
-            <a:endParaRPr lang="en-US" sz="1000" dirty="0"/>
-          </a:p>
-        </p:txBody>
-      </p:sp>
-      <p:sp>
-        <p:nvSpPr>
-          <p:cNvPr id="140" name="Shape 126"/>
-          <p:cNvSpPr/>
-          <p:nvPr/>
-        </p:nvSpPr>
-        <p:spPr>
-          <a:xfrm>
-            <a:off x="6135624" y="5029200"/>
-            <a:ext cx="3685032" cy="566928"/>
-          </a:xfrm>
-          <a:prstGeom prst="rect">
-            <a:avLst>
-              <a:gd name="adj" fmla="val 8065"/>
-            </a:avLst>
-          </a:prstGeom>
-          <a:solidFill>
-            <a:srgbClr val="FFFFFF"/>
-          </a:solidFill>
-          <a:ln w="12700">
-            <a:solidFill>
-              <a:srgbClr val="FFFFFF"/>
-            </a:solidFill>
-            <a:prstDash val="solid"/>
-          </a:ln>
-        </p:spPr>
-      </p:sp>
-      <p:sp>
-        <p:nvSpPr>
-          <p:cNvPr id="141" name="Text 127"/>
-          <p:cNvSpPr/>
-          <p:nvPr/>
-        </p:nvSpPr>
-        <p:spPr>
-          <a:xfrm>
-            <a:off x="6153912" y="5029200"/>
-            <a:ext cx="3648456" cy="164592"/>
-          </a:xfrm>
-          <a:prstGeom prst="rect">
-            <a:avLst/>
-          </a:prstGeom>
-          <a:noFill/>
-          <a:ln/>
-        </p:spPr>
-        <p:txBody>
-          <a:bodyPr wrap="square" rtlCol="0" anchor="ctr"/>
-          <a:lstStyle/>
-          <a:p>
-            <a:pPr algn="ctr" indent="0" marL="0">
-              <a:buNone/>
-            </a:pPr>
-            <a:r>
-              <a:rPr lang="en-US" sz="550" dirty="0">
-                <a:solidFill>
-                  <a:srgbClr val="1A1A1A"/>
-                </a:solidFill>
-              </a:rPr>
-              <a:t>Universal, Open Storage</a:t>
-            </a:r>
-            <a:endParaRPr lang="en-US" sz="550" dirty="0"/>
-          </a:p>
-        </p:txBody>
-      </p:sp>
-      <p:sp>
-        <p:nvSpPr>
-          <p:cNvPr id="142" name="Shape 128"/>
-          <p:cNvSpPr/>
-          <p:nvPr/>
-        </p:nvSpPr>
-        <p:spPr>
-          <a:xfrm>
-            <a:off x="6227064" y="5230368"/>
+      <p:sp>
+        <p:nvSpPr>
+          <p:cNvPr id="141" name="Shape 128"/>
+          <p:cNvSpPr/>
+          <p:nvPr/>
+        </p:nvSpPr>
+        <p:spPr>
+          <a:xfrm>
+            <a:off x="5390388" y="5230368"/>
             <a:ext cx="1170432" cy="274320"/>
           </a:xfrm>
           <a:prstGeom prst="rect">
@@ -5207,13 +5183,13 @@
       </p:sp>
       <p:sp>
         <p:nvSpPr>
-          <p:cNvPr id="143" name="Text 129"/>
-          <p:cNvSpPr/>
-          <p:nvPr/>
-        </p:nvSpPr>
-        <p:spPr>
-          <a:xfrm>
-            <a:off x="6227064" y="5230368"/>
+          <p:cNvPr id="142" name="Text 129"/>
+          <p:cNvSpPr/>
+          <p:nvPr/>
+        </p:nvSpPr>
+        <p:spPr>
+          <a:xfrm>
+            <a:off x="5390388" y="5230368"/>
             <a:ext cx="1170432" cy="274320"/>
           </a:xfrm>
           <a:prstGeom prst="rect">
@@ -5243,13 +5219,13 @@
       </p:sp>
       <p:sp>
         <p:nvSpPr>
-          <p:cNvPr id="144" name="Shape 130"/>
-          <p:cNvSpPr/>
-          <p:nvPr/>
-        </p:nvSpPr>
-        <p:spPr>
-          <a:xfrm>
-            <a:off x="7525512" y="5230368"/>
+          <p:cNvPr id="143" name="Shape 130"/>
+          <p:cNvSpPr/>
+          <p:nvPr/>
+        </p:nvSpPr>
+        <p:spPr>
+          <a:xfrm>
+            <a:off x="6688836" y="5230368"/>
             <a:ext cx="1170432" cy="274320"/>
           </a:xfrm>
           <a:prstGeom prst="rect">
@@ -5270,13 +5246,13 @@
       </p:sp>
       <p:sp>
         <p:nvSpPr>
-          <p:cNvPr id="145" name="Text 131"/>
-          <p:cNvSpPr/>
-          <p:nvPr/>
-        </p:nvSpPr>
-        <p:spPr>
-          <a:xfrm>
-            <a:off x="7525512" y="5230368"/>
+          <p:cNvPr id="144" name="Text 131"/>
+          <p:cNvSpPr/>
+          <p:nvPr/>
+        </p:nvSpPr>
+        <p:spPr>
+          <a:xfrm>
+            <a:off x="6688836" y="5230368"/>
             <a:ext cx="1170432" cy="274320"/>
           </a:xfrm>
           <a:prstGeom prst="rect">
@@ -5306,13 +5282,13 @@
       </p:sp>
       <p:sp>
         <p:nvSpPr>
-          <p:cNvPr id="146" name="Shape 132"/>
-          <p:cNvSpPr/>
-          <p:nvPr/>
-        </p:nvSpPr>
-        <p:spPr>
-          <a:xfrm>
-            <a:off x="8823960" y="5230368"/>
+          <p:cNvPr id="145" name="Shape 132"/>
+          <p:cNvSpPr/>
+          <p:nvPr/>
+        </p:nvSpPr>
+        <p:spPr>
+          <a:xfrm>
+            <a:off x="7987284" y="5230368"/>
             <a:ext cx="1170432" cy="274320"/>
           </a:xfrm>
           <a:prstGeom prst="rect">
@@ -5333,13 +5309,13 @@
       </p:sp>
       <p:sp>
         <p:nvSpPr>
-          <p:cNvPr id="147" name="Text 133"/>
-          <p:cNvSpPr/>
-          <p:nvPr/>
-        </p:nvSpPr>
-        <p:spPr>
-          <a:xfrm>
-            <a:off x="8823960" y="5230368"/>
+          <p:cNvPr id="146" name="Text 133"/>
+          <p:cNvSpPr/>
+          <p:nvPr/>
+        </p:nvSpPr>
+        <p:spPr>
+          <a:xfrm>
+            <a:off x="7987284" y="5230368"/>
             <a:ext cx="1170432" cy="274320"/>
           </a:xfrm>
           <a:prstGeom prst="rect">
@@ -5369,13 +5345,13 @@
       </p:sp>
       <p:sp>
         <p:nvSpPr>
-          <p:cNvPr id="148" name="Shape 134"/>
-          <p:cNvSpPr/>
-          <p:nvPr/>
-        </p:nvSpPr>
-        <p:spPr>
-          <a:xfrm>
-            <a:off x="9957816" y="1371600"/>
+          <p:cNvPr id="147" name="Shape 134"/>
+          <p:cNvSpPr/>
+          <p:nvPr/>
+        </p:nvSpPr>
+        <p:spPr>
+          <a:xfrm>
+            <a:off x="8284464" y="1371600"/>
             <a:ext cx="137160" cy="0"/>
           </a:xfrm>
           <a:prstGeom prst="line">
@@ -5393,14 +5369,14 @@
       </p:sp>
       <p:sp>
         <p:nvSpPr>
-          <p:cNvPr id="149" name="Shape 135"/>
-          <p:cNvSpPr/>
-          <p:nvPr/>
-        </p:nvSpPr>
-        <p:spPr>
-          <a:xfrm>
-            <a:off x="10094976" y="1161288"/>
-            <a:ext cx="1883664" cy="420624"/>
+          <p:cNvPr id="148" name="Shape 135"/>
+          <p:cNvSpPr/>
+          <p:nvPr/>
+        </p:nvSpPr>
+        <p:spPr>
+          <a:xfrm>
+            <a:off x="8421624" y="1161288"/>
+            <a:ext cx="3557016" cy="420624"/>
           </a:xfrm>
           <a:prstGeom prst="rect">
             <a:avLst>
@@ -5420,14 +5396,14 @@
       </p:sp>
       <p:sp>
         <p:nvSpPr>
-          <p:cNvPr id="150" name="Text 136"/>
-          <p:cNvSpPr/>
-          <p:nvPr/>
-        </p:nvSpPr>
-        <p:spPr>
-          <a:xfrm>
-            <a:off x="10168128" y="1161288"/>
-            <a:ext cx="1792224" cy="420624"/>
+          <p:cNvPr id="149" name="Text 136"/>
+          <p:cNvSpPr/>
+          <p:nvPr/>
+        </p:nvSpPr>
+        <p:spPr>
+          <a:xfrm>
+            <a:off x="8494776" y="1161288"/>
+            <a:ext cx="3465576" cy="420624"/>
           </a:xfrm>
           <a:prstGeom prst="rect">
             <a:avLst/>
@@ -5448,35 +5424,21 @@
                   <a:srgbClr val="1A1A1A"/>
                 </a:solidFill>
               </a:rPr>
-              <a:t>Customer</a:t>
+              <a:t>Use Case 1</a:t>
             </a:r>
             <a:endParaRPr lang="en-US" sz="650" dirty="0"/>
           </a:p>
-          <a:p>
-            <a:pPr algn="l" indent="0" marL="0">
-              <a:buNone/>
-            </a:pPr>
-            <a:r>
-              <a:rPr lang="en-US" sz="650" b="1" dirty="0">
-                <a:solidFill>
-                  <a:srgbClr val="1A1A1A"/>
-                </a:solidFill>
-              </a:rPr>
-              <a:t>Churn Prediction</a:t>
-            </a:r>
-            <a:endParaRPr lang="en-US" sz="650" dirty="0"/>
-          </a:p>
-        </p:txBody>
-      </p:sp>
-      <p:sp>
-        <p:nvSpPr>
-          <p:cNvPr id="151" name="Shape 137"/>
-          <p:cNvSpPr/>
-          <p:nvPr/>
-        </p:nvSpPr>
-        <p:spPr>
-          <a:xfrm>
-            <a:off x="9957816" y="2084832"/>
+        </p:txBody>
+      </p:sp>
+      <p:sp>
+        <p:nvSpPr>
+          <p:cNvPr id="150" name="Shape 137"/>
+          <p:cNvSpPr/>
+          <p:nvPr/>
+        </p:nvSpPr>
+        <p:spPr>
+          <a:xfrm>
+            <a:off x="8284464" y="2084832"/>
             <a:ext cx="137160" cy="0"/>
           </a:xfrm>
           <a:prstGeom prst="line">
@@ -5494,14 +5456,14 @@
       </p:sp>
       <p:sp>
         <p:nvSpPr>
-          <p:cNvPr id="152" name="Shape 138"/>
-          <p:cNvSpPr/>
-          <p:nvPr/>
-        </p:nvSpPr>
-        <p:spPr>
-          <a:xfrm>
-            <a:off x="10094976" y="1874520"/>
-            <a:ext cx="1883664" cy="420624"/>
+          <p:cNvPr id="151" name="Shape 138"/>
+          <p:cNvSpPr/>
+          <p:nvPr/>
+        </p:nvSpPr>
+        <p:spPr>
+          <a:xfrm>
+            <a:off x="8421624" y="1874520"/>
+            <a:ext cx="3557016" cy="420624"/>
           </a:xfrm>
           <a:prstGeom prst="rect">
             <a:avLst>
@@ -5521,14 +5483,14 @@
       </p:sp>
       <p:sp>
         <p:nvSpPr>
-          <p:cNvPr id="153" name="Text 139"/>
-          <p:cNvSpPr/>
-          <p:nvPr/>
-        </p:nvSpPr>
-        <p:spPr>
-          <a:xfrm>
-            <a:off x="10168128" y="1874520"/>
-            <a:ext cx="1792224" cy="420624"/>
+          <p:cNvPr id="152" name="Text 139"/>
+          <p:cNvSpPr/>
+          <p:nvPr/>
+        </p:nvSpPr>
+        <p:spPr>
+          <a:xfrm>
+            <a:off x="8494776" y="1874520"/>
+            <a:ext cx="3465576" cy="420624"/>
           </a:xfrm>
           <a:prstGeom prst="rect">
             <a:avLst/>
@@ -5549,35 +5511,21 @@
                   <a:srgbClr val="1A1A1A"/>
                 </a:solidFill>
               </a:rPr>
-              <a:t>Customer</a:t>
+              <a:t>Use Case 2</a:t>
             </a:r>
             <a:endParaRPr lang="en-US" sz="650" dirty="0"/>
           </a:p>
-          <a:p>
-            <a:pPr algn="l" indent="0" marL="0">
-              <a:buNone/>
-            </a:pPr>
-            <a:r>
-              <a:rPr lang="en-US" sz="650" b="1" dirty="0">
-                <a:solidFill>
-                  <a:srgbClr val="1A1A1A"/>
-                </a:solidFill>
-              </a:rPr>
-              <a:t>Segmentation</a:t>
-            </a:r>
-            <a:endParaRPr lang="en-US" sz="650" dirty="0"/>
-          </a:p>
-        </p:txBody>
-      </p:sp>
-      <p:sp>
-        <p:nvSpPr>
-          <p:cNvPr id="154" name="Shape 140"/>
-          <p:cNvSpPr/>
-          <p:nvPr/>
-        </p:nvSpPr>
-        <p:spPr>
-          <a:xfrm>
-            <a:off x="9957816" y="2798064"/>
+        </p:txBody>
+      </p:sp>
+      <p:sp>
+        <p:nvSpPr>
+          <p:cNvPr id="153" name="Shape 140"/>
+          <p:cNvSpPr/>
+          <p:nvPr/>
+        </p:nvSpPr>
+        <p:spPr>
+          <a:xfrm>
+            <a:off x="8284464" y="2798064"/>
             <a:ext cx="137160" cy="0"/>
           </a:xfrm>
           <a:prstGeom prst="line">
@@ -5595,14 +5543,14 @@
       </p:sp>
       <p:sp>
         <p:nvSpPr>
-          <p:cNvPr id="155" name="Shape 141"/>
-          <p:cNvSpPr/>
-          <p:nvPr/>
-        </p:nvSpPr>
-        <p:spPr>
-          <a:xfrm>
-            <a:off x="10094976" y="2587752"/>
-            <a:ext cx="1883664" cy="420624"/>
+          <p:cNvPr id="154" name="Shape 141"/>
+          <p:cNvSpPr/>
+          <p:nvPr/>
+        </p:nvSpPr>
+        <p:spPr>
+          <a:xfrm>
+            <a:off x="8421624" y="2587752"/>
+            <a:ext cx="3557016" cy="420624"/>
           </a:xfrm>
           <a:prstGeom prst="rect">
             <a:avLst>
@@ -5622,14 +5570,14 @@
       </p:sp>
       <p:sp>
         <p:nvSpPr>
-          <p:cNvPr id="156" name="Text 142"/>
-          <p:cNvSpPr/>
-          <p:nvPr/>
-        </p:nvSpPr>
-        <p:spPr>
-          <a:xfrm>
-            <a:off x="10168128" y="2587752"/>
-            <a:ext cx="1792224" cy="420624"/>
+          <p:cNvPr id="155" name="Text 142"/>
+          <p:cNvSpPr/>
+          <p:nvPr/>
+        </p:nvSpPr>
+        <p:spPr>
+          <a:xfrm>
+            <a:off x="8494776" y="2587752"/>
+            <a:ext cx="3465576" cy="420624"/>
           </a:xfrm>
           <a:prstGeom prst="rect">
             <a:avLst/>
@@ -5650,7 +5598,7 @@
                   <a:srgbClr val="1A1A1A"/>
                 </a:solidFill>
               </a:rPr>
-              <a:t>HR Analytics</a:t>
+              <a:t>Use Case 3</a:t>
             </a:r>
             <a:endParaRPr lang="en-US" sz="650" dirty="0"/>
           </a:p>
@@ -5658,13 +5606,13 @@
       </p:sp>
       <p:sp>
         <p:nvSpPr>
-          <p:cNvPr id="157" name="Shape 143"/>
-          <p:cNvSpPr/>
-          <p:nvPr/>
-        </p:nvSpPr>
-        <p:spPr>
-          <a:xfrm>
-            <a:off x="9957816" y="3511296"/>
+          <p:cNvPr id="156" name="Shape 143"/>
+          <p:cNvSpPr/>
+          <p:nvPr/>
+        </p:nvSpPr>
+        <p:spPr>
+          <a:xfrm>
+            <a:off x="8284464" y="3511296"/>
             <a:ext cx="137160" cy="0"/>
           </a:xfrm>
           <a:prstGeom prst="line">
@@ -5682,14 +5630,14 @@
       </p:sp>
       <p:sp>
         <p:nvSpPr>
-          <p:cNvPr id="158" name="Shape 144"/>
-          <p:cNvSpPr/>
-          <p:nvPr/>
-        </p:nvSpPr>
-        <p:spPr>
-          <a:xfrm>
-            <a:off x="10094976" y="3300984"/>
-            <a:ext cx="1883664" cy="420624"/>
+          <p:cNvPr id="157" name="Shape 144"/>
+          <p:cNvSpPr/>
+          <p:nvPr/>
+        </p:nvSpPr>
+        <p:spPr>
+          <a:xfrm>
+            <a:off x="8421624" y="3300984"/>
+            <a:ext cx="3557016" cy="420624"/>
           </a:xfrm>
           <a:prstGeom prst="rect">
             <a:avLst>
@@ -5709,14 +5657,14 @@
       </p:sp>
       <p:sp>
         <p:nvSpPr>
-          <p:cNvPr id="159" name="Text 145"/>
-          <p:cNvSpPr/>
-          <p:nvPr/>
-        </p:nvSpPr>
-        <p:spPr>
-          <a:xfrm>
-            <a:off x="10168128" y="3300984"/>
-            <a:ext cx="1792224" cy="420624"/>
+          <p:cNvPr id="158" name="Text 145"/>
+          <p:cNvSpPr/>
+          <p:nvPr/>
+        </p:nvSpPr>
+        <p:spPr>
+          <a:xfrm>
+            <a:off x="8494776" y="3300984"/>
+            <a:ext cx="3465576" cy="420624"/>
           </a:xfrm>
           <a:prstGeom prst="rect">
             <a:avLst/>
@@ -5737,35 +5685,21 @@
                   <a:srgbClr val="1A1A1A"/>
                 </a:solidFill>
               </a:rPr>
-              <a:t>Operational</a:t>
+              <a:t>Use Case 4</a:t>
             </a:r>
             <a:endParaRPr lang="en-US" sz="650" dirty="0"/>
           </a:p>
-          <a:p>
-            <a:pPr algn="l" indent="0" marL="0">
-              <a:buNone/>
-            </a:pPr>
-            <a:r>
-              <a:rPr lang="en-US" sz="650" b="1" dirty="0">
-                <a:solidFill>
-                  <a:srgbClr val="1A1A1A"/>
-                </a:solidFill>
-              </a:rPr>
-              <a:t>Dashboards</a:t>
-            </a:r>
-            <a:endParaRPr lang="en-US" sz="650" dirty="0"/>
-          </a:p>
-        </p:txBody>
-      </p:sp>
-      <p:sp>
-        <p:nvSpPr>
-          <p:cNvPr id="160" name="Shape 146"/>
-          <p:cNvSpPr/>
-          <p:nvPr/>
-        </p:nvSpPr>
-        <p:spPr>
-          <a:xfrm>
-            <a:off x="9957816" y="4224528"/>
+        </p:txBody>
+      </p:sp>
+      <p:sp>
+        <p:nvSpPr>
+          <p:cNvPr id="159" name="Shape 146"/>
+          <p:cNvSpPr/>
+          <p:nvPr/>
+        </p:nvSpPr>
+        <p:spPr>
+          <a:xfrm>
+            <a:off x="8284464" y="4224528"/>
             <a:ext cx="137160" cy="0"/>
           </a:xfrm>
           <a:prstGeom prst="line">
@@ -5783,14 +5717,14 @@
       </p:sp>
       <p:sp>
         <p:nvSpPr>
-          <p:cNvPr id="161" name="Shape 147"/>
-          <p:cNvSpPr/>
-          <p:nvPr/>
-        </p:nvSpPr>
-        <p:spPr>
-          <a:xfrm>
-            <a:off x="10094976" y="4014216"/>
-            <a:ext cx="1883664" cy="420624"/>
+          <p:cNvPr id="160" name="Shape 147"/>
+          <p:cNvSpPr/>
+          <p:nvPr/>
+        </p:nvSpPr>
+        <p:spPr>
+          <a:xfrm>
+            <a:off x="8421624" y="4014216"/>
+            <a:ext cx="3557016" cy="420624"/>
           </a:xfrm>
           <a:prstGeom prst="rect">
             <a:avLst>
@@ -5810,14 +5744,14 @@
       </p:sp>
       <p:sp>
         <p:nvSpPr>
-          <p:cNvPr id="162" name="Text 148"/>
-          <p:cNvSpPr/>
-          <p:nvPr/>
-        </p:nvSpPr>
-        <p:spPr>
-          <a:xfrm>
-            <a:off x="10168128" y="4014216"/>
-            <a:ext cx="1792224" cy="420624"/>
+          <p:cNvPr id="161" name="Text 148"/>
+          <p:cNvSpPr/>
+          <p:nvPr/>
+        </p:nvSpPr>
+        <p:spPr>
+          <a:xfrm>
+            <a:off x="8494776" y="4014216"/>
+            <a:ext cx="3465576" cy="420624"/>
           </a:xfrm>
           <a:prstGeom prst="rect">
             <a:avLst/>
@@ -5838,29 +5772,15 @@
                   <a:srgbClr val="1A1A1A"/>
                 </a:solidFill>
               </a:rPr>
-              <a:t>Risk Assessment</a:t>
+              <a:t>Use Case 5</a:t>
             </a:r>
             <a:endParaRPr lang="en-US" sz="650" dirty="0"/>
           </a:p>
-          <a:p>
-            <a:pPr algn="l" indent="0" marL="0">
-              <a:buNone/>
-            </a:pPr>
-            <a:r>
-              <a:rPr lang="en-US" sz="650" b="1" dirty="0">
-                <a:solidFill>
-                  <a:srgbClr val="1A1A1A"/>
-                </a:solidFill>
-              </a:rPr>
-              <a:t>&amp; Optimization</a:t>
-            </a:r>
-            <a:endParaRPr lang="en-US" sz="650" dirty="0"/>
-          </a:p>
-        </p:txBody>
-      </p:sp>
-      <p:sp>
-        <p:nvSpPr>
-          <p:cNvPr id="163" name="Text 149"/>
+        </p:txBody>
+      </p:sp>
+      <p:sp>
+        <p:nvSpPr>
+          <p:cNvPr id="162" name="Text 149"/>
           <p:cNvSpPr/>
           <p:nvPr/>
         </p:nvSpPr>
@@ -5896,7 +5816,7 @@
       </p:sp>
       <p:sp>
         <p:nvSpPr>
-          <p:cNvPr id="164" name="Text 150"/>
+          <p:cNvPr id="163" name="Text 150"/>
           <p:cNvSpPr/>
           <p:nvPr/>
         </p:nvSpPr>

--- a/DataIntelligencePlatform.pptx
+++ b/DataIntelligencePlatform.pptx
@@ -981,7 +981,7 @@
         <p:spPr>
           <a:xfrm>
             <a:off x="73152" y="667512"/>
-            <a:ext cx="1920240" cy="1353312"/>
+            <a:ext cx="1920240" cy="886968"/>
           </a:xfrm>
           <a:prstGeom prst="rect">
             <a:avLst/>
@@ -1261,7 +1261,7 @@
         </p:nvSpPr>
         <p:spPr>
           <a:xfrm>
-            <a:off x="73152" y="2075688"/>
+            <a:off x="73152" y="1609344"/>
             <a:ext cx="1920240" cy="228600"/>
           </a:xfrm>
           <a:prstGeom prst="rect">
@@ -1286,7 +1286,7 @@
         </p:nvSpPr>
         <p:spPr>
           <a:xfrm>
-            <a:off x="73152" y="2075688"/>
+            <a:off x="73152" y="1609344"/>
             <a:ext cx="1920240" cy="228600"/>
           </a:xfrm>
           <a:prstGeom prst="rect">
@@ -1322,8 +1322,8 @@
         </p:nvSpPr>
         <p:spPr>
           <a:xfrm>
-            <a:off x="73152" y="2304288"/>
-            <a:ext cx="1920240" cy="932688"/>
+            <a:off x="73152" y="1837944"/>
+            <a:ext cx="1920240" cy="758952"/>
           </a:xfrm>
           <a:prstGeom prst="rect">
             <a:avLst/>
@@ -1347,7 +1347,7 @@
         </p:nvSpPr>
         <p:spPr>
           <a:xfrm>
-            <a:off x="118872" y="2359152"/>
+            <a:off x="118872" y="1892808"/>
             <a:ext cx="609600" cy="420624"/>
           </a:xfrm>
           <a:prstGeom prst="rect">
@@ -1397,7 +1397,7 @@
         </p:blipFill>
         <p:spPr>
           <a:xfrm>
-            <a:off x="859536" y="2395728"/>
+            <a:off x="859536" y="1929384"/>
             <a:ext cx="347472" cy="347472"/>
           </a:xfrm>
           <a:prstGeom prst="rect">
@@ -1413,7 +1413,7 @@
         </p:nvSpPr>
         <p:spPr>
           <a:xfrm>
-            <a:off x="1338072" y="2359152"/>
+            <a:off x="1338072" y="1892808"/>
             <a:ext cx="609600" cy="420624"/>
           </a:xfrm>
           <a:prstGeom prst="rect">
@@ -1463,7 +1463,7 @@
         </p:blipFill>
         <p:spPr>
           <a:xfrm>
-            <a:off x="249936" y="2816352"/>
+            <a:off x="249936" y="2350008"/>
             <a:ext cx="347472" cy="347472"/>
           </a:xfrm>
           <a:prstGeom prst="rect">
@@ -1487,7 +1487,7 @@
         </p:blipFill>
         <p:spPr>
           <a:xfrm>
-            <a:off x="859536" y="2816352"/>
+            <a:off x="859536" y="2350008"/>
             <a:ext cx="347472" cy="347472"/>
           </a:xfrm>
           <a:prstGeom prst="rect">
@@ -1503,7 +1503,7 @@
         </p:nvSpPr>
         <p:spPr>
           <a:xfrm>
-            <a:off x="1338072" y="2779776"/>
+            <a:off x="1338072" y="2313432"/>
             <a:ext cx="609600" cy="420624"/>
           </a:xfrm>
           <a:prstGeom prst="rect">
@@ -1539,7 +1539,7 @@
         </p:nvSpPr>
         <p:spPr>
           <a:xfrm>
-            <a:off x="73152" y="3291840"/>
+            <a:off x="73152" y="2651760"/>
             <a:ext cx="1920240" cy="228600"/>
           </a:xfrm>
           <a:prstGeom prst="rect">
@@ -1564,7 +1564,7 @@
         </p:nvSpPr>
         <p:spPr>
           <a:xfrm>
-            <a:off x="73152" y="3291840"/>
+            <a:off x="73152" y="2651760"/>
             <a:ext cx="1920240" cy="228600"/>
           </a:xfrm>
           <a:prstGeom prst="rect">
@@ -1600,8 +1600,8 @@
         </p:nvSpPr>
         <p:spPr>
           <a:xfrm>
-            <a:off x="73152" y="3520440"/>
-            <a:ext cx="1920240" cy="932688"/>
+            <a:off x="73152" y="2880360"/>
+            <a:ext cx="1920240" cy="594360"/>
           </a:xfrm>
           <a:prstGeom prst="rect">
             <a:avLst/>
@@ -1625,7 +1625,7 @@
         </p:nvSpPr>
         <p:spPr>
           <a:xfrm>
-            <a:off x="118872" y="3575304"/>
+            <a:off x="118872" y="2935224"/>
             <a:ext cx="609600" cy="420624"/>
           </a:xfrm>
           <a:prstGeom prst="rect">
@@ -1661,7 +1661,7 @@
         </p:nvSpPr>
         <p:spPr>
           <a:xfrm>
-            <a:off x="728472" y="3575304"/>
+            <a:off x="728472" y="2935224"/>
             <a:ext cx="609600" cy="420624"/>
           </a:xfrm>
           <a:prstGeom prst="rect">
@@ -1711,7 +1711,7 @@
         </p:blipFill>
         <p:spPr>
           <a:xfrm>
-            <a:off x="1469136" y="3611880"/>
+            <a:off x="1469136" y="2971800"/>
             <a:ext cx="347472" cy="347472"/>
           </a:xfrm>
           <a:prstGeom prst="rect">
@@ -1727,7 +1727,7 @@
         </p:nvSpPr>
         <p:spPr>
           <a:xfrm>
-            <a:off x="118872" y="3995928"/>
+            <a:off x="118872" y="3355848"/>
             <a:ext cx="609600" cy="420624"/>
           </a:xfrm>
           <a:prstGeom prst="rect">
@@ -1763,7 +1763,7 @@
         </p:nvSpPr>
         <p:spPr>
           <a:xfrm>
-            <a:off x="728472" y="3995928"/>
+            <a:off x="728472" y="3355848"/>
             <a:ext cx="609600" cy="420624"/>
           </a:xfrm>
           <a:prstGeom prst="rect">
@@ -1799,7 +1799,7 @@
         </p:nvSpPr>
         <p:spPr>
           <a:xfrm>
-            <a:off x="1338072" y="3995928"/>
+            <a:off x="1338072" y="3355848"/>
             <a:ext cx="609600" cy="420624"/>
           </a:xfrm>
           <a:prstGeom prst="rect">
@@ -1835,7 +1835,7 @@
         </p:nvSpPr>
         <p:spPr>
           <a:xfrm>
-            <a:off x="73152" y="4507992"/>
+            <a:off x="73152" y="3529584"/>
             <a:ext cx="1920240" cy="228600"/>
           </a:xfrm>
           <a:prstGeom prst="rect">
@@ -1860,7 +1860,7 @@
         </p:nvSpPr>
         <p:spPr>
           <a:xfrm>
-            <a:off x="73152" y="4507992"/>
+            <a:off x="73152" y="3529584"/>
             <a:ext cx="1920240" cy="228600"/>
           </a:xfrm>
           <a:prstGeom prst="rect">
@@ -1896,8 +1896,8 @@
         </p:nvSpPr>
         <p:spPr>
           <a:xfrm>
-            <a:off x="73152" y="4736592"/>
-            <a:ext cx="1920240" cy="1353312"/>
+            <a:off x="73152" y="3758184"/>
+            <a:ext cx="1920240" cy="978408"/>
           </a:xfrm>
           <a:prstGeom prst="rect">
             <a:avLst/>
@@ -1921,7 +1921,7 @@
         </p:nvSpPr>
         <p:spPr>
           <a:xfrm>
-            <a:off x="118872" y="4791456"/>
+            <a:off x="118872" y="3813048"/>
             <a:ext cx="609600" cy="420624"/>
           </a:xfrm>
           <a:prstGeom prst="rect">
@@ -1957,7 +1957,7 @@
         </p:nvSpPr>
         <p:spPr>
           <a:xfrm>
-            <a:off x="728472" y="4791456"/>
+            <a:off x="728472" y="3813048"/>
             <a:ext cx="609600" cy="420624"/>
           </a:xfrm>
           <a:prstGeom prst="rect">
@@ -1993,7 +1993,7 @@
         </p:nvSpPr>
         <p:spPr>
           <a:xfrm>
-            <a:off x="1338072" y="4791456"/>
+            <a:off x="1338072" y="3813048"/>
             <a:ext cx="609600" cy="420624"/>
           </a:xfrm>
           <a:prstGeom prst="rect">
@@ -2043,7 +2043,7 @@
         </p:nvSpPr>
         <p:spPr>
           <a:xfrm>
-            <a:off x="118872" y="5212080"/>
+            <a:off x="118872" y="4233672"/>
             <a:ext cx="609600" cy="420624"/>
           </a:xfrm>
           <a:prstGeom prst="rect">
@@ -2093,7 +2093,7 @@
         </p:nvSpPr>
         <p:spPr>
           <a:xfrm>
-            <a:off x="728472" y="5212080"/>
+            <a:off x="728472" y="4233672"/>
             <a:ext cx="609600" cy="420624"/>
           </a:xfrm>
           <a:prstGeom prst="rect">
@@ -2129,7 +2129,7 @@
         </p:nvSpPr>
         <p:spPr>
           <a:xfrm>
-            <a:off x="1338072" y="5212080"/>
+            <a:off x="1338072" y="4233672"/>
             <a:ext cx="609600" cy="420624"/>
           </a:xfrm>
           <a:prstGeom prst="rect">
@@ -2165,7 +2165,7 @@
         </p:nvSpPr>
         <p:spPr>
           <a:xfrm>
-            <a:off x="118872" y="5632704"/>
+            <a:off x="118872" y="4654296"/>
             <a:ext cx="609600" cy="420624"/>
           </a:xfrm>
           <a:prstGeom prst="rect">
@@ -2201,7 +2201,7 @@
         </p:nvSpPr>
         <p:spPr>
           <a:xfrm>
-            <a:off x="728472" y="5632704"/>
+            <a:off x="728472" y="4654296"/>
             <a:ext cx="609600" cy="420624"/>
           </a:xfrm>
           <a:prstGeom prst="rect">
@@ -2237,7 +2237,7 @@
         </p:nvSpPr>
         <p:spPr>
           <a:xfrm>
-            <a:off x="1993392" y="1225296"/>
+            <a:off x="1993392" y="996696"/>
             <a:ext cx="201168" cy="0"/>
           </a:xfrm>
           <a:prstGeom prst="line">
@@ -2261,7 +2261,7 @@
         </p:nvSpPr>
         <p:spPr>
           <a:xfrm>
-            <a:off x="1993392" y="2660904"/>
+            <a:off x="1993392" y="2103120"/>
             <a:ext cx="201168" cy="0"/>
           </a:xfrm>
           <a:prstGeom prst="line">
@@ -2285,7 +2285,7 @@
         </p:nvSpPr>
         <p:spPr>
           <a:xfrm>
-            <a:off x="1993392" y="3877056"/>
+            <a:off x="1993392" y="3063240"/>
             <a:ext cx="201168" cy="0"/>
           </a:xfrm>
           <a:prstGeom prst="line">
@@ -2309,7 +2309,7 @@
         </p:nvSpPr>
         <p:spPr>
           <a:xfrm>
-            <a:off x="1993392" y="5303520"/>
+            <a:off x="1993392" y="4133088"/>
             <a:ext cx="201168" cy="0"/>
           </a:xfrm>
           <a:prstGeom prst="line">
@@ -2334,7 +2334,7 @@
         <p:spPr>
           <a:xfrm>
             <a:off x="2212848" y="438912"/>
-            <a:ext cx="6025896" cy="4224528"/>
+            <a:ext cx="7699248" cy="4224528"/>
           </a:xfrm>
           <a:prstGeom prst="rect">
             <a:avLst/>
@@ -2359,7 +2359,7 @@
         <p:spPr>
           <a:xfrm>
             <a:off x="2212848" y="438912"/>
-            <a:ext cx="6025896" cy="274320"/>
+            <a:ext cx="7699248" cy="274320"/>
           </a:xfrm>
           <a:prstGeom prst="rect">
             <a:avLst/>
@@ -2408,7 +2408,7 @@
         <p:spPr>
           <a:xfrm>
             <a:off x="2898648" y="438912"/>
-            <a:ext cx="5248656" cy="274320"/>
+            <a:ext cx="6327648" cy="274320"/>
           </a:xfrm>
           <a:prstGeom prst="rect">
             <a:avLst/>
@@ -2434,887 +2434,10 @@
             <a:endParaRPr lang="en-US" sz="1100" dirty="0"/>
           </a:p>
         </p:txBody>
-      </p:sp>
-      <p:sp>
-        <p:nvSpPr>
-          <p:cNvPr id="50" name="Shape 41"/>
-          <p:cNvSpPr/>
-          <p:nvPr/>
-        </p:nvSpPr>
-        <p:spPr>
-          <a:xfrm>
-            <a:off x="2286000" y="749808"/>
-            <a:ext cx="5879592" cy="237744"/>
-          </a:xfrm>
-          <a:prstGeom prst="rect">
-            <a:avLst/>
-          </a:prstGeom>
-          <a:solidFill>
-            <a:srgbClr val="2D1B69"/>
-          </a:solidFill>
-          <a:ln w="12700">
-            <a:solidFill>
-              <a:srgbClr val="2D1B69"/>
-            </a:solidFill>
-            <a:prstDash val="solid"/>
-          </a:ln>
-        </p:spPr>
-      </p:sp>
-      <p:sp>
-        <p:nvSpPr>
-          <p:cNvPr id="51" name="Text 42"/>
-          <p:cNvSpPr/>
-          <p:nvPr/>
-        </p:nvSpPr>
-        <p:spPr>
-          <a:xfrm>
-            <a:off x="2286000" y="749808"/>
-            <a:ext cx="5879592" cy="237744"/>
-          </a:xfrm>
-          <a:prstGeom prst="rect">
-            <a:avLst/>
-          </a:prstGeom>
-          <a:noFill/>
-          <a:ln/>
-        </p:spPr>
-        <p:txBody>
-          <a:bodyPr wrap="square" rtlCol="0" anchor="ctr"/>
-          <a:lstStyle/>
-          <a:p>
-            <a:pPr algn="ctr" indent="0" marL="0">
-              <a:buNone/>
-            </a:pPr>
-            <a:r>
-              <a:rPr lang="en-US" sz="800" b="1" dirty="0">
-                <a:solidFill>
-                  <a:srgbClr val="FFFFFF"/>
-                </a:solidFill>
-              </a:rPr>
-              <a:t>Orchestration</a:t>
-            </a:r>
-            <a:endParaRPr lang="en-US" sz="800" dirty="0"/>
-          </a:p>
-        </p:txBody>
-      </p:sp>
-      <p:sp>
-        <p:nvSpPr>
-          <p:cNvPr id="52" name="Shape 43"/>
-          <p:cNvSpPr/>
-          <p:nvPr/>
-        </p:nvSpPr>
-        <p:spPr>
-          <a:xfrm>
-            <a:off x="2286000" y="1042416"/>
-            <a:ext cx="1417320" cy="2633472"/>
-          </a:xfrm>
-          <a:prstGeom prst="rect">
-            <a:avLst/>
-          </a:prstGeom>
-          <a:solidFill>
-            <a:srgbClr val="EDE8F9"/>
-          </a:solidFill>
-          <a:ln w="19050">
-            <a:solidFill>
-              <a:srgbClr val="5D35B1"/>
-            </a:solidFill>
-            <a:prstDash val="dash"/>
-          </a:ln>
-        </p:spPr>
-      </p:sp>
-      <p:sp>
-        <p:nvSpPr>
-          <p:cNvPr id="53" name="Text 44"/>
-          <p:cNvSpPr/>
-          <p:nvPr/>
-        </p:nvSpPr>
-        <p:spPr>
-          <a:xfrm>
-            <a:off x="2286000" y="1078992"/>
-            <a:ext cx="1417320" cy="201168"/>
-          </a:xfrm>
-          <a:prstGeom prst="rect">
-            <a:avLst/>
-          </a:prstGeom>
-          <a:noFill/>
-          <a:ln/>
-        </p:spPr>
-        <p:txBody>
-          <a:bodyPr wrap="square" rtlCol="0" anchor="ctr"/>
-          <a:lstStyle/>
-          <a:p>
-            <a:pPr algn="ctr" indent="0" marL="0">
-              <a:buNone/>
-            </a:pPr>
-            <a:r>
-              <a:rPr lang="en-US" sz="800" b="1" dirty="0">
-                <a:solidFill>
-                  <a:srgbClr val="5D35B1"/>
-                </a:solidFill>
-              </a:rPr>
-              <a:t>Data Ingestion</a:t>
-            </a:r>
-            <a:endParaRPr lang="en-US" sz="800" dirty="0"/>
-          </a:p>
-        </p:txBody>
-      </p:sp>
-      <p:sp>
-        <p:nvSpPr>
-          <p:cNvPr id="54" name="Shape 45"/>
-          <p:cNvSpPr/>
-          <p:nvPr/>
-        </p:nvSpPr>
-        <p:spPr>
-          <a:xfrm>
-            <a:off x="2450592" y="1353312"/>
-            <a:ext cx="256032" cy="256032"/>
-          </a:xfrm>
-          <a:prstGeom prst="ellipse">
-            <a:avLst/>
-          </a:prstGeom>
-          <a:solidFill>
-            <a:srgbClr val="5D35B1"/>
-          </a:solidFill>
-          <a:ln w="12700">
-            <a:solidFill>
-              <a:srgbClr val="5D35B1"/>
-            </a:solidFill>
-            <a:prstDash val="solid"/>
-          </a:ln>
-        </p:spPr>
-      </p:sp>
-      <p:sp>
-        <p:nvSpPr>
-          <p:cNvPr id="55" name="Text 46"/>
-          <p:cNvSpPr/>
-          <p:nvPr/>
-        </p:nvSpPr>
-        <p:spPr>
-          <a:xfrm>
-            <a:off x="2450592" y="1353312"/>
-            <a:ext cx="256032" cy="256032"/>
-          </a:xfrm>
-          <a:prstGeom prst="rect">
-            <a:avLst/>
-          </a:prstGeom>
-          <a:noFill/>
-          <a:ln/>
-        </p:spPr>
-        <p:txBody>
-          <a:bodyPr wrap="square" rtlCol="0" anchor="ctr"/>
-          <a:lstStyle/>
-          <a:p>
-            <a:pPr algn="ctr" indent="0" marL="0">
-              <a:buNone/>
-            </a:pPr>
-            <a:r>
-              <a:rPr lang="en-US" sz="700" b="1" dirty="0">
-                <a:solidFill>
-                  <a:srgbClr val="FFFFFF"/>
-                </a:solidFill>
-              </a:rPr>
-              <a:t>1</a:t>
-            </a:r>
-            <a:endParaRPr lang="en-US" sz="700" dirty="0"/>
-          </a:p>
-        </p:txBody>
-      </p:sp>
-      <p:sp>
-        <p:nvSpPr>
-          <p:cNvPr id="56" name="Shape 47"/>
-          <p:cNvSpPr/>
-          <p:nvPr/>
-        </p:nvSpPr>
-        <p:spPr>
-          <a:xfrm>
-            <a:off x="2633472" y="1389888"/>
-            <a:ext cx="475488" cy="475488"/>
-          </a:xfrm>
-          <a:prstGeom prst="ellipse">
-            <a:avLst/>
-          </a:prstGeom>
-          <a:solidFill>
-            <a:srgbClr val="FFFFFF"/>
-          </a:solidFill>
-          <a:ln w="15240">
-            <a:solidFill>
-              <a:srgbClr val="5D35B1"/>
-            </a:solidFill>
-            <a:prstDash val="solid"/>
-          </a:ln>
-        </p:spPr>
-      </p:sp>
-      <p:sp>
-        <p:nvSpPr>
-          <p:cNvPr id="57" name="Text 48"/>
-          <p:cNvSpPr/>
-          <p:nvPr/>
-        </p:nvSpPr>
-        <p:spPr>
-          <a:xfrm>
-            <a:off x="2377440" y="1883664"/>
-            <a:ext cx="1234440" cy="310896"/>
-          </a:xfrm>
-          <a:prstGeom prst="rect">
-            <a:avLst/>
-          </a:prstGeom>
-          <a:noFill/>
-          <a:ln/>
-        </p:spPr>
-        <p:txBody>
-          <a:bodyPr wrap="square" rtlCol="0" anchor="ctr"/>
-          <a:lstStyle/>
-          <a:p>
-            <a:pPr algn="ctr" indent="0" marL="0">
-              <a:buNone/>
-            </a:pPr>
-            <a:r>
-              <a:rPr lang="en-US" sz="700" b="1" dirty="0">
-                <a:solidFill>
-                  <a:srgbClr val="1A1A1A"/>
-                </a:solidFill>
-              </a:rPr>
-              <a:t>Batch</a:t>
-            </a:r>
-            <a:endParaRPr lang="en-US" sz="700" dirty="0"/>
-          </a:p>
-          <a:p>
-            <a:pPr algn="ctr" indent="0" marL="0">
-              <a:buNone/>
-            </a:pPr>
-            <a:r>
-              <a:rPr lang="en-US" sz="700" b="1" dirty="0">
-                <a:solidFill>
-                  <a:srgbClr val="1A1A1A"/>
-                </a:solidFill>
-              </a:rPr>
-              <a:t>Ingestion</a:t>
-            </a:r>
-            <a:endParaRPr lang="en-US" sz="700" dirty="0"/>
-          </a:p>
-        </p:txBody>
-      </p:sp>
-      <p:sp>
-        <p:nvSpPr>
-          <p:cNvPr id="58" name="Shape 49"/>
-          <p:cNvSpPr/>
-          <p:nvPr/>
-        </p:nvSpPr>
-        <p:spPr>
-          <a:xfrm>
-            <a:off x="2450592" y="2121408"/>
-            <a:ext cx="256032" cy="256032"/>
-          </a:xfrm>
-          <a:prstGeom prst="ellipse">
-            <a:avLst/>
-          </a:prstGeom>
-          <a:solidFill>
-            <a:srgbClr val="5D35B1"/>
-          </a:solidFill>
-          <a:ln w="12700">
-            <a:solidFill>
-              <a:srgbClr val="5D35B1"/>
-            </a:solidFill>
-            <a:prstDash val="solid"/>
-          </a:ln>
-        </p:spPr>
-      </p:sp>
-      <p:sp>
-        <p:nvSpPr>
-          <p:cNvPr id="59" name="Text 50"/>
-          <p:cNvSpPr/>
-          <p:nvPr/>
-        </p:nvSpPr>
-        <p:spPr>
-          <a:xfrm>
-            <a:off x="2450592" y="2121408"/>
-            <a:ext cx="256032" cy="256032"/>
-          </a:xfrm>
-          <a:prstGeom prst="rect">
-            <a:avLst/>
-          </a:prstGeom>
-          <a:noFill/>
-          <a:ln/>
-        </p:spPr>
-        <p:txBody>
-          <a:bodyPr wrap="square" rtlCol="0" anchor="ctr"/>
-          <a:lstStyle/>
-          <a:p>
-            <a:pPr algn="ctr" indent="0" marL="0">
-              <a:buNone/>
-            </a:pPr>
-            <a:r>
-              <a:rPr lang="en-US" sz="700" b="1" dirty="0">
-                <a:solidFill>
-                  <a:srgbClr val="FFFFFF"/>
-                </a:solidFill>
-              </a:rPr>
-              <a:t>2</a:t>
-            </a:r>
-            <a:endParaRPr lang="en-US" sz="700" dirty="0"/>
-          </a:p>
-        </p:txBody>
-      </p:sp>
-      <p:sp>
-        <p:nvSpPr>
-          <p:cNvPr id="60" name="Shape 51"/>
-          <p:cNvSpPr/>
-          <p:nvPr/>
-        </p:nvSpPr>
-        <p:spPr>
-          <a:xfrm>
-            <a:off x="2633472" y="2157984"/>
-            <a:ext cx="475488" cy="475488"/>
-          </a:xfrm>
-          <a:prstGeom prst="ellipse">
-            <a:avLst/>
-          </a:prstGeom>
-          <a:solidFill>
-            <a:srgbClr val="FFFFFF"/>
-          </a:solidFill>
-          <a:ln w="15240">
-            <a:solidFill>
-              <a:srgbClr val="5D35B1"/>
-            </a:solidFill>
-            <a:prstDash val="solid"/>
-          </a:ln>
-        </p:spPr>
-      </p:sp>
-      <p:sp>
-        <p:nvSpPr>
-          <p:cNvPr id="61" name="Text 52"/>
-          <p:cNvSpPr/>
-          <p:nvPr/>
-        </p:nvSpPr>
-        <p:spPr>
-          <a:xfrm>
-            <a:off x="2377440" y="2651760"/>
-            <a:ext cx="1234440" cy="310896"/>
-          </a:xfrm>
-          <a:prstGeom prst="rect">
-            <a:avLst/>
-          </a:prstGeom>
-          <a:noFill/>
-          <a:ln/>
-        </p:spPr>
-        <p:txBody>
-          <a:bodyPr wrap="square" rtlCol="0" anchor="ctr"/>
-          <a:lstStyle/>
-          <a:p>
-            <a:pPr algn="ctr" indent="0" marL="0">
-              <a:buNone/>
-            </a:pPr>
-            <a:r>
-              <a:rPr lang="en-US" sz="700" b="1" dirty="0">
-                <a:solidFill>
-                  <a:srgbClr val="1A1A1A"/>
-                </a:solidFill>
-              </a:rPr>
-              <a:t>CDC</a:t>
-            </a:r>
-            <a:endParaRPr lang="en-US" sz="700" dirty="0"/>
-          </a:p>
-          <a:p>
-            <a:pPr algn="ctr" indent="0" marL="0">
-              <a:buNone/>
-            </a:pPr>
-            <a:r>
-              <a:rPr lang="en-US" sz="700" b="1" dirty="0">
-                <a:solidFill>
-                  <a:srgbClr val="1A1A1A"/>
-                </a:solidFill>
-              </a:rPr>
-              <a:t>Ingestion</a:t>
-            </a:r>
-            <a:endParaRPr lang="en-US" sz="700" dirty="0"/>
-          </a:p>
-        </p:txBody>
-      </p:sp>
-      <p:sp>
-        <p:nvSpPr>
-          <p:cNvPr id="62" name="Shape 53"/>
-          <p:cNvSpPr/>
-          <p:nvPr/>
-        </p:nvSpPr>
-        <p:spPr>
-          <a:xfrm>
-            <a:off x="2450592" y="2889504"/>
-            <a:ext cx="256032" cy="256032"/>
-          </a:xfrm>
-          <a:prstGeom prst="ellipse">
-            <a:avLst/>
-          </a:prstGeom>
-          <a:solidFill>
-            <a:srgbClr val="5D35B1"/>
-          </a:solidFill>
-          <a:ln w="12700">
-            <a:solidFill>
-              <a:srgbClr val="5D35B1"/>
-            </a:solidFill>
-            <a:prstDash val="solid"/>
-          </a:ln>
-        </p:spPr>
-      </p:sp>
-      <p:sp>
-        <p:nvSpPr>
-          <p:cNvPr id="63" name="Text 54"/>
-          <p:cNvSpPr/>
-          <p:nvPr/>
-        </p:nvSpPr>
-        <p:spPr>
-          <a:xfrm>
-            <a:off x="2450592" y="2889504"/>
-            <a:ext cx="256032" cy="256032"/>
-          </a:xfrm>
-          <a:prstGeom prst="rect">
-            <a:avLst/>
-          </a:prstGeom>
-          <a:noFill/>
-          <a:ln/>
-        </p:spPr>
-        <p:txBody>
-          <a:bodyPr wrap="square" rtlCol="0" anchor="ctr"/>
-          <a:lstStyle/>
-          <a:p>
-            <a:pPr algn="ctr" indent="0" marL="0">
-              <a:buNone/>
-            </a:pPr>
-            <a:r>
-              <a:rPr lang="en-US" sz="700" b="1" dirty="0">
-                <a:solidFill>
-                  <a:srgbClr val="FFFFFF"/>
-                </a:solidFill>
-              </a:rPr>
-              <a:t>3</a:t>
-            </a:r>
-            <a:endParaRPr lang="en-US" sz="700" dirty="0"/>
-          </a:p>
-        </p:txBody>
-      </p:sp>
-      <p:sp>
-        <p:nvSpPr>
-          <p:cNvPr id="64" name="Shape 55"/>
-          <p:cNvSpPr/>
-          <p:nvPr/>
-        </p:nvSpPr>
-        <p:spPr>
-          <a:xfrm>
-            <a:off x="2633472" y="2926080"/>
-            <a:ext cx="475488" cy="475488"/>
-          </a:xfrm>
-          <a:prstGeom prst="ellipse">
-            <a:avLst/>
-          </a:prstGeom>
-          <a:solidFill>
-            <a:srgbClr val="FFFFFF"/>
-          </a:solidFill>
-          <a:ln w="15240">
-            <a:solidFill>
-              <a:srgbClr val="5D35B1"/>
-            </a:solidFill>
-            <a:prstDash val="solid"/>
-          </a:ln>
-        </p:spPr>
-      </p:sp>
-      <p:sp>
-        <p:nvSpPr>
-          <p:cNvPr id="65" name="Text 56"/>
-          <p:cNvSpPr/>
-          <p:nvPr/>
-        </p:nvSpPr>
-        <p:spPr>
-          <a:xfrm>
-            <a:off x="2377440" y="3419856"/>
-            <a:ext cx="1234440" cy="310896"/>
-          </a:xfrm>
-          <a:prstGeom prst="rect">
-            <a:avLst/>
-          </a:prstGeom>
-          <a:noFill/>
-          <a:ln/>
-        </p:spPr>
-        <p:txBody>
-          <a:bodyPr wrap="square" rtlCol="0" anchor="ctr"/>
-          <a:lstStyle/>
-          <a:p>
-            <a:pPr algn="ctr" indent="0" marL="0">
-              <a:buNone/>
-            </a:pPr>
-            <a:r>
-              <a:rPr lang="en-US" sz="700" b="1" dirty="0">
-                <a:solidFill>
-                  <a:srgbClr val="1A1A1A"/>
-                </a:solidFill>
-              </a:rPr>
-              <a:t>Streaming</a:t>
-            </a:r>
-            <a:endParaRPr lang="en-US" sz="700" dirty="0"/>
-          </a:p>
-          <a:p>
-            <a:pPr algn="ctr" indent="0" marL="0">
-              <a:buNone/>
-            </a:pPr>
-            <a:r>
-              <a:rPr lang="en-US" sz="700" b="1" dirty="0">
-                <a:solidFill>
-                  <a:srgbClr val="1A1A1A"/>
-                </a:solidFill>
-              </a:rPr>
-              <a:t>Ingestion</a:t>
-            </a:r>
-            <a:endParaRPr lang="en-US" sz="700" dirty="0"/>
-          </a:p>
-        </p:txBody>
-      </p:sp>
-      <p:sp>
-        <p:nvSpPr>
-          <p:cNvPr id="66" name="Shape 57"/>
-          <p:cNvSpPr/>
-          <p:nvPr/>
-        </p:nvSpPr>
-        <p:spPr>
-          <a:xfrm>
-            <a:off x="3831336" y="1042416"/>
-            <a:ext cx="2194560" cy="228600"/>
-          </a:xfrm>
-          <a:prstGeom prst="rect">
-            <a:avLst/>
-          </a:prstGeom>
-          <a:solidFill>
-            <a:srgbClr val="2D1B69"/>
-          </a:solidFill>
-          <a:ln w="12700">
-            <a:solidFill>
-              <a:srgbClr val="2D1B69"/>
-            </a:solidFill>
-            <a:prstDash val="solid"/>
-          </a:ln>
-        </p:spPr>
-      </p:sp>
-      <p:sp>
-        <p:nvSpPr>
-          <p:cNvPr id="67" name="Text 58"/>
-          <p:cNvSpPr/>
-          <p:nvPr/>
-        </p:nvSpPr>
-        <p:spPr>
-          <a:xfrm>
-            <a:off x="3831336" y="1042416"/>
-            <a:ext cx="2194560" cy="228600"/>
-          </a:xfrm>
-          <a:prstGeom prst="rect">
-            <a:avLst/>
-          </a:prstGeom>
-          <a:noFill/>
-          <a:ln/>
-        </p:spPr>
-        <p:txBody>
-          <a:bodyPr wrap="square" rtlCol="0" anchor="ctr"/>
-          <a:lstStyle/>
-          <a:p>
-            <a:pPr algn="ctr" indent="0" marL="0">
-              <a:buNone/>
-            </a:pPr>
-            <a:r>
-              <a:rPr lang="en-US" sz="800" b="1" dirty="0">
-                <a:solidFill>
-                  <a:srgbClr val="FFFFFF"/>
-                </a:solidFill>
-              </a:rPr>
-              <a:t>ETL</a:t>
-            </a:r>
-            <a:endParaRPr lang="en-US" sz="800" dirty="0"/>
-          </a:p>
-        </p:txBody>
-      </p:sp>
-      <p:sp>
-        <p:nvSpPr>
-          <p:cNvPr id="68" name="Shape 59"/>
-          <p:cNvSpPr/>
-          <p:nvPr/>
-        </p:nvSpPr>
-        <p:spPr>
-          <a:xfrm>
-            <a:off x="3831336" y="1271016"/>
-            <a:ext cx="2194560" cy="1014984"/>
-          </a:xfrm>
-          <a:prstGeom prst="rect">
-            <a:avLst/>
-          </a:prstGeom>
-          <a:solidFill>
-            <a:srgbClr val="F2F2F2"/>
-          </a:solidFill>
-          <a:ln w="9525">
-            <a:solidFill>
-              <a:srgbClr val="CCCCCC"/>
-            </a:solidFill>
-            <a:prstDash val="solid"/>
-          </a:ln>
-        </p:spPr>
-      </p:sp>
-      <p:sp>
-        <p:nvSpPr>
-          <p:cNvPr id="69" name="Shape 60"/>
-          <p:cNvSpPr/>
-          <p:nvPr/>
-        </p:nvSpPr>
-        <p:spPr>
-          <a:xfrm>
-            <a:off x="3941064" y="1463040"/>
-            <a:ext cx="475488" cy="402336"/>
-          </a:xfrm>
-          <a:prstGeom prst="rect">
-            <a:avLst>
-              <a:gd name="adj" fmla="val 11364"/>
-            </a:avLst>
-          </a:prstGeom>
-          <a:solidFill>
-            <a:srgbClr val="EDE8F9"/>
-          </a:solidFill>
-          <a:ln w="10160">
-            <a:solidFill>
-              <a:srgbClr val="5D35B1"/>
-            </a:solidFill>
-            <a:prstDash val="solid"/>
-          </a:ln>
-        </p:spPr>
-      </p:sp>
-      <p:sp>
-        <p:nvSpPr>
-          <p:cNvPr id="70" name="Text 61"/>
-          <p:cNvSpPr/>
-          <p:nvPr/>
-        </p:nvSpPr>
-        <p:spPr>
-          <a:xfrm>
-            <a:off x="3941064" y="1700784"/>
-            <a:ext cx="475488" cy="182880"/>
-          </a:xfrm>
-          <a:prstGeom prst="rect">
-            <a:avLst/>
-          </a:prstGeom>
-          <a:noFill/>
-          <a:ln/>
-        </p:spPr>
-        <p:txBody>
-          <a:bodyPr wrap="square" rtlCol="0" anchor="ctr"/>
-          <a:lstStyle/>
-          <a:p>
-            <a:pPr algn="ctr" indent="0" marL="0">
-              <a:buNone/>
-            </a:pPr>
-            <a:r>
-              <a:rPr lang="en-US" sz="650" b="1" dirty="0">
-                <a:solidFill>
-                  <a:srgbClr val="5D35B1"/>
-                </a:solidFill>
-              </a:rPr>
-              <a:t>RAW</a:t>
-            </a:r>
-            <a:endParaRPr lang="en-US" sz="650" dirty="0"/>
-          </a:p>
-        </p:txBody>
-      </p:sp>
-      <p:sp>
-        <p:nvSpPr>
-          <p:cNvPr id="71" name="Shape 62"/>
-          <p:cNvSpPr/>
-          <p:nvPr/>
-        </p:nvSpPr>
-        <p:spPr>
-          <a:xfrm>
-            <a:off x="4672584" y="1463040"/>
-            <a:ext cx="475488" cy="402336"/>
-          </a:xfrm>
-          <a:prstGeom prst="rect">
-            <a:avLst>
-              <a:gd name="adj" fmla="val 11364"/>
-            </a:avLst>
-          </a:prstGeom>
-          <a:solidFill>
-            <a:srgbClr val="EDE8F9"/>
-          </a:solidFill>
-          <a:ln w="10160">
-            <a:solidFill>
-              <a:srgbClr val="5D35B1"/>
-            </a:solidFill>
-            <a:prstDash val="solid"/>
-          </a:ln>
-        </p:spPr>
-      </p:sp>
-      <p:sp>
-        <p:nvSpPr>
-          <p:cNvPr id="72" name="Text 63"/>
-          <p:cNvSpPr/>
-          <p:nvPr/>
-        </p:nvSpPr>
-        <p:spPr>
-          <a:xfrm>
-            <a:off x="4672584" y="1700784"/>
-            <a:ext cx="475488" cy="182880"/>
-          </a:xfrm>
-          <a:prstGeom prst="rect">
-            <a:avLst/>
-          </a:prstGeom>
-          <a:noFill/>
-          <a:ln/>
-        </p:spPr>
-        <p:txBody>
-          <a:bodyPr wrap="square" rtlCol="0" anchor="ctr"/>
-          <a:lstStyle/>
-          <a:p>
-            <a:pPr algn="ctr" indent="0" marL="0">
-              <a:buNone/>
-            </a:pPr>
-            <a:r>
-              <a:rPr lang="en-US" sz="650" b="1" dirty="0">
-                <a:solidFill>
-                  <a:srgbClr val="5D35B1"/>
-                </a:solidFill>
-              </a:rPr>
-              <a:t>ODS</a:t>
-            </a:r>
-            <a:endParaRPr lang="en-US" sz="650" dirty="0"/>
-          </a:p>
-        </p:txBody>
-      </p:sp>
-      <p:sp>
-        <p:nvSpPr>
-          <p:cNvPr id="73" name="Shape 64"/>
-          <p:cNvSpPr/>
-          <p:nvPr/>
-        </p:nvSpPr>
-        <p:spPr>
-          <a:xfrm>
-            <a:off x="5440680" y="1463040"/>
-            <a:ext cx="475488" cy="402336"/>
-          </a:xfrm>
-          <a:prstGeom prst="rect">
-            <a:avLst>
-              <a:gd name="adj" fmla="val 11364"/>
-            </a:avLst>
-          </a:prstGeom>
-          <a:solidFill>
-            <a:srgbClr val="EDE8F9"/>
-          </a:solidFill>
-          <a:ln w="10160">
-            <a:solidFill>
-              <a:srgbClr val="5D35B1"/>
-            </a:solidFill>
-            <a:prstDash val="solid"/>
-          </a:ln>
-        </p:spPr>
-      </p:sp>
-      <p:sp>
-        <p:nvSpPr>
-          <p:cNvPr id="74" name="Text 65"/>
-          <p:cNvSpPr/>
-          <p:nvPr/>
-        </p:nvSpPr>
-        <p:spPr>
-          <a:xfrm>
-            <a:off x="5440680" y="1700784"/>
-            <a:ext cx="475488" cy="182880"/>
-          </a:xfrm>
-          <a:prstGeom prst="rect">
-            <a:avLst/>
-          </a:prstGeom>
-          <a:noFill/>
-          <a:ln/>
-        </p:spPr>
-        <p:txBody>
-          <a:bodyPr wrap="square" rtlCol="0" anchor="ctr"/>
-          <a:lstStyle/>
-          <a:p>
-            <a:pPr algn="ctr" indent="0" marL="0">
-              <a:buNone/>
-            </a:pPr>
-            <a:r>
-              <a:rPr lang="en-US" sz="650" b="1" dirty="0">
-                <a:solidFill>
-                  <a:srgbClr val="5D35B1"/>
-                </a:solidFill>
-              </a:rPr>
-              <a:t>Facts</a:t>
-            </a:r>
-            <a:endParaRPr lang="en-US" sz="650" dirty="0"/>
-          </a:p>
-        </p:txBody>
-      </p:sp>
-      <p:sp>
-        <p:nvSpPr>
-          <p:cNvPr id="75" name="Shape 66"/>
-          <p:cNvSpPr/>
-          <p:nvPr/>
-        </p:nvSpPr>
-        <p:spPr>
-          <a:xfrm>
-            <a:off x="4434840" y="1664208"/>
-            <a:ext cx="237744" cy="0"/>
-          </a:xfrm>
-          <a:prstGeom prst="line">
-            <a:avLst/>
-          </a:prstGeom>
-          <a:noFill/>
-          <a:ln w="12700">
-            <a:solidFill>
-              <a:srgbClr val="888888"/>
-            </a:solidFill>
-            <a:prstDash val="dash"/>
-            <a:tailEnd type="arrow"/>
-          </a:ln>
-        </p:spPr>
-      </p:sp>
-      <p:sp>
-        <p:nvSpPr>
-          <p:cNvPr id="76" name="Shape 67"/>
-          <p:cNvSpPr/>
-          <p:nvPr/>
-        </p:nvSpPr>
-        <p:spPr>
-          <a:xfrm>
-            <a:off x="5184648" y="1627632"/>
-            <a:ext cx="256032" cy="91440"/>
-          </a:xfrm>
-          <a:prstGeom prst="line">
-            <a:avLst/>
-          </a:prstGeom>
-          <a:noFill/>
-          <a:ln w="12700">
-            <a:solidFill>
-              <a:srgbClr val="888888"/>
-            </a:solidFill>
-            <a:prstDash val="dash"/>
-            <a:tailEnd type="arrow"/>
-          </a:ln>
-        </p:spPr>
-      </p:sp>
-      <p:sp>
-        <p:nvSpPr>
-          <p:cNvPr id="77" name="Shape 68"/>
-          <p:cNvSpPr/>
-          <p:nvPr/>
-        </p:nvSpPr>
-        <p:spPr>
-          <a:xfrm>
-            <a:off x="4928616" y="2286000"/>
-            <a:ext cx="0" cy="201168"/>
-          </a:xfrm>
-          <a:prstGeom prst="line">
-            <a:avLst/>
-          </a:prstGeom>
-          <a:noFill/>
-          <a:ln w="15240">
-            <a:solidFill>
-              <a:srgbClr val="1A1A1A"/>
-            </a:solidFill>
-            <a:prstDash val="solid"/>
-            <a:tailEnd type="arrow"/>
-          </a:ln>
-        </p:spPr>
       </p:sp>
       <p:pic>
         <p:nvPicPr>
-          <p:cNvPr id="78" name="Image 7" descr="preencoded.png">    </p:cNvPr>
+          <p:cNvPr id="50" name="Image 7" descr="preencoded.png">    </p:cNvPr>
           <p:cNvPicPr>
             <a:picLocks noChangeAspect="1"/>
           </p:cNvPicPr>
@@ -3328,8 +2451,8 @@
         </p:blipFill>
         <p:spPr>
           <a:xfrm>
-            <a:off x="5477256" y="1298448"/>
-            <a:ext cx="457200" cy="164592"/>
+            <a:off x="9272016" y="466344"/>
+            <a:ext cx="548640" cy="219456"/>
           </a:xfrm>
           <a:prstGeom prst="rect">
             <a:avLst/>
@@ -3338,120 +2461,911 @@
       </p:pic>
       <p:sp>
         <p:nvSpPr>
+          <p:cNvPr id="51" name="Shape 41"/>
+          <p:cNvSpPr/>
+          <p:nvPr/>
+        </p:nvSpPr>
+        <p:spPr>
+          <a:xfrm>
+            <a:off x="2286000" y="749808"/>
+            <a:ext cx="7552944" cy="237744"/>
+          </a:xfrm>
+          <a:prstGeom prst="rect">
+            <a:avLst/>
+          </a:prstGeom>
+          <a:solidFill>
+            <a:srgbClr val="2D1B69"/>
+          </a:solidFill>
+          <a:ln w="12700">
+            <a:solidFill>
+              <a:srgbClr val="2D1B69"/>
+            </a:solidFill>
+            <a:prstDash val="solid"/>
+          </a:ln>
+        </p:spPr>
+      </p:sp>
+      <p:sp>
+        <p:nvSpPr>
+          <p:cNvPr id="52" name="Text 42"/>
+          <p:cNvSpPr/>
+          <p:nvPr/>
+        </p:nvSpPr>
+        <p:spPr>
+          <a:xfrm>
+            <a:off x="2286000" y="749808"/>
+            <a:ext cx="7552944" cy="237744"/>
+          </a:xfrm>
+          <a:prstGeom prst="rect">
+            <a:avLst/>
+          </a:prstGeom>
+          <a:noFill/>
+          <a:ln/>
+        </p:spPr>
+        <p:txBody>
+          <a:bodyPr wrap="square" rtlCol="0" anchor="ctr"/>
+          <a:lstStyle/>
+          <a:p>
+            <a:pPr algn="ctr" indent="0" marL="0">
+              <a:buNone/>
+            </a:pPr>
+            <a:r>
+              <a:rPr lang="en-US" sz="800" b="1" dirty="0">
+                <a:solidFill>
+                  <a:srgbClr val="FFFFFF"/>
+                </a:solidFill>
+              </a:rPr>
+              <a:t>Orchestration</a:t>
+            </a:r>
+            <a:endParaRPr lang="en-US" sz="800" dirty="0"/>
+          </a:p>
+        </p:txBody>
+      </p:sp>
+      <p:sp>
+        <p:nvSpPr>
+          <p:cNvPr id="53" name="Shape 43"/>
+          <p:cNvSpPr/>
+          <p:nvPr/>
+        </p:nvSpPr>
+        <p:spPr>
+          <a:xfrm>
+            <a:off x="2194560" y="996696"/>
+            <a:ext cx="1600200" cy="2724912"/>
+          </a:xfrm>
+          <a:prstGeom prst="rect">
+            <a:avLst/>
+          </a:prstGeom>
+          <a:solidFill>
+            <a:srgbClr val="FFFFFF">
+              <a:alpha val="0"/>
+            </a:srgbClr>
+          </a:solidFill>
+          <a:ln w="15240">
+            <a:solidFill>
+              <a:srgbClr val="F4B000"/>
+            </a:solidFill>
+            <a:prstDash val="solid"/>
+          </a:ln>
+        </p:spPr>
+      </p:sp>
+      <p:sp>
+        <p:nvSpPr>
+          <p:cNvPr id="54" name="Shape 44"/>
+          <p:cNvSpPr/>
+          <p:nvPr/>
+        </p:nvSpPr>
+        <p:spPr>
+          <a:xfrm>
+            <a:off x="2286000" y="1042416"/>
+            <a:ext cx="1417320" cy="2633472"/>
+          </a:xfrm>
+          <a:prstGeom prst="rect">
+            <a:avLst/>
+          </a:prstGeom>
+          <a:solidFill>
+            <a:srgbClr val="EDE8F9"/>
+          </a:solidFill>
+          <a:ln w="19050">
+            <a:solidFill>
+              <a:srgbClr val="5D35B1"/>
+            </a:solidFill>
+            <a:prstDash val="dash"/>
+          </a:ln>
+        </p:spPr>
+      </p:sp>
+      <p:sp>
+        <p:nvSpPr>
+          <p:cNvPr id="55" name="Text 45"/>
+          <p:cNvSpPr/>
+          <p:nvPr/>
+        </p:nvSpPr>
+        <p:spPr>
+          <a:xfrm>
+            <a:off x="2286000" y="1078992"/>
+            <a:ext cx="1417320" cy="201168"/>
+          </a:xfrm>
+          <a:prstGeom prst="rect">
+            <a:avLst/>
+          </a:prstGeom>
+          <a:noFill/>
+          <a:ln/>
+        </p:spPr>
+        <p:txBody>
+          <a:bodyPr wrap="square" rtlCol="0" anchor="ctr"/>
+          <a:lstStyle/>
+          <a:p>
+            <a:pPr algn="ctr" indent="0" marL="0">
+              <a:buNone/>
+            </a:pPr>
+            <a:r>
+              <a:rPr lang="en-US" sz="800" b="1" dirty="0">
+                <a:solidFill>
+                  <a:srgbClr val="5D35B1"/>
+                </a:solidFill>
+              </a:rPr>
+              <a:t>Data Ingestion</a:t>
+            </a:r>
+            <a:endParaRPr lang="en-US" sz="800" dirty="0"/>
+          </a:p>
+        </p:txBody>
+      </p:sp>
+      <p:sp>
+        <p:nvSpPr>
+          <p:cNvPr id="56" name="Shape 46"/>
+          <p:cNvSpPr/>
+          <p:nvPr/>
+        </p:nvSpPr>
+        <p:spPr>
+          <a:xfrm>
+            <a:off x="2450592" y="1353312"/>
+            <a:ext cx="256032" cy="256032"/>
+          </a:xfrm>
+          <a:prstGeom prst="ellipse">
+            <a:avLst/>
+          </a:prstGeom>
+          <a:solidFill>
+            <a:srgbClr val="5D35B1"/>
+          </a:solidFill>
+          <a:ln w="12700">
+            <a:solidFill>
+              <a:srgbClr val="5D35B1"/>
+            </a:solidFill>
+            <a:prstDash val="solid"/>
+          </a:ln>
+        </p:spPr>
+      </p:sp>
+      <p:sp>
+        <p:nvSpPr>
+          <p:cNvPr id="57" name="Text 47"/>
+          <p:cNvSpPr/>
+          <p:nvPr/>
+        </p:nvSpPr>
+        <p:spPr>
+          <a:xfrm>
+            <a:off x="2450592" y="1353312"/>
+            <a:ext cx="256032" cy="256032"/>
+          </a:xfrm>
+          <a:prstGeom prst="rect">
+            <a:avLst/>
+          </a:prstGeom>
+          <a:noFill/>
+          <a:ln/>
+        </p:spPr>
+        <p:txBody>
+          <a:bodyPr wrap="square" rtlCol="0" anchor="ctr"/>
+          <a:lstStyle/>
+          <a:p>
+            <a:pPr algn="ctr" indent="0" marL="0">
+              <a:buNone/>
+            </a:pPr>
+            <a:r>
+              <a:rPr lang="en-US" sz="700" b="1" dirty="0">
+                <a:solidFill>
+                  <a:srgbClr val="FFFFFF"/>
+                </a:solidFill>
+              </a:rPr>
+              <a:t>1</a:t>
+            </a:r>
+            <a:endParaRPr lang="en-US" sz="700" dirty="0"/>
+          </a:p>
+        </p:txBody>
+      </p:sp>
+      <p:sp>
+        <p:nvSpPr>
+          <p:cNvPr id="58" name="Shape 48"/>
+          <p:cNvSpPr/>
+          <p:nvPr/>
+        </p:nvSpPr>
+        <p:spPr>
+          <a:xfrm>
+            <a:off x="2633472" y="1389888"/>
+            <a:ext cx="475488" cy="475488"/>
+          </a:xfrm>
+          <a:prstGeom prst="ellipse">
+            <a:avLst/>
+          </a:prstGeom>
+          <a:solidFill>
+            <a:srgbClr val="FFFFFF"/>
+          </a:solidFill>
+          <a:ln w="15240">
+            <a:solidFill>
+              <a:srgbClr val="5D35B1"/>
+            </a:solidFill>
+            <a:prstDash val="solid"/>
+          </a:ln>
+        </p:spPr>
+      </p:sp>
+      <p:sp>
+        <p:nvSpPr>
+          <p:cNvPr id="59" name="Text 49"/>
+          <p:cNvSpPr/>
+          <p:nvPr/>
+        </p:nvSpPr>
+        <p:spPr>
+          <a:xfrm>
+            <a:off x="2377440" y="1883664"/>
+            <a:ext cx="1234440" cy="310896"/>
+          </a:xfrm>
+          <a:prstGeom prst="rect">
+            <a:avLst/>
+          </a:prstGeom>
+          <a:noFill/>
+          <a:ln/>
+        </p:spPr>
+        <p:txBody>
+          <a:bodyPr wrap="square" rtlCol="0" anchor="ctr"/>
+          <a:lstStyle/>
+          <a:p>
+            <a:pPr algn="ctr" indent="0" marL="0">
+              <a:buNone/>
+            </a:pPr>
+            <a:r>
+              <a:rPr lang="en-US" sz="700" b="1" dirty="0">
+                <a:solidFill>
+                  <a:srgbClr val="1A1A1A"/>
+                </a:solidFill>
+              </a:rPr>
+              <a:t>Batch</a:t>
+            </a:r>
+            <a:endParaRPr lang="en-US" sz="700" dirty="0"/>
+          </a:p>
+          <a:p>
+            <a:pPr algn="ctr" indent="0" marL="0">
+              <a:buNone/>
+            </a:pPr>
+            <a:r>
+              <a:rPr lang="en-US" sz="700" b="1" dirty="0">
+                <a:solidFill>
+                  <a:srgbClr val="1A1A1A"/>
+                </a:solidFill>
+              </a:rPr>
+              <a:t>Ingestion</a:t>
+            </a:r>
+            <a:endParaRPr lang="en-US" sz="700" dirty="0"/>
+          </a:p>
+        </p:txBody>
+      </p:sp>
+      <p:sp>
+        <p:nvSpPr>
+          <p:cNvPr id="60" name="Shape 50"/>
+          <p:cNvSpPr/>
+          <p:nvPr/>
+        </p:nvSpPr>
+        <p:spPr>
+          <a:xfrm>
+            <a:off x="2450592" y="2121408"/>
+            <a:ext cx="256032" cy="256032"/>
+          </a:xfrm>
+          <a:prstGeom prst="ellipse">
+            <a:avLst/>
+          </a:prstGeom>
+          <a:solidFill>
+            <a:srgbClr val="5D35B1"/>
+          </a:solidFill>
+          <a:ln w="12700">
+            <a:solidFill>
+              <a:srgbClr val="5D35B1"/>
+            </a:solidFill>
+            <a:prstDash val="solid"/>
+          </a:ln>
+        </p:spPr>
+      </p:sp>
+      <p:sp>
+        <p:nvSpPr>
+          <p:cNvPr id="61" name="Text 51"/>
+          <p:cNvSpPr/>
+          <p:nvPr/>
+        </p:nvSpPr>
+        <p:spPr>
+          <a:xfrm>
+            <a:off x="2450592" y="2121408"/>
+            <a:ext cx="256032" cy="256032"/>
+          </a:xfrm>
+          <a:prstGeom prst="rect">
+            <a:avLst/>
+          </a:prstGeom>
+          <a:noFill/>
+          <a:ln/>
+        </p:spPr>
+        <p:txBody>
+          <a:bodyPr wrap="square" rtlCol="0" anchor="ctr"/>
+          <a:lstStyle/>
+          <a:p>
+            <a:pPr algn="ctr" indent="0" marL="0">
+              <a:buNone/>
+            </a:pPr>
+            <a:r>
+              <a:rPr lang="en-US" sz="700" b="1" dirty="0">
+                <a:solidFill>
+                  <a:srgbClr val="FFFFFF"/>
+                </a:solidFill>
+              </a:rPr>
+              <a:t>2</a:t>
+            </a:r>
+            <a:endParaRPr lang="en-US" sz="700" dirty="0"/>
+          </a:p>
+        </p:txBody>
+      </p:sp>
+      <p:sp>
+        <p:nvSpPr>
+          <p:cNvPr id="62" name="Shape 52"/>
+          <p:cNvSpPr/>
+          <p:nvPr/>
+        </p:nvSpPr>
+        <p:spPr>
+          <a:xfrm>
+            <a:off x="2633472" y="2157984"/>
+            <a:ext cx="475488" cy="475488"/>
+          </a:xfrm>
+          <a:prstGeom prst="ellipse">
+            <a:avLst/>
+          </a:prstGeom>
+          <a:solidFill>
+            <a:srgbClr val="FFFFFF"/>
+          </a:solidFill>
+          <a:ln w="15240">
+            <a:solidFill>
+              <a:srgbClr val="5D35B1"/>
+            </a:solidFill>
+            <a:prstDash val="solid"/>
+          </a:ln>
+        </p:spPr>
+      </p:sp>
+      <p:sp>
+        <p:nvSpPr>
+          <p:cNvPr id="63" name="Text 53"/>
+          <p:cNvSpPr/>
+          <p:nvPr/>
+        </p:nvSpPr>
+        <p:spPr>
+          <a:xfrm>
+            <a:off x="2377440" y="2651760"/>
+            <a:ext cx="1234440" cy="310896"/>
+          </a:xfrm>
+          <a:prstGeom prst="rect">
+            <a:avLst/>
+          </a:prstGeom>
+          <a:noFill/>
+          <a:ln/>
+        </p:spPr>
+        <p:txBody>
+          <a:bodyPr wrap="square" rtlCol="0" anchor="ctr"/>
+          <a:lstStyle/>
+          <a:p>
+            <a:pPr algn="ctr" indent="0" marL="0">
+              <a:buNone/>
+            </a:pPr>
+            <a:r>
+              <a:rPr lang="en-US" sz="700" b="1" dirty="0">
+                <a:solidFill>
+                  <a:srgbClr val="1A1A1A"/>
+                </a:solidFill>
+              </a:rPr>
+              <a:t>CDC</a:t>
+            </a:r>
+            <a:endParaRPr lang="en-US" sz="700" dirty="0"/>
+          </a:p>
+          <a:p>
+            <a:pPr algn="ctr" indent="0" marL="0">
+              <a:buNone/>
+            </a:pPr>
+            <a:r>
+              <a:rPr lang="en-US" sz="700" b="1" dirty="0">
+                <a:solidFill>
+                  <a:srgbClr val="1A1A1A"/>
+                </a:solidFill>
+              </a:rPr>
+              <a:t>Ingestion</a:t>
+            </a:r>
+            <a:endParaRPr lang="en-US" sz="700" dirty="0"/>
+          </a:p>
+        </p:txBody>
+      </p:sp>
+      <p:sp>
+        <p:nvSpPr>
+          <p:cNvPr id="64" name="Shape 54"/>
+          <p:cNvSpPr/>
+          <p:nvPr/>
+        </p:nvSpPr>
+        <p:spPr>
+          <a:xfrm>
+            <a:off x="2450592" y="2889504"/>
+            <a:ext cx="256032" cy="256032"/>
+          </a:xfrm>
+          <a:prstGeom prst="ellipse">
+            <a:avLst/>
+          </a:prstGeom>
+          <a:solidFill>
+            <a:srgbClr val="5D35B1"/>
+          </a:solidFill>
+          <a:ln w="12700">
+            <a:solidFill>
+              <a:srgbClr val="5D35B1"/>
+            </a:solidFill>
+            <a:prstDash val="solid"/>
+          </a:ln>
+        </p:spPr>
+      </p:sp>
+      <p:sp>
+        <p:nvSpPr>
+          <p:cNvPr id="65" name="Text 55"/>
+          <p:cNvSpPr/>
+          <p:nvPr/>
+        </p:nvSpPr>
+        <p:spPr>
+          <a:xfrm>
+            <a:off x="2450592" y="2889504"/>
+            <a:ext cx="256032" cy="256032"/>
+          </a:xfrm>
+          <a:prstGeom prst="rect">
+            <a:avLst/>
+          </a:prstGeom>
+          <a:noFill/>
+          <a:ln/>
+        </p:spPr>
+        <p:txBody>
+          <a:bodyPr wrap="square" rtlCol="0" anchor="ctr"/>
+          <a:lstStyle/>
+          <a:p>
+            <a:pPr algn="ctr" indent="0" marL="0">
+              <a:buNone/>
+            </a:pPr>
+            <a:r>
+              <a:rPr lang="en-US" sz="700" b="1" dirty="0">
+                <a:solidFill>
+                  <a:srgbClr val="FFFFFF"/>
+                </a:solidFill>
+              </a:rPr>
+              <a:t>3</a:t>
+            </a:r>
+            <a:endParaRPr lang="en-US" sz="700" dirty="0"/>
+          </a:p>
+        </p:txBody>
+      </p:sp>
+      <p:sp>
+        <p:nvSpPr>
+          <p:cNvPr id="66" name="Shape 56"/>
+          <p:cNvSpPr/>
+          <p:nvPr/>
+        </p:nvSpPr>
+        <p:spPr>
+          <a:xfrm>
+            <a:off x="2633472" y="2926080"/>
+            <a:ext cx="475488" cy="475488"/>
+          </a:xfrm>
+          <a:prstGeom prst="ellipse">
+            <a:avLst/>
+          </a:prstGeom>
+          <a:solidFill>
+            <a:srgbClr val="FFFFFF"/>
+          </a:solidFill>
+          <a:ln w="15240">
+            <a:solidFill>
+              <a:srgbClr val="5D35B1"/>
+            </a:solidFill>
+            <a:prstDash val="solid"/>
+          </a:ln>
+        </p:spPr>
+      </p:sp>
+      <p:sp>
+        <p:nvSpPr>
+          <p:cNvPr id="67" name="Text 57"/>
+          <p:cNvSpPr/>
+          <p:nvPr/>
+        </p:nvSpPr>
+        <p:spPr>
+          <a:xfrm>
+            <a:off x="2377440" y="3419856"/>
+            <a:ext cx="1234440" cy="310896"/>
+          </a:xfrm>
+          <a:prstGeom prst="rect">
+            <a:avLst/>
+          </a:prstGeom>
+          <a:noFill/>
+          <a:ln/>
+        </p:spPr>
+        <p:txBody>
+          <a:bodyPr wrap="square" rtlCol="0" anchor="ctr"/>
+          <a:lstStyle/>
+          <a:p>
+            <a:pPr algn="ctr" indent="0" marL="0">
+              <a:buNone/>
+            </a:pPr>
+            <a:r>
+              <a:rPr lang="en-US" sz="700" b="1" dirty="0">
+                <a:solidFill>
+                  <a:srgbClr val="1A1A1A"/>
+                </a:solidFill>
+              </a:rPr>
+              <a:t>Streaming</a:t>
+            </a:r>
+            <a:endParaRPr lang="en-US" sz="700" dirty="0"/>
+          </a:p>
+          <a:p>
+            <a:pPr algn="ctr" indent="0" marL="0">
+              <a:buNone/>
+            </a:pPr>
+            <a:r>
+              <a:rPr lang="en-US" sz="700" b="1" dirty="0">
+                <a:solidFill>
+                  <a:srgbClr val="1A1A1A"/>
+                </a:solidFill>
+              </a:rPr>
+              <a:t>Ingestion</a:t>
+            </a:r>
+            <a:endParaRPr lang="en-US" sz="700" dirty="0"/>
+          </a:p>
+        </p:txBody>
+      </p:sp>
+      <p:sp>
+        <p:nvSpPr>
+          <p:cNvPr id="68" name="Shape 58"/>
+          <p:cNvSpPr/>
+          <p:nvPr/>
+        </p:nvSpPr>
+        <p:spPr>
+          <a:xfrm>
+            <a:off x="3831336" y="1042416"/>
+            <a:ext cx="2194560" cy="228600"/>
+          </a:xfrm>
+          <a:prstGeom prst="rect">
+            <a:avLst/>
+          </a:prstGeom>
+          <a:solidFill>
+            <a:srgbClr val="2D1B69"/>
+          </a:solidFill>
+          <a:ln w="12700">
+            <a:solidFill>
+              <a:srgbClr val="2D1B69"/>
+            </a:solidFill>
+            <a:prstDash val="solid"/>
+          </a:ln>
+        </p:spPr>
+      </p:sp>
+      <p:sp>
+        <p:nvSpPr>
+          <p:cNvPr id="69" name="Text 59"/>
+          <p:cNvSpPr/>
+          <p:nvPr/>
+        </p:nvSpPr>
+        <p:spPr>
+          <a:xfrm>
+            <a:off x="3831336" y="1042416"/>
+            <a:ext cx="2194560" cy="228600"/>
+          </a:xfrm>
+          <a:prstGeom prst="rect">
+            <a:avLst/>
+          </a:prstGeom>
+          <a:noFill/>
+          <a:ln/>
+        </p:spPr>
+        <p:txBody>
+          <a:bodyPr wrap="square" rtlCol="0" anchor="ctr"/>
+          <a:lstStyle/>
+          <a:p>
+            <a:pPr algn="ctr" indent="0" marL="0">
+              <a:buNone/>
+            </a:pPr>
+            <a:r>
+              <a:rPr lang="en-US" sz="800" b="1" dirty="0">
+                <a:solidFill>
+                  <a:srgbClr val="FFFFFF"/>
+                </a:solidFill>
+              </a:rPr>
+              <a:t>ETL</a:t>
+            </a:r>
+            <a:endParaRPr lang="en-US" sz="800" dirty="0"/>
+          </a:p>
+        </p:txBody>
+      </p:sp>
+      <p:sp>
+        <p:nvSpPr>
+          <p:cNvPr id="70" name="Shape 60"/>
+          <p:cNvSpPr/>
+          <p:nvPr/>
+        </p:nvSpPr>
+        <p:spPr>
+          <a:xfrm>
+            <a:off x="3831336" y="1271016"/>
+            <a:ext cx="2194560" cy="1014984"/>
+          </a:xfrm>
+          <a:prstGeom prst="rect">
+            <a:avLst/>
+          </a:prstGeom>
+          <a:solidFill>
+            <a:srgbClr val="F2F2F2"/>
+          </a:solidFill>
+          <a:ln w="9525">
+            <a:solidFill>
+              <a:srgbClr val="CCCCCC"/>
+            </a:solidFill>
+            <a:prstDash val="solid"/>
+          </a:ln>
+        </p:spPr>
+      </p:sp>
+      <p:sp>
+        <p:nvSpPr>
+          <p:cNvPr id="71" name="Shape 61"/>
+          <p:cNvSpPr/>
+          <p:nvPr/>
+        </p:nvSpPr>
+        <p:spPr>
+          <a:xfrm>
+            <a:off x="3941064" y="1463040"/>
+            <a:ext cx="475488" cy="402336"/>
+          </a:xfrm>
+          <a:prstGeom prst="rect">
+            <a:avLst>
+              <a:gd name="adj" fmla="val 11364"/>
+            </a:avLst>
+          </a:prstGeom>
+          <a:solidFill>
+            <a:srgbClr val="EDE8F9"/>
+          </a:solidFill>
+          <a:ln w="10160">
+            <a:solidFill>
+              <a:srgbClr val="5D35B1"/>
+            </a:solidFill>
+            <a:prstDash val="solid"/>
+          </a:ln>
+        </p:spPr>
+      </p:sp>
+      <p:sp>
+        <p:nvSpPr>
+          <p:cNvPr id="72" name="Text 62"/>
+          <p:cNvSpPr/>
+          <p:nvPr/>
+        </p:nvSpPr>
+        <p:spPr>
+          <a:xfrm>
+            <a:off x="3941064" y="1700784"/>
+            <a:ext cx="475488" cy="182880"/>
+          </a:xfrm>
+          <a:prstGeom prst="rect">
+            <a:avLst/>
+          </a:prstGeom>
+          <a:noFill/>
+          <a:ln/>
+        </p:spPr>
+        <p:txBody>
+          <a:bodyPr wrap="square" rtlCol="0" anchor="ctr"/>
+          <a:lstStyle/>
+          <a:p>
+            <a:pPr algn="ctr" indent="0" marL="0">
+              <a:buNone/>
+            </a:pPr>
+            <a:r>
+              <a:rPr lang="en-US" sz="650" b="1" dirty="0">
+                <a:solidFill>
+                  <a:srgbClr val="5D35B1"/>
+                </a:solidFill>
+              </a:rPr>
+              <a:t>RAW</a:t>
+            </a:r>
+            <a:endParaRPr lang="en-US" sz="650" dirty="0"/>
+          </a:p>
+        </p:txBody>
+      </p:sp>
+      <p:sp>
+        <p:nvSpPr>
+          <p:cNvPr id="73" name="Shape 63"/>
+          <p:cNvSpPr/>
+          <p:nvPr/>
+        </p:nvSpPr>
+        <p:spPr>
+          <a:xfrm>
+            <a:off x="4672584" y="1463040"/>
+            <a:ext cx="475488" cy="402336"/>
+          </a:xfrm>
+          <a:prstGeom prst="rect">
+            <a:avLst>
+              <a:gd name="adj" fmla="val 11364"/>
+            </a:avLst>
+          </a:prstGeom>
+          <a:solidFill>
+            <a:srgbClr val="EDE8F9"/>
+          </a:solidFill>
+          <a:ln w="10160">
+            <a:solidFill>
+              <a:srgbClr val="5D35B1"/>
+            </a:solidFill>
+            <a:prstDash val="solid"/>
+          </a:ln>
+        </p:spPr>
+      </p:sp>
+      <p:sp>
+        <p:nvSpPr>
+          <p:cNvPr id="74" name="Text 64"/>
+          <p:cNvSpPr/>
+          <p:nvPr/>
+        </p:nvSpPr>
+        <p:spPr>
+          <a:xfrm>
+            <a:off x="4672584" y="1700784"/>
+            <a:ext cx="475488" cy="182880"/>
+          </a:xfrm>
+          <a:prstGeom prst="rect">
+            <a:avLst/>
+          </a:prstGeom>
+          <a:noFill/>
+          <a:ln/>
+        </p:spPr>
+        <p:txBody>
+          <a:bodyPr wrap="square" rtlCol="0" anchor="ctr"/>
+          <a:lstStyle/>
+          <a:p>
+            <a:pPr algn="ctr" indent="0" marL="0">
+              <a:buNone/>
+            </a:pPr>
+            <a:r>
+              <a:rPr lang="en-US" sz="650" b="1" dirty="0">
+                <a:solidFill>
+                  <a:srgbClr val="5D35B1"/>
+                </a:solidFill>
+              </a:rPr>
+              <a:t>ODS</a:t>
+            </a:r>
+            <a:endParaRPr lang="en-US" sz="650" dirty="0"/>
+          </a:p>
+        </p:txBody>
+      </p:sp>
+      <p:sp>
+        <p:nvSpPr>
+          <p:cNvPr id="75" name="Shape 65"/>
+          <p:cNvSpPr/>
+          <p:nvPr/>
+        </p:nvSpPr>
+        <p:spPr>
+          <a:xfrm>
+            <a:off x="5440680" y="1463040"/>
+            <a:ext cx="475488" cy="402336"/>
+          </a:xfrm>
+          <a:prstGeom prst="rect">
+            <a:avLst>
+              <a:gd name="adj" fmla="val 11364"/>
+            </a:avLst>
+          </a:prstGeom>
+          <a:solidFill>
+            <a:srgbClr val="EDE8F9"/>
+          </a:solidFill>
+          <a:ln w="10160">
+            <a:solidFill>
+              <a:srgbClr val="5D35B1"/>
+            </a:solidFill>
+            <a:prstDash val="solid"/>
+          </a:ln>
+        </p:spPr>
+      </p:sp>
+      <p:sp>
+        <p:nvSpPr>
+          <p:cNvPr id="76" name="Text 66"/>
+          <p:cNvSpPr/>
+          <p:nvPr/>
+        </p:nvSpPr>
+        <p:spPr>
+          <a:xfrm>
+            <a:off x="5440680" y="1700784"/>
+            <a:ext cx="475488" cy="182880"/>
+          </a:xfrm>
+          <a:prstGeom prst="rect">
+            <a:avLst/>
+          </a:prstGeom>
+          <a:noFill/>
+          <a:ln/>
+        </p:spPr>
+        <p:txBody>
+          <a:bodyPr wrap="square" rtlCol="0" anchor="ctr"/>
+          <a:lstStyle/>
+          <a:p>
+            <a:pPr algn="ctr" indent="0" marL="0">
+              <a:buNone/>
+            </a:pPr>
+            <a:r>
+              <a:rPr lang="en-US" sz="650" b="1" dirty="0">
+                <a:solidFill>
+                  <a:srgbClr val="5D35B1"/>
+                </a:solidFill>
+              </a:rPr>
+              <a:t>Facts</a:t>
+            </a:r>
+            <a:endParaRPr lang="en-US" sz="650" dirty="0"/>
+          </a:p>
+        </p:txBody>
+      </p:sp>
+      <p:sp>
+        <p:nvSpPr>
+          <p:cNvPr id="77" name="Shape 67"/>
+          <p:cNvSpPr/>
+          <p:nvPr/>
+        </p:nvSpPr>
+        <p:spPr>
+          <a:xfrm>
+            <a:off x="4434840" y="1664208"/>
+            <a:ext cx="237744" cy="0"/>
+          </a:xfrm>
+          <a:prstGeom prst="line">
+            <a:avLst/>
+          </a:prstGeom>
+          <a:noFill/>
+          <a:ln w="12700">
+            <a:solidFill>
+              <a:srgbClr val="888888"/>
+            </a:solidFill>
+            <a:prstDash val="dash"/>
+            <a:tailEnd type="arrow"/>
+          </a:ln>
+        </p:spPr>
+      </p:sp>
+      <p:sp>
+        <p:nvSpPr>
+          <p:cNvPr id="78" name="Shape 68"/>
+          <p:cNvSpPr/>
+          <p:nvPr/>
+        </p:nvSpPr>
+        <p:spPr>
+          <a:xfrm>
+            <a:off x="5184648" y="1627632"/>
+            <a:ext cx="256032" cy="91440"/>
+          </a:xfrm>
+          <a:prstGeom prst="line">
+            <a:avLst/>
+          </a:prstGeom>
+          <a:noFill/>
+          <a:ln w="12700">
+            <a:solidFill>
+              <a:srgbClr val="888888"/>
+            </a:solidFill>
+            <a:prstDash val="dash"/>
+            <a:tailEnd type="arrow"/>
+          </a:ln>
+        </p:spPr>
+      </p:sp>
+      <p:sp>
+        <p:nvSpPr>
           <p:cNvPr id="79" name="Shape 69"/>
           <p:cNvSpPr/>
           <p:nvPr/>
         </p:nvSpPr>
         <p:spPr>
           <a:xfrm>
-            <a:off x="3831336" y="2487168"/>
-            <a:ext cx="2194560" cy="237744"/>
-          </a:xfrm>
-          <a:prstGeom prst="rect">
-            <a:avLst/>
-          </a:prstGeom>
-          <a:solidFill>
-            <a:srgbClr val="2D1B69"/>
-          </a:solidFill>
-          <a:ln w="12700">
-            <a:solidFill>
-              <a:srgbClr val="2D1B69"/>
-            </a:solidFill>
-            <a:prstDash val="solid"/>
-          </a:ln>
-        </p:spPr>
-      </p:sp>
-      <p:sp>
-        <p:nvSpPr>
-          <p:cNvPr id="80" name="Text 70"/>
-          <p:cNvSpPr/>
-          <p:nvPr/>
-        </p:nvSpPr>
-        <p:spPr>
-          <a:xfrm>
-            <a:off x="3831336" y="2487168"/>
-            <a:ext cx="2194560" cy="237744"/>
-          </a:xfrm>
-          <a:prstGeom prst="rect">
-            <a:avLst/>
-          </a:prstGeom>
-          <a:noFill/>
-          <a:ln/>
-        </p:spPr>
-        <p:txBody>
-          <a:bodyPr wrap="square" rtlCol="0" anchor="ctr"/>
-          <a:lstStyle/>
-          <a:p>
-            <a:pPr algn="ctr" indent="0" marL="0">
-              <a:buNone/>
-            </a:pPr>
-            <a:r>
-              <a:rPr lang="en-US" sz="800" b="1" dirty="0">
-                <a:solidFill>
-                  <a:srgbClr val="FFFFFF"/>
-                </a:solidFill>
-              </a:rPr>
-              <a:t>Data Warehouse</a:t>
-            </a:r>
-            <a:endParaRPr lang="en-US" sz="800" dirty="0"/>
-          </a:p>
-        </p:txBody>
-      </p:sp>
-      <p:sp>
-        <p:nvSpPr>
-          <p:cNvPr id="81" name="Shape 71"/>
-          <p:cNvSpPr/>
-          <p:nvPr/>
-        </p:nvSpPr>
-        <p:spPr>
-          <a:xfrm>
-            <a:off x="3831336" y="2724912"/>
-            <a:ext cx="2194560" cy="512064"/>
-          </a:xfrm>
-          <a:prstGeom prst="rect">
-            <a:avLst/>
-          </a:prstGeom>
-          <a:solidFill>
-            <a:srgbClr val="F2F2F2"/>
-          </a:solidFill>
-          <a:ln w="9525">
-            <a:solidFill>
-              <a:srgbClr val="CCCCCC"/>
-            </a:solidFill>
-            <a:prstDash val="solid"/>
-          </a:ln>
-        </p:spPr>
-      </p:sp>
-      <p:sp>
-        <p:nvSpPr>
-          <p:cNvPr id="82" name="Shape 72"/>
-          <p:cNvSpPr/>
-          <p:nvPr/>
-        </p:nvSpPr>
-        <p:spPr>
-          <a:xfrm>
-            <a:off x="3959352" y="2779776"/>
-            <a:ext cx="1938528" cy="274320"/>
-          </a:xfrm>
-          <a:prstGeom prst="rect">
-            <a:avLst>
-              <a:gd name="adj" fmla="val 20000"/>
-            </a:avLst>
-          </a:prstGeom>
-          <a:solidFill>
-            <a:srgbClr val="5D35B1"/>
-          </a:solidFill>
-          <a:ln w="12700">
-            <a:solidFill>
-              <a:srgbClr val="5D35B1"/>
-            </a:solidFill>
-            <a:prstDash val="solid"/>
+            <a:off x="4928616" y="2286000"/>
+            <a:ext cx="0" cy="201168"/>
+          </a:xfrm>
+          <a:prstGeom prst="line">
+            <a:avLst/>
+          </a:prstGeom>
+          <a:noFill/>
+          <a:ln w="15240">
+            <a:solidFill>
+              <a:srgbClr val="1A1A1A"/>
+            </a:solidFill>
+            <a:prstDash val="solid"/>
+            <a:tailEnd type="arrow"/>
           </a:ln>
         </p:spPr>
       </p:sp>
       <p:pic>
         <p:nvPicPr>
-          <p:cNvPr id="83" name="Image 8" descr="preencoded.png">    </p:cNvPr>
+          <p:cNvPr id="80" name="Image 8" descr="preencoded.png">    </p:cNvPr>
           <p:cNvPicPr>
             <a:picLocks noChangeAspect="1"/>
           </p:cNvPicPr>
@@ -3465,8 +3379,8 @@
         </p:blipFill>
         <p:spPr>
           <a:xfrm>
-            <a:off x="4032504" y="2807208"/>
-            <a:ext cx="182880" cy="182880"/>
+            <a:off x="5477256" y="1298448"/>
+            <a:ext cx="457200" cy="164592"/>
           </a:xfrm>
           <a:prstGeom prst="rect">
             <a:avLst/>
@@ -3475,165 +3389,120 @@
       </p:pic>
       <p:sp>
         <p:nvSpPr>
-          <p:cNvPr id="84" name="Text 73"/>
-          <p:cNvSpPr/>
-          <p:nvPr/>
-        </p:nvSpPr>
-        <p:spPr>
-          <a:xfrm>
-            <a:off x="4251960" y="2779776"/>
-            <a:ext cx="1554480" cy="274320"/>
-          </a:xfrm>
-          <a:prstGeom prst="rect">
-            <a:avLst/>
-          </a:prstGeom>
-          <a:noFill/>
-          <a:ln/>
-        </p:spPr>
-        <p:txBody>
-          <a:bodyPr wrap="square" rtlCol="0" anchor="ctr"/>
-          <a:lstStyle/>
-          <a:p>
-            <a:pPr indent="0" marL="0">
-              <a:buNone/>
-            </a:pPr>
-            <a:r>
-              <a:rPr lang="en-US" sz="750" b="1" dirty="0">
+          <p:cNvPr id="81" name="Shape 70"/>
+          <p:cNvSpPr/>
+          <p:nvPr/>
+        </p:nvSpPr>
+        <p:spPr>
+          <a:xfrm>
+            <a:off x="3831336" y="2487168"/>
+            <a:ext cx="2194560" cy="237744"/>
+          </a:xfrm>
+          <a:prstGeom prst="rect">
+            <a:avLst/>
+          </a:prstGeom>
+          <a:solidFill>
+            <a:srgbClr val="2D1B69"/>
+          </a:solidFill>
+          <a:ln w="12700">
+            <a:solidFill>
+              <a:srgbClr val="2D1B69"/>
+            </a:solidFill>
+            <a:prstDash val="solid"/>
+          </a:ln>
+        </p:spPr>
+      </p:sp>
+      <p:sp>
+        <p:nvSpPr>
+          <p:cNvPr id="82" name="Text 71"/>
+          <p:cNvSpPr/>
+          <p:nvPr/>
+        </p:nvSpPr>
+        <p:spPr>
+          <a:xfrm>
+            <a:off x="3831336" y="2487168"/>
+            <a:ext cx="2194560" cy="237744"/>
+          </a:xfrm>
+          <a:prstGeom prst="rect">
+            <a:avLst/>
+          </a:prstGeom>
+          <a:noFill/>
+          <a:ln/>
+        </p:spPr>
+        <p:txBody>
+          <a:bodyPr wrap="square" rtlCol="0" anchor="ctr"/>
+          <a:lstStyle/>
+          <a:p>
+            <a:pPr algn="ctr" indent="0" marL="0">
+              <a:buNone/>
+            </a:pPr>
+            <a:r>
+              <a:rPr lang="en-US" sz="800" b="1" dirty="0">
                 <a:solidFill>
                   <a:srgbClr val="FFFFFF"/>
                 </a:solidFill>
               </a:rPr>
-              <a:t>Databricks SQL</a:t>
-            </a:r>
-            <a:endParaRPr lang="en-US" sz="750" dirty="0"/>
-          </a:p>
-        </p:txBody>
-      </p:sp>
-      <p:sp>
-        <p:nvSpPr>
-          <p:cNvPr id="85" name="Text 74"/>
-          <p:cNvSpPr/>
-          <p:nvPr/>
-        </p:nvSpPr>
-        <p:spPr>
-          <a:xfrm>
-            <a:off x="3922776" y="3081528"/>
-            <a:ext cx="2011680" cy="128016"/>
-          </a:xfrm>
-          <a:prstGeom prst="rect">
-            <a:avLst/>
-          </a:prstGeom>
-          <a:noFill/>
-          <a:ln/>
-        </p:spPr>
-        <p:txBody>
-          <a:bodyPr wrap="square" rtlCol="0" anchor="ctr"/>
-          <a:lstStyle/>
-          <a:p>
-            <a:pPr algn="ctr" indent="0" marL="0">
-              <a:buNone/>
-            </a:pPr>
-            <a:r>
-              <a:rPr lang="en-US" sz="550" i="1" dirty="0">
-                <a:solidFill>
-                  <a:srgbClr val="888888"/>
-                </a:solidFill>
-              </a:rPr>
-              <a:t>Best-in-class DW performance</a:t>
-            </a:r>
-            <a:endParaRPr lang="en-US" sz="550" dirty="0"/>
-          </a:p>
-        </p:txBody>
-      </p:sp>
-      <p:sp>
-        <p:nvSpPr>
-          <p:cNvPr id="86" name="Shape 75"/>
-          <p:cNvSpPr/>
-          <p:nvPr/>
-        </p:nvSpPr>
-        <p:spPr>
-          <a:xfrm>
-            <a:off x="3831336" y="3364992"/>
-            <a:ext cx="2194560" cy="237744"/>
-          </a:xfrm>
-          <a:prstGeom prst="rect">
-            <a:avLst/>
-          </a:prstGeom>
-          <a:solidFill>
-            <a:srgbClr val="2D1B69"/>
+              <a:t>Data Warehouse</a:t>
+            </a:r>
+            <a:endParaRPr lang="en-US" sz="800" dirty="0"/>
+          </a:p>
+        </p:txBody>
+      </p:sp>
+      <p:sp>
+        <p:nvSpPr>
+          <p:cNvPr id="83" name="Shape 72"/>
+          <p:cNvSpPr/>
+          <p:nvPr/>
+        </p:nvSpPr>
+        <p:spPr>
+          <a:xfrm>
+            <a:off x="3831336" y="2724912"/>
+            <a:ext cx="2194560" cy="512064"/>
+          </a:xfrm>
+          <a:prstGeom prst="rect">
+            <a:avLst/>
+          </a:prstGeom>
+          <a:solidFill>
+            <a:srgbClr val="F2F2F2"/>
+          </a:solidFill>
+          <a:ln w="9525">
+            <a:solidFill>
+              <a:srgbClr val="CCCCCC"/>
+            </a:solidFill>
+            <a:prstDash val="solid"/>
+          </a:ln>
+        </p:spPr>
+      </p:sp>
+      <p:sp>
+        <p:nvSpPr>
+          <p:cNvPr id="84" name="Shape 73"/>
+          <p:cNvSpPr/>
+          <p:nvPr/>
+        </p:nvSpPr>
+        <p:spPr>
+          <a:xfrm>
+            <a:off x="3959352" y="2779776"/>
+            <a:ext cx="1938528" cy="274320"/>
+          </a:xfrm>
+          <a:prstGeom prst="rect">
+            <a:avLst>
+              <a:gd name="adj" fmla="val 20000"/>
+            </a:avLst>
+          </a:prstGeom>
+          <a:solidFill>
+            <a:srgbClr val="5D35B1"/>
           </a:solidFill>
           <a:ln w="12700">
             <a:solidFill>
-              <a:srgbClr val="2D1B69"/>
-            </a:solidFill>
-            <a:prstDash val="solid"/>
-          </a:ln>
-        </p:spPr>
-      </p:sp>
-      <p:sp>
-        <p:nvSpPr>
-          <p:cNvPr id="87" name="Text 76"/>
-          <p:cNvSpPr/>
-          <p:nvPr/>
-        </p:nvSpPr>
-        <p:spPr>
-          <a:xfrm>
-            <a:off x="3831336" y="3364992"/>
-            <a:ext cx="2194560" cy="237744"/>
-          </a:xfrm>
-          <a:prstGeom prst="rect">
-            <a:avLst/>
-          </a:prstGeom>
-          <a:noFill/>
-          <a:ln/>
-        </p:spPr>
-        <p:txBody>
-          <a:bodyPr wrap="square" rtlCol="0" anchor="ctr"/>
-          <a:lstStyle/>
-          <a:p>
-            <a:pPr algn="ctr" indent="0" marL="0">
-              <a:buNone/>
-            </a:pPr>
-            <a:r>
-              <a:rPr lang="en-US" sz="800" b="1" dirty="0">
-                <a:solidFill>
-                  <a:srgbClr val="FFFFFF"/>
-                </a:solidFill>
-              </a:rPr>
-              <a:t>AI Agent Systems</a:t>
-            </a:r>
-            <a:endParaRPr lang="en-US" sz="800" dirty="0"/>
-          </a:p>
-        </p:txBody>
-      </p:sp>
-      <p:sp>
-        <p:nvSpPr>
-          <p:cNvPr id="88" name="Shape 77"/>
-          <p:cNvSpPr/>
-          <p:nvPr/>
-        </p:nvSpPr>
-        <p:spPr>
-          <a:xfrm>
-            <a:off x="3831336" y="3602736"/>
-            <a:ext cx="2194560" cy="969264"/>
-          </a:xfrm>
-          <a:prstGeom prst="rect">
-            <a:avLst/>
-          </a:prstGeom>
-          <a:solidFill>
-            <a:srgbClr val="F2F2F2"/>
-          </a:solidFill>
-          <a:ln w="9525">
-            <a:solidFill>
-              <a:srgbClr val="CCCCCC"/>
-            </a:solidFill>
-            <a:prstDash val="dash"/>
+              <a:srgbClr val="5D35B1"/>
+            </a:solidFill>
+            <a:prstDash val="solid"/>
           </a:ln>
         </p:spPr>
       </p:sp>
       <p:pic>
         <p:nvPicPr>
-          <p:cNvPr id="89" name="Image 9" descr="preencoded.png">    </p:cNvPr>
+          <p:cNvPr id="85" name="Image 9" descr="preencoded.png">    </p:cNvPr>
           <p:cNvPicPr>
             <a:picLocks noChangeAspect="1"/>
           </p:cNvPicPr>
@@ -3647,8 +3516,8 @@
         </p:blipFill>
         <p:spPr>
           <a:xfrm>
-            <a:off x="5550408" y="3639312"/>
-            <a:ext cx="402336" cy="329184"/>
+            <a:off x="4032504" y="2807208"/>
+            <a:ext cx="182880" cy="182880"/>
           </a:xfrm>
           <a:prstGeom prst="rect">
             <a:avLst/>
@@ -3657,390 +3526,147 @@
       </p:pic>
       <p:sp>
         <p:nvSpPr>
+          <p:cNvPr id="86" name="Text 74"/>
+          <p:cNvSpPr/>
+          <p:nvPr/>
+        </p:nvSpPr>
+        <p:spPr>
+          <a:xfrm>
+            <a:off x="4251960" y="2779776"/>
+            <a:ext cx="1554480" cy="274320"/>
+          </a:xfrm>
+          <a:prstGeom prst="rect">
+            <a:avLst/>
+          </a:prstGeom>
+          <a:noFill/>
+          <a:ln/>
+        </p:spPr>
+        <p:txBody>
+          <a:bodyPr wrap="square" rtlCol="0" anchor="ctr"/>
+          <a:lstStyle/>
+          <a:p>
+            <a:pPr indent="0" marL="0">
+              <a:buNone/>
+            </a:pPr>
+            <a:r>
+              <a:rPr lang="en-US" sz="750" b="1" dirty="0">
+                <a:solidFill>
+                  <a:srgbClr val="FFFFFF"/>
+                </a:solidFill>
+              </a:rPr>
+              <a:t>Databricks SQL</a:t>
+            </a:r>
+            <a:endParaRPr lang="en-US" sz="750" dirty="0"/>
+          </a:p>
+        </p:txBody>
+      </p:sp>
+      <p:sp>
+        <p:nvSpPr>
+          <p:cNvPr id="87" name="Text 75"/>
+          <p:cNvSpPr/>
+          <p:nvPr/>
+        </p:nvSpPr>
+        <p:spPr>
+          <a:xfrm>
+            <a:off x="3922776" y="3081528"/>
+            <a:ext cx="2011680" cy="128016"/>
+          </a:xfrm>
+          <a:prstGeom prst="rect">
+            <a:avLst/>
+          </a:prstGeom>
+          <a:noFill/>
+          <a:ln/>
+        </p:spPr>
+        <p:txBody>
+          <a:bodyPr wrap="square" rtlCol="0" anchor="ctr"/>
+          <a:lstStyle/>
+          <a:p>
+            <a:pPr algn="ctr" indent="0" marL="0">
+              <a:buNone/>
+            </a:pPr>
+            <a:r>
+              <a:rPr lang="en-US" sz="550" i="1" dirty="0">
+                <a:solidFill>
+                  <a:srgbClr val="888888"/>
+                </a:solidFill>
+              </a:rPr>
+              <a:t>Best-in-class DW performance</a:t>
+            </a:r>
+            <a:endParaRPr lang="en-US" sz="550" dirty="0"/>
+          </a:p>
+        </p:txBody>
+      </p:sp>
+      <p:sp>
+        <p:nvSpPr>
+          <p:cNvPr id="88" name="Shape 76"/>
+          <p:cNvSpPr/>
+          <p:nvPr/>
+        </p:nvSpPr>
+        <p:spPr>
+          <a:xfrm>
+            <a:off x="3831336" y="3364992"/>
+            <a:ext cx="2194560" cy="237744"/>
+          </a:xfrm>
+          <a:prstGeom prst="rect">
+            <a:avLst/>
+          </a:prstGeom>
+          <a:solidFill>
+            <a:srgbClr val="2D1B69"/>
+          </a:solidFill>
+          <a:ln w="12700">
+            <a:solidFill>
+              <a:srgbClr val="2D1B69"/>
+            </a:solidFill>
+            <a:prstDash val="solid"/>
+          </a:ln>
+        </p:spPr>
+      </p:sp>
+      <p:sp>
+        <p:nvSpPr>
+          <p:cNvPr id="89" name="Text 77"/>
+          <p:cNvSpPr/>
+          <p:nvPr/>
+        </p:nvSpPr>
+        <p:spPr>
+          <a:xfrm>
+            <a:off x="3831336" y="3364992"/>
+            <a:ext cx="2194560" cy="237744"/>
+          </a:xfrm>
+          <a:prstGeom prst="rect">
+            <a:avLst/>
+          </a:prstGeom>
+          <a:noFill/>
+          <a:ln/>
+        </p:spPr>
+        <p:txBody>
+          <a:bodyPr wrap="square" rtlCol="0" anchor="ctr"/>
+          <a:lstStyle/>
+          <a:p>
+            <a:pPr algn="ctr" indent="0" marL="0">
+              <a:buNone/>
+            </a:pPr>
+            <a:r>
+              <a:rPr lang="en-US" sz="800" b="1" dirty="0">
+                <a:solidFill>
+                  <a:srgbClr val="FFFFFF"/>
+                </a:solidFill>
+              </a:rPr>
+              <a:t>AI Agent Systems</a:t>
+            </a:r>
+            <a:endParaRPr lang="en-US" sz="800" dirty="0"/>
+          </a:p>
+        </p:txBody>
+      </p:sp>
+      <p:sp>
+        <p:nvSpPr>
           <p:cNvPr id="90" name="Shape 78"/>
           <p:cNvSpPr/>
           <p:nvPr/>
         </p:nvSpPr>
         <p:spPr>
           <a:xfrm>
-            <a:off x="3904488" y="3675888"/>
-            <a:ext cx="786384" cy="219456"/>
-          </a:xfrm>
-          <a:prstGeom prst="rect">
-            <a:avLst>
-              <a:gd name="adj" fmla="val 33333"/>
-            </a:avLst>
-          </a:prstGeom>
-          <a:solidFill>
-            <a:srgbClr val="5D35B1"/>
-          </a:solidFill>
-          <a:ln w="12700">
-            <a:solidFill>
-              <a:srgbClr val="5D35B1"/>
-            </a:solidFill>
-            <a:prstDash val="solid"/>
-          </a:ln>
-        </p:spPr>
-      </p:sp>
-      <p:sp>
-        <p:nvSpPr>
-          <p:cNvPr id="91" name="Text 79"/>
-          <p:cNvSpPr/>
-          <p:nvPr/>
-        </p:nvSpPr>
-        <p:spPr>
-          <a:xfrm>
-            <a:off x="3904488" y="3675888"/>
-            <a:ext cx="786384" cy="219456"/>
-          </a:xfrm>
-          <a:prstGeom prst="rect">
-            <a:avLst/>
-          </a:prstGeom>
-          <a:noFill/>
-          <a:ln/>
-        </p:spPr>
-        <p:txBody>
-          <a:bodyPr wrap="square" lIns="12700" tIns="12700" rIns="12700" bIns="12700" rtlCol="0" anchor="ctr"/>
-          <a:lstStyle/>
-          <a:p>
-            <a:pPr algn="ctr" indent="0" marL="0">
-              <a:buNone/>
-            </a:pPr>
-            <a:r>
-              <a:rPr lang="en-US" sz="550" b="1" dirty="0">
-                <a:solidFill>
-                  <a:srgbClr val="FFFFFF"/>
-                </a:solidFill>
-              </a:rPr>
-              <a:t>Prepare data</a:t>
-            </a:r>
-            <a:endParaRPr lang="en-US" sz="550" dirty="0"/>
-          </a:p>
-        </p:txBody>
-      </p:sp>
-      <p:sp>
-        <p:nvSpPr>
-          <p:cNvPr id="92" name="Shape 80"/>
-          <p:cNvSpPr/>
-          <p:nvPr/>
-        </p:nvSpPr>
-        <p:spPr>
-          <a:xfrm>
-            <a:off x="5148072" y="3675888"/>
-            <a:ext cx="786384" cy="219456"/>
-          </a:xfrm>
-          <a:prstGeom prst="rect">
-            <a:avLst>
-              <a:gd name="adj" fmla="val 33333"/>
-            </a:avLst>
-          </a:prstGeom>
-          <a:solidFill>
-            <a:srgbClr val="5D35B1"/>
-          </a:solidFill>
-          <a:ln w="12700">
-            <a:solidFill>
-              <a:srgbClr val="5D35B1"/>
-            </a:solidFill>
-            <a:prstDash val="solid"/>
-          </a:ln>
-        </p:spPr>
-      </p:sp>
-      <p:sp>
-        <p:nvSpPr>
-          <p:cNvPr id="93" name="Text 81"/>
-          <p:cNvSpPr/>
-          <p:nvPr/>
-        </p:nvSpPr>
-        <p:spPr>
-          <a:xfrm>
-            <a:off x="5148072" y="3675888"/>
-            <a:ext cx="786384" cy="219456"/>
-          </a:xfrm>
-          <a:prstGeom prst="rect">
-            <a:avLst/>
-          </a:prstGeom>
-          <a:noFill/>
-          <a:ln/>
-        </p:spPr>
-        <p:txBody>
-          <a:bodyPr wrap="square" lIns="12700" tIns="12700" rIns="12700" bIns="12700" rtlCol="0" anchor="ctr"/>
-          <a:lstStyle/>
-          <a:p>
-            <a:pPr algn="ctr" indent="0" marL="0">
-              <a:buNone/>
-            </a:pPr>
-            <a:r>
-              <a:rPr lang="en-US" sz="550" b="1" dirty="0">
-                <a:solidFill>
-                  <a:srgbClr val="FFFFFF"/>
-                </a:solidFill>
-              </a:rPr>
-              <a:t>Build agents</a:t>
-            </a:r>
-            <a:endParaRPr lang="en-US" sz="550" dirty="0"/>
-          </a:p>
-        </p:txBody>
-      </p:sp>
-      <p:sp>
-        <p:nvSpPr>
-          <p:cNvPr id="94" name="Shape 82"/>
-          <p:cNvSpPr/>
-          <p:nvPr/>
-        </p:nvSpPr>
-        <p:spPr>
-          <a:xfrm>
-            <a:off x="3904488" y="3950208"/>
-            <a:ext cx="786384" cy="219456"/>
-          </a:xfrm>
-          <a:prstGeom prst="rect">
-            <a:avLst>
-              <a:gd name="adj" fmla="val 33333"/>
-            </a:avLst>
-          </a:prstGeom>
-          <a:solidFill>
-            <a:srgbClr val="5D35B1"/>
-          </a:solidFill>
-          <a:ln w="12700">
-            <a:solidFill>
-              <a:srgbClr val="5D35B1"/>
-            </a:solidFill>
-            <a:prstDash val="solid"/>
-          </a:ln>
-        </p:spPr>
-      </p:sp>
-      <p:sp>
-        <p:nvSpPr>
-          <p:cNvPr id="95" name="Text 83"/>
-          <p:cNvSpPr/>
-          <p:nvPr/>
-        </p:nvSpPr>
-        <p:spPr>
-          <a:xfrm>
-            <a:off x="3904488" y="3950208"/>
-            <a:ext cx="786384" cy="219456"/>
-          </a:xfrm>
-          <a:prstGeom prst="rect">
-            <a:avLst/>
-          </a:prstGeom>
-          <a:noFill/>
-          <a:ln/>
-        </p:spPr>
-        <p:txBody>
-          <a:bodyPr wrap="square" lIns="12700" tIns="12700" rIns="12700" bIns="12700" rtlCol="0" anchor="ctr"/>
-          <a:lstStyle/>
-          <a:p>
-            <a:pPr algn="ctr" indent="0" marL="0">
-              <a:buNone/>
-            </a:pPr>
-            <a:r>
-              <a:rPr lang="en-US" sz="550" b="1" dirty="0">
-                <a:solidFill>
-                  <a:srgbClr val="FFFFFF"/>
-                </a:solidFill>
-              </a:rPr>
-              <a:t>Evaluate agents</a:t>
-            </a:r>
-            <a:endParaRPr lang="en-US" sz="550" dirty="0"/>
-          </a:p>
-        </p:txBody>
-      </p:sp>
-      <p:sp>
-        <p:nvSpPr>
-          <p:cNvPr id="96" name="Shape 84"/>
-          <p:cNvSpPr/>
-          <p:nvPr/>
-        </p:nvSpPr>
-        <p:spPr>
-          <a:xfrm>
-            <a:off x="5148072" y="3950208"/>
-            <a:ext cx="786384" cy="219456"/>
-          </a:xfrm>
-          <a:prstGeom prst="rect">
-            <a:avLst>
-              <a:gd name="adj" fmla="val 33333"/>
-            </a:avLst>
-          </a:prstGeom>
-          <a:solidFill>
-            <a:srgbClr val="5D35B1"/>
-          </a:solidFill>
-          <a:ln w="12700">
-            <a:solidFill>
-              <a:srgbClr val="5D35B1"/>
-            </a:solidFill>
-            <a:prstDash val="solid"/>
-          </a:ln>
-        </p:spPr>
-      </p:sp>
-      <p:sp>
-        <p:nvSpPr>
-          <p:cNvPr id="97" name="Text 85"/>
-          <p:cNvSpPr/>
-          <p:nvPr/>
-        </p:nvSpPr>
-        <p:spPr>
-          <a:xfrm>
-            <a:off x="5148072" y="3950208"/>
-            <a:ext cx="786384" cy="219456"/>
-          </a:xfrm>
-          <a:prstGeom prst="rect">
-            <a:avLst/>
-          </a:prstGeom>
-          <a:noFill/>
-          <a:ln/>
-        </p:spPr>
-        <p:txBody>
-          <a:bodyPr wrap="square" lIns="12700" tIns="12700" rIns="12700" bIns="12700" rtlCol="0" anchor="ctr"/>
-          <a:lstStyle/>
-          <a:p>
-            <a:pPr algn="ctr" indent="0" marL="0">
-              <a:buNone/>
-            </a:pPr>
-            <a:r>
-              <a:rPr lang="en-US" sz="550" b="1" dirty="0">
-                <a:solidFill>
-                  <a:srgbClr val="FFFFFF"/>
-                </a:solidFill>
-              </a:rPr>
-              <a:t>Deploy agents</a:t>
-            </a:r>
-            <a:endParaRPr lang="en-US" sz="550" dirty="0"/>
-          </a:p>
-        </p:txBody>
-      </p:sp>
-      <p:sp>
-        <p:nvSpPr>
-          <p:cNvPr id="98" name="Shape 86"/>
-          <p:cNvSpPr/>
-          <p:nvPr/>
-        </p:nvSpPr>
-        <p:spPr>
-          <a:xfrm>
-            <a:off x="4526280" y="4224528"/>
-            <a:ext cx="786384" cy="219456"/>
-          </a:xfrm>
-          <a:prstGeom prst="rect">
-            <a:avLst>
-              <a:gd name="adj" fmla="val 33333"/>
-            </a:avLst>
-          </a:prstGeom>
-          <a:solidFill>
-            <a:srgbClr val="5D35B1"/>
-          </a:solidFill>
-          <a:ln w="12700">
-            <a:solidFill>
-              <a:srgbClr val="5D35B1"/>
-            </a:solidFill>
-            <a:prstDash val="solid"/>
-          </a:ln>
-        </p:spPr>
-      </p:sp>
-      <p:sp>
-        <p:nvSpPr>
-          <p:cNvPr id="99" name="Text 87"/>
-          <p:cNvSpPr/>
-          <p:nvPr/>
-        </p:nvSpPr>
-        <p:spPr>
-          <a:xfrm>
-            <a:off x="4526280" y="4224528"/>
-            <a:ext cx="786384" cy="219456"/>
-          </a:xfrm>
-          <a:prstGeom prst="rect">
-            <a:avLst/>
-          </a:prstGeom>
-          <a:noFill/>
-          <a:ln/>
-        </p:spPr>
-        <p:txBody>
-          <a:bodyPr wrap="square" lIns="12700" tIns="12700" rIns="12700" bIns="12700" rtlCol="0" anchor="ctr"/>
-          <a:lstStyle/>
-          <a:p>
-            <a:pPr algn="ctr" indent="0" marL="0">
-              <a:buNone/>
-            </a:pPr>
-            <a:r>
-              <a:rPr lang="en-US" sz="550" b="1" dirty="0">
-                <a:solidFill>
-                  <a:srgbClr val="FFFFFF"/>
-                </a:solidFill>
-              </a:rPr>
-              <a:t>Govern agents</a:t>
-            </a:r>
-            <a:endParaRPr lang="en-US" sz="550" dirty="0"/>
-          </a:p>
-        </p:txBody>
-      </p:sp>
-      <p:sp>
-        <p:nvSpPr>
-          <p:cNvPr id="100" name="Shape 88"/>
-          <p:cNvSpPr/>
-          <p:nvPr/>
-        </p:nvSpPr>
-        <p:spPr>
-          <a:xfrm>
-            <a:off x="6153912" y="1042416"/>
-            <a:ext cx="1828800" cy="237744"/>
-          </a:xfrm>
-          <a:prstGeom prst="rect">
-            <a:avLst/>
-          </a:prstGeom>
-          <a:solidFill>
-            <a:srgbClr val="2D1B69"/>
-          </a:solidFill>
-          <a:ln w="12700">
-            <a:solidFill>
-              <a:srgbClr val="2D1B69"/>
-            </a:solidFill>
-            <a:prstDash val="solid"/>
-          </a:ln>
-        </p:spPr>
-      </p:sp>
-      <p:sp>
-        <p:nvSpPr>
-          <p:cNvPr id="101" name="Text 89"/>
-          <p:cNvSpPr/>
-          <p:nvPr/>
-        </p:nvSpPr>
-        <p:spPr>
-          <a:xfrm>
-            <a:off x="6153912" y="1042416"/>
-            <a:ext cx="1828800" cy="237744"/>
-          </a:xfrm>
-          <a:prstGeom prst="rect">
-            <a:avLst/>
-          </a:prstGeom>
-          <a:noFill/>
-          <a:ln/>
-        </p:spPr>
-        <p:txBody>
-          <a:bodyPr wrap="square" rtlCol="0" anchor="ctr"/>
-          <a:lstStyle/>
-          <a:p>
-            <a:pPr algn="ctr" indent="0" marL="0">
-              <a:buNone/>
-            </a:pPr>
-            <a:r>
-              <a:rPr lang="en-US" sz="700" b="1" dirty="0">
-                <a:solidFill>
-                  <a:srgbClr val="FFFFFF"/>
-                </a:solidFill>
-              </a:rPr>
-              <a:t>Streaming Analytics</a:t>
-            </a:r>
-            <a:endParaRPr lang="en-US" sz="700" dirty="0"/>
-          </a:p>
-        </p:txBody>
-      </p:sp>
-      <p:sp>
-        <p:nvSpPr>
-          <p:cNvPr id="102" name="Shape 90"/>
-          <p:cNvSpPr/>
-          <p:nvPr/>
-        </p:nvSpPr>
-        <p:spPr>
-          <a:xfrm>
-            <a:off x="6153912" y="1280160"/>
-            <a:ext cx="1828800" cy="420624"/>
+            <a:off x="3831336" y="3602736"/>
+            <a:ext cx="2194560" cy="969264"/>
           </a:xfrm>
           <a:prstGeom prst="rect">
             <a:avLst/>
@@ -4052,988 +3678,13 @@
             <a:solidFill>
               <a:srgbClr val="CCCCCC"/>
             </a:solidFill>
-            <a:prstDash val="solid"/>
-          </a:ln>
-        </p:spPr>
-      </p:sp>
-      <p:sp>
-        <p:nvSpPr>
-          <p:cNvPr id="103" name="Shape 91"/>
-          <p:cNvSpPr/>
-          <p:nvPr/>
-        </p:nvSpPr>
-        <p:spPr>
-          <a:xfrm>
-            <a:off x="6245352" y="1335024"/>
-            <a:ext cx="384048" cy="329184"/>
-          </a:xfrm>
-          <a:prstGeom prst="rect">
-            <a:avLst>
-              <a:gd name="adj" fmla="val 11111"/>
-            </a:avLst>
-          </a:prstGeom>
-          <a:solidFill>
-            <a:srgbClr val="EDE8F9"/>
-          </a:solidFill>
-          <a:ln w="6350">
-            <a:solidFill>
-              <a:srgbClr val="5D35B1"/>
-            </a:solidFill>
-            <a:prstDash val="solid"/>
-          </a:ln>
-        </p:spPr>
-      </p:sp>
-      <p:sp>
-        <p:nvSpPr>
-          <p:cNvPr id="104" name="Text 92"/>
-          <p:cNvSpPr/>
-          <p:nvPr/>
-        </p:nvSpPr>
-        <p:spPr>
-          <a:xfrm>
-            <a:off x="6245352" y="1335024"/>
-            <a:ext cx="384048" cy="329184"/>
-          </a:xfrm>
-          <a:prstGeom prst="rect">
-            <a:avLst/>
-          </a:prstGeom>
-          <a:noFill/>
-          <a:ln/>
-        </p:spPr>
-        <p:txBody>
-          <a:bodyPr wrap="square" rtlCol="0" anchor="ctr"/>
-          <a:lstStyle/>
-          <a:p>
-            <a:pPr algn="ctr" indent="0" marL="0">
-              <a:buNone/>
-            </a:pPr>
-            <a:r>
-              <a:rPr lang="en-US" sz="1300" dirty="0">
-                <a:solidFill>
-                  <a:srgbClr val="000000"/>
-                </a:solidFill>
-              </a:rPr>
-              <a:t>📊</a:t>
-            </a:r>
-            <a:endParaRPr lang="en-US" sz="1300" dirty="0"/>
-          </a:p>
-        </p:txBody>
-      </p:sp>
-      <p:sp>
-        <p:nvSpPr>
-          <p:cNvPr id="105" name="Shape 93"/>
-          <p:cNvSpPr/>
-          <p:nvPr/>
-        </p:nvSpPr>
-        <p:spPr>
-          <a:xfrm>
-            <a:off x="6153912" y="1755648"/>
-            <a:ext cx="1828800" cy="237744"/>
-          </a:xfrm>
-          <a:prstGeom prst="rect">
-            <a:avLst/>
-          </a:prstGeom>
-          <a:solidFill>
-            <a:srgbClr val="2D1B69"/>
-          </a:solidFill>
-          <a:ln w="12700">
-            <a:solidFill>
-              <a:srgbClr val="2D1B69"/>
-            </a:solidFill>
-            <a:prstDash val="solid"/>
-          </a:ln>
-        </p:spPr>
-      </p:sp>
-      <p:sp>
-        <p:nvSpPr>
-          <p:cNvPr id="106" name="Text 94"/>
-          <p:cNvSpPr/>
-          <p:nvPr/>
-        </p:nvSpPr>
-        <p:spPr>
-          <a:xfrm>
-            <a:off x="6153912" y="1755648"/>
-            <a:ext cx="1828800" cy="237744"/>
-          </a:xfrm>
-          <a:prstGeom prst="rect">
-            <a:avLst/>
-          </a:prstGeom>
-          <a:noFill/>
-          <a:ln/>
-        </p:spPr>
-        <p:txBody>
-          <a:bodyPr wrap="square" rtlCol="0" anchor="ctr"/>
-          <a:lstStyle/>
-          <a:p>
-            <a:pPr algn="ctr" indent="0" marL="0">
-              <a:buNone/>
-            </a:pPr>
-            <a:r>
-              <a:rPr lang="en-US" sz="700" b="1" dirty="0">
-                <a:solidFill>
-                  <a:srgbClr val="FFFFFF"/>
-                </a:solidFill>
-              </a:rPr>
-              <a:t>BI &amp; Reporting</a:t>
-            </a:r>
-            <a:endParaRPr lang="en-US" sz="700" dirty="0"/>
-          </a:p>
-        </p:txBody>
-      </p:sp>
-      <p:sp>
-        <p:nvSpPr>
-          <p:cNvPr id="107" name="Shape 95"/>
-          <p:cNvSpPr/>
-          <p:nvPr/>
-        </p:nvSpPr>
-        <p:spPr>
-          <a:xfrm>
-            <a:off x="6153912" y="1993392"/>
-            <a:ext cx="1828800" cy="420624"/>
-          </a:xfrm>
-          <a:prstGeom prst="rect">
-            <a:avLst/>
-          </a:prstGeom>
-          <a:solidFill>
-            <a:srgbClr val="F2F2F2"/>
-          </a:solidFill>
-          <a:ln w="9525">
-            <a:solidFill>
-              <a:srgbClr val="CCCCCC"/>
-            </a:solidFill>
-            <a:prstDash val="solid"/>
-          </a:ln>
-        </p:spPr>
-      </p:sp>
-      <p:sp>
-        <p:nvSpPr>
-          <p:cNvPr id="108" name="Shape 96"/>
-          <p:cNvSpPr/>
-          <p:nvPr/>
-        </p:nvSpPr>
-        <p:spPr>
-          <a:xfrm>
-            <a:off x="6245352" y="2048256"/>
-            <a:ext cx="384048" cy="329184"/>
-          </a:xfrm>
-          <a:prstGeom prst="rect">
-            <a:avLst>
-              <a:gd name="adj" fmla="val 11111"/>
-            </a:avLst>
-          </a:prstGeom>
-          <a:solidFill>
-            <a:srgbClr val="EDE8F9"/>
-          </a:solidFill>
-          <a:ln w="6350">
-            <a:solidFill>
-              <a:srgbClr val="5D35B1"/>
-            </a:solidFill>
-            <a:prstDash val="solid"/>
-          </a:ln>
-        </p:spPr>
-      </p:sp>
-      <p:sp>
-        <p:nvSpPr>
-          <p:cNvPr id="109" name="Text 97"/>
-          <p:cNvSpPr/>
-          <p:nvPr/>
-        </p:nvSpPr>
-        <p:spPr>
-          <a:xfrm>
-            <a:off x="6245352" y="2048256"/>
-            <a:ext cx="384048" cy="329184"/>
-          </a:xfrm>
-          <a:prstGeom prst="rect">
-            <a:avLst/>
-          </a:prstGeom>
-          <a:noFill/>
-          <a:ln/>
-        </p:spPr>
-        <p:txBody>
-          <a:bodyPr wrap="square" rtlCol="0" anchor="ctr"/>
-          <a:lstStyle/>
-          <a:p>
-            <a:pPr algn="ctr" indent="0" marL="0">
-              <a:buNone/>
-            </a:pPr>
-            <a:r>
-              <a:rPr lang="en-US" sz="1300" dirty="0">
-                <a:solidFill>
-                  <a:srgbClr val="000000"/>
-                </a:solidFill>
-              </a:rPr>
-              <a:t>📈</a:t>
-            </a:r>
-            <a:endParaRPr lang="en-US" sz="1300" dirty="0"/>
-          </a:p>
-        </p:txBody>
-      </p:sp>
-      <p:sp>
-        <p:nvSpPr>
-          <p:cNvPr id="110" name="Shape 98"/>
-          <p:cNvSpPr/>
-          <p:nvPr/>
-        </p:nvSpPr>
-        <p:spPr>
-          <a:xfrm>
-            <a:off x="6153912" y="2468880"/>
-            <a:ext cx="1828800" cy="237744"/>
-          </a:xfrm>
-          <a:prstGeom prst="rect">
-            <a:avLst/>
-          </a:prstGeom>
-          <a:solidFill>
-            <a:srgbClr val="2D1B69"/>
-          </a:solidFill>
-          <a:ln w="12700">
-            <a:solidFill>
-              <a:srgbClr val="2D1B69"/>
-            </a:solidFill>
-            <a:prstDash val="solid"/>
-          </a:ln>
-        </p:spPr>
-      </p:sp>
-      <p:sp>
-        <p:nvSpPr>
-          <p:cNvPr id="111" name="Text 99"/>
-          <p:cNvSpPr/>
-          <p:nvPr/>
-        </p:nvSpPr>
-        <p:spPr>
-          <a:xfrm>
-            <a:off x="6153912" y="2468880"/>
-            <a:ext cx="1828800" cy="237744"/>
-          </a:xfrm>
-          <a:prstGeom prst="rect">
-            <a:avLst/>
-          </a:prstGeom>
-          <a:noFill/>
-          <a:ln/>
-        </p:spPr>
-        <p:txBody>
-          <a:bodyPr wrap="square" rtlCol="0" anchor="ctr"/>
-          <a:lstStyle/>
-          <a:p>
-            <a:pPr algn="ctr" indent="0" marL="0">
-              <a:buNone/>
-            </a:pPr>
-            <a:r>
-              <a:rPr lang="en-US" sz="700" b="1" dirty="0">
-                <a:solidFill>
-                  <a:srgbClr val="FFFFFF"/>
-                </a:solidFill>
-              </a:rPr>
-              <a:t>Data Sharing &amp; Marketplace</a:t>
-            </a:r>
-            <a:endParaRPr lang="en-US" sz="700" dirty="0"/>
-          </a:p>
-        </p:txBody>
-      </p:sp>
-      <p:sp>
-        <p:nvSpPr>
-          <p:cNvPr id="112" name="Shape 100"/>
-          <p:cNvSpPr/>
-          <p:nvPr/>
-        </p:nvSpPr>
-        <p:spPr>
-          <a:xfrm>
-            <a:off x="6153912" y="2706624"/>
-            <a:ext cx="1828800" cy="420624"/>
-          </a:xfrm>
-          <a:prstGeom prst="rect">
-            <a:avLst/>
-          </a:prstGeom>
-          <a:solidFill>
-            <a:srgbClr val="F2F2F2"/>
-          </a:solidFill>
-          <a:ln w="9525">
-            <a:solidFill>
-              <a:srgbClr val="CCCCCC"/>
-            </a:solidFill>
-            <a:prstDash val="solid"/>
-          </a:ln>
-        </p:spPr>
-      </p:sp>
-      <p:sp>
-        <p:nvSpPr>
-          <p:cNvPr id="113" name="Shape 101"/>
-          <p:cNvSpPr/>
-          <p:nvPr/>
-        </p:nvSpPr>
-        <p:spPr>
-          <a:xfrm>
-            <a:off x="6245352" y="2761488"/>
-            <a:ext cx="384048" cy="329184"/>
-          </a:xfrm>
-          <a:prstGeom prst="rect">
-            <a:avLst>
-              <a:gd name="adj" fmla="val 11111"/>
-            </a:avLst>
-          </a:prstGeom>
-          <a:solidFill>
-            <a:srgbClr val="EDE8F9"/>
-          </a:solidFill>
-          <a:ln w="6350">
-            <a:solidFill>
-              <a:srgbClr val="5D35B1"/>
-            </a:solidFill>
-            <a:prstDash val="solid"/>
-          </a:ln>
-        </p:spPr>
-      </p:sp>
-      <p:sp>
-        <p:nvSpPr>
-          <p:cNvPr id="114" name="Text 102"/>
-          <p:cNvSpPr/>
-          <p:nvPr/>
-        </p:nvSpPr>
-        <p:spPr>
-          <a:xfrm>
-            <a:off x="6245352" y="2761488"/>
-            <a:ext cx="384048" cy="329184"/>
-          </a:xfrm>
-          <a:prstGeom prst="rect">
-            <a:avLst/>
-          </a:prstGeom>
-          <a:noFill/>
-          <a:ln/>
-        </p:spPr>
-        <p:txBody>
-          <a:bodyPr wrap="square" rtlCol="0" anchor="ctr"/>
-          <a:lstStyle/>
-          <a:p>
-            <a:pPr algn="ctr" indent="0" marL="0">
-              <a:buNone/>
-            </a:pPr>
-            <a:r>
-              <a:rPr lang="en-US" sz="1300" dirty="0">
-                <a:solidFill>
-                  <a:srgbClr val="000000"/>
-                </a:solidFill>
-              </a:rPr>
-              <a:t>🔗</a:t>
-            </a:r>
-            <a:endParaRPr lang="en-US" sz="1300" dirty="0"/>
-          </a:p>
-        </p:txBody>
-      </p:sp>
-      <p:sp>
-        <p:nvSpPr>
-          <p:cNvPr id="115" name="Shape 103"/>
-          <p:cNvSpPr/>
-          <p:nvPr/>
-        </p:nvSpPr>
-        <p:spPr>
-          <a:xfrm>
-            <a:off x="6153912" y="3182112"/>
-            <a:ext cx="1828800" cy="237744"/>
-          </a:xfrm>
-          <a:prstGeom prst="rect">
-            <a:avLst/>
-          </a:prstGeom>
-          <a:solidFill>
-            <a:srgbClr val="2D1B69"/>
-          </a:solidFill>
-          <a:ln w="12700">
-            <a:solidFill>
-              <a:srgbClr val="2D1B69"/>
-            </a:solidFill>
-            <a:prstDash val="solid"/>
-          </a:ln>
-        </p:spPr>
-      </p:sp>
-      <p:sp>
-        <p:nvSpPr>
-          <p:cNvPr id="116" name="Text 104"/>
-          <p:cNvSpPr/>
-          <p:nvPr/>
-        </p:nvSpPr>
-        <p:spPr>
-          <a:xfrm>
-            <a:off x="6153912" y="3182112"/>
-            <a:ext cx="1828800" cy="237744"/>
-          </a:xfrm>
-          <a:prstGeom prst="rect">
-            <a:avLst/>
-          </a:prstGeom>
-          <a:noFill/>
-          <a:ln/>
-        </p:spPr>
-        <p:txBody>
-          <a:bodyPr wrap="square" rtlCol="0" anchor="ctr"/>
-          <a:lstStyle/>
-          <a:p>
-            <a:pPr algn="ctr" indent="0" marL="0">
-              <a:buNone/>
-            </a:pPr>
-            <a:r>
-              <a:rPr lang="en-US" sz="700" b="1" dirty="0">
-                <a:solidFill>
-                  <a:srgbClr val="FFFFFF"/>
-                </a:solidFill>
-              </a:rPr>
-              <a:t>AI Applications</a:t>
-            </a:r>
-            <a:endParaRPr lang="en-US" sz="700" dirty="0"/>
-          </a:p>
-        </p:txBody>
-      </p:sp>
-      <p:sp>
-        <p:nvSpPr>
-          <p:cNvPr id="117" name="Shape 105"/>
-          <p:cNvSpPr/>
-          <p:nvPr/>
-        </p:nvSpPr>
-        <p:spPr>
-          <a:xfrm>
-            <a:off x="6153912" y="3419856"/>
-            <a:ext cx="1828800" cy="420624"/>
-          </a:xfrm>
-          <a:prstGeom prst="rect">
-            <a:avLst/>
-          </a:prstGeom>
-          <a:solidFill>
-            <a:srgbClr val="F2F2F2"/>
-          </a:solidFill>
-          <a:ln w="9525">
-            <a:solidFill>
-              <a:srgbClr val="CCCCCC"/>
-            </a:solidFill>
-            <a:prstDash val="solid"/>
-          </a:ln>
-        </p:spPr>
-      </p:sp>
-      <p:sp>
-        <p:nvSpPr>
-          <p:cNvPr id="118" name="Shape 106"/>
-          <p:cNvSpPr/>
-          <p:nvPr/>
-        </p:nvSpPr>
-        <p:spPr>
-          <a:xfrm>
-            <a:off x="6245352" y="3474720"/>
-            <a:ext cx="384048" cy="329184"/>
-          </a:xfrm>
-          <a:prstGeom prst="rect">
-            <a:avLst>
-              <a:gd name="adj" fmla="val 11111"/>
-            </a:avLst>
-          </a:prstGeom>
-          <a:solidFill>
-            <a:srgbClr val="EDE8F9"/>
-          </a:solidFill>
-          <a:ln w="6350">
-            <a:solidFill>
-              <a:srgbClr val="5D35B1"/>
-            </a:solidFill>
-            <a:prstDash val="solid"/>
-          </a:ln>
-        </p:spPr>
-      </p:sp>
-      <p:sp>
-        <p:nvSpPr>
-          <p:cNvPr id="119" name="Text 107"/>
-          <p:cNvSpPr/>
-          <p:nvPr/>
-        </p:nvSpPr>
-        <p:spPr>
-          <a:xfrm>
-            <a:off x="6245352" y="3474720"/>
-            <a:ext cx="384048" cy="329184"/>
-          </a:xfrm>
-          <a:prstGeom prst="rect">
-            <a:avLst/>
-          </a:prstGeom>
-          <a:noFill/>
-          <a:ln/>
-        </p:spPr>
-        <p:txBody>
-          <a:bodyPr wrap="square" rtlCol="0" anchor="ctr"/>
-          <a:lstStyle/>
-          <a:p>
-            <a:pPr algn="ctr" indent="0" marL="0">
-              <a:buNone/>
-            </a:pPr>
-            <a:r>
-              <a:rPr lang="en-US" sz="1300" dirty="0">
-                <a:solidFill>
-                  <a:srgbClr val="000000"/>
-                </a:solidFill>
-              </a:rPr>
-              <a:t>🤖</a:t>
-            </a:r>
-            <a:endParaRPr lang="en-US" sz="1300" dirty="0"/>
-          </a:p>
-        </p:txBody>
-      </p:sp>
-      <p:sp>
-        <p:nvSpPr>
-          <p:cNvPr id="120" name="Shape 108"/>
-          <p:cNvSpPr/>
-          <p:nvPr/>
-        </p:nvSpPr>
-        <p:spPr>
-          <a:xfrm>
-            <a:off x="6153912" y="3895344"/>
-            <a:ext cx="1828800" cy="237744"/>
-          </a:xfrm>
-          <a:prstGeom prst="rect">
-            <a:avLst/>
-          </a:prstGeom>
-          <a:solidFill>
-            <a:srgbClr val="2D1B69"/>
-          </a:solidFill>
-          <a:ln w="12700">
-            <a:solidFill>
-              <a:srgbClr val="2D1B69"/>
-            </a:solidFill>
-            <a:prstDash val="solid"/>
-          </a:ln>
-        </p:spPr>
-      </p:sp>
-      <p:sp>
-        <p:nvSpPr>
-          <p:cNvPr id="121" name="Text 109"/>
-          <p:cNvSpPr/>
-          <p:nvPr/>
-        </p:nvSpPr>
-        <p:spPr>
-          <a:xfrm>
-            <a:off x="6153912" y="3895344"/>
-            <a:ext cx="1828800" cy="237744"/>
-          </a:xfrm>
-          <a:prstGeom prst="rect">
-            <a:avLst/>
-          </a:prstGeom>
-          <a:noFill/>
-          <a:ln/>
-        </p:spPr>
-        <p:txBody>
-          <a:bodyPr wrap="square" rtlCol="0" anchor="ctr"/>
-          <a:lstStyle/>
-          <a:p>
-            <a:pPr algn="ctr" indent="0" marL="0">
-              <a:buNone/>
-            </a:pPr>
-            <a:r>
-              <a:rPr lang="en-US" sz="700" b="1" dirty="0">
-                <a:solidFill>
-                  <a:srgbClr val="FFFFFF"/>
-                </a:solidFill>
-              </a:rPr>
-              <a:t>Apps</a:t>
-            </a:r>
-            <a:endParaRPr lang="en-US" sz="700" dirty="0"/>
-          </a:p>
-        </p:txBody>
-      </p:sp>
-      <p:sp>
-        <p:nvSpPr>
-          <p:cNvPr id="122" name="Shape 110"/>
-          <p:cNvSpPr/>
-          <p:nvPr/>
-        </p:nvSpPr>
-        <p:spPr>
-          <a:xfrm>
-            <a:off x="6153912" y="4133088"/>
-            <a:ext cx="1828800" cy="420624"/>
-          </a:xfrm>
-          <a:prstGeom prst="rect">
-            <a:avLst/>
-          </a:prstGeom>
-          <a:solidFill>
-            <a:srgbClr val="F2F2F2"/>
-          </a:solidFill>
-          <a:ln w="9525">
-            <a:solidFill>
-              <a:srgbClr val="CCCCCC"/>
-            </a:solidFill>
-            <a:prstDash val="solid"/>
-          </a:ln>
-        </p:spPr>
-      </p:sp>
-      <p:sp>
-        <p:nvSpPr>
-          <p:cNvPr id="123" name="Shape 111"/>
-          <p:cNvSpPr/>
-          <p:nvPr/>
-        </p:nvSpPr>
-        <p:spPr>
-          <a:xfrm>
-            <a:off x="6245352" y="4187952"/>
-            <a:ext cx="384048" cy="329184"/>
-          </a:xfrm>
-          <a:prstGeom prst="rect">
-            <a:avLst>
-              <a:gd name="adj" fmla="val 11111"/>
-            </a:avLst>
-          </a:prstGeom>
-          <a:solidFill>
-            <a:srgbClr val="EDE8F9"/>
-          </a:solidFill>
-          <a:ln w="6350">
-            <a:solidFill>
-              <a:srgbClr val="5D35B1"/>
-            </a:solidFill>
-            <a:prstDash val="solid"/>
-          </a:ln>
-        </p:spPr>
-      </p:sp>
-      <p:sp>
-        <p:nvSpPr>
-          <p:cNvPr id="124" name="Text 112"/>
-          <p:cNvSpPr/>
-          <p:nvPr/>
-        </p:nvSpPr>
-        <p:spPr>
-          <a:xfrm>
-            <a:off x="6245352" y="4187952"/>
-            <a:ext cx="384048" cy="329184"/>
-          </a:xfrm>
-          <a:prstGeom prst="rect">
-            <a:avLst/>
-          </a:prstGeom>
-          <a:noFill/>
-          <a:ln/>
-        </p:spPr>
-        <p:txBody>
-          <a:bodyPr wrap="square" rtlCol="0" anchor="ctr"/>
-          <a:lstStyle/>
-          <a:p>
-            <a:pPr algn="ctr" indent="0" marL="0">
-              <a:buNone/>
-            </a:pPr>
-            <a:r>
-              <a:rPr lang="en-US" sz="1300" dirty="0">
-                <a:solidFill>
-                  <a:srgbClr val="000000"/>
-                </a:solidFill>
-              </a:rPr>
-              <a:t>⚙️</a:t>
-            </a:r>
-            <a:endParaRPr lang="en-US" sz="1300" dirty="0"/>
-          </a:p>
-        </p:txBody>
-      </p:sp>
-      <p:sp>
-        <p:nvSpPr>
-          <p:cNvPr id="125" name="Shape 113"/>
-          <p:cNvSpPr/>
-          <p:nvPr/>
-        </p:nvSpPr>
-        <p:spPr>
-          <a:xfrm>
-            <a:off x="3703320" y="1463040"/>
-            <a:ext cx="128016" cy="0"/>
-          </a:xfrm>
-          <a:prstGeom prst="line">
-            <a:avLst/>
-          </a:prstGeom>
-          <a:noFill/>
-          <a:ln w="15240">
-            <a:solidFill>
-              <a:srgbClr val="1A1A1A"/>
-            </a:solidFill>
-            <a:prstDash val="solid"/>
-            <a:tailEnd type="arrow"/>
-          </a:ln>
-        </p:spPr>
-      </p:sp>
-      <p:sp>
-        <p:nvSpPr>
-          <p:cNvPr id="126" name="Shape 114"/>
-          <p:cNvSpPr/>
-          <p:nvPr/>
-        </p:nvSpPr>
-        <p:spPr>
-          <a:xfrm>
-            <a:off x="3703320" y="2871216"/>
-            <a:ext cx="128016" cy="0"/>
-          </a:xfrm>
-          <a:prstGeom prst="line">
-            <a:avLst/>
-          </a:prstGeom>
-          <a:noFill/>
-          <a:ln w="15240">
-            <a:solidFill>
-              <a:srgbClr val="1A1A1A"/>
-            </a:solidFill>
-            <a:prstDash val="solid"/>
-            <a:tailEnd type="arrow"/>
-          </a:ln>
-        </p:spPr>
-      </p:sp>
-      <p:sp>
-        <p:nvSpPr>
-          <p:cNvPr id="127" name="Shape 115"/>
-          <p:cNvSpPr/>
-          <p:nvPr/>
-        </p:nvSpPr>
-        <p:spPr>
-          <a:xfrm>
-            <a:off x="3703320" y="3913632"/>
-            <a:ext cx="128016" cy="0"/>
-          </a:xfrm>
-          <a:prstGeom prst="line">
-            <a:avLst/>
-          </a:prstGeom>
-          <a:noFill/>
-          <a:ln w="15240">
-            <a:solidFill>
-              <a:srgbClr val="1A1A1A"/>
-            </a:solidFill>
-            <a:prstDash val="solid"/>
-            <a:tailEnd type="arrow"/>
-          </a:ln>
-        </p:spPr>
-      </p:sp>
-      <p:sp>
-        <p:nvSpPr>
-          <p:cNvPr id="128" name="Shape 116"/>
-          <p:cNvSpPr/>
-          <p:nvPr/>
-        </p:nvSpPr>
-        <p:spPr>
-          <a:xfrm>
-            <a:off x="6025896" y="1371600"/>
-            <a:ext cx="128016" cy="0"/>
-          </a:xfrm>
-          <a:prstGeom prst="line">
-            <a:avLst/>
-          </a:prstGeom>
-          <a:noFill/>
-          <a:ln w="15240">
-            <a:solidFill>
-              <a:srgbClr val="1A1A1A"/>
-            </a:solidFill>
-            <a:prstDash val="solid"/>
-            <a:tailEnd type="arrow"/>
-          </a:ln>
-        </p:spPr>
-      </p:sp>
-      <p:sp>
-        <p:nvSpPr>
-          <p:cNvPr id="129" name="Shape 117"/>
-          <p:cNvSpPr/>
-          <p:nvPr/>
-        </p:nvSpPr>
-        <p:spPr>
-          <a:xfrm>
-            <a:off x="6025896" y="2084832"/>
-            <a:ext cx="128016" cy="0"/>
-          </a:xfrm>
-          <a:prstGeom prst="line">
-            <a:avLst/>
-          </a:prstGeom>
-          <a:noFill/>
-          <a:ln w="15240">
-            <a:solidFill>
-              <a:srgbClr val="1A1A1A"/>
-            </a:solidFill>
-            <a:prstDash val="solid"/>
-            <a:tailEnd type="arrow"/>
-          </a:ln>
-        </p:spPr>
-      </p:sp>
-      <p:sp>
-        <p:nvSpPr>
-          <p:cNvPr id="130" name="Shape 118"/>
-          <p:cNvSpPr/>
-          <p:nvPr/>
-        </p:nvSpPr>
-        <p:spPr>
-          <a:xfrm>
-            <a:off x="6025896" y="2798064"/>
-            <a:ext cx="128016" cy="0"/>
-          </a:xfrm>
-          <a:prstGeom prst="line">
-            <a:avLst/>
-          </a:prstGeom>
-          <a:noFill/>
-          <a:ln w="15240">
-            <a:solidFill>
-              <a:srgbClr val="1A1A1A"/>
-            </a:solidFill>
-            <a:prstDash val="solid"/>
-            <a:tailEnd type="arrow"/>
-          </a:ln>
-        </p:spPr>
-      </p:sp>
-      <p:sp>
-        <p:nvSpPr>
-          <p:cNvPr id="131" name="Shape 119"/>
-          <p:cNvSpPr/>
-          <p:nvPr/>
-        </p:nvSpPr>
-        <p:spPr>
-          <a:xfrm>
-            <a:off x="6025896" y="3511296"/>
-            <a:ext cx="128016" cy="0"/>
-          </a:xfrm>
-          <a:prstGeom prst="line">
-            <a:avLst/>
-          </a:prstGeom>
-          <a:noFill/>
-          <a:ln w="15240">
-            <a:solidFill>
-              <a:srgbClr val="1A1A1A"/>
-            </a:solidFill>
-            <a:prstDash val="solid"/>
-            <a:tailEnd type="arrow"/>
-          </a:ln>
-        </p:spPr>
-      </p:sp>
-      <p:sp>
-        <p:nvSpPr>
-          <p:cNvPr id="132" name="Shape 120"/>
-          <p:cNvSpPr/>
-          <p:nvPr/>
-        </p:nvSpPr>
-        <p:spPr>
-          <a:xfrm>
-            <a:off x="6025896" y="4224528"/>
-            <a:ext cx="128016" cy="0"/>
-          </a:xfrm>
-          <a:prstGeom prst="line">
-            <a:avLst/>
-          </a:prstGeom>
-          <a:noFill/>
-          <a:ln w="15240">
-            <a:solidFill>
-              <a:srgbClr val="1A1A1A"/>
-            </a:solidFill>
-            <a:prstDash val="solid"/>
-            <a:tailEnd type="arrow"/>
-          </a:ln>
-        </p:spPr>
-      </p:sp>
-      <p:sp>
-        <p:nvSpPr>
-          <p:cNvPr id="133" name="Shape 121"/>
-          <p:cNvSpPr/>
-          <p:nvPr/>
-        </p:nvSpPr>
-        <p:spPr>
-          <a:xfrm>
-            <a:off x="2212848" y="4754880"/>
-            <a:ext cx="6025896" cy="914400"/>
-          </a:xfrm>
-          <a:prstGeom prst="rect">
-            <a:avLst/>
-          </a:prstGeom>
-          <a:solidFill>
-            <a:srgbClr val="7030A0"/>
-          </a:solidFill>
-          <a:ln w="12700">
-            <a:solidFill>
-              <a:srgbClr val="7030A0"/>
-            </a:solidFill>
-            <a:prstDash val="solid"/>
-          </a:ln>
-        </p:spPr>
-      </p:sp>
-      <p:sp>
-        <p:nvSpPr>
-          <p:cNvPr id="134" name="Text 122"/>
-          <p:cNvSpPr/>
-          <p:nvPr/>
-        </p:nvSpPr>
-        <p:spPr>
-          <a:xfrm>
-            <a:off x="2212848" y="4791456"/>
-            <a:ext cx="6025896" cy="219456"/>
-          </a:xfrm>
-          <a:prstGeom prst="rect">
-            <a:avLst/>
-          </a:prstGeom>
-          <a:noFill/>
-          <a:ln/>
-        </p:spPr>
-        <p:txBody>
-          <a:bodyPr wrap="square" rtlCol="0" anchor="ctr"/>
-          <a:lstStyle/>
-          <a:p>
-            <a:pPr algn="ctr" indent="0" marL="0">
-              <a:buNone/>
-            </a:pPr>
-            <a:r>
-              <a:rPr lang="en-US" sz="900" b="1" dirty="0">
-                <a:solidFill>
-                  <a:srgbClr val="FFFFFF"/>
-                </a:solidFill>
-              </a:rPr>
-              <a:t>Unified, Open and Scalable Lakehouse</a:t>
-            </a:r>
-            <a:endParaRPr lang="en-US" sz="900" dirty="0"/>
-          </a:p>
-        </p:txBody>
-      </p:sp>
-      <p:sp>
-        <p:nvSpPr>
-          <p:cNvPr id="135" name="Shape 123"/>
-          <p:cNvSpPr/>
-          <p:nvPr/>
-        </p:nvSpPr>
-        <p:spPr>
-          <a:xfrm>
-            <a:off x="2304288" y="5029200"/>
-            <a:ext cx="2848356" cy="566928"/>
-          </a:xfrm>
-          <a:prstGeom prst="rect">
-            <a:avLst>
-              <a:gd name="adj" fmla="val 8065"/>
-            </a:avLst>
-          </a:prstGeom>
-          <a:solidFill>
-            <a:srgbClr val="FFFFFF"/>
-          </a:solidFill>
-          <a:ln w="12700">
-            <a:solidFill>
-              <a:srgbClr val="FFFFFF"/>
-            </a:solidFill>
-            <a:prstDash val="solid"/>
-          </a:ln>
-        </p:spPr>
-      </p:sp>
-      <p:sp>
-        <p:nvSpPr>
-          <p:cNvPr id="136" name="Text 124"/>
-          <p:cNvSpPr/>
-          <p:nvPr/>
-        </p:nvSpPr>
-        <p:spPr>
-          <a:xfrm>
-            <a:off x="2322576" y="5029200"/>
-            <a:ext cx="2811780" cy="164592"/>
-          </a:xfrm>
-          <a:prstGeom prst="rect">
-            <a:avLst/>
-          </a:prstGeom>
-          <a:noFill/>
-          <a:ln/>
-        </p:spPr>
-        <p:txBody>
-          <a:bodyPr wrap="square" rtlCol="0" anchor="ctr"/>
-          <a:lstStyle/>
-          <a:p>
-            <a:pPr algn="ctr" indent="0" marL="0">
-              <a:buNone/>
-            </a:pPr>
-            <a:r>
-              <a:rPr lang="en-US" sz="550" dirty="0">
-                <a:solidFill>
-                  <a:srgbClr val="1A1A1A"/>
-                </a:solidFill>
-              </a:rPr>
-              <a:t>Governance, Security, Observability, Interoperability, Sharing</a:t>
-            </a:r>
-            <a:endParaRPr lang="en-US" sz="550" dirty="0"/>
-          </a:p>
-        </p:txBody>
+            <a:prstDash val="dash"/>
+          </a:ln>
+        </p:spPr>
       </p:sp>
       <p:pic>
         <p:nvPicPr>
-          <p:cNvPr id="137" name="Image 10" descr="preencoded.png">    </p:cNvPr>
+          <p:cNvPr id="91" name="Image 10" descr="preencoded.png">    </p:cNvPr>
           <p:cNvPicPr>
             <a:picLocks noChangeAspect="1"/>
           </p:cNvPicPr>
@@ -5047,8 +3698,8 @@
         </p:blipFill>
         <p:spPr>
           <a:xfrm>
-            <a:off x="3316986" y="5212080"/>
-            <a:ext cx="201168" cy="201168"/>
+            <a:off x="5550408" y="3639312"/>
+            <a:ext cx="402336" cy="329184"/>
           </a:xfrm>
           <a:prstGeom prst="rect">
             <a:avLst/>
@@ -5057,50 +3708,1317 @@
       </p:pic>
       <p:sp>
         <p:nvSpPr>
-          <p:cNvPr id="138" name="Text 125"/>
-          <p:cNvSpPr/>
-          <p:nvPr/>
-        </p:nvSpPr>
-        <p:spPr>
-          <a:xfrm>
-            <a:off x="3554730" y="5193792"/>
-            <a:ext cx="2464308" cy="256032"/>
-          </a:xfrm>
-          <a:prstGeom prst="rect">
-            <a:avLst/>
-          </a:prstGeom>
-          <a:noFill/>
-          <a:ln/>
-        </p:spPr>
-        <p:txBody>
-          <a:bodyPr wrap="square" rtlCol="0" anchor="ctr"/>
-          <a:lstStyle/>
-          <a:p>
-            <a:pPr indent="0" marL="0">
-              <a:buNone/>
-            </a:pPr>
-            <a:r>
-              <a:rPr lang="en-US" sz="1000" b="1" dirty="0">
+          <p:cNvPr id="92" name="Shape 79"/>
+          <p:cNvSpPr/>
+          <p:nvPr/>
+        </p:nvSpPr>
+        <p:spPr>
+          <a:xfrm>
+            <a:off x="3904488" y="3675888"/>
+            <a:ext cx="786384" cy="219456"/>
+          </a:xfrm>
+          <a:prstGeom prst="rect">
+            <a:avLst>
+              <a:gd name="adj" fmla="val 33333"/>
+            </a:avLst>
+          </a:prstGeom>
+          <a:solidFill>
+            <a:srgbClr val="5D35B1"/>
+          </a:solidFill>
+          <a:ln w="12700">
+            <a:solidFill>
+              <a:srgbClr val="5D35B1"/>
+            </a:solidFill>
+            <a:prstDash val="solid"/>
+          </a:ln>
+        </p:spPr>
+      </p:sp>
+      <p:sp>
+        <p:nvSpPr>
+          <p:cNvPr id="93" name="Text 80"/>
+          <p:cNvSpPr/>
+          <p:nvPr/>
+        </p:nvSpPr>
+        <p:spPr>
+          <a:xfrm>
+            <a:off x="3904488" y="3675888"/>
+            <a:ext cx="786384" cy="219456"/>
+          </a:xfrm>
+          <a:prstGeom prst="rect">
+            <a:avLst/>
+          </a:prstGeom>
+          <a:noFill/>
+          <a:ln/>
+        </p:spPr>
+        <p:txBody>
+          <a:bodyPr wrap="square" lIns="12700" tIns="12700" rIns="12700" bIns="12700" rtlCol="0" anchor="ctr"/>
+          <a:lstStyle/>
+          <a:p>
+            <a:pPr algn="ctr" indent="0" marL="0">
+              <a:buNone/>
+            </a:pPr>
+            <a:r>
+              <a:rPr lang="en-US" sz="550" b="1" dirty="0">
+                <a:solidFill>
+                  <a:srgbClr val="FFFFFF"/>
+                </a:solidFill>
+              </a:rPr>
+              <a:t>Prepare data</a:t>
+            </a:r>
+            <a:endParaRPr lang="en-US" sz="550" dirty="0"/>
+          </a:p>
+        </p:txBody>
+      </p:sp>
+      <p:sp>
+        <p:nvSpPr>
+          <p:cNvPr id="94" name="Shape 81"/>
+          <p:cNvSpPr/>
+          <p:nvPr/>
+        </p:nvSpPr>
+        <p:spPr>
+          <a:xfrm>
+            <a:off x="5148072" y="3675888"/>
+            <a:ext cx="786384" cy="219456"/>
+          </a:xfrm>
+          <a:prstGeom prst="rect">
+            <a:avLst>
+              <a:gd name="adj" fmla="val 33333"/>
+            </a:avLst>
+          </a:prstGeom>
+          <a:solidFill>
+            <a:srgbClr val="5D35B1"/>
+          </a:solidFill>
+          <a:ln w="12700">
+            <a:solidFill>
+              <a:srgbClr val="5D35B1"/>
+            </a:solidFill>
+            <a:prstDash val="solid"/>
+          </a:ln>
+        </p:spPr>
+      </p:sp>
+      <p:sp>
+        <p:nvSpPr>
+          <p:cNvPr id="95" name="Text 82"/>
+          <p:cNvSpPr/>
+          <p:nvPr/>
+        </p:nvSpPr>
+        <p:spPr>
+          <a:xfrm>
+            <a:off x="5148072" y="3675888"/>
+            <a:ext cx="786384" cy="219456"/>
+          </a:xfrm>
+          <a:prstGeom prst="rect">
+            <a:avLst/>
+          </a:prstGeom>
+          <a:noFill/>
+          <a:ln/>
+        </p:spPr>
+        <p:txBody>
+          <a:bodyPr wrap="square" lIns="12700" tIns="12700" rIns="12700" bIns="12700" rtlCol="0" anchor="ctr"/>
+          <a:lstStyle/>
+          <a:p>
+            <a:pPr algn="ctr" indent="0" marL="0">
+              <a:buNone/>
+            </a:pPr>
+            <a:r>
+              <a:rPr lang="en-US" sz="550" b="1" dirty="0">
+                <a:solidFill>
+                  <a:srgbClr val="FFFFFF"/>
+                </a:solidFill>
+              </a:rPr>
+              <a:t>Build agents</a:t>
+            </a:r>
+            <a:endParaRPr lang="en-US" sz="550" dirty="0"/>
+          </a:p>
+        </p:txBody>
+      </p:sp>
+      <p:sp>
+        <p:nvSpPr>
+          <p:cNvPr id="96" name="Shape 83"/>
+          <p:cNvSpPr/>
+          <p:nvPr/>
+        </p:nvSpPr>
+        <p:spPr>
+          <a:xfrm>
+            <a:off x="3904488" y="3950208"/>
+            <a:ext cx="786384" cy="219456"/>
+          </a:xfrm>
+          <a:prstGeom prst="rect">
+            <a:avLst>
+              <a:gd name="adj" fmla="val 33333"/>
+            </a:avLst>
+          </a:prstGeom>
+          <a:solidFill>
+            <a:srgbClr val="5D35B1"/>
+          </a:solidFill>
+          <a:ln w="12700">
+            <a:solidFill>
+              <a:srgbClr val="5D35B1"/>
+            </a:solidFill>
+            <a:prstDash val="solid"/>
+          </a:ln>
+        </p:spPr>
+      </p:sp>
+      <p:sp>
+        <p:nvSpPr>
+          <p:cNvPr id="97" name="Text 84"/>
+          <p:cNvSpPr/>
+          <p:nvPr/>
+        </p:nvSpPr>
+        <p:spPr>
+          <a:xfrm>
+            <a:off x="3904488" y="3950208"/>
+            <a:ext cx="786384" cy="219456"/>
+          </a:xfrm>
+          <a:prstGeom prst="rect">
+            <a:avLst/>
+          </a:prstGeom>
+          <a:noFill/>
+          <a:ln/>
+        </p:spPr>
+        <p:txBody>
+          <a:bodyPr wrap="square" lIns="12700" tIns="12700" rIns="12700" bIns="12700" rtlCol="0" anchor="ctr"/>
+          <a:lstStyle/>
+          <a:p>
+            <a:pPr algn="ctr" indent="0" marL="0">
+              <a:buNone/>
+            </a:pPr>
+            <a:r>
+              <a:rPr lang="en-US" sz="550" b="1" dirty="0">
+                <a:solidFill>
+                  <a:srgbClr val="FFFFFF"/>
+                </a:solidFill>
+              </a:rPr>
+              <a:t>Evaluate agents</a:t>
+            </a:r>
+            <a:endParaRPr lang="en-US" sz="550" dirty="0"/>
+          </a:p>
+        </p:txBody>
+      </p:sp>
+      <p:sp>
+        <p:nvSpPr>
+          <p:cNvPr id="98" name="Shape 85"/>
+          <p:cNvSpPr/>
+          <p:nvPr/>
+        </p:nvSpPr>
+        <p:spPr>
+          <a:xfrm>
+            <a:off x="5148072" y="3950208"/>
+            <a:ext cx="786384" cy="219456"/>
+          </a:xfrm>
+          <a:prstGeom prst="rect">
+            <a:avLst>
+              <a:gd name="adj" fmla="val 33333"/>
+            </a:avLst>
+          </a:prstGeom>
+          <a:solidFill>
+            <a:srgbClr val="5D35B1"/>
+          </a:solidFill>
+          <a:ln w="12700">
+            <a:solidFill>
+              <a:srgbClr val="5D35B1"/>
+            </a:solidFill>
+            <a:prstDash val="solid"/>
+          </a:ln>
+        </p:spPr>
+      </p:sp>
+      <p:sp>
+        <p:nvSpPr>
+          <p:cNvPr id="99" name="Text 86"/>
+          <p:cNvSpPr/>
+          <p:nvPr/>
+        </p:nvSpPr>
+        <p:spPr>
+          <a:xfrm>
+            <a:off x="5148072" y="3950208"/>
+            <a:ext cx="786384" cy="219456"/>
+          </a:xfrm>
+          <a:prstGeom prst="rect">
+            <a:avLst/>
+          </a:prstGeom>
+          <a:noFill/>
+          <a:ln/>
+        </p:spPr>
+        <p:txBody>
+          <a:bodyPr wrap="square" lIns="12700" tIns="12700" rIns="12700" bIns="12700" rtlCol="0" anchor="ctr"/>
+          <a:lstStyle/>
+          <a:p>
+            <a:pPr algn="ctr" indent="0" marL="0">
+              <a:buNone/>
+            </a:pPr>
+            <a:r>
+              <a:rPr lang="en-US" sz="550" b="1" dirty="0">
+                <a:solidFill>
+                  <a:srgbClr val="FFFFFF"/>
+                </a:solidFill>
+              </a:rPr>
+              <a:t>Deploy agents</a:t>
+            </a:r>
+            <a:endParaRPr lang="en-US" sz="550" dirty="0"/>
+          </a:p>
+        </p:txBody>
+      </p:sp>
+      <p:sp>
+        <p:nvSpPr>
+          <p:cNvPr id="100" name="Shape 87"/>
+          <p:cNvSpPr/>
+          <p:nvPr/>
+        </p:nvSpPr>
+        <p:spPr>
+          <a:xfrm>
+            <a:off x="4526280" y="4224528"/>
+            <a:ext cx="786384" cy="219456"/>
+          </a:xfrm>
+          <a:prstGeom prst="rect">
+            <a:avLst>
+              <a:gd name="adj" fmla="val 33333"/>
+            </a:avLst>
+          </a:prstGeom>
+          <a:solidFill>
+            <a:srgbClr val="5D35B1"/>
+          </a:solidFill>
+          <a:ln w="12700">
+            <a:solidFill>
+              <a:srgbClr val="5D35B1"/>
+            </a:solidFill>
+            <a:prstDash val="solid"/>
+          </a:ln>
+        </p:spPr>
+      </p:sp>
+      <p:sp>
+        <p:nvSpPr>
+          <p:cNvPr id="101" name="Text 88"/>
+          <p:cNvSpPr/>
+          <p:nvPr/>
+        </p:nvSpPr>
+        <p:spPr>
+          <a:xfrm>
+            <a:off x="4526280" y="4224528"/>
+            <a:ext cx="786384" cy="219456"/>
+          </a:xfrm>
+          <a:prstGeom prst="rect">
+            <a:avLst/>
+          </a:prstGeom>
+          <a:noFill/>
+          <a:ln/>
+        </p:spPr>
+        <p:txBody>
+          <a:bodyPr wrap="square" lIns="12700" tIns="12700" rIns="12700" bIns="12700" rtlCol="0" anchor="ctr"/>
+          <a:lstStyle/>
+          <a:p>
+            <a:pPr algn="ctr" indent="0" marL="0">
+              <a:buNone/>
+            </a:pPr>
+            <a:r>
+              <a:rPr lang="en-US" sz="550" b="1" dirty="0">
+                <a:solidFill>
+                  <a:srgbClr val="FFFFFF"/>
+                </a:solidFill>
+              </a:rPr>
+              <a:t>Govern agents</a:t>
+            </a:r>
+            <a:endParaRPr lang="en-US" sz="550" dirty="0"/>
+          </a:p>
+        </p:txBody>
+      </p:sp>
+      <p:sp>
+        <p:nvSpPr>
+          <p:cNvPr id="102" name="Shape 89"/>
+          <p:cNvSpPr/>
+          <p:nvPr/>
+        </p:nvSpPr>
+        <p:spPr>
+          <a:xfrm>
+            <a:off x="6153912" y="1042416"/>
+            <a:ext cx="3685032" cy="237744"/>
+          </a:xfrm>
+          <a:prstGeom prst="rect">
+            <a:avLst/>
+          </a:prstGeom>
+          <a:solidFill>
+            <a:srgbClr val="2D1B69"/>
+          </a:solidFill>
+          <a:ln w="12700">
+            <a:solidFill>
+              <a:srgbClr val="2D1B69"/>
+            </a:solidFill>
+            <a:prstDash val="solid"/>
+          </a:ln>
+        </p:spPr>
+      </p:sp>
+      <p:sp>
+        <p:nvSpPr>
+          <p:cNvPr id="103" name="Text 90"/>
+          <p:cNvSpPr/>
+          <p:nvPr/>
+        </p:nvSpPr>
+        <p:spPr>
+          <a:xfrm>
+            <a:off x="6153912" y="1042416"/>
+            <a:ext cx="3685032" cy="237744"/>
+          </a:xfrm>
+          <a:prstGeom prst="rect">
+            <a:avLst/>
+          </a:prstGeom>
+          <a:noFill/>
+          <a:ln/>
+        </p:spPr>
+        <p:txBody>
+          <a:bodyPr wrap="square" rtlCol="0" anchor="ctr"/>
+          <a:lstStyle/>
+          <a:p>
+            <a:pPr algn="ctr" indent="0" marL="0">
+              <a:buNone/>
+            </a:pPr>
+            <a:r>
+              <a:rPr lang="en-US" sz="700" b="1" dirty="0">
+                <a:solidFill>
+                  <a:srgbClr val="FFFFFF"/>
+                </a:solidFill>
+              </a:rPr>
+              <a:t>Streaming analytics</a:t>
+            </a:r>
+            <a:endParaRPr lang="en-US" sz="700" dirty="0"/>
+          </a:p>
+        </p:txBody>
+      </p:sp>
+      <p:sp>
+        <p:nvSpPr>
+          <p:cNvPr id="104" name="Shape 91"/>
+          <p:cNvSpPr/>
+          <p:nvPr/>
+        </p:nvSpPr>
+        <p:spPr>
+          <a:xfrm>
+            <a:off x="6153912" y="1280160"/>
+            <a:ext cx="3685032" cy="420624"/>
+          </a:xfrm>
+          <a:prstGeom prst="rect">
+            <a:avLst/>
+          </a:prstGeom>
+          <a:solidFill>
+            <a:srgbClr val="F2F2F2"/>
+          </a:solidFill>
+          <a:ln w="9525">
+            <a:solidFill>
+              <a:srgbClr val="CCCCCC"/>
+            </a:solidFill>
+            <a:prstDash val="solid"/>
+          </a:ln>
+        </p:spPr>
+      </p:sp>
+      <p:sp>
+        <p:nvSpPr>
+          <p:cNvPr id="105" name="Shape 92"/>
+          <p:cNvSpPr/>
+          <p:nvPr/>
+        </p:nvSpPr>
+        <p:spPr>
+          <a:xfrm>
+            <a:off x="6281928" y="1353312"/>
+            <a:ext cx="310896" cy="274320"/>
+          </a:xfrm>
+          <a:prstGeom prst="ellipse">
+            <a:avLst/>
+          </a:prstGeom>
+          <a:solidFill>
+            <a:srgbClr val="FFFFFF"/>
+          </a:solidFill>
+          <a:ln w="12700">
+            <a:solidFill>
+              <a:srgbClr val="5D35B1"/>
+            </a:solidFill>
+            <a:prstDash val="solid"/>
+          </a:ln>
+        </p:spPr>
+      </p:sp>
+      <p:sp>
+        <p:nvSpPr>
+          <p:cNvPr id="106" name="Text 93"/>
+          <p:cNvSpPr/>
+          <p:nvPr/>
+        </p:nvSpPr>
+        <p:spPr>
+          <a:xfrm>
+            <a:off x="6281928" y="1353312"/>
+            <a:ext cx="310896" cy="274320"/>
+          </a:xfrm>
+          <a:prstGeom prst="rect">
+            <a:avLst/>
+          </a:prstGeom>
+          <a:noFill/>
+          <a:ln/>
+        </p:spPr>
+        <p:txBody>
+          <a:bodyPr wrap="square" rtlCol="0" anchor="ctr"/>
+          <a:lstStyle/>
+          <a:p>
+            <a:pPr algn="ctr" indent="0" marL="0">
+              <a:buNone/>
+            </a:pPr>
+            <a:r>
+              <a:rPr lang="en-US" sz="650" b="1" dirty="0">
                 <a:solidFill>
                   <a:srgbClr val="5D35B1"/>
                 </a:solidFill>
               </a:rPr>
-              <a:t>Unity Catalog</a:t>
-            </a:r>
-            <a:endParaRPr lang="en-US" sz="1000" dirty="0"/>
-          </a:p>
-        </p:txBody>
-      </p:sp>
-      <p:sp>
-        <p:nvSpPr>
-          <p:cNvPr id="139" name="Shape 126"/>
-          <p:cNvSpPr/>
-          <p:nvPr/>
-        </p:nvSpPr>
-        <p:spPr>
-          <a:xfrm>
-            <a:off x="5298948" y="5029200"/>
-            <a:ext cx="2848356" cy="566928"/>
+              <a:t>SA</a:t>
+            </a:r>
+            <a:endParaRPr lang="en-US" sz="650" dirty="0"/>
+          </a:p>
+        </p:txBody>
+      </p:sp>
+      <p:sp>
+        <p:nvSpPr>
+          <p:cNvPr id="107" name="Shape 94"/>
+          <p:cNvSpPr/>
+          <p:nvPr/>
+        </p:nvSpPr>
+        <p:spPr>
+          <a:xfrm>
+            <a:off x="6153912" y="1755648"/>
+            <a:ext cx="3685032" cy="237744"/>
+          </a:xfrm>
+          <a:prstGeom prst="rect">
+            <a:avLst/>
+          </a:prstGeom>
+          <a:solidFill>
+            <a:srgbClr val="2D1B69"/>
+          </a:solidFill>
+          <a:ln w="12700">
+            <a:solidFill>
+              <a:srgbClr val="2D1B69"/>
+            </a:solidFill>
+            <a:prstDash val="solid"/>
+          </a:ln>
+        </p:spPr>
+      </p:sp>
+      <p:sp>
+        <p:nvSpPr>
+          <p:cNvPr id="108" name="Text 95"/>
+          <p:cNvSpPr/>
+          <p:nvPr/>
+        </p:nvSpPr>
+        <p:spPr>
+          <a:xfrm>
+            <a:off x="6153912" y="1755648"/>
+            <a:ext cx="3685032" cy="237744"/>
+          </a:xfrm>
+          <a:prstGeom prst="rect">
+            <a:avLst/>
+          </a:prstGeom>
+          <a:noFill/>
+          <a:ln/>
+        </p:spPr>
+        <p:txBody>
+          <a:bodyPr wrap="square" rtlCol="0" anchor="ctr"/>
+          <a:lstStyle/>
+          <a:p>
+            <a:pPr algn="ctr" indent="0" marL="0">
+              <a:buNone/>
+            </a:pPr>
+            <a:r>
+              <a:rPr lang="en-US" sz="700" b="1" dirty="0">
+                <a:solidFill>
+                  <a:srgbClr val="FFFFFF"/>
+                </a:solidFill>
+              </a:rPr>
+              <a:t>BI &amp; reporting</a:t>
+            </a:r>
+            <a:endParaRPr lang="en-US" sz="700" dirty="0"/>
+          </a:p>
+        </p:txBody>
+      </p:sp>
+      <p:sp>
+        <p:nvSpPr>
+          <p:cNvPr id="109" name="Shape 96"/>
+          <p:cNvSpPr/>
+          <p:nvPr/>
+        </p:nvSpPr>
+        <p:spPr>
+          <a:xfrm>
+            <a:off x="6153912" y="1993392"/>
+            <a:ext cx="3685032" cy="420624"/>
+          </a:xfrm>
+          <a:prstGeom prst="rect">
+            <a:avLst/>
+          </a:prstGeom>
+          <a:solidFill>
+            <a:srgbClr val="F2F2F2"/>
+          </a:solidFill>
+          <a:ln w="9525">
+            <a:solidFill>
+              <a:srgbClr val="CCCCCC"/>
+            </a:solidFill>
+            <a:prstDash val="solid"/>
+          </a:ln>
+        </p:spPr>
+      </p:sp>
+      <p:sp>
+        <p:nvSpPr>
+          <p:cNvPr id="110" name="Shape 97"/>
+          <p:cNvSpPr/>
+          <p:nvPr/>
+        </p:nvSpPr>
+        <p:spPr>
+          <a:xfrm>
+            <a:off x="6281928" y="2066544"/>
+            <a:ext cx="310896" cy="274320"/>
+          </a:xfrm>
+          <a:prstGeom prst="ellipse">
+            <a:avLst/>
+          </a:prstGeom>
+          <a:solidFill>
+            <a:srgbClr val="FFFFFF"/>
+          </a:solidFill>
+          <a:ln w="12700">
+            <a:solidFill>
+              <a:srgbClr val="5D35B1"/>
+            </a:solidFill>
+            <a:prstDash val="solid"/>
+          </a:ln>
+        </p:spPr>
+      </p:sp>
+      <p:sp>
+        <p:nvSpPr>
+          <p:cNvPr id="111" name="Text 98"/>
+          <p:cNvSpPr/>
+          <p:nvPr/>
+        </p:nvSpPr>
+        <p:spPr>
+          <a:xfrm>
+            <a:off x="6281928" y="2066544"/>
+            <a:ext cx="310896" cy="274320"/>
+          </a:xfrm>
+          <a:prstGeom prst="rect">
+            <a:avLst/>
+          </a:prstGeom>
+          <a:noFill/>
+          <a:ln/>
+        </p:spPr>
+        <p:txBody>
+          <a:bodyPr wrap="square" rtlCol="0" anchor="ctr"/>
+          <a:lstStyle/>
+          <a:p>
+            <a:pPr algn="ctr" indent="0" marL="0">
+              <a:buNone/>
+            </a:pPr>
+            <a:r>
+              <a:rPr lang="en-US" sz="650" b="1" dirty="0">
+                <a:solidFill>
+                  <a:srgbClr val="5D35B1"/>
+                </a:solidFill>
+              </a:rPr>
+              <a:t>BI</a:t>
+            </a:r>
+            <a:endParaRPr lang="en-US" sz="650" dirty="0"/>
+          </a:p>
+        </p:txBody>
+      </p:sp>
+      <p:sp>
+        <p:nvSpPr>
+          <p:cNvPr id="112" name="Shape 99"/>
+          <p:cNvSpPr/>
+          <p:nvPr/>
+        </p:nvSpPr>
+        <p:spPr>
+          <a:xfrm>
+            <a:off x="6153912" y="2468880"/>
+            <a:ext cx="3685032" cy="237744"/>
+          </a:xfrm>
+          <a:prstGeom prst="rect">
+            <a:avLst/>
+          </a:prstGeom>
+          <a:solidFill>
+            <a:srgbClr val="2D1B69"/>
+          </a:solidFill>
+          <a:ln w="12700">
+            <a:solidFill>
+              <a:srgbClr val="2D1B69"/>
+            </a:solidFill>
+            <a:prstDash val="solid"/>
+          </a:ln>
+        </p:spPr>
+      </p:sp>
+      <p:sp>
+        <p:nvSpPr>
+          <p:cNvPr id="113" name="Text 100"/>
+          <p:cNvSpPr/>
+          <p:nvPr/>
+        </p:nvSpPr>
+        <p:spPr>
+          <a:xfrm>
+            <a:off x="6153912" y="2468880"/>
+            <a:ext cx="3685032" cy="237744"/>
+          </a:xfrm>
+          <a:prstGeom prst="rect">
+            <a:avLst/>
+          </a:prstGeom>
+          <a:noFill/>
+          <a:ln/>
+        </p:spPr>
+        <p:txBody>
+          <a:bodyPr wrap="square" rtlCol="0" anchor="ctr"/>
+          <a:lstStyle/>
+          <a:p>
+            <a:pPr algn="ctr" indent="0" marL="0">
+              <a:buNone/>
+            </a:pPr>
+            <a:r>
+              <a:rPr lang="en-US" sz="700" b="1" dirty="0">
+                <a:solidFill>
+                  <a:srgbClr val="FFFFFF"/>
+                </a:solidFill>
+              </a:rPr>
+              <a:t>Data sharing &amp; Marketplace</a:t>
+            </a:r>
+            <a:endParaRPr lang="en-US" sz="700" dirty="0"/>
+          </a:p>
+        </p:txBody>
+      </p:sp>
+      <p:sp>
+        <p:nvSpPr>
+          <p:cNvPr id="114" name="Shape 101"/>
+          <p:cNvSpPr/>
+          <p:nvPr/>
+        </p:nvSpPr>
+        <p:spPr>
+          <a:xfrm>
+            <a:off x="6153912" y="2706624"/>
+            <a:ext cx="3685032" cy="420624"/>
+          </a:xfrm>
+          <a:prstGeom prst="rect">
+            <a:avLst/>
+          </a:prstGeom>
+          <a:solidFill>
+            <a:srgbClr val="F2F2F2"/>
+          </a:solidFill>
+          <a:ln w="9525">
+            <a:solidFill>
+              <a:srgbClr val="CCCCCC"/>
+            </a:solidFill>
+            <a:prstDash val="solid"/>
+          </a:ln>
+        </p:spPr>
+      </p:sp>
+      <p:sp>
+        <p:nvSpPr>
+          <p:cNvPr id="115" name="Shape 102"/>
+          <p:cNvSpPr/>
+          <p:nvPr/>
+        </p:nvSpPr>
+        <p:spPr>
+          <a:xfrm>
+            <a:off x="6281928" y="2779776"/>
+            <a:ext cx="310896" cy="274320"/>
+          </a:xfrm>
+          <a:prstGeom prst="ellipse">
+            <a:avLst/>
+          </a:prstGeom>
+          <a:solidFill>
+            <a:srgbClr val="FFFFFF"/>
+          </a:solidFill>
+          <a:ln w="12700">
+            <a:solidFill>
+              <a:srgbClr val="5D35B1"/>
+            </a:solidFill>
+            <a:prstDash val="solid"/>
+          </a:ln>
+        </p:spPr>
+      </p:sp>
+      <p:sp>
+        <p:nvSpPr>
+          <p:cNvPr id="116" name="Text 103"/>
+          <p:cNvSpPr/>
+          <p:nvPr/>
+        </p:nvSpPr>
+        <p:spPr>
+          <a:xfrm>
+            <a:off x="6281928" y="2779776"/>
+            <a:ext cx="310896" cy="274320"/>
+          </a:xfrm>
+          <a:prstGeom prst="rect">
+            <a:avLst/>
+          </a:prstGeom>
+          <a:noFill/>
+          <a:ln/>
+        </p:spPr>
+        <p:txBody>
+          <a:bodyPr wrap="square" rtlCol="0" anchor="ctr"/>
+          <a:lstStyle/>
+          <a:p>
+            <a:pPr algn="ctr" indent="0" marL="0">
+              <a:buNone/>
+            </a:pPr>
+            <a:r>
+              <a:rPr lang="en-US" sz="650" b="1" dirty="0">
+                <a:solidFill>
+                  <a:srgbClr val="5D35B1"/>
+                </a:solidFill>
+              </a:rPr>
+              <a:t>DS</a:t>
+            </a:r>
+            <a:endParaRPr lang="en-US" sz="650" dirty="0"/>
+          </a:p>
+        </p:txBody>
+      </p:sp>
+      <p:sp>
+        <p:nvSpPr>
+          <p:cNvPr id="117" name="Shape 104"/>
+          <p:cNvSpPr/>
+          <p:nvPr/>
+        </p:nvSpPr>
+        <p:spPr>
+          <a:xfrm>
+            <a:off x="6153912" y="3182112"/>
+            <a:ext cx="3685032" cy="237744"/>
+          </a:xfrm>
+          <a:prstGeom prst="rect">
+            <a:avLst/>
+          </a:prstGeom>
+          <a:solidFill>
+            <a:srgbClr val="2D1B69"/>
+          </a:solidFill>
+          <a:ln w="12700">
+            <a:solidFill>
+              <a:srgbClr val="2D1B69"/>
+            </a:solidFill>
+            <a:prstDash val="solid"/>
+          </a:ln>
+        </p:spPr>
+      </p:sp>
+      <p:sp>
+        <p:nvSpPr>
+          <p:cNvPr id="118" name="Text 105"/>
+          <p:cNvSpPr/>
+          <p:nvPr/>
+        </p:nvSpPr>
+        <p:spPr>
+          <a:xfrm>
+            <a:off x="6153912" y="3182112"/>
+            <a:ext cx="3685032" cy="237744"/>
+          </a:xfrm>
+          <a:prstGeom prst="rect">
+            <a:avLst/>
+          </a:prstGeom>
+          <a:noFill/>
+          <a:ln/>
+        </p:spPr>
+        <p:txBody>
+          <a:bodyPr wrap="square" rtlCol="0" anchor="ctr"/>
+          <a:lstStyle/>
+          <a:p>
+            <a:pPr algn="ctr" indent="0" marL="0">
+              <a:buNone/>
+            </a:pPr>
+            <a:r>
+              <a:rPr lang="en-US" sz="700" b="1" dirty="0">
+                <a:solidFill>
+                  <a:srgbClr val="FFFFFF"/>
+                </a:solidFill>
+              </a:rPr>
+              <a:t>AI Applications</a:t>
+            </a:r>
+            <a:endParaRPr lang="en-US" sz="700" dirty="0"/>
+          </a:p>
+        </p:txBody>
+      </p:sp>
+      <p:sp>
+        <p:nvSpPr>
+          <p:cNvPr id="119" name="Shape 106"/>
+          <p:cNvSpPr/>
+          <p:nvPr/>
+        </p:nvSpPr>
+        <p:spPr>
+          <a:xfrm>
+            <a:off x="6153912" y="3419856"/>
+            <a:ext cx="3685032" cy="420624"/>
+          </a:xfrm>
+          <a:prstGeom prst="rect">
+            <a:avLst/>
+          </a:prstGeom>
+          <a:solidFill>
+            <a:srgbClr val="F2F2F2"/>
+          </a:solidFill>
+          <a:ln w="9525">
+            <a:solidFill>
+              <a:srgbClr val="CCCCCC"/>
+            </a:solidFill>
+            <a:prstDash val="solid"/>
+          </a:ln>
+        </p:spPr>
+      </p:sp>
+      <p:sp>
+        <p:nvSpPr>
+          <p:cNvPr id="120" name="Shape 107"/>
+          <p:cNvSpPr/>
+          <p:nvPr/>
+        </p:nvSpPr>
+        <p:spPr>
+          <a:xfrm>
+            <a:off x="6281928" y="3493008"/>
+            <a:ext cx="310896" cy="274320"/>
+          </a:xfrm>
+          <a:prstGeom prst="ellipse">
+            <a:avLst/>
+          </a:prstGeom>
+          <a:solidFill>
+            <a:srgbClr val="FFFFFF"/>
+          </a:solidFill>
+          <a:ln w="12700">
+            <a:solidFill>
+              <a:srgbClr val="5D35B1"/>
+            </a:solidFill>
+            <a:prstDash val="solid"/>
+          </a:ln>
+        </p:spPr>
+      </p:sp>
+      <p:sp>
+        <p:nvSpPr>
+          <p:cNvPr id="121" name="Text 108"/>
+          <p:cNvSpPr/>
+          <p:nvPr/>
+        </p:nvSpPr>
+        <p:spPr>
+          <a:xfrm>
+            <a:off x="6281928" y="3493008"/>
+            <a:ext cx="310896" cy="274320"/>
+          </a:xfrm>
+          <a:prstGeom prst="rect">
+            <a:avLst/>
+          </a:prstGeom>
+          <a:noFill/>
+          <a:ln/>
+        </p:spPr>
+        <p:txBody>
+          <a:bodyPr wrap="square" rtlCol="0" anchor="ctr"/>
+          <a:lstStyle/>
+          <a:p>
+            <a:pPr algn="ctr" indent="0" marL="0">
+              <a:buNone/>
+            </a:pPr>
+            <a:r>
+              <a:rPr lang="en-US" sz="650" b="1" dirty="0">
+                <a:solidFill>
+                  <a:srgbClr val="5D35B1"/>
+                </a:solidFill>
+              </a:rPr>
+              <a:t>AI</a:t>
+            </a:r>
+            <a:endParaRPr lang="en-US" sz="650" dirty="0"/>
+          </a:p>
+        </p:txBody>
+      </p:sp>
+      <p:sp>
+        <p:nvSpPr>
+          <p:cNvPr id="122" name="Shape 109"/>
+          <p:cNvSpPr/>
+          <p:nvPr/>
+        </p:nvSpPr>
+        <p:spPr>
+          <a:xfrm>
+            <a:off x="6153912" y="3895344"/>
+            <a:ext cx="3685032" cy="237744"/>
+          </a:xfrm>
+          <a:prstGeom prst="rect">
+            <a:avLst/>
+          </a:prstGeom>
+          <a:solidFill>
+            <a:srgbClr val="2D1B69"/>
+          </a:solidFill>
+          <a:ln w="12700">
+            <a:solidFill>
+              <a:srgbClr val="2D1B69"/>
+            </a:solidFill>
+            <a:prstDash val="solid"/>
+          </a:ln>
+        </p:spPr>
+      </p:sp>
+      <p:sp>
+        <p:nvSpPr>
+          <p:cNvPr id="123" name="Text 110"/>
+          <p:cNvSpPr/>
+          <p:nvPr/>
+        </p:nvSpPr>
+        <p:spPr>
+          <a:xfrm>
+            <a:off x="6153912" y="3895344"/>
+            <a:ext cx="3685032" cy="237744"/>
+          </a:xfrm>
+          <a:prstGeom prst="rect">
+            <a:avLst/>
+          </a:prstGeom>
+          <a:noFill/>
+          <a:ln/>
+        </p:spPr>
+        <p:txBody>
+          <a:bodyPr wrap="square" rtlCol="0" anchor="ctr"/>
+          <a:lstStyle/>
+          <a:p>
+            <a:pPr algn="ctr" indent="0" marL="0">
+              <a:buNone/>
+            </a:pPr>
+            <a:r>
+              <a:rPr lang="en-US" sz="700" b="1" dirty="0">
+                <a:solidFill>
+                  <a:srgbClr val="FFFFFF"/>
+                </a:solidFill>
+              </a:rPr>
+              <a:t>Apps</a:t>
+            </a:r>
+            <a:endParaRPr lang="en-US" sz="700" dirty="0"/>
+          </a:p>
+        </p:txBody>
+      </p:sp>
+      <p:sp>
+        <p:nvSpPr>
+          <p:cNvPr id="124" name="Shape 111"/>
+          <p:cNvSpPr/>
+          <p:nvPr/>
+        </p:nvSpPr>
+        <p:spPr>
+          <a:xfrm>
+            <a:off x="6153912" y="4133088"/>
+            <a:ext cx="3685032" cy="420624"/>
+          </a:xfrm>
+          <a:prstGeom prst="rect">
+            <a:avLst/>
+          </a:prstGeom>
+          <a:solidFill>
+            <a:srgbClr val="F2F2F2"/>
+          </a:solidFill>
+          <a:ln w="9525">
+            <a:solidFill>
+              <a:srgbClr val="CCCCCC"/>
+            </a:solidFill>
+            <a:prstDash val="solid"/>
+          </a:ln>
+        </p:spPr>
+      </p:sp>
+      <p:sp>
+        <p:nvSpPr>
+          <p:cNvPr id="125" name="Shape 112"/>
+          <p:cNvSpPr/>
+          <p:nvPr/>
+        </p:nvSpPr>
+        <p:spPr>
+          <a:xfrm>
+            <a:off x="6281928" y="4206240"/>
+            <a:ext cx="310896" cy="274320"/>
+          </a:xfrm>
+          <a:prstGeom prst="ellipse">
+            <a:avLst/>
+          </a:prstGeom>
+          <a:solidFill>
+            <a:srgbClr val="FFFFFF"/>
+          </a:solidFill>
+          <a:ln w="12700">
+            <a:solidFill>
+              <a:srgbClr val="5D35B1"/>
+            </a:solidFill>
+            <a:prstDash val="solid"/>
+          </a:ln>
+        </p:spPr>
+      </p:sp>
+      <p:sp>
+        <p:nvSpPr>
+          <p:cNvPr id="126" name="Text 113"/>
+          <p:cNvSpPr/>
+          <p:nvPr/>
+        </p:nvSpPr>
+        <p:spPr>
+          <a:xfrm>
+            <a:off x="6281928" y="4206240"/>
+            <a:ext cx="310896" cy="274320"/>
+          </a:xfrm>
+          <a:prstGeom prst="rect">
+            <a:avLst/>
+          </a:prstGeom>
+          <a:noFill/>
+          <a:ln/>
+        </p:spPr>
+        <p:txBody>
+          <a:bodyPr wrap="square" rtlCol="0" anchor="ctr"/>
+          <a:lstStyle/>
+          <a:p>
+            <a:pPr algn="ctr" indent="0" marL="0">
+              <a:buNone/>
+            </a:pPr>
+            <a:r>
+              <a:rPr lang="en-US" sz="650" b="1" dirty="0">
+                <a:solidFill>
+                  <a:srgbClr val="5D35B1"/>
+                </a:solidFill>
+              </a:rPr>
+              <a:t>AP</a:t>
+            </a:r>
+            <a:endParaRPr lang="en-US" sz="650" dirty="0"/>
+          </a:p>
+        </p:txBody>
+      </p:sp>
+      <p:sp>
+        <p:nvSpPr>
+          <p:cNvPr id="127" name="Shape 114"/>
+          <p:cNvSpPr/>
+          <p:nvPr/>
+        </p:nvSpPr>
+        <p:spPr>
+          <a:xfrm>
+            <a:off x="3703320" y="1463040"/>
+            <a:ext cx="128016" cy="0"/>
+          </a:xfrm>
+          <a:prstGeom prst="line">
+            <a:avLst/>
+          </a:prstGeom>
+          <a:noFill/>
+          <a:ln w="15240">
+            <a:solidFill>
+              <a:srgbClr val="1A1A1A"/>
+            </a:solidFill>
+            <a:prstDash val="solid"/>
+            <a:tailEnd type="arrow"/>
+          </a:ln>
+        </p:spPr>
+      </p:sp>
+      <p:sp>
+        <p:nvSpPr>
+          <p:cNvPr id="128" name="Shape 115"/>
+          <p:cNvSpPr/>
+          <p:nvPr/>
+        </p:nvSpPr>
+        <p:spPr>
+          <a:xfrm>
+            <a:off x="3703320" y="2871216"/>
+            <a:ext cx="128016" cy="0"/>
+          </a:xfrm>
+          <a:prstGeom prst="line">
+            <a:avLst/>
+          </a:prstGeom>
+          <a:noFill/>
+          <a:ln w="15240">
+            <a:solidFill>
+              <a:srgbClr val="1A1A1A"/>
+            </a:solidFill>
+            <a:prstDash val="solid"/>
+            <a:tailEnd type="arrow"/>
+          </a:ln>
+        </p:spPr>
+      </p:sp>
+      <p:sp>
+        <p:nvSpPr>
+          <p:cNvPr id="129" name="Shape 116"/>
+          <p:cNvSpPr/>
+          <p:nvPr/>
+        </p:nvSpPr>
+        <p:spPr>
+          <a:xfrm>
+            <a:off x="3703320" y="3913632"/>
+            <a:ext cx="128016" cy="0"/>
+          </a:xfrm>
+          <a:prstGeom prst="line">
+            <a:avLst/>
+          </a:prstGeom>
+          <a:noFill/>
+          <a:ln w="15240">
+            <a:solidFill>
+              <a:srgbClr val="1A1A1A"/>
+            </a:solidFill>
+            <a:prstDash val="solid"/>
+            <a:tailEnd type="arrow"/>
+          </a:ln>
+        </p:spPr>
+      </p:sp>
+      <p:sp>
+        <p:nvSpPr>
+          <p:cNvPr id="130" name="Shape 117"/>
+          <p:cNvSpPr/>
+          <p:nvPr/>
+        </p:nvSpPr>
+        <p:spPr>
+          <a:xfrm>
+            <a:off x="6025896" y="1371600"/>
+            <a:ext cx="128016" cy="0"/>
+          </a:xfrm>
+          <a:prstGeom prst="line">
+            <a:avLst/>
+          </a:prstGeom>
+          <a:noFill/>
+          <a:ln w="15240">
+            <a:solidFill>
+              <a:srgbClr val="1A1A1A"/>
+            </a:solidFill>
+            <a:prstDash val="solid"/>
+            <a:tailEnd type="arrow"/>
+          </a:ln>
+        </p:spPr>
+      </p:sp>
+      <p:sp>
+        <p:nvSpPr>
+          <p:cNvPr id="131" name="Shape 118"/>
+          <p:cNvSpPr/>
+          <p:nvPr/>
+        </p:nvSpPr>
+        <p:spPr>
+          <a:xfrm>
+            <a:off x="6025896" y="2084832"/>
+            <a:ext cx="128016" cy="0"/>
+          </a:xfrm>
+          <a:prstGeom prst="line">
+            <a:avLst/>
+          </a:prstGeom>
+          <a:noFill/>
+          <a:ln w="15240">
+            <a:solidFill>
+              <a:srgbClr val="1A1A1A"/>
+            </a:solidFill>
+            <a:prstDash val="solid"/>
+            <a:tailEnd type="arrow"/>
+          </a:ln>
+        </p:spPr>
+      </p:sp>
+      <p:sp>
+        <p:nvSpPr>
+          <p:cNvPr id="132" name="Shape 119"/>
+          <p:cNvSpPr/>
+          <p:nvPr/>
+        </p:nvSpPr>
+        <p:spPr>
+          <a:xfrm>
+            <a:off x="6025896" y="2798064"/>
+            <a:ext cx="128016" cy="0"/>
+          </a:xfrm>
+          <a:prstGeom prst="line">
+            <a:avLst/>
+          </a:prstGeom>
+          <a:noFill/>
+          <a:ln w="15240">
+            <a:solidFill>
+              <a:srgbClr val="1A1A1A"/>
+            </a:solidFill>
+            <a:prstDash val="solid"/>
+            <a:tailEnd type="arrow"/>
+          </a:ln>
+        </p:spPr>
+      </p:sp>
+      <p:sp>
+        <p:nvSpPr>
+          <p:cNvPr id="133" name="Shape 120"/>
+          <p:cNvSpPr/>
+          <p:nvPr/>
+        </p:nvSpPr>
+        <p:spPr>
+          <a:xfrm>
+            <a:off x="6025896" y="3511296"/>
+            <a:ext cx="128016" cy="0"/>
+          </a:xfrm>
+          <a:prstGeom prst="line">
+            <a:avLst/>
+          </a:prstGeom>
+          <a:noFill/>
+          <a:ln w="15240">
+            <a:solidFill>
+              <a:srgbClr val="1A1A1A"/>
+            </a:solidFill>
+            <a:prstDash val="solid"/>
+            <a:tailEnd type="arrow"/>
+          </a:ln>
+        </p:spPr>
+      </p:sp>
+      <p:sp>
+        <p:nvSpPr>
+          <p:cNvPr id="134" name="Shape 121"/>
+          <p:cNvSpPr/>
+          <p:nvPr/>
+        </p:nvSpPr>
+        <p:spPr>
+          <a:xfrm>
+            <a:off x="6025896" y="4224528"/>
+            <a:ext cx="128016" cy="0"/>
+          </a:xfrm>
+          <a:prstGeom prst="line">
+            <a:avLst/>
+          </a:prstGeom>
+          <a:noFill/>
+          <a:ln w="15240">
+            <a:solidFill>
+              <a:srgbClr val="1A1A1A"/>
+            </a:solidFill>
+            <a:prstDash val="solid"/>
+            <a:tailEnd type="arrow"/>
+          </a:ln>
+        </p:spPr>
+      </p:sp>
+      <p:sp>
+        <p:nvSpPr>
+          <p:cNvPr id="135" name="Shape 122"/>
+          <p:cNvSpPr/>
+          <p:nvPr/>
+        </p:nvSpPr>
+        <p:spPr>
+          <a:xfrm>
+            <a:off x="2212848" y="4754880"/>
+            <a:ext cx="7699248" cy="914400"/>
+          </a:xfrm>
+          <a:prstGeom prst="rect">
+            <a:avLst/>
+          </a:prstGeom>
+          <a:solidFill>
+            <a:srgbClr val="7030A0"/>
+          </a:solidFill>
+          <a:ln w="12700">
+            <a:solidFill>
+              <a:srgbClr val="7030A0"/>
+            </a:solidFill>
+            <a:prstDash val="solid"/>
+          </a:ln>
+        </p:spPr>
+      </p:sp>
+      <p:sp>
+        <p:nvSpPr>
+          <p:cNvPr id="136" name="Text 123"/>
+          <p:cNvSpPr/>
+          <p:nvPr/>
+        </p:nvSpPr>
+        <p:spPr>
+          <a:xfrm>
+            <a:off x="2212848" y="4791456"/>
+            <a:ext cx="7699248" cy="219456"/>
+          </a:xfrm>
+          <a:prstGeom prst="rect">
+            <a:avLst/>
+          </a:prstGeom>
+          <a:noFill/>
+          <a:ln/>
+        </p:spPr>
+        <p:txBody>
+          <a:bodyPr wrap="square" rtlCol="0" anchor="ctr"/>
+          <a:lstStyle/>
+          <a:p>
+            <a:pPr algn="ctr" indent="0" marL="0">
+              <a:buNone/>
+            </a:pPr>
+            <a:r>
+              <a:rPr lang="en-US" sz="900" b="1" dirty="0">
+                <a:solidFill>
+                  <a:srgbClr val="FFFFFF"/>
+                </a:solidFill>
+              </a:rPr>
+              <a:t>Unified, Open and Scalable Lakehouse</a:t>
+            </a:r>
+            <a:endParaRPr lang="en-US" sz="900" dirty="0"/>
+          </a:p>
+        </p:txBody>
+      </p:sp>
+      <p:sp>
+        <p:nvSpPr>
+          <p:cNvPr id="137" name="Shape 124"/>
+          <p:cNvSpPr/>
+          <p:nvPr/>
+        </p:nvSpPr>
+        <p:spPr>
+          <a:xfrm>
+            <a:off x="2304288" y="5029200"/>
+            <a:ext cx="3685032" cy="566928"/>
           </a:xfrm>
           <a:prstGeom prst="rect">
             <a:avLst>
@@ -5120,14 +5038,14 @@
       </p:sp>
       <p:sp>
         <p:nvSpPr>
-          <p:cNvPr id="140" name="Text 127"/>
-          <p:cNvSpPr/>
-          <p:nvPr/>
-        </p:nvSpPr>
-        <p:spPr>
-          <a:xfrm>
-            <a:off x="5317236" y="5029200"/>
-            <a:ext cx="2811780" cy="164592"/>
+          <p:cNvPr id="138" name="Text 125"/>
+          <p:cNvSpPr/>
+          <p:nvPr/>
+        </p:nvSpPr>
+        <p:spPr>
+          <a:xfrm>
+            <a:off x="2322576" y="5029200"/>
+            <a:ext cx="3648456" cy="164592"/>
           </a:xfrm>
           <a:prstGeom prst="rect">
             <a:avLst/>
@@ -5148,6 +5066,129 @@
                   <a:srgbClr val="1A1A1A"/>
                 </a:solidFill>
               </a:rPr>
+              <a:t>Governance, Security, Observability, Interoperability, Sharing</a:t>
+            </a:r>
+            <a:endParaRPr lang="en-US" sz="550" dirty="0"/>
+          </a:p>
+        </p:txBody>
+      </p:sp>
+      <p:pic>
+        <p:nvPicPr>
+          <p:cNvPr id="139" name="Image 11" descr="preencoded.png">    </p:cNvPr>
+          <p:cNvPicPr>
+            <a:picLocks noChangeAspect="1"/>
+          </p:cNvPicPr>
+          <p:nvPr/>
+        </p:nvPicPr>
+        <p:blipFill>
+          <a:blip r:embed="rId15"/>
+          <a:stretch>
+            <a:fillRect/>
+          </a:stretch>
+        </p:blipFill>
+        <p:spPr>
+          <a:xfrm>
+            <a:off x="3735324" y="5212080"/>
+            <a:ext cx="201168" cy="201168"/>
+          </a:xfrm>
+          <a:prstGeom prst="rect">
+            <a:avLst/>
+          </a:prstGeom>
+        </p:spPr>
+      </p:pic>
+      <p:sp>
+        <p:nvSpPr>
+          <p:cNvPr id="140" name="Text 126"/>
+          <p:cNvSpPr/>
+          <p:nvPr/>
+        </p:nvSpPr>
+        <p:spPr>
+          <a:xfrm>
+            <a:off x="3973068" y="5193792"/>
+            <a:ext cx="3300984" cy="256032"/>
+          </a:xfrm>
+          <a:prstGeom prst="rect">
+            <a:avLst/>
+          </a:prstGeom>
+          <a:noFill/>
+          <a:ln/>
+        </p:spPr>
+        <p:txBody>
+          <a:bodyPr wrap="square" rtlCol="0" anchor="ctr"/>
+          <a:lstStyle/>
+          <a:p>
+            <a:pPr indent="0" marL="0">
+              <a:buNone/>
+            </a:pPr>
+            <a:r>
+              <a:rPr lang="en-US" sz="1000" b="1" dirty="0">
+                <a:solidFill>
+                  <a:srgbClr val="5D35B1"/>
+                </a:solidFill>
+              </a:rPr>
+              <a:t>Unity Catalog</a:t>
+            </a:r>
+            <a:endParaRPr lang="en-US" sz="1000" dirty="0"/>
+          </a:p>
+        </p:txBody>
+      </p:sp>
+      <p:sp>
+        <p:nvSpPr>
+          <p:cNvPr id="141" name="Shape 127"/>
+          <p:cNvSpPr/>
+          <p:nvPr/>
+        </p:nvSpPr>
+        <p:spPr>
+          <a:xfrm>
+            <a:off x="6135624" y="5029200"/>
+            <a:ext cx="3685032" cy="566928"/>
+          </a:xfrm>
+          <a:prstGeom prst="rect">
+            <a:avLst>
+              <a:gd name="adj" fmla="val 8065"/>
+            </a:avLst>
+          </a:prstGeom>
+          <a:solidFill>
+            <a:srgbClr val="FFFFFF"/>
+          </a:solidFill>
+          <a:ln w="12700">
+            <a:solidFill>
+              <a:srgbClr val="FFFFFF"/>
+            </a:solidFill>
+            <a:prstDash val="solid"/>
+          </a:ln>
+        </p:spPr>
+      </p:sp>
+      <p:sp>
+        <p:nvSpPr>
+          <p:cNvPr id="142" name="Text 128"/>
+          <p:cNvSpPr/>
+          <p:nvPr/>
+        </p:nvSpPr>
+        <p:spPr>
+          <a:xfrm>
+            <a:off x="6153912" y="5029200"/>
+            <a:ext cx="3648456" cy="164592"/>
+          </a:xfrm>
+          <a:prstGeom prst="rect">
+            <a:avLst/>
+          </a:prstGeom>
+          <a:noFill/>
+          <a:ln/>
+        </p:spPr>
+        <p:txBody>
+          <a:bodyPr wrap="square" rtlCol="0" anchor="ctr"/>
+          <a:lstStyle/>
+          <a:p>
+            <a:pPr algn="ctr" indent="0" marL="0">
+              <a:buNone/>
+            </a:pPr>
+            <a:r>
+              <a:rPr lang="en-US" sz="550" dirty="0">
+                <a:solidFill>
+                  <a:srgbClr val="1A1A1A"/>
+                </a:solidFill>
+              </a:rPr>
               <a:t>Universal, Open Storage</a:t>
             </a:r>
             <a:endParaRPr lang="en-US" sz="550" dirty="0"/>
@@ -5156,13 +5197,70 @@
       </p:sp>
       <p:sp>
         <p:nvSpPr>
-          <p:cNvPr id="141" name="Shape 128"/>
-          <p:cNvSpPr/>
-          <p:nvPr/>
-        </p:nvSpPr>
-        <p:spPr>
-          <a:xfrm>
-            <a:off x="5390388" y="5230368"/>
+          <p:cNvPr id="143" name="Shape 129"/>
+          <p:cNvSpPr/>
+          <p:nvPr/>
+        </p:nvSpPr>
+        <p:spPr>
+          <a:xfrm>
+            <a:off x="6227064" y="5212080"/>
+            <a:ext cx="1170432" cy="310896"/>
+          </a:xfrm>
+          <a:prstGeom prst="rect">
+            <a:avLst>
+              <a:gd name="adj" fmla="val 11765"/>
+            </a:avLst>
+          </a:prstGeom>
+          <a:solidFill>
+            <a:srgbClr val="FFFFFF"/>
+          </a:solidFill>
+          <a:ln w="6350">
+            <a:solidFill>
+              <a:srgbClr val="CCCCCC"/>
+            </a:solidFill>
+            <a:prstDash val="solid"/>
+          </a:ln>
+        </p:spPr>
+      </p:sp>
+      <p:pic>
+        <p:nvPicPr>
+          <p:cNvPr id="144" name="Image 12" descr="preencoded.png">    </p:cNvPr>
+          <p:cNvPicPr>
+            <a:picLocks noChangeAspect="1"/>
+          </p:cNvPicPr>
+          <p:nvPr/>
+        </p:nvPicPr>
+        <p:blipFill>
+          <a:blip r:embed="rId16">
+            <a:extLst>
+              <a:ext uri="{96DAC541-7B7A-43D3-8B79-37D633B846F1}">
+                <asvg:svgBlip xmlns:asvg="http://schemas.microsoft.com/office/drawing/2016/SVG/main" r:embed="rId17"/>
+              </a:ext>
+            </a:extLst>
+          </a:blip>
+          <a:stretch>
+            <a:fillRect/>
+          </a:stretch>
+        </p:blipFill>
+        <p:spPr>
+          <a:xfrm>
+            <a:off x="6336792" y="5248656"/>
+            <a:ext cx="950976" cy="201168"/>
+          </a:xfrm>
+          <a:prstGeom prst="rect">
+            <a:avLst/>
+          </a:prstGeom>
+        </p:spPr>
+      </p:pic>
+      <p:sp>
+        <p:nvSpPr>
+          <p:cNvPr id="145" name="Shape 130"/>
+          <p:cNvSpPr/>
+          <p:nvPr/>
+        </p:nvSpPr>
+        <p:spPr>
+          <a:xfrm>
+            <a:off x="7525512" y="5230368"/>
             <a:ext cx="1170432" cy="274320"/>
           </a:xfrm>
           <a:prstGeom prst="rect">
@@ -5183,13 +5281,13 @@
       </p:sp>
       <p:sp>
         <p:nvSpPr>
-          <p:cNvPr id="142" name="Text 129"/>
-          <p:cNvSpPr/>
-          <p:nvPr/>
-        </p:nvSpPr>
-        <p:spPr>
-          <a:xfrm>
-            <a:off x="5390388" y="5230368"/>
+          <p:cNvPr id="146" name="Text 131"/>
+          <p:cNvSpPr/>
+          <p:nvPr/>
+        </p:nvSpPr>
+        <p:spPr>
+          <a:xfrm>
+            <a:off x="7525512" y="5230368"/>
             <a:ext cx="1170432" cy="274320"/>
           </a:xfrm>
           <a:prstGeom prst="rect">
@@ -5211,7 +5309,7 @@
                   <a:srgbClr val="FFFFFF"/>
                 </a:solidFill>
               </a:rPr>
-              <a:t>Delta Lake</a:t>
+              <a:t>Parquet</a:t>
             </a:r>
             <a:endParaRPr lang="en-US" sz="800" dirty="0"/>
           </a:p>
@@ -5219,13 +5317,13 @@
       </p:sp>
       <p:sp>
         <p:nvSpPr>
-          <p:cNvPr id="143" name="Shape 130"/>
-          <p:cNvSpPr/>
-          <p:nvPr/>
-        </p:nvSpPr>
-        <p:spPr>
-          <a:xfrm>
-            <a:off x="6688836" y="5230368"/>
+          <p:cNvPr id="147" name="Shape 132"/>
+          <p:cNvSpPr/>
+          <p:nvPr/>
+        </p:nvSpPr>
+        <p:spPr>
+          <a:xfrm>
+            <a:off x="8823960" y="5230368"/>
             <a:ext cx="1170432" cy="274320"/>
           </a:xfrm>
           <a:prstGeom prst="rect">
@@ -5246,13 +5344,13 @@
       </p:sp>
       <p:sp>
         <p:nvSpPr>
-          <p:cNvPr id="144" name="Text 131"/>
-          <p:cNvSpPr/>
-          <p:nvPr/>
-        </p:nvSpPr>
-        <p:spPr>
-          <a:xfrm>
-            <a:off x="6688836" y="5230368"/>
+          <p:cNvPr id="148" name="Text 133"/>
+          <p:cNvSpPr/>
+          <p:nvPr/>
+        </p:nvSpPr>
+        <p:spPr>
+          <a:xfrm>
+            <a:off x="8823960" y="5230368"/>
             <a:ext cx="1170432" cy="274320"/>
           </a:xfrm>
           <a:prstGeom prst="rect">
@@ -5274,7 +5372,7 @@
                   <a:srgbClr val="FFFFFF"/>
                 </a:solidFill>
               </a:rPr>
-              <a:t>Parquet</a:t>
+              <a:t>Iceberg</a:t>
             </a:r>
             <a:endParaRPr lang="en-US" sz="800" dirty="0"/>
           </a:p>
@@ -5282,76 +5380,13 @@
       </p:sp>
       <p:sp>
         <p:nvSpPr>
-          <p:cNvPr id="145" name="Shape 132"/>
-          <p:cNvSpPr/>
-          <p:nvPr/>
-        </p:nvSpPr>
-        <p:spPr>
-          <a:xfrm>
-            <a:off x="7987284" y="5230368"/>
-            <a:ext cx="1170432" cy="274320"/>
-          </a:xfrm>
-          <a:prstGeom prst="rect">
-            <a:avLst>
-              <a:gd name="adj" fmla="val 26667"/>
-            </a:avLst>
-          </a:prstGeom>
-          <a:solidFill>
-            <a:srgbClr val="5D35B1"/>
-          </a:solidFill>
-          <a:ln w="12700">
-            <a:solidFill>
-              <a:srgbClr val="5D35B1"/>
-            </a:solidFill>
-            <a:prstDash val="solid"/>
-          </a:ln>
-        </p:spPr>
-      </p:sp>
-      <p:sp>
-        <p:nvSpPr>
-          <p:cNvPr id="146" name="Text 133"/>
-          <p:cNvSpPr/>
-          <p:nvPr/>
-        </p:nvSpPr>
-        <p:spPr>
-          <a:xfrm>
-            <a:off x="7987284" y="5230368"/>
-            <a:ext cx="1170432" cy="274320"/>
-          </a:xfrm>
-          <a:prstGeom prst="rect">
-            <a:avLst/>
-          </a:prstGeom>
-          <a:noFill/>
-          <a:ln/>
-        </p:spPr>
-        <p:txBody>
-          <a:bodyPr wrap="square" lIns="12700" tIns="12700" rIns="12700" bIns="12700" rtlCol="0" anchor="ctr"/>
-          <a:lstStyle/>
-          <a:p>
-            <a:pPr algn="ctr" indent="0" marL="0">
-              <a:buNone/>
-            </a:pPr>
-            <a:r>
-              <a:rPr lang="en-US" sz="800" b="1" dirty="0">
-                <a:solidFill>
-                  <a:srgbClr val="FFFFFF"/>
-                </a:solidFill>
-              </a:rPr>
-              <a:t>Iceberg</a:t>
-            </a:r>
-            <a:endParaRPr lang="en-US" sz="800" dirty="0"/>
-          </a:p>
-        </p:txBody>
-      </p:sp>
-      <p:sp>
-        <p:nvSpPr>
-          <p:cNvPr id="147" name="Shape 134"/>
-          <p:cNvSpPr/>
-          <p:nvPr/>
-        </p:nvSpPr>
-        <p:spPr>
-          <a:xfrm>
-            <a:off x="8284464" y="1371600"/>
+          <p:cNvPr id="149" name="Shape 134"/>
+          <p:cNvSpPr/>
+          <p:nvPr/>
+        </p:nvSpPr>
+        <p:spPr>
+          <a:xfrm>
+            <a:off x="9957816" y="1371600"/>
             <a:ext cx="137160" cy="0"/>
           </a:xfrm>
           <a:prstGeom prst="line">
@@ -5369,14 +5404,14 @@
       </p:sp>
       <p:sp>
         <p:nvSpPr>
-          <p:cNvPr id="148" name="Shape 135"/>
-          <p:cNvSpPr/>
-          <p:nvPr/>
-        </p:nvSpPr>
-        <p:spPr>
-          <a:xfrm>
-            <a:off x="8421624" y="1161288"/>
-            <a:ext cx="3557016" cy="420624"/>
+          <p:cNvPr id="150" name="Shape 135"/>
+          <p:cNvSpPr/>
+          <p:nvPr/>
+        </p:nvSpPr>
+        <p:spPr>
+          <a:xfrm>
+            <a:off x="10094976" y="1161288"/>
+            <a:ext cx="1883664" cy="420624"/>
           </a:xfrm>
           <a:prstGeom prst="rect">
             <a:avLst>
@@ -5396,14 +5431,14 @@
       </p:sp>
       <p:sp>
         <p:nvSpPr>
-          <p:cNvPr id="149" name="Text 136"/>
-          <p:cNvSpPr/>
-          <p:nvPr/>
-        </p:nvSpPr>
-        <p:spPr>
-          <a:xfrm>
-            <a:off x="8494776" y="1161288"/>
-            <a:ext cx="3465576" cy="420624"/>
+          <p:cNvPr id="151" name="Text 136"/>
+          <p:cNvSpPr/>
+          <p:nvPr/>
+        </p:nvSpPr>
+        <p:spPr>
+          <a:xfrm>
+            <a:off x="10168128" y="1161288"/>
+            <a:ext cx="1792224" cy="420624"/>
           </a:xfrm>
           <a:prstGeom prst="rect">
             <a:avLst/>
@@ -5424,21 +5459,35 @@
                   <a:srgbClr val="1A1A1A"/>
                 </a:solidFill>
               </a:rPr>
-              <a:t>Use Case 1</a:t>
+              <a:t>Customer</a:t>
             </a:r>
             <a:endParaRPr lang="en-US" sz="650" dirty="0"/>
           </a:p>
-        </p:txBody>
-      </p:sp>
-      <p:sp>
-        <p:nvSpPr>
-          <p:cNvPr id="150" name="Shape 137"/>
-          <p:cNvSpPr/>
-          <p:nvPr/>
-        </p:nvSpPr>
-        <p:spPr>
-          <a:xfrm>
-            <a:off x="8284464" y="2084832"/>
+          <a:p>
+            <a:pPr algn="l" indent="0" marL="0">
+              <a:buNone/>
+            </a:pPr>
+            <a:r>
+              <a:rPr lang="en-US" sz="650" b="1" dirty="0">
+                <a:solidFill>
+                  <a:srgbClr val="1A1A1A"/>
+                </a:solidFill>
+              </a:rPr>
+              <a:t>Churn Prediction</a:t>
+            </a:r>
+            <a:endParaRPr lang="en-US" sz="650" dirty="0"/>
+          </a:p>
+        </p:txBody>
+      </p:sp>
+      <p:sp>
+        <p:nvSpPr>
+          <p:cNvPr id="152" name="Shape 137"/>
+          <p:cNvSpPr/>
+          <p:nvPr/>
+        </p:nvSpPr>
+        <p:spPr>
+          <a:xfrm>
+            <a:off x="9957816" y="2084832"/>
             <a:ext cx="137160" cy="0"/>
           </a:xfrm>
           <a:prstGeom prst="line">
@@ -5456,14 +5505,14 @@
       </p:sp>
       <p:sp>
         <p:nvSpPr>
-          <p:cNvPr id="151" name="Shape 138"/>
-          <p:cNvSpPr/>
-          <p:nvPr/>
-        </p:nvSpPr>
-        <p:spPr>
-          <a:xfrm>
-            <a:off x="8421624" y="1874520"/>
-            <a:ext cx="3557016" cy="420624"/>
+          <p:cNvPr id="153" name="Shape 138"/>
+          <p:cNvSpPr/>
+          <p:nvPr/>
+        </p:nvSpPr>
+        <p:spPr>
+          <a:xfrm>
+            <a:off x="10094976" y="1874520"/>
+            <a:ext cx="1883664" cy="420624"/>
           </a:xfrm>
           <a:prstGeom prst="rect">
             <a:avLst>
@@ -5483,14 +5532,14 @@
       </p:sp>
       <p:sp>
         <p:nvSpPr>
-          <p:cNvPr id="152" name="Text 139"/>
-          <p:cNvSpPr/>
-          <p:nvPr/>
-        </p:nvSpPr>
-        <p:spPr>
-          <a:xfrm>
-            <a:off x="8494776" y="1874520"/>
-            <a:ext cx="3465576" cy="420624"/>
+          <p:cNvPr id="154" name="Text 139"/>
+          <p:cNvSpPr/>
+          <p:nvPr/>
+        </p:nvSpPr>
+        <p:spPr>
+          <a:xfrm>
+            <a:off x="10168128" y="1874520"/>
+            <a:ext cx="1792224" cy="420624"/>
           </a:xfrm>
           <a:prstGeom prst="rect">
             <a:avLst/>
@@ -5511,21 +5560,35 @@
                   <a:srgbClr val="1A1A1A"/>
                 </a:solidFill>
               </a:rPr>
-              <a:t>Use Case 2</a:t>
+              <a:t>Customer</a:t>
             </a:r>
             <a:endParaRPr lang="en-US" sz="650" dirty="0"/>
           </a:p>
-        </p:txBody>
-      </p:sp>
-      <p:sp>
-        <p:nvSpPr>
-          <p:cNvPr id="153" name="Shape 140"/>
-          <p:cNvSpPr/>
-          <p:nvPr/>
-        </p:nvSpPr>
-        <p:spPr>
-          <a:xfrm>
-            <a:off x="8284464" y="2798064"/>
+          <a:p>
+            <a:pPr algn="l" indent="0" marL="0">
+              <a:buNone/>
+            </a:pPr>
+            <a:r>
+              <a:rPr lang="en-US" sz="650" b="1" dirty="0">
+                <a:solidFill>
+                  <a:srgbClr val="1A1A1A"/>
+                </a:solidFill>
+              </a:rPr>
+              <a:t>Segmentation</a:t>
+            </a:r>
+            <a:endParaRPr lang="en-US" sz="650" dirty="0"/>
+          </a:p>
+        </p:txBody>
+      </p:sp>
+      <p:sp>
+        <p:nvSpPr>
+          <p:cNvPr id="155" name="Shape 140"/>
+          <p:cNvSpPr/>
+          <p:nvPr/>
+        </p:nvSpPr>
+        <p:spPr>
+          <a:xfrm>
+            <a:off x="9957816" y="2798064"/>
             <a:ext cx="137160" cy="0"/>
           </a:xfrm>
           <a:prstGeom prst="line">
@@ -5543,14 +5606,14 @@
       </p:sp>
       <p:sp>
         <p:nvSpPr>
-          <p:cNvPr id="154" name="Shape 141"/>
-          <p:cNvSpPr/>
-          <p:nvPr/>
-        </p:nvSpPr>
-        <p:spPr>
-          <a:xfrm>
-            <a:off x="8421624" y="2587752"/>
-            <a:ext cx="3557016" cy="420624"/>
+          <p:cNvPr id="156" name="Shape 141"/>
+          <p:cNvSpPr/>
+          <p:nvPr/>
+        </p:nvSpPr>
+        <p:spPr>
+          <a:xfrm>
+            <a:off x="10094976" y="2587752"/>
+            <a:ext cx="1883664" cy="420624"/>
           </a:xfrm>
           <a:prstGeom prst="rect">
             <a:avLst>
@@ -5570,14 +5633,14 @@
       </p:sp>
       <p:sp>
         <p:nvSpPr>
-          <p:cNvPr id="155" name="Text 142"/>
-          <p:cNvSpPr/>
-          <p:nvPr/>
-        </p:nvSpPr>
-        <p:spPr>
-          <a:xfrm>
-            <a:off x="8494776" y="2587752"/>
-            <a:ext cx="3465576" cy="420624"/>
+          <p:cNvPr id="157" name="Text 142"/>
+          <p:cNvSpPr/>
+          <p:nvPr/>
+        </p:nvSpPr>
+        <p:spPr>
+          <a:xfrm>
+            <a:off x="10168128" y="2587752"/>
+            <a:ext cx="1792224" cy="420624"/>
           </a:xfrm>
           <a:prstGeom prst="rect">
             <a:avLst/>
@@ -5598,7 +5661,7 @@
                   <a:srgbClr val="1A1A1A"/>
                 </a:solidFill>
               </a:rPr>
-              <a:t>Use Case 3</a:t>
+              <a:t>HR Analytics</a:t>
             </a:r>
             <a:endParaRPr lang="en-US" sz="650" dirty="0"/>
           </a:p>
@@ -5606,13 +5669,13 @@
       </p:sp>
       <p:sp>
         <p:nvSpPr>
-          <p:cNvPr id="156" name="Shape 143"/>
-          <p:cNvSpPr/>
-          <p:nvPr/>
-        </p:nvSpPr>
-        <p:spPr>
-          <a:xfrm>
-            <a:off x="8284464" y="3511296"/>
+          <p:cNvPr id="158" name="Shape 143"/>
+          <p:cNvSpPr/>
+          <p:nvPr/>
+        </p:nvSpPr>
+        <p:spPr>
+          <a:xfrm>
+            <a:off x="9957816" y="3511296"/>
             <a:ext cx="137160" cy="0"/>
           </a:xfrm>
           <a:prstGeom prst="line">
@@ -5630,14 +5693,14 @@
       </p:sp>
       <p:sp>
         <p:nvSpPr>
-          <p:cNvPr id="157" name="Shape 144"/>
-          <p:cNvSpPr/>
-          <p:nvPr/>
-        </p:nvSpPr>
-        <p:spPr>
-          <a:xfrm>
-            <a:off x="8421624" y="3300984"/>
-            <a:ext cx="3557016" cy="420624"/>
+          <p:cNvPr id="159" name="Shape 144"/>
+          <p:cNvSpPr/>
+          <p:nvPr/>
+        </p:nvSpPr>
+        <p:spPr>
+          <a:xfrm>
+            <a:off x="10094976" y="3300984"/>
+            <a:ext cx="1883664" cy="420624"/>
           </a:xfrm>
           <a:prstGeom prst="rect">
             <a:avLst>
@@ -5657,14 +5720,14 @@
       </p:sp>
       <p:sp>
         <p:nvSpPr>
-          <p:cNvPr id="158" name="Text 145"/>
-          <p:cNvSpPr/>
-          <p:nvPr/>
-        </p:nvSpPr>
-        <p:spPr>
-          <a:xfrm>
-            <a:off x="8494776" y="3300984"/>
-            <a:ext cx="3465576" cy="420624"/>
+          <p:cNvPr id="160" name="Text 145"/>
+          <p:cNvSpPr/>
+          <p:nvPr/>
+        </p:nvSpPr>
+        <p:spPr>
+          <a:xfrm>
+            <a:off x="10168128" y="3300984"/>
+            <a:ext cx="1792224" cy="420624"/>
           </a:xfrm>
           <a:prstGeom prst="rect">
             <a:avLst/>
@@ -5685,21 +5748,35 @@
                   <a:srgbClr val="1A1A1A"/>
                 </a:solidFill>
               </a:rPr>
-              <a:t>Use Case 4</a:t>
+              <a:t>Operational</a:t>
             </a:r>
             <a:endParaRPr lang="en-US" sz="650" dirty="0"/>
           </a:p>
-        </p:txBody>
-      </p:sp>
-      <p:sp>
-        <p:nvSpPr>
-          <p:cNvPr id="159" name="Shape 146"/>
-          <p:cNvSpPr/>
-          <p:nvPr/>
-        </p:nvSpPr>
-        <p:spPr>
-          <a:xfrm>
-            <a:off x="8284464" y="4224528"/>
+          <a:p>
+            <a:pPr algn="l" indent="0" marL="0">
+              <a:buNone/>
+            </a:pPr>
+            <a:r>
+              <a:rPr lang="en-US" sz="650" b="1" dirty="0">
+                <a:solidFill>
+                  <a:srgbClr val="1A1A1A"/>
+                </a:solidFill>
+              </a:rPr>
+              <a:t>Dashboards</a:t>
+            </a:r>
+            <a:endParaRPr lang="en-US" sz="650" dirty="0"/>
+          </a:p>
+        </p:txBody>
+      </p:sp>
+      <p:sp>
+        <p:nvSpPr>
+          <p:cNvPr id="161" name="Shape 146"/>
+          <p:cNvSpPr/>
+          <p:nvPr/>
+        </p:nvSpPr>
+        <p:spPr>
+          <a:xfrm>
+            <a:off x="9957816" y="4224528"/>
             <a:ext cx="137160" cy="0"/>
           </a:xfrm>
           <a:prstGeom prst="line">
@@ -5717,14 +5794,14 @@
       </p:sp>
       <p:sp>
         <p:nvSpPr>
-          <p:cNvPr id="160" name="Shape 147"/>
-          <p:cNvSpPr/>
-          <p:nvPr/>
-        </p:nvSpPr>
-        <p:spPr>
-          <a:xfrm>
-            <a:off x="8421624" y="4014216"/>
-            <a:ext cx="3557016" cy="420624"/>
+          <p:cNvPr id="162" name="Shape 147"/>
+          <p:cNvSpPr/>
+          <p:nvPr/>
+        </p:nvSpPr>
+        <p:spPr>
+          <a:xfrm>
+            <a:off x="10094976" y="4014216"/>
+            <a:ext cx="1883664" cy="420624"/>
           </a:xfrm>
           <a:prstGeom prst="rect">
             <a:avLst>
@@ -5744,14 +5821,14 @@
       </p:sp>
       <p:sp>
         <p:nvSpPr>
-          <p:cNvPr id="161" name="Text 148"/>
-          <p:cNvSpPr/>
-          <p:nvPr/>
-        </p:nvSpPr>
-        <p:spPr>
-          <a:xfrm>
-            <a:off x="8494776" y="4014216"/>
-            <a:ext cx="3465576" cy="420624"/>
+          <p:cNvPr id="163" name="Text 148"/>
+          <p:cNvSpPr/>
+          <p:nvPr/>
+        </p:nvSpPr>
+        <p:spPr>
+          <a:xfrm>
+            <a:off x="10168128" y="4014216"/>
+            <a:ext cx="1792224" cy="420624"/>
           </a:xfrm>
           <a:prstGeom prst="rect">
             <a:avLst/>
@@ -5772,15 +5849,29 @@
                   <a:srgbClr val="1A1A1A"/>
                 </a:solidFill>
               </a:rPr>
-              <a:t>Use Case 5</a:t>
+              <a:t>Risk Assessment</a:t>
             </a:r>
             <a:endParaRPr lang="en-US" sz="650" dirty="0"/>
           </a:p>
-        </p:txBody>
-      </p:sp>
-      <p:sp>
-        <p:nvSpPr>
-          <p:cNvPr id="162" name="Text 149"/>
+          <a:p>
+            <a:pPr algn="l" indent="0" marL="0">
+              <a:buNone/>
+            </a:pPr>
+            <a:r>
+              <a:rPr lang="en-US" sz="650" b="1" dirty="0">
+                <a:solidFill>
+                  <a:srgbClr val="1A1A1A"/>
+                </a:solidFill>
+              </a:rPr>
+              <a:t>&amp; Optimization</a:t>
+            </a:r>
+            <a:endParaRPr lang="en-US" sz="650" dirty="0"/>
+          </a:p>
+        </p:txBody>
+      </p:sp>
+      <p:sp>
+        <p:nvSpPr>
+          <p:cNvPr id="164" name="Text 149"/>
           <p:cNvSpPr/>
           <p:nvPr/>
         </p:nvSpPr>
@@ -5816,7 +5907,7 @@
       </p:sp>
       <p:sp>
         <p:nvSpPr>
-          <p:cNvPr id="163" name="Text 150"/>
+          <p:cNvPr id="165" name="Text 150"/>
           <p:cNvSpPr/>
           <p:nvPr/>
         </p:nvSpPr>
